--- a/LabBook_10.pptx
+++ b/LabBook_10.pptx
@@ -5,19 +5,24 @@
     <p:sldMasterId id="2147483648" r:id="rId1"/>
   </p:sldMasterIdLst>
   <p:notesMasterIdLst>
-    <p:notesMasterId r:id="rId9"/>
+    <p:notesMasterId r:id="rId14"/>
   </p:notesMasterIdLst>
   <p:handoutMasterIdLst>
-    <p:handoutMasterId r:id="rId10"/>
+    <p:handoutMasterId r:id="rId15"/>
   </p:handoutMasterIdLst>
   <p:sldIdLst>
     <p:sldId id="256" r:id="rId2"/>
     <p:sldId id="295" r:id="rId3"/>
     <p:sldId id="290" r:id="rId4"/>
-    <p:sldId id="292" r:id="rId5"/>
-    <p:sldId id="297" r:id="rId6"/>
-    <p:sldId id="293" r:id="rId7"/>
-    <p:sldId id="288" r:id="rId8"/>
+    <p:sldId id="300" r:id="rId5"/>
+    <p:sldId id="292" r:id="rId6"/>
+    <p:sldId id="301" r:id="rId7"/>
+    <p:sldId id="297" r:id="rId8"/>
+    <p:sldId id="298" r:id="rId9"/>
+    <p:sldId id="293" r:id="rId10"/>
+    <p:sldId id="299" r:id="rId11"/>
+    <p:sldId id="302" r:id="rId12"/>
+    <p:sldId id="288" r:id="rId13"/>
   </p:sldIdLst>
   <p:sldSz cx="12192000" cy="6858000"/>
   <p:notesSz cx="12192000" cy="6858000"/>
@@ -392,7 +397,7 @@
           <a:p>
             <a:fld id="{8438F8DC-35B0-48E6-A86E-42F1F08DD00F}" type="datetimeFigureOut">
               <a:rPr lang="es-ES" smtClean="0"/>
-              <a:t>16/02/2026</a:t>
+              <a:t>03/03/2026</a:t>
             </a:fld>
             <a:endParaRPr lang="es-ES"/>
           </a:p>
@@ -569,7 +574,7 @@
           <a:p>
             <a:fld id="{FACBDC12-F39B-4B97-8F4D-6734F9D366FF}" type="datetimeFigureOut">
               <a:rPr lang="es-ES" smtClean="0"/>
-              <a:t>16/02/2026</a:t>
+              <a:t>03/03/2026</a:t>
             </a:fld>
             <a:endParaRPr lang="es-ES"/>
           </a:p>
@@ -928,6 +933,114 @@
         <p:cNvPr id="1" name="">
           <a:extLst>
             <a:ext uri="{FF2B5EF4-FFF2-40B4-BE49-F238E27FC236}">
+              <a16:creationId xmlns:a16="http://schemas.microsoft.com/office/drawing/2014/main" id="{BBC859C1-E4C7-566E-DE33-4E89816DC4D2}"/>
+            </a:ext>
+          </a:extLst>
+        </p:cNvPr>
+        <p:cNvGrpSpPr/>
+        <p:nvPr/>
+      </p:nvGrpSpPr>
+      <p:grpSpPr>
+        <a:xfrm>
+          <a:off x="0" y="0"/>
+          <a:ext cx="0" cy="0"/>
+          <a:chOff x="0" y="0"/>
+          <a:chExt cx="0" cy="0"/>
+        </a:xfrm>
+      </p:grpSpPr>
+      <p:sp>
+        <p:nvSpPr>
+          <p:cNvPr id="2" name="Marcador de imagen de diapositiva 1">
+            <a:extLst>
+              <a:ext uri="{FF2B5EF4-FFF2-40B4-BE49-F238E27FC236}">
+                <a16:creationId xmlns:a16="http://schemas.microsoft.com/office/drawing/2014/main" id="{8C0BBF76-8A11-2BAF-0D6C-AE2CF0ACAF9A}"/>
+              </a:ext>
+            </a:extLst>
+          </p:cNvPr>
+          <p:cNvSpPr>
+            <a:spLocks noGrp="1" noRot="1" noChangeAspect="1"/>
+          </p:cNvSpPr>
+          <p:nvPr>
+            <p:ph type="sldImg"/>
+          </p:nvPr>
+        </p:nvSpPr>
+        <p:spPr/>
+      </p:sp>
+      <p:sp>
+        <p:nvSpPr>
+          <p:cNvPr id="3" name="Marcador de notas 2">
+            <a:extLst>
+              <a:ext uri="{FF2B5EF4-FFF2-40B4-BE49-F238E27FC236}">
+                <a16:creationId xmlns:a16="http://schemas.microsoft.com/office/drawing/2014/main" id="{0D94EFFD-587A-E45F-BF5D-188981760D5B}"/>
+              </a:ext>
+            </a:extLst>
+          </p:cNvPr>
+          <p:cNvSpPr>
+            <a:spLocks noGrp="1"/>
+          </p:cNvSpPr>
+          <p:nvPr>
+            <p:ph type="body" idx="1"/>
+          </p:nvPr>
+        </p:nvSpPr>
+        <p:spPr/>
+        <p:txBody>
+          <a:bodyPr/>
+          <a:lstStyle/>
+          <a:p>
+            <a:endParaRPr lang="es-ES" dirty="0"/>
+          </a:p>
+        </p:txBody>
+      </p:sp>
+      <p:sp>
+        <p:nvSpPr>
+          <p:cNvPr id="4" name="Marcador de número de diapositiva 3">
+            <a:extLst>
+              <a:ext uri="{FF2B5EF4-FFF2-40B4-BE49-F238E27FC236}">
+                <a16:creationId xmlns:a16="http://schemas.microsoft.com/office/drawing/2014/main" id="{695E8DA2-EDAC-DAE3-2D88-63A7A187A548}"/>
+              </a:ext>
+            </a:extLst>
+          </p:cNvPr>
+          <p:cNvSpPr>
+            <a:spLocks noGrp="1"/>
+          </p:cNvSpPr>
+          <p:nvPr>
+            <p:ph type="sldNum" sz="quarter" idx="5"/>
+          </p:nvPr>
+        </p:nvSpPr>
+        <p:spPr/>
+        <p:txBody>
+          <a:bodyPr/>
+          <a:lstStyle/>
+          <a:p>
+            <a:fld id="{676223B9-C868-4436-87D9-1A3152E1157A}" type="slidenum">
+              <a:rPr lang="es-ES" smtClean="0"/>
+              <a:t>4</a:t>
+            </a:fld>
+            <a:endParaRPr lang="es-ES"/>
+          </a:p>
+        </p:txBody>
+      </p:sp>
+    </p:spTree>
+    <p:extLst>
+      <p:ext uri="{BB962C8B-B14F-4D97-AF65-F5344CB8AC3E}">
+        <p14:creationId xmlns:p14="http://schemas.microsoft.com/office/powerpoint/2010/main" val="1165980402"/>
+      </p:ext>
+    </p:extLst>
+  </p:cSld>
+  <p:clrMapOvr>
+    <a:masterClrMapping/>
+  </p:clrMapOvr>
+</p:notes>
+</file>
+
+<file path=ppt/notesSlides/notesSlide3.xml><?xml version="1.0" encoding="utf-8"?>
+<p:notes xmlns:a="http://schemas.openxmlformats.org/drawingml/2006/main" xmlns:r="http://schemas.openxmlformats.org/officeDocument/2006/relationships" xmlns:p="http://schemas.openxmlformats.org/presentationml/2006/main">
+  <p:cSld>
+    <p:spTree>
+      <p:nvGrpSpPr>
+        <p:cNvPr id="1" name="">
+          <a:extLst>
+            <a:ext uri="{FF2B5EF4-FFF2-40B4-BE49-F238E27FC236}">
               <a16:creationId xmlns:a16="http://schemas.microsoft.com/office/drawing/2014/main" id="{95993BBE-3704-D894-1C10-5488EE611F08}"/>
             </a:ext>
           </a:extLst>
@@ -1009,7 +1122,7 @@
           <a:p>
             <a:fld id="{676223B9-C868-4436-87D9-1A3152E1157A}" type="slidenum">
               <a:rPr lang="es-ES" smtClean="0"/>
-              <a:t>4</a:t>
+              <a:t>5</a:t>
             </a:fld>
             <a:endParaRPr lang="es-ES"/>
           </a:p>
@@ -1028,7 +1141,115 @@
 </p:notes>
 </file>
 
-<file path=ppt/notesSlides/notesSlide3.xml><?xml version="1.0" encoding="utf-8"?>
+<file path=ppt/notesSlides/notesSlide4.xml><?xml version="1.0" encoding="utf-8"?>
+<p:notes xmlns:a="http://schemas.openxmlformats.org/drawingml/2006/main" xmlns:r="http://schemas.openxmlformats.org/officeDocument/2006/relationships" xmlns:p="http://schemas.openxmlformats.org/presentationml/2006/main">
+  <p:cSld>
+    <p:spTree>
+      <p:nvGrpSpPr>
+        <p:cNvPr id="1" name="">
+          <a:extLst>
+            <a:ext uri="{FF2B5EF4-FFF2-40B4-BE49-F238E27FC236}">
+              <a16:creationId xmlns:a16="http://schemas.microsoft.com/office/drawing/2014/main" id="{E639566C-837D-827A-2D27-56E0458B28F3}"/>
+            </a:ext>
+          </a:extLst>
+        </p:cNvPr>
+        <p:cNvGrpSpPr/>
+        <p:nvPr/>
+      </p:nvGrpSpPr>
+      <p:grpSpPr>
+        <a:xfrm>
+          <a:off x="0" y="0"/>
+          <a:ext cx="0" cy="0"/>
+          <a:chOff x="0" y="0"/>
+          <a:chExt cx="0" cy="0"/>
+        </a:xfrm>
+      </p:grpSpPr>
+      <p:sp>
+        <p:nvSpPr>
+          <p:cNvPr id="2" name="Marcador de imagen de diapositiva 1">
+            <a:extLst>
+              <a:ext uri="{FF2B5EF4-FFF2-40B4-BE49-F238E27FC236}">
+                <a16:creationId xmlns:a16="http://schemas.microsoft.com/office/drawing/2014/main" id="{B74B54E8-5577-B25E-A178-42EEE8FACB17}"/>
+              </a:ext>
+            </a:extLst>
+          </p:cNvPr>
+          <p:cNvSpPr>
+            <a:spLocks noGrp="1" noRot="1" noChangeAspect="1"/>
+          </p:cNvSpPr>
+          <p:nvPr>
+            <p:ph type="sldImg"/>
+          </p:nvPr>
+        </p:nvSpPr>
+        <p:spPr/>
+      </p:sp>
+      <p:sp>
+        <p:nvSpPr>
+          <p:cNvPr id="3" name="Marcador de notas 2">
+            <a:extLst>
+              <a:ext uri="{FF2B5EF4-FFF2-40B4-BE49-F238E27FC236}">
+                <a16:creationId xmlns:a16="http://schemas.microsoft.com/office/drawing/2014/main" id="{D0D6991F-0B07-C6A7-5125-47A971C7B5F0}"/>
+              </a:ext>
+            </a:extLst>
+          </p:cNvPr>
+          <p:cNvSpPr>
+            <a:spLocks noGrp="1"/>
+          </p:cNvSpPr>
+          <p:nvPr>
+            <p:ph type="body" idx="1"/>
+          </p:nvPr>
+        </p:nvSpPr>
+        <p:spPr/>
+        <p:txBody>
+          <a:bodyPr/>
+          <a:lstStyle/>
+          <a:p>
+            <a:endParaRPr lang="es-ES" dirty="0"/>
+          </a:p>
+        </p:txBody>
+      </p:sp>
+      <p:sp>
+        <p:nvSpPr>
+          <p:cNvPr id="4" name="Marcador de número de diapositiva 3">
+            <a:extLst>
+              <a:ext uri="{FF2B5EF4-FFF2-40B4-BE49-F238E27FC236}">
+                <a16:creationId xmlns:a16="http://schemas.microsoft.com/office/drawing/2014/main" id="{2BE69CEB-B0C4-4D75-3A8F-08B2E8271E38}"/>
+              </a:ext>
+            </a:extLst>
+          </p:cNvPr>
+          <p:cNvSpPr>
+            <a:spLocks noGrp="1"/>
+          </p:cNvSpPr>
+          <p:nvPr>
+            <p:ph type="sldNum" sz="quarter" idx="5"/>
+          </p:nvPr>
+        </p:nvSpPr>
+        <p:spPr/>
+        <p:txBody>
+          <a:bodyPr/>
+          <a:lstStyle/>
+          <a:p>
+            <a:fld id="{676223B9-C868-4436-87D9-1A3152E1157A}" type="slidenum">
+              <a:rPr lang="es-ES" smtClean="0"/>
+              <a:t>6</a:t>
+            </a:fld>
+            <a:endParaRPr lang="es-ES"/>
+          </a:p>
+        </p:txBody>
+      </p:sp>
+    </p:spTree>
+    <p:extLst>
+      <p:ext uri="{BB962C8B-B14F-4D97-AF65-F5344CB8AC3E}">
+        <p14:creationId xmlns:p14="http://schemas.microsoft.com/office/powerpoint/2010/main" val="2442426445"/>
+      </p:ext>
+    </p:extLst>
+  </p:cSld>
+  <p:clrMapOvr>
+    <a:masterClrMapping/>
+  </p:clrMapOvr>
+</p:notes>
+</file>
+
+<file path=ppt/notesSlides/notesSlide5.xml><?xml version="1.0" encoding="utf-8"?>
 <p:notes xmlns:a="http://schemas.openxmlformats.org/drawingml/2006/main" xmlns:r="http://schemas.openxmlformats.org/officeDocument/2006/relationships" xmlns:p="http://schemas.openxmlformats.org/presentationml/2006/main">
   <p:cSld>
     <p:spTree>
@@ -1117,7 +1338,7 @@
           <a:p>
             <a:fld id="{676223B9-C868-4436-87D9-1A3152E1157A}" type="slidenum">
               <a:rPr lang="es-ES" smtClean="0"/>
-              <a:t>5</a:t>
+              <a:t>7</a:t>
             </a:fld>
             <a:endParaRPr lang="es-ES"/>
           </a:p>
@@ -1136,7 +1357,115 @@
 </p:notes>
 </file>
 
-<file path=ppt/notesSlides/notesSlide4.xml><?xml version="1.0" encoding="utf-8"?>
+<file path=ppt/notesSlides/notesSlide6.xml><?xml version="1.0" encoding="utf-8"?>
+<p:notes xmlns:a="http://schemas.openxmlformats.org/drawingml/2006/main" xmlns:r="http://schemas.openxmlformats.org/officeDocument/2006/relationships" xmlns:p="http://schemas.openxmlformats.org/presentationml/2006/main">
+  <p:cSld>
+    <p:spTree>
+      <p:nvGrpSpPr>
+        <p:cNvPr id="1" name="">
+          <a:extLst>
+            <a:ext uri="{FF2B5EF4-FFF2-40B4-BE49-F238E27FC236}">
+              <a16:creationId xmlns:a16="http://schemas.microsoft.com/office/drawing/2014/main" id="{6CFD2547-9BE9-E995-7995-15B65E2F409A}"/>
+            </a:ext>
+          </a:extLst>
+        </p:cNvPr>
+        <p:cNvGrpSpPr/>
+        <p:nvPr/>
+      </p:nvGrpSpPr>
+      <p:grpSpPr>
+        <a:xfrm>
+          <a:off x="0" y="0"/>
+          <a:ext cx="0" cy="0"/>
+          <a:chOff x="0" y="0"/>
+          <a:chExt cx="0" cy="0"/>
+        </a:xfrm>
+      </p:grpSpPr>
+      <p:sp>
+        <p:nvSpPr>
+          <p:cNvPr id="2" name="Marcador de imagen de diapositiva 1">
+            <a:extLst>
+              <a:ext uri="{FF2B5EF4-FFF2-40B4-BE49-F238E27FC236}">
+                <a16:creationId xmlns:a16="http://schemas.microsoft.com/office/drawing/2014/main" id="{6EBA887C-A4F2-0119-3B58-777479AB3455}"/>
+              </a:ext>
+            </a:extLst>
+          </p:cNvPr>
+          <p:cNvSpPr>
+            <a:spLocks noGrp="1" noRot="1" noChangeAspect="1"/>
+          </p:cNvSpPr>
+          <p:nvPr>
+            <p:ph type="sldImg"/>
+          </p:nvPr>
+        </p:nvSpPr>
+        <p:spPr/>
+      </p:sp>
+      <p:sp>
+        <p:nvSpPr>
+          <p:cNvPr id="3" name="Marcador de notas 2">
+            <a:extLst>
+              <a:ext uri="{FF2B5EF4-FFF2-40B4-BE49-F238E27FC236}">
+                <a16:creationId xmlns:a16="http://schemas.microsoft.com/office/drawing/2014/main" id="{ACD85C9A-0E9B-17EF-1AB1-DD42D876E727}"/>
+              </a:ext>
+            </a:extLst>
+          </p:cNvPr>
+          <p:cNvSpPr>
+            <a:spLocks noGrp="1"/>
+          </p:cNvSpPr>
+          <p:nvPr>
+            <p:ph type="body" idx="1"/>
+          </p:nvPr>
+        </p:nvSpPr>
+        <p:spPr/>
+        <p:txBody>
+          <a:bodyPr/>
+          <a:lstStyle/>
+          <a:p>
+            <a:endParaRPr lang="es-ES" dirty="0"/>
+          </a:p>
+        </p:txBody>
+      </p:sp>
+      <p:sp>
+        <p:nvSpPr>
+          <p:cNvPr id="4" name="Marcador de número de diapositiva 3">
+            <a:extLst>
+              <a:ext uri="{FF2B5EF4-FFF2-40B4-BE49-F238E27FC236}">
+                <a16:creationId xmlns:a16="http://schemas.microsoft.com/office/drawing/2014/main" id="{733AF8CC-73C0-4653-A67D-D556CD071446}"/>
+              </a:ext>
+            </a:extLst>
+          </p:cNvPr>
+          <p:cNvSpPr>
+            <a:spLocks noGrp="1"/>
+          </p:cNvSpPr>
+          <p:nvPr>
+            <p:ph type="sldNum" sz="quarter" idx="5"/>
+          </p:nvPr>
+        </p:nvSpPr>
+        <p:spPr/>
+        <p:txBody>
+          <a:bodyPr/>
+          <a:lstStyle/>
+          <a:p>
+            <a:fld id="{676223B9-C868-4436-87D9-1A3152E1157A}" type="slidenum">
+              <a:rPr lang="es-ES" smtClean="0"/>
+              <a:t>8</a:t>
+            </a:fld>
+            <a:endParaRPr lang="es-ES"/>
+          </a:p>
+        </p:txBody>
+      </p:sp>
+    </p:spTree>
+    <p:extLst>
+      <p:ext uri="{BB962C8B-B14F-4D97-AF65-F5344CB8AC3E}">
+        <p14:creationId xmlns:p14="http://schemas.microsoft.com/office/powerpoint/2010/main" val="3412261587"/>
+      </p:ext>
+    </p:extLst>
+  </p:cSld>
+  <p:clrMapOvr>
+    <a:masterClrMapping/>
+  </p:clrMapOvr>
+</p:notes>
+</file>
+
+<file path=ppt/notesSlides/notesSlide7.xml><?xml version="1.0" encoding="utf-8"?>
 <p:notes xmlns:a="http://schemas.openxmlformats.org/drawingml/2006/main" xmlns:r="http://schemas.openxmlformats.org/officeDocument/2006/relationships" xmlns:p="http://schemas.openxmlformats.org/presentationml/2006/main">
   <p:cSld>
     <p:spTree>
@@ -1225,7 +1554,7 @@
           <a:p>
             <a:fld id="{676223B9-C868-4436-87D9-1A3152E1157A}" type="slidenum">
               <a:rPr lang="es-ES" smtClean="0"/>
-              <a:t>6</a:t>
+              <a:t>9</a:t>
             </a:fld>
             <a:endParaRPr lang="es-ES"/>
           </a:p>
@@ -1235,6 +1564,222 @@
     <p:extLst>
       <p:ext uri="{BB962C8B-B14F-4D97-AF65-F5344CB8AC3E}">
         <p14:creationId xmlns:p14="http://schemas.microsoft.com/office/powerpoint/2010/main" val="2917382716"/>
+      </p:ext>
+    </p:extLst>
+  </p:cSld>
+  <p:clrMapOvr>
+    <a:masterClrMapping/>
+  </p:clrMapOvr>
+</p:notes>
+</file>
+
+<file path=ppt/notesSlides/notesSlide8.xml><?xml version="1.0" encoding="utf-8"?>
+<p:notes xmlns:a="http://schemas.openxmlformats.org/drawingml/2006/main" xmlns:r="http://schemas.openxmlformats.org/officeDocument/2006/relationships" xmlns:p="http://schemas.openxmlformats.org/presentationml/2006/main">
+  <p:cSld>
+    <p:spTree>
+      <p:nvGrpSpPr>
+        <p:cNvPr id="1" name="">
+          <a:extLst>
+            <a:ext uri="{FF2B5EF4-FFF2-40B4-BE49-F238E27FC236}">
+              <a16:creationId xmlns:a16="http://schemas.microsoft.com/office/drawing/2014/main" id="{29AD741A-1BEF-9BBE-95D6-0D814A96E254}"/>
+            </a:ext>
+          </a:extLst>
+        </p:cNvPr>
+        <p:cNvGrpSpPr/>
+        <p:nvPr/>
+      </p:nvGrpSpPr>
+      <p:grpSpPr>
+        <a:xfrm>
+          <a:off x="0" y="0"/>
+          <a:ext cx="0" cy="0"/>
+          <a:chOff x="0" y="0"/>
+          <a:chExt cx="0" cy="0"/>
+        </a:xfrm>
+      </p:grpSpPr>
+      <p:sp>
+        <p:nvSpPr>
+          <p:cNvPr id="2" name="Marcador de imagen de diapositiva 1">
+            <a:extLst>
+              <a:ext uri="{FF2B5EF4-FFF2-40B4-BE49-F238E27FC236}">
+                <a16:creationId xmlns:a16="http://schemas.microsoft.com/office/drawing/2014/main" id="{CA74441F-8744-FF93-61FF-583E5F93F1FF}"/>
+              </a:ext>
+            </a:extLst>
+          </p:cNvPr>
+          <p:cNvSpPr>
+            <a:spLocks noGrp="1" noRot="1" noChangeAspect="1"/>
+          </p:cNvSpPr>
+          <p:nvPr>
+            <p:ph type="sldImg"/>
+          </p:nvPr>
+        </p:nvSpPr>
+        <p:spPr/>
+      </p:sp>
+      <p:sp>
+        <p:nvSpPr>
+          <p:cNvPr id="3" name="Marcador de notas 2">
+            <a:extLst>
+              <a:ext uri="{FF2B5EF4-FFF2-40B4-BE49-F238E27FC236}">
+                <a16:creationId xmlns:a16="http://schemas.microsoft.com/office/drawing/2014/main" id="{9E4FEF10-CE51-3EB1-20D5-7FEC62BD052D}"/>
+              </a:ext>
+            </a:extLst>
+          </p:cNvPr>
+          <p:cNvSpPr>
+            <a:spLocks noGrp="1"/>
+          </p:cNvSpPr>
+          <p:nvPr>
+            <p:ph type="body" idx="1"/>
+          </p:nvPr>
+        </p:nvSpPr>
+        <p:spPr/>
+        <p:txBody>
+          <a:bodyPr/>
+          <a:lstStyle/>
+          <a:p>
+            <a:endParaRPr lang="es-ES" dirty="0"/>
+          </a:p>
+        </p:txBody>
+      </p:sp>
+      <p:sp>
+        <p:nvSpPr>
+          <p:cNvPr id="4" name="Marcador de número de diapositiva 3">
+            <a:extLst>
+              <a:ext uri="{FF2B5EF4-FFF2-40B4-BE49-F238E27FC236}">
+                <a16:creationId xmlns:a16="http://schemas.microsoft.com/office/drawing/2014/main" id="{0E688DF3-C50B-A8AE-3A11-912C98A1B2A1}"/>
+              </a:ext>
+            </a:extLst>
+          </p:cNvPr>
+          <p:cNvSpPr>
+            <a:spLocks noGrp="1"/>
+          </p:cNvSpPr>
+          <p:nvPr>
+            <p:ph type="sldNum" sz="quarter" idx="5"/>
+          </p:nvPr>
+        </p:nvSpPr>
+        <p:spPr/>
+        <p:txBody>
+          <a:bodyPr/>
+          <a:lstStyle/>
+          <a:p>
+            <a:fld id="{676223B9-C868-4436-87D9-1A3152E1157A}" type="slidenum">
+              <a:rPr lang="es-ES" smtClean="0"/>
+              <a:t>10</a:t>
+            </a:fld>
+            <a:endParaRPr lang="es-ES"/>
+          </a:p>
+        </p:txBody>
+      </p:sp>
+    </p:spTree>
+    <p:extLst>
+      <p:ext uri="{BB962C8B-B14F-4D97-AF65-F5344CB8AC3E}">
+        <p14:creationId xmlns:p14="http://schemas.microsoft.com/office/powerpoint/2010/main" val="2106816802"/>
+      </p:ext>
+    </p:extLst>
+  </p:cSld>
+  <p:clrMapOvr>
+    <a:masterClrMapping/>
+  </p:clrMapOvr>
+</p:notes>
+</file>
+
+<file path=ppt/notesSlides/notesSlide9.xml><?xml version="1.0" encoding="utf-8"?>
+<p:notes xmlns:a="http://schemas.openxmlformats.org/drawingml/2006/main" xmlns:r="http://schemas.openxmlformats.org/officeDocument/2006/relationships" xmlns:p="http://schemas.openxmlformats.org/presentationml/2006/main">
+  <p:cSld>
+    <p:spTree>
+      <p:nvGrpSpPr>
+        <p:cNvPr id="1" name="">
+          <a:extLst>
+            <a:ext uri="{FF2B5EF4-FFF2-40B4-BE49-F238E27FC236}">
+              <a16:creationId xmlns:a16="http://schemas.microsoft.com/office/drawing/2014/main" id="{5065749A-0B6F-FE31-B927-259D4CD92D1B}"/>
+            </a:ext>
+          </a:extLst>
+        </p:cNvPr>
+        <p:cNvGrpSpPr/>
+        <p:nvPr/>
+      </p:nvGrpSpPr>
+      <p:grpSpPr>
+        <a:xfrm>
+          <a:off x="0" y="0"/>
+          <a:ext cx="0" cy="0"/>
+          <a:chOff x="0" y="0"/>
+          <a:chExt cx="0" cy="0"/>
+        </a:xfrm>
+      </p:grpSpPr>
+      <p:sp>
+        <p:nvSpPr>
+          <p:cNvPr id="2" name="Marcador de imagen de diapositiva 1">
+            <a:extLst>
+              <a:ext uri="{FF2B5EF4-FFF2-40B4-BE49-F238E27FC236}">
+                <a16:creationId xmlns:a16="http://schemas.microsoft.com/office/drawing/2014/main" id="{5F70F33D-5EB6-52E9-2B08-119781ED4EBC}"/>
+              </a:ext>
+            </a:extLst>
+          </p:cNvPr>
+          <p:cNvSpPr>
+            <a:spLocks noGrp="1" noRot="1" noChangeAspect="1"/>
+          </p:cNvSpPr>
+          <p:nvPr>
+            <p:ph type="sldImg"/>
+          </p:nvPr>
+        </p:nvSpPr>
+        <p:spPr/>
+      </p:sp>
+      <p:sp>
+        <p:nvSpPr>
+          <p:cNvPr id="3" name="Marcador de notas 2">
+            <a:extLst>
+              <a:ext uri="{FF2B5EF4-FFF2-40B4-BE49-F238E27FC236}">
+                <a16:creationId xmlns:a16="http://schemas.microsoft.com/office/drawing/2014/main" id="{ADB83A7C-8B4E-3A44-023D-BE07A76ABAFF}"/>
+              </a:ext>
+            </a:extLst>
+          </p:cNvPr>
+          <p:cNvSpPr>
+            <a:spLocks noGrp="1"/>
+          </p:cNvSpPr>
+          <p:nvPr>
+            <p:ph type="body" idx="1"/>
+          </p:nvPr>
+        </p:nvSpPr>
+        <p:spPr/>
+        <p:txBody>
+          <a:bodyPr/>
+          <a:lstStyle/>
+          <a:p>
+            <a:endParaRPr lang="es-ES" dirty="0"/>
+          </a:p>
+        </p:txBody>
+      </p:sp>
+      <p:sp>
+        <p:nvSpPr>
+          <p:cNvPr id="4" name="Marcador de número de diapositiva 3">
+            <a:extLst>
+              <a:ext uri="{FF2B5EF4-FFF2-40B4-BE49-F238E27FC236}">
+                <a16:creationId xmlns:a16="http://schemas.microsoft.com/office/drawing/2014/main" id="{BC16D7CC-974D-EC06-4055-2B93F59EDC73}"/>
+              </a:ext>
+            </a:extLst>
+          </p:cNvPr>
+          <p:cNvSpPr>
+            <a:spLocks noGrp="1"/>
+          </p:cNvSpPr>
+          <p:nvPr>
+            <p:ph type="sldNum" sz="quarter" idx="5"/>
+          </p:nvPr>
+        </p:nvSpPr>
+        <p:spPr/>
+        <p:txBody>
+          <a:bodyPr/>
+          <a:lstStyle/>
+          <a:p>
+            <a:fld id="{676223B9-C868-4436-87D9-1A3152E1157A}" type="slidenum">
+              <a:rPr lang="es-ES" smtClean="0"/>
+              <a:t>11</a:t>
+            </a:fld>
+            <a:endParaRPr lang="es-ES"/>
+          </a:p>
+        </p:txBody>
+      </p:sp>
+    </p:spTree>
+    <p:extLst>
+      <p:ext uri="{BB962C8B-B14F-4D97-AF65-F5344CB8AC3E}">
+        <p14:creationId xmlns:p14="http://schemas.microsoft.com/office/powerpoint/2010/main" val="2765148611"/>
       </p:ext>
     </p:extLst>
   </p:cSld>
@@ -2761,7 +3306,7 @@
                 <a:latin typeface="Arial"/>
                 <a:cs typeface="Arial"/>
               </a:rPr>
-              <a:t>: </a:t>
+              <a:t>: Paula Daniela Ortiz Cuervo </a:t>
             </a:r>
             <a:endParaRPr sz="1800" dirty="0">
               <a:latin typeface="Arial"/>
@@ -2823,6 +3368,1827 @@
             <a:fld id="{B6F15528-21DE-4FAA-801E-634DDDAF4B2B}" type="slidenum">
               <a:rPr lang="es-ES" smtClean="0"/>
               <a:t>1</a:t>
+            </a:fld>
+            <a:endParaRPr lang="es-ES"/>
+          </a:p>
+        </p:txBody>
+      </p:sp>
+    </p:spTree>
+  </p:cSld>
+  <p:clrMapOvr>
+    <a:masterClrMapping/>
+  </p:clrMapOvr>
+</p:sld>
+</file>
+
+<file path=ppt/slides/slide10.xml><?xml version="1.0" encoding="utf-8"?>
+<p:sld xmlns:a="http://schemas.openxmlformats.org/drawingml/2006/main" xmlns:r="http://schemas.openxmlformats.org/officeDocument/2006/relationships" xmlns:p="http://schemas.openxmlformats.org/presentationml/2006/main">
+  <p:cSld>
+    <p:spTree>
+      <p:nvGrpSpPr>
+        <p:cNvPr id="1" name="">
+          <a:extLst>
+            <a:ext uri="{FF2B5EF4-FFF2-40B4-BE49-F238E27FC236}">
+              <a16:creationId xmlns:a16="http://schemas.microsoft.com/office/drawing/2014/main" id="{AC1362E9-4EF2-374D-8182-0F996F5E891A}"/>
+            </a:ext>
+          </a:extLst>
+        </p:cNvPr>
+        <p:cNvGrpSpPr/>
+        <p:nvPr/>
+      </p:nvGrpSpPr>
+      <p:grpSpPr>
+        <a:xfrm>
+          <a:off x="0" y="0"/>
+          <a:ext cx="0" cy="0"/>
+          <a:chOff x="0" y="0"/>
+          <a:chExt cx="0" cy="0"/>
+        </a:xfrm>
+      </p:grpSpPr>
+      <p:sp>
+        <p:nvSpPr>
+          <p:cNvPr id="16" name="object 16">
+            <a:extLst>
+              <a:ext uri="{FF2B5EF4-FFF2-40B4-BE49-F238E27FC236}">
+                <a16:creationId xmlns:a16="http://schemas.microsoft.com/office/drawing/2014/main" id="{D25534C6-91A7-F047-3828-B746C3759AD0}"/>
+              </a:ext>
+            </a:extLst>
+          </p:cNvPr>
+          <p:cNvSpPr txBox="1">
+            <a:spLocks noGrp="1"/>
+          </p:cNvSpPr>
+          <p:nvPr>
+            <p:ph type="title"/>
+          </p:nvPr>
+        </p:nvSpPr>
+        <p:spPr>
+          <a:xfrm>
+            <a:off x="685800" y="408883"/>
+            <a:ext cx="10994410" cy="1782539"/>
+          </a:xfrm>
+          <a:prstGeom prst="rect">
+            <a:avLst/>
+          </a:prstGeom>
+        </p:spPr>
+        <p:txBody>
+          <a:bodyPr vert="horz" wrap="square" lIns="0" tIns="12700" rIns="0" bIns="0" rtlCol="0">
+            <a:spAutoFit/>
+          </a:bodyPr>
+          <a:lstStyle/>
+          <a:p>
+            <a:pPr marL="12700">
+              <a:spcBef>
+                <a:spcPts val="100"/>
+              </a:spcBef>
+            </a:pPr>
+            <a:r>
+              <a:rPr lang="es-CO" sz="2500" noProof="0" dirty="0" err="1"/>
+              <a:t>Learning</a:t>
+            </a:r>
+            <a:r>
+              <a:rPr lang="es-CO" sz="2500" noProof="0" dirty="0"/>
+              <a:t> </a:t>
+            </a:r>
+            <a:r>
+              <a:rPr lang="es-CO" sz="2500" noProof="0" dirty="0" err="1"/>
+              <a:t>outcome</a:t>
+            </a:r>
+            <a:r>
+              <a:rPr lang="es-CO" sz="2500" noProof="0" dirty="0"/>
+              <a:t> #4 – Bend </a:t>
+            </a:r>
+            <a:r>
+              <a:rPr lang="es-CO" sz="2500" noProof="0" dirty="0" err="1"/>
+              <a:t>waveguide</a:t>
+            </a:r>
+            <a:r>
+              <a:rPr lang="es-CO" sz="2500" noProof="0" dirty="0"/>
+              <a:t> </a:t>
+            </a:r>
+            <a:r>
+              <a:rPr lang="es-CO" sz="2500" noProof="0" dirty="0" err="1"/>
+              <a:t>radius</a:t>
+            </a:r>
+            <a:r>
+              <a:rPr lang="es-CO" sz="2500" noProof="0" dirty="0"/>
+              <a:t> vs. </a:t>
+            </a:r>
+            <a:r>
+              <a:rPr lang="es-CO" sz="2500" noProof="0" dirty="0" err="1"/>
+              <a:t>loss</a:t>
+            </a:r>
+            <a:r>
+              <a:rPr lang="es-CO" sz="2500" noProof="0" dirty="0"/>
+              <a:t> – </a:t>
+            </a:r>
+            <a:r>
+              <a:rPr lang="es-CO" sz="2500" noProof="0" dirty="0" err="1"/>
+              <a:t>deep</a:t>
+            </a:r>
+            <a:br>
+              <a:rPr lang="es-CO" sz="2500" noProof="0" dirty="0"/>
+            </a:br>
+            <a:r>
+              <a:rPr lang="en-US" b="0" dirty="0"/>
+              <a:t>Use the code provided in this section to calculate the safe radius for 1.2 um width deep waveguides at 1.5 um.</a:t>
+            </a:r>
+            <a:br>
+              <a:rPr lang="en-US" b="0" dirty="0"/>
+            </a:br>
+            <a:br>
+              <a:rPr lang="es-CO" sz="2500" noProof="0" dirty="0"/>
+            </a:br>
+            <a:endParaRPr lang="es-CO" sz="2500" b="0" noProof="0" dirty="0">
+              <a:latin typeface="+mj-lt"/>
+              <a:cs typeface="Lucida Sans"/>
+            </a:endParaRPr>
+          </a:p>
+        </p:txBody>
+      </p:sp>
+      <p:pic>
+        <p:nvPicPr>
+          <p:cNvPr id="83" name="Gráfico 82">
+            <a:extLst>
+              <a:ext uri="{FF2B5EF4-FFF2-40B4-BE49-F238E27FC236}">
+                <a16:creationId xmlns:a16="http://schemas.microsoft.com/office/drawing/2014/main" id="{E85A83B2-DE96-1F40-F9DD-43BC72F0D707}"/>
+              </a:ext>
+            </a:extLst>
+          </p:cNvPr>
+          <p:cNvPicPr>
+            <a:picLocks noChangeAspect="1"/>
+          </p:cNvPicPr>
+          <p:nvPr/>
+        </p:nvPicPr>
+        <p:blipFill>
+          <a:blip r:embed="rId3">
+            <a:extLst>
+              <a:ext uri="{96DAC541-7B7A-43D3-8B79-37D633B846F1}">
+                <asvg:svgBlip xmlns:asvg="http://schemas.microsoft.com/office/drawing/2016/SVG/main" r:embed="rId4"/>
+              </a:ext>
+            </a:extLst>
+          </a:blip>
+          <a:stretch>
+            <a:fillRect/>
+          </a:stretch>
+        </p:blipFill>
+        <p:spPr>
+          <a:xfrm>
+            <a:off x="5045006" y="6356057"/>
+            <a:ext cx="6409575" cy="363174"/>
+          </a:xfrm>
+          <a:prstGeom prst="rect">
+            <a:avLst/>
+          </a:prstGeom>
+        </p:spPr>
+      </p:pic>
+      <p:sp>
+        <p:nvSpPr>
+          <p:cNvPr id="84" name="Marcador de número de diapositiva 83">
+            <a:extLst>
+              <a:ext uri="{FF2B5EF4-FFF2-40B4-BE49-F238E27FC236}">
+                <a16:creationId xmlns:a16="http://schemas.microsoft.com/office/drawing/2014/main" id="{0C69CE97-ADD2-558B-8E8B-31412D681100}"/>
+              </a:ext>
+            </a:extLst>
+          </p:cNvPr>
+          <p:cNvSpPr>
+            <a:spLocks noGrp="1"/>
+          </p:cNvSpPr>
+          <p:nvPr>
+            <p:ph type="sldNum" sz="quarter" idx="7"/>
+          </p:nvPr>
+        </p:nvSpPr>
+        <p:spPr/>
+        <p:txBody>
+          <a:bodyPr/>
+          <a:lstStyle/>
+          <a:p>
+            <a:fld id="{B6F15528-21DE-4FAA-801E-634DDDAF4B2B}" type="slidenum">
+              <a:rPr lang="es-CO" noProof="0" smtClean="0"/>
+              <a:t>10</a:t>
+            </a:fld>
+            <a:endParaRPr lang="es-CO" noProof="0" dirty="0"/>
+          </a:p>
+        </p:txBody>
+      </p:sp>
+      <p:sp>
+        <p:nvSpPr>
+          <p:cNvPr id="3" name="Marcador de pie de página 2">
+            <a:extLst>
+              <a:ext uri="{FF2B5EF4-FFF2-40B4-BE49-F238E27FC236}">
+                <a16:creationId xmlns:a16="http://schemas.microsoft.com/office/drawing/2014/main" id="{6D565AE7-A8EF-92E1-7293-A5C503D05BF7}"/>
+              </a:ext>
+            </a:extLst>
+          </p:cNvPr>
+          <p:cNvSpPr>
+            <a:spLocks noGrp="1"/>
+          </p:cNvSpPr>
+          <p:nvPr>
+            <p:ph type="ftr" sz="quarter" idx="5"/>
+          </p:nvPr>
+        </p:nvSpPr>
+        <p:spPr/>
+        <p:txBody>
+          <a:bodyPr/>
+          <a:lstStyle/>
+          <a:p>
+            <a:pPr marL="12700">
+              <a:spcBef>
+                <a:spcPts val="15"/>
+              </a:spcBef>
+            </a:pPr>
+            <a:r>
+              <a:rPr lang="es-CO" spc="-5" noProof="0" dirty="0"/>
+              <a:t>LAB 1.0. WAVEGUIDES</a:t>
+            </a:r>
+          </a:p>
+        </p:txBody>
+      </p:sp>
+      <p:sp>
+        <p:nvSpPr>
+          <p:cNvPr id="2" name="CuadroTexto 1">
+            <a:extLst>
+              <a:ext uri="{FF2B5EF4-FFF2-40B4-BE49-F238E27FC236}">
+                <a16:creationId xmlns:a16="http://schemas.microsoft.com/office/drawing/2014/main" id="{4F394DDF-3E49-7C28-2005-540B5681A1EB}"/>
+              </a:ext>
+            </a:extLst>
+          </p:cNvPr>
+          <p:cNvSpPr txBox="1"/>
+          <p:nvPr/>
+        </p:nvSpPr>
+        <p:spPr>
+          <a:xfrm>
+            <a:off x="609600" y="4860334"/>
+            <a:ext cx="11199971" cy="1200329"/>
+          </a:xfrm>
+          <a:prstGeom prst="rect">
+            <a:avLst/>
+          </a:prstGeom>
+          <a:solidFill>
+            <a:schemeClr val="bg1">
+              <a:lumMod val="95000"/>
+            </a:schemeClr>
+          </a:solidFill>
+          <a:ln w="28575">
+            <a:solidFill>
+              <a:srgbClr val="E0700D"/>
+            </a:solidFill>
+          </a:ln>
+        </p:spPr>
+        <p:txBody>
+          <a:bodyPr wrap="square" rtlCol="0">
+            <a:spAutoFit/>
+          </a:bodyPr>
+          <a:lstStyle/>
+          <a:p>
+            <a:pPr algn="just"/>
+            <a:r>
+              <a:rPr lang="es-CO" sz="1200" noProof="0" dirty="0" err="1">
+                <a:latin typeface="Arial" panose="020B0604020202020204" pitchFamily="34" charset="0"/>
+                <a:cs typeface="Arial" panose="020B0604020202020204" pitchFamily="34" charset="0"/>
+              </a:rPr>
+              <a:t>Comment</a:t>
+            </a:r>
+            <a:r>
+              <a:rPr lang="es-CO" sz="1200" noProof="0" dirty="0">
+                <a:latin typeface="Arial" panose="020B0604020202020204" pitchFamily="34" charset="0"/>
+                <a:cs typeface="Arial" panose="020B0604020202020204" pitchFamily="34" charset="0"/>
+              </a:rPr>
+              <a:t> </a:t>
+            </a:r>
+            <a:r>
+              <a:rPr lang="es-CO" sz="1200" noProof="0" dirty="0" err="1">
+                <a:latin typeface="Arial" panose="020B0604020202020204" pitchFamily="34" charset="0"/>
+                <a:cs typeface="Arial" panose="020B0604020202020204" pitchFamily="34" charset="0"/>
+              </a:rPr>
+              <a:t>results</a:t>
+            </a:r>
+            <a:r>
+              <a:rPr lang="es-CO" sz="1200" noProof="0" dirty="0">
+                <a:latin typeface="Arial" panose="020B0604020202020204" pitchFamily="34" charset="0"/>
+                <a:cs typeface="Arial" panose="020B0604020202020204" pitchFamily="34" charset="0"/>
+              </a:rPr>
+              <a:t>, </a:t>
+            </a:r>
+            <a:r>
+              <a:rPr lang="es-CO" sz="1200" noProof="0" dirty="0" err="1">
+                <a:latin typeface="Arial" panose="020B0604020202020204" pitchFamily="34" charset="0"/>
+                <a:cs typeface="Arial" panose="020B0604020202020204" pitchFamily="34" charset="0"/>
+              </a:rPr>
+              <a:t>which</a:t>
+            </a:r>
+            <a:r>
+              <a:rPr lang="es-CO" sz="1200" noProof="0" dirty="0">
+                <a:latin typeface="Arial" panose="020B0604020202020204" pitchFamily="34" charset="0"/>
+                <a:cs typeface="Arial" panose="020B0604020202020204" pitchFamily="34" charset="0"/>
+              </a:rPr>
+              <a:t> </a:t>
+            </a:r>
+            <a:r>
+              <a:rPr lang="es-CO" sz="1200" noProof="0" dirty="0" err="1">
+                <a:latin typeface="Arial" panose="020B0604020202020204" pitchFamily="34" charset="0"/>
+                <a:cs typeface="Arial" panose="020B0604020202020204" pitchFamily="34" charset="0"/>
+              </a:rPr>
+              <a:t>is</a:t>
+            </a:r>
+            <a:r>
+              <a:rPr lang="es-CO" sz="1200" noProof="0" dirty="0">
+                <a:latin typeface="Arial" panose="020B0604020202020204" pitchFamily="34" charset="0"/>
+                <a:cs typeface="Arial" panose="020B0604020202020204" pitchFamily="34" charset="0"/>
+              </a:rPr>
+              <a:t> the </a:t>
+            </a:r>
+            <a:r>
+              <a:rPr lang="es-CO" sz="1200" noProof="0" dirty="0" err="1">
+                <a:latin typeface="Arial" panose="020B0604020202020204" pitchFamily="34" charset="0"/>
+                <a:cs typeface="Arial" panose="020B0604020202020204" pitchFamily="34" charset="0"/>
+              </a:rPr>
+              <a:t>safe</a:t>
+            </a:r>
+            <a:r>
+              <a:rPr lang="es-CO" sz="1200" noProof="0" dirty="0">
+                <a:latin typeface="Arial" panose="020B0604020202020204" pitchFamily="34" charset="0"/>
+                <a:cs typeface="Arial" panose="020B0604020202020204" pitchFamily="34" charset="0"/>
+              </a:rPr>
+              <a:t> </a:t>
+            </a:r>
+            <a:r>
+              <a:rPr lang="es-CO" sz="1200" noProof="0" dirty="0" err="1">
+                <a:latin typeface="Arial" panose="020B0604020202020204" pitchFamily="34" charset="0"/>
+                <a:cs typeface="Arial" panose="020B0604020202020204" pitchFamily="34" charset="0"/>
+              </a:rPr>
+              <a:t>radius</a:t>
+            </a:r>
+            <a:r>
+              <a:rPr lang="es-CO" sz="1200" noProof="0" dirty="0">
+                <a:latin typeface="Arial" panose="020B0604020202020204" pitchFamily="34" charset="0"/>
+                <a:cs typeface="Arial" panose="020B0604020202020204" pitchFamily="34" charset="0"/>
+              </a:rPr>
+              <a:t>, </a:t>
+            </a:r>
+            <a:r>
+              <a:rPr lang="es-CO" sz="1200" noProof="0" dirty="0" err="1">
+                <a:latin typeface="Arial" panose="020B0604020202020204" pitchFamily="34" charset="0"/>
+                <a:cs typeface="Arial" panose="020B0604020202020204" pitchFamily="34" charset="0"/>
+              </a:rPr>
+              <a:t>consider</a:t>
+            </a:r>
+            <a:r>
+              <a:rPr lang="es-CO" sz="1200" noProof="0" dirty="0">
+                <a:latin typeface="Arial" panose="020B0604020202020204" pitchFamily="34" charset="0"/>
+                <a:cs typeface="Arial" panose="020B0604020202020204" pitchFamily="34" charset="0"/>
+              </a:rPr>
+              <a:t> </a:t>
+            </a:r>
+            <a:r>
+              <a:rPr lang="es-CO" sz="1200" noProof="0" dirty="0" err="1">
+                <a:latin typeface="Arial" panose="020B0604020202020204" pitchFamily="34" charset="0"/>
+                <a:cs typeface="Arial" panose="020B0604020202020204" pitchFamily="34" charset="0"/>
+              </a:rPr>
+              <a:t>safe</a:t>
+            </a:r>
+            <a:r>
+              <a:rPr lang="es-CO" sz="1200" noProof="0" dirty="0">
+                <a:latin typeface="Arial" panose="020B0604020202020204" pitchFamily="34" charset="0"/>
+                <a:cs typeface="Arial" panose="020B0604020202020204" pitchFamily="34" charset="0"/>
+              </a:rPr>
+              <a:t> </a:t>
+            </a:r>
+            <a:r>
+              <a:rPr lang="es-CO" sz="1200" noProof="0" dirty="0" err="1">
+                <a:latin typeface="Arial" panose="020B0604020202020204" pitchFamily="34" charset="0"/>
+                <a:cs typeface="Arial" panose="020B0604020202020204" pitchFamily="34" charset="0"/>
+              </a:rPr>
+              <a:t>means</a:t>
+            </a:r>
+            <a:r>
+              <a:rPr lang="es-CO" sz="1200" noProof="0" dirty="0">
+                <a:latin typeface="Arial" panose="020B0604020202020204" pitchFamily="34" charset="0"/>
+                <a:cs typeface="Arial" panose="020B0604020202020204" pitchFamily="34" charset="0"/>
+              </a:rPr>
+              <a:t> </a:t>
+            </a:r>
+            <a:r>
+              <a:rPr lang="es-CO" sz="1200" noProof="0" dirty="0" err="1">
+                <a:latin typeface="Arial" panose="020B0604020202020204" pitchFamily="34" charset="0"/>
+                <a:cs typeface="Arial" panose="020B0604020202020204" pitchFamily="34" charset="0"/>
+              </a:rPr>
+              <a:t>less</a:t>
+            </a:r>
+            <a:r>
+              <a:rPr lang="es-CO" sz="1200" noProof="0" dirty="0">
+                <a:latin typeface="Arial" panose="020B0604020202020204" pitchFamily="34" charset="0"/>
+                <a:cs typeface="Arial" panose="020B0604020202020204" pitchFamily="34" charset="0"/>
+              </a:rPr>
+              <a:t> </a:t>
+            </a:r>
+            <a:r>
+              <a:rPr lang="es-CO" sz="1200" noProof="0" dirty="0" err="1">
+                <a:latin typeface="Arial" panose="020B0604020202020204" pitchFamily="34" charset="0"/>
+                <a:cs typeface="Arial" panose="020B0604020202020204" pitchFamily="34" charset="0"/>
+              </a:rPr>
+              <a:t>than</a:t>
+            </a:r>
+            <a:r>
+              <a:rPr lang="es-CO" sz="1200" noProof="0" dirty="0">
+                <a:latin typeface="Arial" panose="020B0604020202020204" pitchFamily="34" charset="0"/>
+                <a:cs typeface="Arial" panose="020B0604020202020204" pitchFamily="34" charset="0"/>
+              </a:rPr>
+              <a:t> 0.1 dB/90º.</a:t>
+            </a:r>
+          </a:p>
+          <a:p>
+            <a:pPr algn="just"/>
+            <a:endParaRPr lang="es-CO" sz="1200" dirty="0">
+              <a:latin typeface="Arial" panose="020B0604020202020204" pitchFamily="34" charset="0"/>
+              <a:cs typeface="Arial" panose="020B0604020202020204" pitchFamily="34" charset="0"/>
+            </a:endParaRPr>
+          </a:p>
+          <a:p>
+            <a:pPr algn="just"/>
+            <a:r>
+              <a:rPr lang="es-CO" sz="1200" noProof="0" dirty="0">
+                <a:latin typeface="Arial" panose="020B0604020202020204" pitchFamily="34" charset="0"/>
+                <a:cs typeface="Arial" panose="020B0604020202020204" pitchFamily="34" charset="0"/>
+              </a:rPr>
+              <a:t>Ahora, en el caso de  </a:t>
+            </a:r>
+            <a:r>
+              <a:rPr lang="en-US" sz="1200" dirty="0"/>
+              <a:t>1.2 um width deep waveguides at 1.5 um, </a:t>
+            </a:r>
+            <a:r>
+              <a:rPr lang="es-CO" sz="1200" noProof="0" dirty="0"/>
+              <a:t>el</a:t>
+            </a:r>
+            <a:r>
+              <a:rPr lang="en-US" sz="1200" dirty="0"/>
+              <a:t> radio Seguro </a:t>
+            </a:r>
+            <a:r>
+              <a:rPr lang="en-US" sz="1200" dirty="0" err="1"/>
+              <a:t>sería</a:t>
+            </a:r>
+            <a:r>
+              <a:rPr lang="en-US" sz="1200" dirty="0"/>
+              <a:t> de 85 um </a:t>
+            </a:r>
+            <a:r>
+              <a:rPr lang="en-US" sz="1200" dirty="0" err="1"/>
+              <a:t>aproximadamente</a:t>
+            </a:r>
+            <a:r>
+              <a:rPr lang="en-US" sz="1200" dirty="0"/>
+              <a:t>, </a:t>
+            </a:r>
+            <a:r>
+              <a:rPr lang="en-US" sz="1200" dirty="0" err="1"/>
+              <a:t>este</a:t>
+            </a:r>
+            <a:r>
+              <a:rPr lang="en-US" sz="1200" dirty="0"/>
+              <a:t> valor es </a:t>
+            </a:r>
+            <a:r>
+              <a:rPr lang="en-US" sz="1200" dirty="0" err="1"/>
+              <a:t>más</a:t>
+            </a:r>
+            <a:r>
+              <a:rPr lang="en-US" sz="1200" dirty="0"/>
+              <a:t> grande </a:t>
+            </a:r>
+            <a:r>
+              <a:rPr lang="en-US" sz="1200" dirty="0" err="1"/>
+              <a:t>que</a:t>
+            </a:r>
+            <a:r>
+              <a:rPr lang="en-US" sz="1200" dirty="0"/>
+              <a:t> </a:t>
+            </a:r>
+            <a:r>
+              <a:rPr lang="en-US" sz="1200" dirty="0" err="1"/>
+              <a:t>en</a:t>
+            </a:r>
+            <a:r>
+              <a:rPr lang="en-US" sz="1200" dirty="0"/>
+              <a:t> </a:t>
+            </a:r>
+            <a:r>
+              <a:rPr lang="en-US" sz="1200" dirty="0" err="1"/>
+              <a:t>el</a:t>
+            </a:r>
+            <a:r>
+              <a:rPr lang="en-US" sz="1200" dirty="0"/>
+              <a:t> </a:t>
+            </a:r>
+            <a:r>
+              <a:rPr lang="en-US" sz="1200" dirty="0" err="1"/>
+              <a:t>caso</a:t>
+            </a:r>
+            <a:r>
+              <a:rPr lang="en-US" sz="1200" dirty="0"/>
+              <a:t> anterior </a:t>
+            </a:r>
+            <a:r>
+              <a:rPr lang="en-US" sz="1200" dirty="0" err="1"/>
+              <a:t>que</a:t>
+            </a:r>
+            <a:r>
+              <a:rPr lang="en-US" sz="1200" dirty="0"/>
+              <a:t> </a:t>
+            </a:r>
+            <a:r>
+              <a:rPr lang="en-US" sz="1200" dirty="0" err="1"/>
+              <a:t>teniamos</a:t>
+            </a:r>
+            <a:r>
+              <a:rPr lang="en-US" sz="1200" dirty="0"/>
+              <a:t> un radio de 65 um. Esta </a:t>
+            </a:r>
+            <a:r>
+              <a:rPr lang="en-US" sz="1200" dirty="0" err="1"/>
+              <a:t>diferencia</a:t>
+            </a:r>
+            <a:r>
+              <a:rPr lang="en-US" sz="1200" dirty="0"/>
+              <a:t> </a:t>
+            </a:r>
+            <a:r>
+              <a:rPr lang="en-US" sz="1200" dirty="0" err="1"/>
+              <a:t>puede</a:t>
+            </a:r>
+            <a:r>
+              <a:rPr lang="en-US" sz="1200" dirty="0"/>
+              <a:t> </a:t>
+            </a:r>
+            <a:r>
+              <a:rPr lang="en-US" sz="1200" dirty="0" err="1"/>
+              <a:t>estar</a:t>
+            </a:r>
+            <a:r>
+              <a:rPr lang="en-US" sz="1200" dirty="0"/>
+              <a:t> dada tanto </a:t>
+            </a:r>
+            <a:r>
+              <a:rPr lang="en-US" sz="1200" dirty="0" err="1"/>
+              <a:t>por</a:t>
+            </a:r>
+            <a:r>
+              <a:rPr lang="en-US" sz="1200" dirty="0"/>
+              <a:t> </a:t>
+            </a:r>
+            <a:r>
+              <a:rPr lang="en-US" sz="1200" dirty="0" err="1"/>
+              <a:t>el</a:t>
+            </a:r>
+            <a:r>
+              <a:rPr lang="en-US" sz="1200" dirty="0"/>
+              <a:t> </a:t>
+            </a:r>
+            <a:r>
+              <a:rPr lang="en-US" sz="1200" dirty="0" err="1"/>
+              <a:t>cambio</a:t>
+            </a:r>
+            <a:r>
+              <a:rPr lang="en-US" sz="1200" dirty="0"/>
+              <a:t> de longitude de </a:t>
+            </a:r>
+            <a:r>
+              <a:rPr lang="en-US" sz="1200" dirty="0" err="1"/>
+              <a:t>onda</a:t>
+            </a:r>
+            <a:r>
+              <a:rPr lang="en-US" sz="1200" dirty="0"/>
+              <a:t> </a:t>
+            </a:r>
+            <a:r>
+              <a:rPr lang="en-US" sz="1200" dirty="0" err="1"/>
+              <a:t>como</a:t>
+            </a:r>
+            <a:r>
+              <a:rPr lang="en-US" sz="1200" dirty="0"/>
+              <a:t> de </a:t>
+            </a:r>
+            <a:r>
+              <a:rPr lang="en-US" sz="1200" dirty="0" err="1"/>
+              <a:t>aumentar</a:t>
+            </a:r>
+            <a:r>
+              <a:rPr lang="en-US" sz="1200" dirty="0"/>
+              <a:t> </a:t>
+            </a:r>
+            <a:r>
+              <a:rPr lang="en-US" sz="1200" dirty="0" err="1"/>
+              <a:t>el</a:t>
+            </a:r>
+            <a:r>
+              <a:rPr lang="en-US" sz="1200" dirty="0"/>
+              <a:t> ancho del core. </a:t>
+            </a:r>
+            <a:endParaRPr lang="es-CO" sz="1200" noProof="0" dirty="0">
+              <a:latin typeface="Arial" panose="020B0604020202020204" pitchFamily="34" charset="0"/>
+              <a:cs typeface="Arial" panose="020B0604020202020204" pitchFamily="34" charset="0"/>
+            </a:endParaRPr>
+          </a:p>
+          <a:p>
+            <a:pPr algn="just"/>
+            <a:endParaRPr lang="es-CO" sz="1200" noProof="0" dirty="0">
+              <a:latin typeface="Arial" panose="020B0604020202020204" pitchFamily="34" charset="0"/>
+              <a:cs typeface="Arial" panose="020B0604020202020204" pitchFamily="34" charset="0"/>
+            </a:endParaRPr>
+          </a:p>
+          <a:p>
+            <a:pPr algn="just"/>
+            <a:endParaRPr lang="es-CO" sz="1200" noProof="0" dirty="0">
+              <a:latin typeface="Arial" panose="020B0604020202020204" pitchFamily="34" charset="0"/>
+              <a:cs typeface="Arial" panose="020B0604020202020204" pitchFamily="34" charset="0"/>
+            </a:endParaRPr>
+          </a:p>
+        </p:txBody>
+      </p:sp>
+      <p:sp>
+        <p:nvSpPr>
+          <p:cNvPr id="7" name="Rectángulo 6">
+            <a:extLst>
+              <a:ext uri="{FF2B5EF4-FFF2-40B4-BE49-F238E27FC236}">
+                <a16:creationId xmlns:a16="http://schemas.microsoft.com/office/drawing/2014/main" id="{091E93B1-6CD6-C0A3-B44D-A07D8C741DC5}"/>
+              </a:ext>
+            </a:extLst>
+          </p:cNvPr>
+          <p:cNvSpPr/>
+          <p:nvPr/>
+        </p:nvSpPr>
+        <p:spPr>
+          <a:xfrm>
+            <a:off x="609441" y="1418373"/>
+            <a:ext cx="11199971" cy="3306028"/>
+          </a:xfrm>
+          <a:prstGeom prst="rect">
+            <a:avLst/>
+          </a:prstGeom>
+          <a:noFill/>
+          <a:ln w="28575">
+            <a:solidFill>
+              <a:srgbClr val="E0700D"/>
+            </a:solidFill>
+          </a:ln>
+        </p:spPr>
+        <p:style>
+          <a:lnRef idx="2">
+            <a:schemeClr val="accent1">
+              <a:shade val="15000"/>
+            </a:schemeClr>
+          </a:lnRef>
+          <a:fillRef idx="1">
+            <a:schemeClr val="accent1"/>
+          </a:fillRef>
+          <a:effectRef idx="0">
+            <a:schemeClr val="accent1"/>
+          </a:effectRef>
+          <a:fontRef idx="minor">
+            <a:schemeClr val="lt1"/>
+          </a:fontRef>
+        </p:style>
+        <p:txBody>
+          <a:bodyPr rtlCol="0" anchor="ctr"/>
+          <a:lstStyle/>
+          <a:p>
+            <a:pPr algn="ctr"/>
+            <a:endParaRPr lang="es-CO" noProof="0" dirty="0"/>
+          </a:p>
+        </p:txBody>
+      </p:sp>
+      <mc:AlternateContent xmlns:mc="http://schemas.openxmlformats.org/markup-compatibility/2006" xmlns:a14="http://schemas.microsoft.com/office/drawing/2010/main">
+        <mc:Choice Requires="a14">
+          <p:sp>
+            <p:nvSpPr>
+              <p:cNvPr id="13" name="CuadroTexto 12">
+                <a:extLst>
+                  <a:ext uri="{FF2B5EF4-FFF2-40B4-BE49-F238E27FC236}">
+                    <a16:creationId xmlns:a16="http://schemas.microsoft.com/office/drawing/2014/main" id="{7706F372-2C0E-8BC9-CCBF-ACCD917802CA}"/>
+                  </a:ext>
+                </a:extLst>
+              </p:cNvPr>
+              <p:cNvSpPr txBox="1"/>
+              <p:nvPr/>
+            </p:nvSpPr>
+            <p:spPr>
+              <a:xfrm>
+                <a:off x="9914680" y="4262088"/>
+                <a:ext cx="1856534" cy="439608"/>
+              </a:xfrm>
+              <a:prstGeom prst="rect">
+                <a:avLst/>
+              </a:prstGeom>
+              <a:noFill/>
+            </p:spPr>
+            <p:txBody>
+              <a:bodyPr wrap="none" lIns="0" tIns="0" rIns="0" bIns="0" rtlCol="0">
+                <a:spAutoFit/>
+              </a:bodyPr>
+              <a:lstStyle/>
+              <a:p>
+                <a14:m>
+                  <m:oMath xmlns:m="http://schemas.openxmlformats.org/officeDocument/2006/math">
+                    <m:r>
+                      <a:rPr lang="es-CO" sz="1800" b="0" i="1" noProof="0" smtClean="0">
+                        <a:latin typeface="Cambria Math" panose="02040503050406030204" pitchFamily="18" charset="0"/>
+                      </a:rPr>
+                      <m:t>𝛼</m:t>
+                    </m:r>
+                    <m:d>
+                      <m:dPr>
+                        <m:begChr m:val="["/>
+                        <m:endChr m:val="]"/>
+                        <m:ctrlPr>
+                          <a:rPr lang="es-CO" sz="1800" b="0" i="1" noProof="0" smtClean="0">
+                            <a:latin typeface="Cambria Math" panose="02040503050406030204" pitchFamily="18" charset="0"/>
+                          </a:rPr>
+                        </m:ctrlPr>
+                      </m:dPr>
+                      <m:e>
+                        <m:f>
+                          <m:fPr>
+                            <m:ctrlPr>
+                              <a:rPr lang="es-CO" sz="1800" b="0" i="1" noProof="0" smtClean="0">
+                                <a:latin typeface="Cambria Math" panose="02040503050406030204" pitchFamily="18" charset="0"/>
+                              </a:rPr>
+                            </m:ctrlPr>
+                          </m:fPr>
+                          <m:num>
+                            <m:r>
+                              <a:rPr lang="es-CO" sz="1800" b="0" i="1" noProof="0" smtClean="0">
+                                <a:latin typeface="Cambria Math" panose="02040503050406030204" pitchFamily="18" charset="0"/>
+                              </a:rPr>
+                              <m:t>𝑑𝐵</m:t>
+                            </m:r>
+                          </m:num>
+                          <m:den>
+                            <m:r>
+                              <a:rPr lang="es-CO" sz="1800" b="0" i="1" noProof="0" smtClean="0">
+                                <a:latin typeface="Cambria Math" panose="02040503050406030204" pitchFamily="18" charset="0"/>
+                              </a:rPr>
+                              <m:t>90</m:t>
+                            </m:r>
+                            <m:r>
+                              <a:rPr lang="es-CO" sz="1800" b="0" i="1" noProof="0" smtClean="0">
+                                <a:latin typeface="Cambria Math" panose="02040503050406030204" pitchFamily="18" charset="0"/>
+                                <a:ea typeface="Cambria Math" panose="02040503050406030204" pitchFamily="18" charset="0"/>
+                              </a:rPr>
+                              <m:t>°</m:t>
+                            </m:r>
+                          </m:den>
+                        </m:f>
+                      </m:e>
+                    </m:d>
+                    <m:r>
+                      <a:rPr lang="es-CO" sz="1800" b="0" i="1" noProof="0" smtClean="0">
+                        <a:latin typeface="Cambria Math" panose="02040503050406030204" pitchFamily="18" charset="0"/>
+                      </a:rPr>
+                      <m:t>=</m:t>
+                    </m:r>
+                  </m:oMath>
+                </a14:m>
+                <a:r>
+                  <a:rPr lang="es-CO" sz="1800" noProof="0" dirty="0"/>
+                  <a:t> </a:t>
+                </a:r>
+                <a14:m>
+                  <m:oMath xmlns:m="http://schemas.openxmlformats.org/officeDocument/2006/math">
+                    <m:r>
+                      <m:rPr>
+                        <m:sty m:val="p"/>
+                      </m:rPr>
+                      <a:rPr lang="es-CO" sz="1800" b="0" i="0" noProof="0" smtClean="0">
+                        <a:latin typeface="Cambria Math" panose="02040503050406030204" pitchFamily="18" charset="0"/>
+                      </a:rPr>
+                      <m:t>R</m:t>
+                    </m:r>
+                    <m:f>
+                      <m:fPr>
+                        <m:ctrlPr>
+                          <a:rPr lang="es-CO" sz="1800" b="0" i="1" noProof="0" smtClean="0">
+                            <a:latin typeface="Cambria Math" panose="02040503050406030204" pitchFamily="18" charset="0"/>
+                          </a:rPr>
+                        </m:ctrlPr>
+                      </m:fPr>
+                      <m:num>
+                        <m:r>
+                          <a:rPr lang="es-CO" sz="1800" b="0" i="1" noProof="0" smtClean="0">
+                            <a:latin typeface="Cambria Math" panose="02040503050406030204" pitchFamily="18" charset="0"/>
+                          </a:rPr>
+                          <m:t>𝜋</m:t>
+                        </m:r>
+                      </m:num>
+                      <m:den>
+                        <m:r>
+                          <a:rPr lang="es-CO" sz="1800" b="0" i="1" noProof="0" smtClean="0">
+                            <a:latin typeface="Cambria Math" panose="02040503050406030204" pitchFamily="18" charset="0"/>
+                          </a:rPr>
+                          <m:t>2</m:t>
+                        </m:r>
+                      </m:den>
+                    </m:f>
+                    <m:r>
+                      <a:rPr lang="es-CO" sz="1800" i="1" noProof="0" smtClean="0">
+                        <a:latin typeface="Cambria Math" panose="02040503050406030204" pitchFamily="18" charset="0"/>
+                      </a:rPr>
+                      <m:t>𝛼</m:t>
+                    </m:r>
+                    <m:d>
+                      <m:dPr>
+                        <m:begChr m:val="["/>
+                        <m:endChr m:val="]"/>
+                        <m:ctrlPr>
+                          <a:rPr lang="es-CO" sz="1800" i="1" noProof="0" smtClean="0">
+                            <a:latin typeface="Cambria Math" panose="02040503050406030204" pitchFamily="18" charset="0"/>
+                          </a:rPr>
+                        </m:ctrlPr>
+                      </m:dPr>
+                      <m:e>
+                        <m:f>
+                          <m:fPr>
+                            <m:ctrlPr>
+                              <a:rPr lang="es-CO" sz="1800" i="1" noProof="0" smtClean="0">
+                                <a:latin typeface="Cambria Math" panose="02040503050406030204" pitchFamily="18" charset="0"/>
+                              </a:rPr>
+                            </m:ctrlPr>
+                          </m:fPr>
+                          <m:num>
+                            <m:r>
+                              <a:rPr lang="es-CO" sz="1800" i="1" noProof="0" smtClean="0">
+                                <a:latin typeface="Cambria Math" panose="02040503050406030204" pitchFamily="18" charset="0"/>
+                              </a:rPr>
+                              <m:t>𝑑𝐵</m:t>
+                            </m:r>
+                          </m:num>
+                          <m:den>
+                            <m:r>
+                              <a:rPr lang="es-CO" sz="1800" i="1" noProof="0" smtClean="0">
+                                <a:latin typeface="Cambria Math" panose="02040503050406030204" pitchFamily="18" charset="0"/>
+                              </a:rPr>
+                              <m:t>µ</m:t>
+                            </m:r>
+                            <m:r>
+                              <a:rPr lang="es-CO" sz="1800" i="1" noProof="0" smtClean="0">
+                                <a:latin typeface="Cambria Math" panose="02040503050406030204" pitchFamily="18" charset="0"/>
+                              </a:rPr>
+                              <m:t>𝑚</m:t>
+                            </m:r>
+                          </m:den>
+                        </m:f>
+                      </m:e>
+                    </m:d>
+                  </m:oMath>
+                </a14:m>
+                <a:endParaRPr lang="es-CO" sz="1800" noProof="0" dirty="0"/>
+              </a:p>
+            </p:txBody>
+          </p:sp>
+        </mc:Choice>
+        <mc:Fallback xmlns="">
+          <p:sp>
+            <p:nvSpPr>
+              <p:cNvPr id="13" name="CuadroTexto 12">
+                <a:extLst>
+                  <a:ext uri="{FF2B5EF4-FFF2-40B4-BE49-F238E27FC236}">
+                    <a16:creationId xmlns:a16="http://schemas.microsoft.com/office/drawing/2014/main" id="{7706F372-2C0E-8BC9-CCBF-ACCD917802CA}"/>
+                  </a:ext>
+                </a:extLst>
+              </p:cNvPr>
+              <p:cNvSpPr txBox="1">
+                <a:spLocks noRot="1" noChangeAspect="1" noMove="1" noResize="1" noEditPoints="1" noAdjustHandles="1" noChangeArrowheads="1" noChangeShapeType="1" noTextEdit="1"/>
+              </p:cNvSpPr>
+              <p:nvPr/>
+            </p:nvSpPr>
+            <p:spPr>
+              <a:xfrm>
+                <a:off x="9914680" y="4262088"/>
+                <a:ext cx="1856534" cy="439608"/>
+              </a:xfrm>
+              <a:prstGeom prst="rect">
+                <a:avLst/>
+              </a:prstGeom>
+              <a:blipFill>
+                <a:blip r:embed="rId5"/>
+                <a:stretch>
+                  <a:fillRect l="-3279" b="-13889"/>
+                </a:stretch>
+              </a:blipFill>
+            </p:spPr>
+            <p:txBody>
+              <a:bodyPr/>
+              <a:lstStyle/>
+              <a:p>
+                <a:r>
+                  <a:rPr lang="es-CO">
+                    <a:noFill/>
+                  </a:rPr>
+                  <a:t> </a:t>
+                </a:r>
+              </a:p>
+            </p:txBody>
+          </p:sp>
+        </mc:Fallback>
+      </mc:AlternateContent>
+      <p:pic>
+        <p:nvPicPr>
+          <p:cNvPr id="5" name="Imagen 4">
+            <a:extLst>
+              <a:ext uri="{FF2B5EF4-FFF2-40B4-BE49-F238E27FC236}">
+                <a16:creationId xmlns:a16="http://schemas.microsoft.com/office/drawing/2014/main" id="{8B8FE707-4743-4A7D-888C-FAB5F90AB6F4}"/>
+              </a:ext>
+            </a:extLst>
+          </p:cNvPr>
+          <p:cNvPicPr>
+            <a:picLocks noChangeAspect="1"/>
+          </p:cNvPicPr>
+          <p:nvPr/>
+        </p:nvPicPr>
+        <p:blipFill>
+          <a:blip r:embed="rId6"/>
+          <a:stretch>
+            <a:fillRect/>
+          </a:stretch>
+        </p:blipFill>
+        <p:spPr>
+          <a:xfrm>
+            <a:off x="2351455" y="1654036"/>
+            <a:ext cx="3715516" cy="2880000"/>
+          </a:xfrm>
+          <a:prstGeom prst="rect">
+            <a:avLst/>
+          </a:prstGeom>
+        </p:spPr>
+      </p:pic>
+      <p:pic>
+        <p:nvPicPr>
+          <p:cNvPr id="8" name="Imagen 7">
+            <a:extLst>
+              <a:ext uri="{FF2B5EF4-FFF2-40B4-BE49-F238E27FC236}">
+                <a16:creationId xmlns:a16="http://schemas.microsoft.com/office/drawing/2014/main" id="{D535B5E8-833B-E6B5-F629-45CC37AFEB71}"/>
+              </a:ext>
+            </a:extLst>
+          </p:cNvPr>
+          <p:cNvPicPr>
+            <a:picLocks noChangeAspect="1"/>
+          </p:cNvPicPr>
+          <p:nvPr/>
+        </p:nvPicPr>
+        <p:blipFill>
+          <a:blip r:embed="rId7"/>
+          <a:stretch>
+            <a:fillRect/>
+          </a:stretch>
+        </p:blipFill>
+        <p:spPr>
+          <a:xfrm>
+            <a:off x="6212331" y="1654036"/>
+            <a:ext cx="3645890" cy="2880000"/>
+          </a:xfrm>
+          <a:prstGeom prst="rect">
+            <a:avLst/>
+          </a:prstGeom>
+        </p:spPr>
+      </p:pic>
+    </p:spTree>
+    <p:extLst>
+      <p:ext uri="{BB962C8B-B14F-4D97-AF65-F5344CB8AC3E}">
+        <p14:creationId xmlns:p14="http://schemas.microsoft.com/office/powerpoint/2010/main" val="3382675219"/>
+      </p:ext>
+    </p:extLst>
+  </p:cSld>
+  <p:clrMapOvr>
+    <a:masterClrMapping/>
+  </p:clrMapOvr>
+</p:sld>
+</file>
+
+<file path=ppt/slides/slide11.xml><?xml version="1.0" encoding="utf-8"?>
+<p:sld xmlns:a="http://schemas.openxmlformats.org/drawingml/2006/main" xmlns:r="http://schemas.openxmlformats.org/officeDocument/2006/relationships" xmlns:p="http://schemas.openxmlformats.org/presentationml/2006/main">
+  <p:cSld>
+    <p:spTree>
+      <p:nvGrpSpPr>
+        <p:cNvPr id="1" name="">
+          <a:extLst>
+            <a:ext uri="{FF2B5EF4-FFF2-40B4-BE49-F238E27FC236}">
+              <a16:creationId xmlns:a16="http://schemas.microsoft.com/office/drawing/2014/main" id="{CF3D5949-F2F7-449F-DD5C-3A4C043E1BD9}"/>
+            </a:ext>
+          </a:extLst>
+        </p:cNvPr>
+        <p:cNvGrpSpPr/>
+        <p:nvPr/>
+      </p:nvGrpSpPr>
+      <p:grpSpPr>
+        <a:xfrm>
+          <a:off x="0" y="0"/>
+          <a:ext cx="0" cy="0"/>
+          <a:chOff x="0" y="0"/>
+          <a:chExt cx="0" cy="0"/>
+        </a:xfrm>
+      </p:grpSpPr>
+      <p:sp>
+        <p:nvSpPr>
+          <p:cNvPr id="16" name="object 16">
+            <a:extLst>
+              <a:ext uri="{FF2B5EF4-FFF2-40B4-BE49-F238E27FC236}">
+                <a16:creationId xmlns:a16="http://schemas.microsoft.com/office/drawing/2014/main" id="{F7235206-39C4-28CB-0981-2A9F452326C1}"/>
+              </a:ext>
+            </a:extLst>
+          </p:cNvPr>
+          <p:cNvSpPr txBox="1">
+            <a:spLocks noGrp="1"/>
+          </p:cNvSpPr>
+          <p:nvPr>
+            <p:ph type="title"/>
+          </p:nvPr>
+        </p:nvSpPr>
+        <p:spPr>
+          <a:xfrm>
+            <a:off x="685800" y="408883"/>
+            <a:ext cx="10994410" cy="1782539"/>
+          </a:xfrm>
+          <a:prstGeom prst="rect">
+            <a:avLst/>
+          </a:prstGeom>
+        </p:spPr>
+        <p:txBody>
+          <a:bodyPr vert="horz" wrap="square" lIns="0" tIns="12700" rIns="0" bIns="0" rtlCol="0">
+            <a:spAutoFit/>
+          </a:bodyPr>
+          <a:lstStyle/>
+          <a:p>
+            <a:pPr marL="12700">
+              <a:spcBef>
+                <a:spcPts val="100"/>
+              </a:spcBef>
+            </a:pPr>
+            <a:r>
+              <a:rPr lang="es-CO" sz="2500" noProof="0" dirty="0" err="1"/>
+              <a:t>Learning</a:t>
+            </a:r>
+            <a:r>
+              <a:rPr lang="es-CO" sz="2500" noProof="0" dirty="0"/>
+              <a:t> </a:t>
+            </a:r>
+            <a:r>
+              <a:rPr lang="es-CO" sz="2500" noProof="0" dirty="0" err="1"/>
+              <a:t>outcome</a:t>
+            </a:r>
+            <a:r>
+              <a:rPr lang="es-CO" sz="2500" noProof="0" dirty="0"/>
+              <a:t> #4 – Bend </a:t>
+            </a:r>
+            <a:r>
+              <a:rPr lang="es-CO" sz="2500" noProof="0" dirty="0" err="1"/>
+              <a:t>waveguide</a:t>
+            </a:r>
+            <a:r>
+              <a:rPr lang="es-CO" sz="2500" noProof="0" dirty="0"/>
+              <a:t> </a:t>
+            </a:r>
+            <a:r>
+              <a:rPr lang="es-CO" sz="2500" noProof="0" dirty="0" err="1"/>
+              <a:t>radius</a:t>
+            </a:r>
+            <a:r>
+              <a:rPr lang="es-CO" sz="2500" noProof="0" dirty="0"/>
+              <a:t> vs. </a:t>
+            </a:r>
+            <a:r>
+              <a:rPr lang="es-CO" sz="2500" noProof="0" dirty="0" err="1"/>
+              <a:t>loss</a:t>
+            </a:r>
+            <a:r>
+              <a:rPr lang="es-CO" sz="2500" noProof="0" dirty="0"/>
+              <a:t> – </a:t>
+            </a:r>
+            <a:r>
+              <a:rPr lang="es-CO" sz="2500" noProof="0" dirty="0" err="1"/>
+              <a:t>deep</a:t>
+            </a:r>
+            <a:br>
+              <a:rPr lang="es-CO" sz="2500" noProof="0" dirty="0"/>
+            </a:br>
+            <a:r>
+              <a:rPr lang="en-US" b="0" dirty="0"/>
+              <a:t>Use the code provided in this section to calculate the safe radius for 0.5 um width deep waveguides at 1.55 um – Silicon On Insulator</a:t>
+            </a:r>
+            <a:br>
+              <a:rPr lang="en-US" b="0" dirty="0"/>
+            </a:br>
+            <a:br>
+              <a:rPr lang="es-CO" sz="2500" noProof="0" dirty="0"/>
+            </a:br>
+            <a:endParaRPr lang="es-CO" sz="2500" b="0" noProof="0" dirty="0">
+              <a:latin typeface="+mj-lt"/>
+              <a:cs typeface="Lucida Sans"/>
+            </a:endParaRPr>
+          </a:p>
+        </p:txBody>
+      </p:sp>
+      <p:pic>
+        <p:nvPicPr>
+          <p:cNvPr id="83" name="Gráfico 82">
+            <a:extLst>
+              <a:ext uri="{FF2B5EF4-FFF2-40B4-BE49-F238E27FC236}">
+                <a16:creationId xmlns:a16="http://schemas.microsoft.com/office/drawing/2014/main" id="{6493B621-2DF2-6BF7-943C-B121FC3DF542}"/>
+              </a:ext>
+            </a:extLst>
+          </p:cNvPr>
+          <p:cNvPicPr>
+            <a:picLocks noChangeAspect="1"/>
+          </p:cNvPicPr>
+          <p:nvPr/>
+        </p:nvPicPr>
+        <p:blipFill>
+          <a:blip r:embed="rId3">
+            <a:extLst>
+              <a:ext uri="{96DAC541-7B7A-43D3-8B79-37D633B846F1}">
+                <asvg:svgBlip xmlns:asvg="http://schemas.microsoft.com/office/drawing/2016/SVG/main" r:embed="rId4"/>
+              </a:ext>
+            </a:extLst>
+          </a:blip>
+          <a:stretch>
+            <a:fillRect/>
+          </a:stretch>
+        </p:blipFill>
+        <p:spPr>
+          <a:xfrm>
+            <a:off x="5045006" y="6356057"/>
+            <a:ext cx="6409575" cy="363174"/>
+          </a:xfrm>
+          <a:prstGeom prst="rect">
+            <a:avLst/>
+          </a:prstGeom>
+        </p:spPr>
+      </p:pic>
+      <p:sp>
+        <p:nvSpPr>
+          <p:cNvPr id="84" name="Marcador de número de diapositiva 83">
+            <a:extLst>
+              <a:ext uri="{FF2B5EF4-FFF2-40B4-BE49-F238E27FC236}">
+                <a16:creationId xmlns:a16="http://schemas.microsoft.com/office/drawing/2014/main" id="{CC27BEF8-E1D8-3C91-69C4-6DD343309B15}"/>
+              </a:ext>
+            </a:extLst>
+          </p:cNvPr>
+          <p:cNvSpPr>
+            <a:spLocks noGrp="1"/>
+          </p:cNvSpPr>
+          <p:nvPr>
+            <p:ph type="sldNum" sz="quarter" idx="7"/>
+          </p:nvPr>
+        </p:nvSpPr>
+        <p:spPr/>
+        <p:txBody>
+          <a:bodyPr/>
+          <a:lstStyle/>
+          <a:p>
+            <a:fld id="{B6F15528-21DE-4FAA-801E-634DDDAF4B2B}" type="slidenum">
+              <a:rPr lang="es-CO" noProof="0" smtClean="0"/>
+              <a:t>11</a:t>
+            </a:fld>
+            <a:endParaRPr lang="es-CO" noProof="0" dirty="0"/>
+          </a:p>
+        </p:txBody>
+      </p:sp>
+      <p:sp>
+        <p:nvSpPr>
+          <p:cNvPr id="3" name="Marcador de pie de página 2">
+            <a:extLst>
+              <a:ext uri="{FF2B5EF4-FFF2-40B4-BE49-F238E27FC236}">
+                <a16:creationId xmlns:a16="http://schemas.microsoft.com/office/drawing/2014/main" id="{668090AA-330E-E7F9-A461-09631B42DFDE}"/>
+              </a:ext>
+            </a:extLst>
+          </p:cNvPr>
+          <p:cNvSpPr>
+            <a:spLocks noGrp="1"/>
+          </p:cNvSpPr>
+          <p:nvPr>
+            <p:ph type="ftr" sz="quarter" idx="5"/>
+          </p:nvPr>
+        </p:nvSpPr>
+        <p:spPr/>
+        <p:txBody>
+          <a:bodyPr/>
+          <a:lstStyle/>
+          <a:p>
+            <a:pPr marL="12700">
+              <a:spcBef>
+                <a:spcPts val="15"/>
+              </a:spcBef>
+            </a:pPr>
+            <a:r>
+              <a:rPr lang="es-CO" spc="-5" noProof="0" dirty="0"/>
+              <a:t>LAB 1.0. WAVEGUIDES</a:t>
+            </a:r>
+          </a:p>
+        </p:txBody>
+      </p:sp>
+      <p:sp>
+        <p:nvSpPr>
+          <p:cNvPr id="2" name="CuadroTexto 1">
+            <a:extLst>
+              <a:ext uri="{FF2B5EF4-FFF2-40B4-BE49-F238E27FC236}">
+                <a16:creationId xmlns:a16="http://schemas.microsoft.com/office/drawing/2014/main" id="{CEC17DC9-1A15-35EE-E65B-D7ADDCCAF880}"/>
+              </a:ext>
+            </a:extLst>
+          </p:cNvPr>
+          <p:cNvSpPr txBox="1"/>
+          <p:nvPr/>
+        </p:nvSpPr>
+        <p:spPr>
+          <a:xfrm>
+            <a:off x="609600" y="4860334"/>
+            <a:ext cx="11199971" cy="1384995"/>
+          </a:xfrm>
+          <a:prstGeom prst="rect">
+            <a:avLst/>
+          </a:prstGeom>
+          <a:solidFill>
+            <a:schemeClr val="bg1">
+              <a:lumMod val="95000"/>
+            </a:schemeClr>
+          </a:solidFill>
+          <a:ln w="28575">
+            <a:solidFill>
+              <a:srgbClr val="E0700D"/>
+            </a:solidFill>
+          </a:ln>
+        </p:spPr>
+        <p:txBody>
+          <a:bodyPr wrap="square" rtlCol="0">
+            <a:spAutoFit/>
+          </a:bodyPr>
+          <a:lstStyle/>
+          <a:p>
+            <a:pPr algn="just"/>
+            <a:r>
+              <a:rPr lang="es-ES" sz="1200" noProof="0" dirty="0">
+                <a:latin typeface="Arial" panose="020B0604020202020204" pitchFamily="34" charset="0"/>
+                <a:cs typeface="Arial" panose="020B0604020202020204" pitchFamily="34" charset="0"/>
+              </a:rPr>
+              <a:t>En este caso que es el de SOI, vemos que un radio seguro sería alrededor de los 15 </a:t>
+            </a:r>
+            <a:r>
+              <a:rPr lang="es-ES" sz="1200" noProof="0" dirty="0" err="1">
+                <a:latin typeface="Arial" panose="020B0604020202020204" pitchFamily="34" charset="0"/>
+                <a:cs typeface="Arial" panose="020B0604020202020204" pitchFamily="34" charset="0"/>
+              </a:rPr>
+              <a:t>um</a:t>
+            </a:r>
+            <a:r>
+              <a:rPr lang="es-ES" sz="1200" dirty="0">
+                <a:latin typeface="Arial" panose="020B0604020202020204" pitchFamily="34" charset="0"/>
+                <a:cs typeface="Arial" panose="020B0604020202020204" pitchFamily="34" charset="0"/>
+              </a:rPr>
+              <a:t>, lo cual es bastante pequeño a comparación de </a:t>
+            </a:r>
+            <a:r>
+              <a:rPr lang="es-ES" sz="1200" dirty="0" err="1">
+                <a:latin typeface="Arial" panose="020B0604020202020204" pitchFamily="34" charset="0"/>
+                <a:cs typeface="Arial" panose="020B0604020202020204" pitchFamily="34" charset="0"/>
+              </a:rPr>
+              <a:t>SiNx</a:t>
+            </a:r>
+            <a:r>
+              <a:rPr lang="es-ES" sz="1200" dirty="0">
+                <a:latin typeface="Arial" panose="020B0604020202020204" pitchFamily="34" charset="0"/>
+                <a:cs typeface="Arial" panose="020B0604020202020204" pitchFamily="34" charset="0"/>
+              </a:rPr>
+              <a:t> que era a los 65 </a:t>
+            </a:r>
+            <a:r>
+              <a:rPr lang="es-ES" sz="1200" dirty="0" err="1">
+                <a:latin typeface="Arial" panose="020B0604020202020204" pitchFamily="34" charset="0"/>
+                <a:cs typeface="Arial" panose="020B0604020202020204" pitchFamily="34" charset="0"/>
+              </a:rPr>
+              <a:t>um</a:t>
+            </a:r>
+            <a:r>
+              <a:rPr lang="es-ES" sz="1200" dirty="0">
+                <a:latin typeface="Arial" panose="020B0604020202020204" pitchFamily="34" charset="0"/>
+                <a:cs typeface="Arial" panose="020B0604020202020204" pitchFamily="34" charset="0"/>
+              </a:rPr>
+              <a:t>, reduciéndose este radio 4.3 veces. Por lo que el SOI es una tecnología que nos permite hacer curvaturas más pequeñas y a su vez circuitos integrados más pequeños, al poder optimizar mejor las curvaturas, aunque también hay que tener cuidado, porque entre más grande la curvatura, más perdidas se tendrán, aunque también se tienen muchas menos perdidas en cuanto a dB, esto porque al ser una tecnología más pequeña, y ser radios más pequeños, las perdidas de propagación serán menores. </a:t>
+            </a:r>
+            <a:endParaRPr lang="es-CO" sz="1200" noProof="0" dirty="0">
+              <a:latin typeface="Arial" panose="020B0604020202020204" pitchFamily="34" charset="0"/>
+              <a:cs typeface="Arial" panose="020B0604020202020204" pitchFamily="34" charset="0"/>
+            </a:endParaRPr>
+          </a:p>
+          <a:p>
+            <a:pPr algn="just"/>
+            <a:endParaRPr lang="es-CO" sz="1200" noProof="0" dirty="0">
+              <a:latin typeface="Arial" panose="020B0604020202020204" pitchFamily="34" charset="0"/>
+              <a:cs typeface="Arial" panose="020B0604020202020204" pitchFamily="34" charset="0"/>
+            </a:endParaRPr>
+          </a:p>
+          <a:p>
+            <a:pPr algn="just"/>
+            <a:endParaRPr lang="es-CO" sz="1200" noProof="0" dirty="0">
+              <a:latin typeface="Arial" panose="020B0604020202020204" pitchFamily="34" charset="0"/>
+              <a:cs typeface="Arial" panose="020B0604020202020204" pitchFamily="34" charset="0"/>
+            </a:endParaRPr>
+          </a:p>
+        </p:txBody>
+      </p:sp>
+      <p:sp>
+        <p:nvSpPr>
+          <p:cNvPr id="7" name="Rectángulo 6">
+            <a:extLst>
+              <a:ext uri="{FF2B5EF4-FFF2-40B4-BE49-F238E27FC236}">
+                <a16:creationId xmlns:a16="http://schemas.microsoft.com/office/drawing/2014/main" id="{87D2B385-CC1F-9E83-99FF-D4FC9F1F28BC}"/>
+              </a:ext>
+            </a:extLst>
+          </p:cNvPr>
+          <p:cNvSpPr/>
+          <p:nvPr/>
+        </p:nvSpPr>
+        <p:spPr>
+          <a:xfrm>
+            <a:off x="609441" y="1418373"/>
+            <a:ext cx="11199971" cy="3306028"/>
+          </a:xfrm>
+          <a:prstGeom prst="rect">
+            <a:avLst/>
+          </a:prstGeom>
+          <a:noFill/>
+          <a:ln w="28575">
+            <a:solidFill>
+              <a:srgbClr val="E0700D"/>
+            </a:solidFill>
+          </a:ln>
+        </p:spPr>
+        <p:style>
+          <a:lnRef idx="2">
+            <a:schemeClr val="accent1">
+              <a:shade val="15000"/>
+            </a:schemeClr>
+          </a:lnRef>
+          <a:fillRef idx="1">
+            <a:schemeClr val="accent1"/>
+          </a:fillRef>
+          <a:effectRef idx="0">
+            <a:schemeClr val="accent1"/>
+          </a:effectRef>
+          <a:fontRef idx="minor">
+            <a:schemeClr val="lt1"/>
+          </a:fontRef>
+        </p:style>
+        <p:txBody>
+          <a:bodyPr rtlCol="0" anchor="ctr"/>
+          <a:lstStyle/>
+          <a:p>
+            <a:pPr algn="ctr"/>
+            <a:endParaRPr lang="es-CO" noProof="0" dirty="0"/>
+          </a:p>
+        </p:txBody>
+      </p:sp>
+      <mc:AlternateContent xmlns:mc="http://schemas.openxmlformats.org/markup-compatibility/2006" xmlns:a14="http://schemas.microsoft.com/office/drawing/2010/main">
+        <mc:Choice Requires="a14">
+          <p:sp>
+            <p:nvSpPr>
+              <p:cNvPr id="13" name="CuadroTexto 12">
+                <a:extLst>
+                  <a:ext uri="{FF2B5EF4-FFF2-40B4-BE49-F238E27FC236}">
+                    <a16:creationId xmlns:a16="http://schemas.microsoft.com/office/drawing/2014/main" id="{124D1D9F-D05A-A589-58DD-B4240144B54E}"/>
+                  </a:ext>
+                </a:extLst>
+              </p:cNvPr>
+              <p:cNvSpPr txBox="1"/>
+              <p:nvPr/>
+            </p:nvSpPr>
+            <p:spPr>
+              <a:xfrm>
+                <a:off x="9914680" y="4262088"/>
+                <a:ext cx="1856534" cy="439608"/>
+              </a:xfrm>
+              <a:prstGeom prst="rect">
+                <a:avLst/>
+              </a:prstGeom>
+              <a:noFill/>
+            </p:spPr>
+            <p:txBody>
+              <a:bodyPr wrap="none" lIns="0" tIns="0" rIns="0" bIns="0" rtlCol="0">
+                <a:spAutoFit/>
+              </a:bodyPr>
+              <a:lstStyle/>
+              <a:p>
+                <a14:m>
+                  <m:oMath xmlns:m="http://schemas.openxmlformats.org/officeDocument/2006/math">
+                    <m:r>
+                      <a:rPr lang="es-CO" sz="1800" b="0" i="1" noProof="0" smtClean="0">
+                        <a:latin typeface="Cambria Math" panose="02040503050406030204" pitchFamily="18" charset="0"/>
+                      </a:rPr>
+                      <m:t>𝛼</m:t>
+                    </m:r>
+                    <m:d>
+                      <m:dPr>
+                        <m:begChr m:val="["/>
+                        <m:endChr m:val="]"/>
+                        <m:ctrlPr>
+                          <a:rPr lang="es-CO" sz="1800" b="0" i="1" noProof="0" smtClean="0">
+                            <a:latin typeface="Cambria Math" panose="02040503050406030204" pitchFamily="18" charset="0"/>
+                          </a:rPr>
+                        </m:ctrlPr>
+                      </m:dPr>
+                      <m:e>
+                        <m:f>
+                          <m:fPr>
+                            <m:ctrlPr>
+                              <a:rPr lang="es-CO" sz="1800" b="0" i="1" noProof="0" smtClean="0">
+                                <a:latin typeface="Cambria Math" panose="02040503050406030204" pitchFamily="18" charset="0"/>
+                              </a:rPr>
+                            </m:ctrlPr>
+                          </m:fPr>
+                          <m:num>
+                            <m:r>
+                              <a:rPr lang="es-CO" sz="1800" b="0" i="1" noProof="0" smtClean="0">
+                                <a:latin typeface="Cambria Math" panose="02040503050406030204" pitchFamily="18" charset="0"/>
+                              </a:rPr>
+                              <m:t>𝑑𝐵</m:t>
+                            </m:r>
+                          </m:num>
+                          <m:den>
+                            <m:r>
+                              <a:rPr lang="es-CO" sz="1800" b="0" i="1" noProof="0" smtClean="0">
+                                <a:latin typeface="Cambria Math" panose="02040503050406030204" pitchFamily="18" charset="0"/>
+                              </a:rPr>
+                              <m:t>90</m:t>
+                            </m:r>
+                            <m:r>
+                              <a:rPr lang="es-CO" sz="1800" b="0" i="1" noProof="0" smtClean="0">
+                                <a:latin typeface="Cambria Math" panose="02040503050406030204" pitchFamily="18" charset="0"/>
+                                <a:ea typeface="Cambria Math" panose="02040503050406030204" pitchFamily="18" charset="0"/>
+                              </a:rPr>
+                              <m:t>°</m:t>
+                            </m:r>
+                          </m:den>
+                        </m:f>
+                      </m:e>
+                    </m:d>
+                    <m:r>
+                      <a:rPr lang="es-CO" sz="1800" b="0" i="1" noProof="0" smtClean="0">
+                        <a:latin typeface="Cambria Math" panose="02040503050406030204" pitchFamily="18" charset="0"/>
+                      </a:rPr>
+                      <m:t>=</m:t>
+                    </m:r>
+                  </m:oMath>
+                </a14:m>
+                <a:r>
+                  <a:rPr lang="es-CO" sz="1800" noProof="0" dirty="0"/>
+                  <a:t> </a:t>
+                </a:r>
+                <a14:m>
+                  <m:oMath xmlns:m="http://schemas.openxmlformats.org/officeDocument/2006/math">
+                    <m:r>
+                      <m:rPr>
+                        <m:sty m:val="p"/>
+                      </m:rPr>
+                      <a:rPr lang="es-CO" sz="1800" b="0" i="0" noProof="0" smtClean="0">
+                        <a:latin typeface="Cambria Math" panose="02040503050406030204" pitchFamily="18" charset="0"/>
+                      </a:rPr>
+                      <m:t>R</m:t>
+                    </m:r>
+                    <m:f>
+                      <m:fPr>
+                        <m:ctrlPr>
+                          <a:rPr lang="es-CO" sz="1800" b="0" i="1" noProof="0" smtClean="0">
+                            <a:latin typeface="Cambria Math" panose="02040503050406030204" pitchFamily="18" charset="0"/>
+                          </a:rPr>
+                        </m:ctrlPr>
+                      </m:fPr>
+                      <m:num>
+                        <m:r>
+                          <a:rPr lang="es-CO" sz="1800" b="0" i="1" noProof="0" smtClean="0">
+                            <a:latin typeface="Cambria Math" panose="02040503050406030204" pitchFamily="18" charset="0"/>
+                          </a:rPr>
+                          <m:t>𝜋</m:t>
+                        </m:r>
+                      </m:num>
+                      <m:den>
+                        <m:r>
+                          <a:rPr lang="es-CO" sz="1800" b="0" i="1" noProof="0" smtClean="0">
+                            <a:latin typeface="Cambria Math" panose="02040503050406030204" pitchFamily="18" charset="0"/>
+                          </a:rPr>
+                          <m:t>2</m:t>
+                        </m:r>
+                      </m:den>
+                    </m:f>
+                    <m:r>
+                      <a:rPr lang="es-CO" sz="1800" i="1" noProof="0" smtClean="0">
+                        <a:latin typeface="Cambria Math" panose="02040503050406030204" pitchFamily="18" charset="0"/>
+                      </a:rPr>
+                      <m:t>𝛼</m:t>
+                    </m:r>
+                    <m:d>
+                      <m:dPr>
+                        <m:begChr m:val="["/>
+                        <m:endChr m:val="]"/>
+                        <m:ctrlPr>
+                          <a:rPr lang="es-CO" sz="1800" i="1" noProof="0" smtClean="0">
+                            <a:latin typeface="Cambria Math" panose="02040503050406030204" pitchFamily="18" charset="0"/>
+                          </a:rPr>
+                        </m:ctrlPr>
+                      </m:dPr>
+                      <m:e>
+                        <m:f>
+                          <m:fPr>
+                            <m:ctrlPr>
+                              <a:rPr lang="es-CO" sz="1800" i="1" noProof="0" smtClean="0">
+                                <a:latin typeface="Cambria Math" panose="02040503050406030204" pitchFamily="18" charset="0"/>
+                              </a:rPr>
+                            </m:ctrlPr>
+                          </m:fPr>
+                          <m:num>
+                            <m:r>
+                              <a:rPr lang="es-CO" sz="1800" i="1" noProof="0" smtClean="0">
+                                <a:latin typeface="Cambria Math" panose="02040503050406030204" pitchFamily="18" charset="0"/>
+                              </a:rPr>
+                              <m:t>𝑑𝐵</m:t>
+                            </m:r>
+                          </m:num>
+                          <m:den>
+                            <m:r>
+                              <a:rPr lang="es-CO" sz="1800" i="1" noProof="0" smtClean="0">
+                                <a:latin typeface="Cambria Math" panose="02040503050406030204" pitchFamily="18" charset="0"/>
+                              </a:rPr>
+                              <m:t>µ</m:t>
+                            </m:r>
+                            <m:r>
+                              <a:rPr lang="es-CO" sz="1800" i="1" noProof="0" smtClean="0">
+                                <a:latin typeface="Cambria Math" panose="02040503050406030204" pitchFamily="18" charset="0"/>
+                              </a:rPr>
+                              <m:t>𝑚</m:t>
+                            </m:r>
+                          </m:den>
+                        </m:f>
+                      </m:e>
+                    </m:d>
+                  </m:oMath>
+                </a14:m>
+                <a:endParaRPr lang="es-CO" sz="1800" noProof="0" dirty="0"/>
+              </a:p>
+            </p:txBody>
+          </p:sp>
+        </mc:Choice>
+        <mc:Fallback xmlns="">
+          <p:sp>
+            <p:nvSpPr>
+              <p:cNvPr id="13" name="CuadroTexto 12">
+                <a:extLst>
+                  <a:ext uri="{FF2B5EF4-FFF2-40B4-BE49-F238E27FC236}">
+                    <a16:creationId xmlns:a16="http://schemas.microsoft.com/office/drawing/2014/main" id="{124D1D9F-D05A-A589-58DD-B4240144B54E}"/>
+                  </a:ext>
+                </a:extLst>
+              </p:cNvPr>
+              <p:cNvSpPr txBox="1">
+                <a:spLocks noRot="1" noChangeAspect="1" noMove="1" noResize="1" noEditPoints="1" noAdjustHandles="1" noChangeArrowheads="1" noChangeShapeType="1" noTextEdit="1"/>
+              </p:cNvSpPr>
+              <p:nvPr/>
+            </p:nvSpPr>
+            <p:spPr>
+              <a:xfrm>
+                <a:off x="9914680" y="4262088"/>
+                <a:ext cx="1856534" cy="439608"/>
+              </a:xfrm>
+              <a:prstGeom prst="rect">
+                <a:avLst/>
+              </a:prstGeom>
+              <a:blipFill>
+                <a:blip r:embed="rId5"/>
+                <a:stretch>
+                  <a:fillRect l="-3279" b="-13889"/>
+                </a:stretch>
+              </a:blipFill>
+            </p:spPr>
+            <p:txBody>
+              <a:bodyPr/>
+              <a:lstStyle/>
+              <a:p>
+                <a:r>
+                  <a:rPr lang="es-CO">
+                    <a:noFill/>
+                  </a:rPr>
+                  <a:t> </a:t>
+                </a:r>
+              </a:p>
+            </p:txBody>
+          </p:sp>
+        </mc:Fallback>
+      </mc:AlternateContent>
+      <p:pic>
+        <p:nvPicPr>
+          <p:cNvPr id="6" name="Imagen 5">
+            <a:extLst>
+              <a:ext uri="{FF2B5EF4-FFF2-40B4-BE49-F238E27FC236}">
+                <a16:creationId xmlns:a16="http://schemas.microsoft.com/office/drawing/2014/main" id="{0FDB1000-4638-74B8-B030-F4594425D366}"/>
+              </a:ext>
+            </a:extLst>
+          </p:cNvPr>
+          <p:cNvPicPr>
+            <a:picLocks noChangeAspect="1"/>
+          </p:cNvPicPr>
+          <p:nvPr/>
+        </p:nvPicPr>
+        <p:blipFill>
+          <a:blip r:embed="rId6"/>
+          <a:stretch>
+            <a:fillRect/>
+          </a:stretch>
+        </p:blipFill>
+        <p:spPr>
+          <a:xfrm>
+            <a:off x="2057400" y="1558540"/>
+            <a:ext cx="3804132" cy="2880000"/>
+          </a:xfrm>
+          <a:prstGeom prst="rect">
+            <a:avLst/>
+          </a:prstGeom>
+        </p:spPr>
+      </p:pic>
+      <p:pic>
+        <p:nvPicPr>
+          <p:cNvPr id="10" name="Imagen 9">
+            <a:extLst>
+              <a:ext uri="{FF2B5EF4-FFF2-40B4-BE49-F238E27FC236}">
+                <a16:creationId xmlns:a16="http://schemas.microsoft.com/office/drawing/2014/main" id="{9B9CB922-B8F3-30F5-422A-60F24987EAA8}"/>
+              </a:ext>
+            </a:extLst>
+          </p:cNvPr>
+          <p:cNvPicPr>
+            <a:picLocks noChangeAspect="1"/>
+          </p:cNvPicPr>
+          <p:nvPr/>
+        </p:nvPicPr>
+        <p:blipFill>
+          <a:blip r:embed="rId7"/>
+          <a:stretch>
+            <a:fillRect/>
+          </a:stretch>
+        </p:blipFill>
+        <p:spPr>
+          <a:xfrm>
+            <a:off x="6096000" y="1556931"/>
+            <a:ext cx="3728176" cy="2880000"/>
+          </a:xfrm>
+          <a:prstGeom prst="rect">
+            <a:avLst/>
+          </a:prstGeom>
+        </p:spPr>
+      </p:pic>
+    </p:spTree>
+    <p:extLst>
+      <p:ext uri="{BB962C8B-B14F-4D97-AF65-F5344CB8AC3E}">
+        <p14:creationId xmlns:p14="http://schemas.microsoft.com/office/powerpoint/2010/main" val="3292449409"/>
+      </p:ext>
+    </p:extLst>
+  </p:cSld>
+  <p:clrMapOvr>
+    <a:masterClrMapping/>
+  </p:clrMapOvr>
+</p:sld>
+</file>
+
+<file path=ppt/slides/slide12.xml><?xml version="1.0" encoding="utf-8"?>
+<p:sld xmlns:a="http://schemas.openxmlformats.org/drawingml/2006/main" xmlns:r="http://schemas.openxmlformats.org/officeDocument/2006/relationships" xmlns:p="http://schemas.openxmlformats.org/presentationml/2006/main">
+  <p:cSld>
+    <p:spTree>
+      <p:nvGrpSpPr>
+        <p:cNvPr id="1" name=""/>
+        <p:cNvGrpSpPr/>
+        <p:nvPr/>
+      </p:nvGrpSpPr>
+      <p:grpSpPr>
+        <a:xfrm>
+          <a:off x="0" y="0"/>
+          <a:ext cx="0" cy="0"/>
+          <a:chOff x="0" y="0"/>
+          <a:chExt cx="0" cy="0"/>
+        </a:xfrm>
+      </p:grpSpPr>
+      <p:sp>
+        <p:nvSpPr>
+          <p:cNvPr id="3" name="object 3"/>
+          <p:cNvSpPr/>
+          <p:nvPr/>
+        </p:nvSpPr>
+        <p:spPr>
+          <a:xfrm>
+            <a:off x="3945635" y="2636520"/>
+            <a:ext cx="8246363" cy="1584959"/>
+          </a:xfrm>
+          <a:prstGeom prst="rect">
+            <a:avLst/>
+          </a:prstGeom>
+          <a:blipFill>
+            <a:blip r:embed="rId2" cstate="print"/>
+            <a:stretch>
+              <a:fillRect/>
+            </a:stretch>
+          </a:blipFill>
+        </p:spPr>
+        <p:txBody>
+          <a:bodyPr wrap="square" lIns="0" tIns="0" rIns="0" bIns="0" rtlCol="0"/>
+          <a:lstStyle/>
+          <a:p>
+            <a:endParaRPr/>
+          </a:p>
+        </p:txBody>
+      </p:sp>
+      <p:sp>
+        <p:nvSpPr>
+          <p:cNvPr id="4" name="object 4"/>
+          <p:cNvSpPr txBox="1">
+            <a:spLocks noGrp="1"/>
+          </p:cNvSpPr>
+          <p:nvPr>
+            <p:ph type="title"/>
+          </p:nvPr>
+        </p:nvSpPr>
+        <p:spPr>
+          <a:xfrm>
+            <a:off x="4513326" y="3165729"/>
+            <a:ext cx="2233295" cy="513715"/>
+          </a:xfrm>
+          <a:prstGeom prst="rect">
+            <a:avLst/>
+          </a:prstGeom>
+        </p:spPr>
+        <p:txBody>
+          <a:bodyPr vert="horz" wrap="square" lIns="0" tIns="13335" rIns="0" bIns="0" rtlCol="0">
+            <a:spAutoFit/>
+          </a:bodyPr>
+          <a:lstStyle/>
+          <a:p>
+            <a:pPr marL="12700">
+              <a:lnSpc>
+                <a:spcPct val="100000"/>
+              </a:lnSpc>
+              <a:spcBef>
+                <a:spcPts val="105"/>
+              </a:spcBef>
+            </a:pPr>
+            <a:r>
+              <a:rPr sz="3200" b="1" spc="-5" dirty="0">
+                <a:solidFill>
+                  <a:srgbClr val="FFFFFF"/>
+                </a:solidFill>
+                <a:latin typeface="Lucida Sans"/>
+                <a:cs typeface="Lucida Sans"/>
+              </a:rPr>
+              <a:t>Thank</a:t>
+            </a:r>
+            <a:r>
+              <a:rPr sz="3200" b="1" spc="-55" dirty="0">
+                <a:solidFill>
+                  <a:srgbClr val="FFFFFF"/>
+                </a:solidFill>
+                <a:latin typeface="Lucida Sans"/>
+                <a:cs typeface="Lucida Sans"/>
+              </a:rPr>
+              <a:t> </a:t>
+            </a:r>
+            <a:r>
+              <a:rPr sz="3200" b="1" dirty="0">
+                <a:solidFill>
+                  <a:srgbClr val="FFFFFF"/>
+                </a:solidFill>
+                <a:latin typeface="Lucida Sans"/>
+                <a:cs typeface="Lucida Sans"/>
+              </a:rPr>
+              <a:t>you</a:t>
+            </a:r>
+            <a:endParaRPr sz="3200">
+              <a:latin typeface="Lucida Sans"/>
+              <a:cs typeface="Lucida Sans"/>
+            </a:endParaRPr>
+          </a:p>
+        </p:txBody>
+      </p:sp>
+      <p:sp>
+        <p:nvSpPr>
+          <p:cNvPr id="5" name="Marcador de número de diapositiva 4">
+            <a:extLst>
+              <a:ext uri="{FF2B5EF4-FFF2-40B4-BE49-F238E27FC236}">
+                <a16:creationId xmlns:a16="http://schemas.microsoft.com/office/drawing/2014/main" id="{B052DA19-AD24-7D24-2AE9-51F8F5A7F5E0}"/>
+              </a:ext>
+            </a:extLst>
+          </p:cNvPr>
+          <p:cNvSpPr>
+            <a:spLocks noGrp="1"/>
+          </p:cNvSpPr>
+          <p:nvPr>
+            <p:ph type="sldNum" sz="quarter" idx="7"/>
+          </p:nvPr>
+        </p:nvSpPr>
+        <p:spPr/>
+        <p:txBody>
+          <a:bodyPr/>
+          <a:lstStyle/>
+          <a:p>
+            <a:fld id="{B6F15528-21DE-4FAA-801E-634DDDAF4B2B}" type="slidenum">
+              <a:rPr lang="es-ES" smtClean="0"/>
+              <a:t>12</a:t>
             </a:fld>
             <a:endParaRPr lang="es-ES"/>
           </a:p>
@@ -4828,7 +7194,7 @@
         </p:nvSpPr>
         <p:spPr>
           <a:xfrm>
-            <a:off x="685800" y="408883"/>
+            <a:off x="685800" y="161033"/>
             <a:ext cx="10994410" cy="705321"/>
           </a:xfrm>
           <a:prstGeom prst="rect">
@@ -4850,17 +7216,57 @@
               </a:spcBef>
             </a:pPr>
             <a:r>
-              <a:rPr lang="en-US" sz="2500" dirty="0"/>
-              <a:t>Learning outcome #1 – Convergence tests</a:t>
+              <a:rPr lang="es-CO" sz="2500" noProof="0" dirty="0" err="1"/>
+              <a:t>Learning</a:t>
+            </a:r>
+            <a:r>
+              <a:rPr lang="es-CO" sz="2500" noProof="0" dirty="0"/>
+              <a:t> </a:t>
+            </a:r>
+            <a:r>
+              <a:rPr lang="es-CO" sz="2500" noProof="0" dirty="0" err="1"/>
+              <a:t>outcome</a:t>
+            </a:r>
+            <a:r>
+              <a:rPr lang="es-CO" sz="2500" noProof="0" dirty="0"/>
+              <a:t> #1 – </a:t>
+            </a:r>
+            <a:r>
+              <a:rPr lang="es-CO" sz="2500" noProof="0" dirty="0" err="1"/>
+              <a:t>Convergence</a:t>
+            </a:r>
+            <a:r>
+              <a:rPr lang="es-CO" sz="2500" noProof="0" dirty="0"/>
+              <a:t> </a:t>
+            </a:r>
+            <a:r>
+              <a:rPr lang="es-CO" sz="2500" noProof="0" dirty="0" err="1"/>
+              <a:t>tests</a:t>
             </a:r>
             <a:br>
-              <a:rPr lang="en-US" sz="2500" dirty="0"/>
+              <a:rPr lang="es-CO" sz="2500" noProof="0" dirty="0"/>
             </a:br>
             <a:r>
-              <a:rPr lang="nl-NL" b="0" dirty="0"/>
-              <a:t>DE waveguide, w = 1.2 µm, neff_TE0, wvl 1.55 µm. </a:t>
-            </a:r>
-            <a:endParaRPr sz="2500" b="0" dirty="0">
+              <a:rPr lang="es-CO" b="0" noProof="0" dirty="0"/>
+              <a:t>DE </a:t>
+            </a:r>
+            <a:r>
+              <a:rPr lang="es-CO" b="0" noProof="0" dirty="0" err="1"/>
+              <a:t>waveguide</a:t>
+            </a:r>
+            <a:r>
+              <a:rPr lang="es-CO" b="0" noProof="0" dirty="0"/>
+              <a:t>, w = 1.2 µm, neff_TE0, </a:t>
+            </a:r>
+            <a:r>
+              <a:rPr lang="es-CO" b="0" noProof="0" dirty="0" err="1"/>
+              <a:t>wvl</a:t>
+            </a:r>
+            <a:r>
+              <a:rPr lang="es-CO" b="0" noProof="0" dirty="0"/>
+              <a:t> 1.55 µm. </a:t>
+            </a:r>
+            <a:endParaRPr lang="es-CO" sz="2500" b="0" noProof="0" dirty="0">
               <a:latin typeface="+mj-lt"/>
               <a:cs typeface="Lucida Sans"/>
             </a:endParaRPr>
@@ -4925,10 +7331,10 @@
           <a:lstStyle/>
           <a:p>
             <a:fld id="{B6F15528-21DE-4FAA-801E-634DDDAF4B2B}" type="slidenum">
-              <a:rPr lang="es-ES" smtClean="0"/>
+              <a:rPr lang="es-CO" noProof="0" smtClean="0"/>
               <a:t>3</a:t>
             </a:fld>
-            <a:endParaRPr lang="es-ES"/>
+            <a:endParaRPr lang="es-CO" noProof="0" dirty="0"/>
           </a:p>
         </p:txBody>
       </p:sp>
@@ -4959,10 +7365,9 @@
               </a:spcBef>
             </a:pPr>
             <a:r>
-              <a:rPr lang="es-ES" spc="-5"/>
+              <a:rPr lang="es-CO" spc="-5" noProof="0" dirty="0"/>
               <a:t>LAB 1.0. WAVEGUIDES</a:t>
             </a:r>
-            <a:endParaRPr lang="es-ES" spc="-5" dirty="0"/>
           </a:p>
         </p:txBody>
       </p:sp>
@@ -4980,8 +7385,8 @@
         </p:nvSpPr>
         <p:spPr>
           <a:xfrm>
-            <a:off x="609441" y="1447800"/>
-            <a:ext cx="5486559" cy="3306028"/>
+            <a:off x="304800" y="978277"/>
+            <a:ext cx="4114959" cy="5078313"/>
           </a:xfrm>
           <a:prstGeom prst="rect">
             <a:avLst/>
@@ -5014,16 +7419,16 @@
           <a:lstStyle/>
           <a:p>
             <a:pPr algn="ctr"/>
-            <a:endParaRPr lang="en-US"/>
+            <a:endParaRPr lang="es-CO" noProof="0" dirty="0"/>
           </a:p>
         </p:txBody>
       </p:sp>
       <p:sp>
         <p:nvSpPr>
-          <p:cNvPr id="8" name="CuadroTexto 7">
+          <p:cNvPr id="10" name="CuadroTexto 9">
             <a:extLst>
               <a:ext uri="{FF2B5EF4-FFF2-40B4-BE49-F238E27FC236}">
-                <a16:creationId xmlns:a16="http://schemas.microsoft.com/office/drawing/2014/main" id="{53A5ECC9-91D2-2918-1681-822F99EB31CD}"/>
+                <a16:creationId xmlns:a16="http://schemas.microsoft.com/office/drawing/2014/main" id="{C814CDD6-2B59-8488-4EB8-82801B4D3F22}"/>
               </a:ext>
             </a:extLst>
           </p:cNvPr>
@@ -5032,67 +7437,8 @@
         </p:nvSpPr>
         <p:spPr>
           <a:xfrm>
-            <a:off x="1079403" y="2709096"/>
-            <a:ext cx="4546634" cy="923330"/>
-          </a:xfrm>
-          <a:prstGeom prst="rect">
-            <a:avLst/>
-          </a:prstGeom>
-          <a:noFill/>
-        </p:spPr>
-        <p:txBody>
-          <a:bodyPr wrap="square" rtlCol="0">
-            <a:spAutoFit/>
-          </a:bodyPr>
-          <a:lstStyle/>
-          <a:p>
-            <a:pPr algn="ctr"/>
-            <a:r>
-              <a:rPr lang="en-US" b="1" dirty="0"/>
-              <a:t>deep</a:t>
-            </a:r>
-            <a:r>
-              <a:rPr lang="en-US" dirty="0"/>
-              <a:t> waveguide</a:t>
-            </a:r>
-          </a:p>
-          <a:p>
-            <a:pPr algn="ctr"/>
-            <a:endParaRPr lang="en-US" dirty="0"/>
-          </a:p>
-          <a:p>
-            <a:pPr algn="ctr"/>
-            <a:r>
-              <a:rPr lang="en-US" dirty="0"/>
-              <a:t>Paste neff_TE0 vs </a:t>
-            </a:r>
-            <a:r>
-              <a:rPr lang="en-US" dirty="0" err="1"/>
-              <a:t>grid_resolution</a:t>
-            </a:r>
-            <a:r>
-              <a:rPr lang="en-US" dirty="0"/>
-              <a:t> plot here</a:t>
-            </a:r>
-          </a:p>
-        </p:txBody>
-      </p:sp>
-      <p:sp>
-        <p:nvSpPr>
-          <p:cNvPr id="10" name="CuadroTexto 9">
-            <a:extLst>
-              <a:ext uri="{FF2B5EF4-FFF2-40B4-BE49-F238E27FC236}">
-                <a16:creationId xmlns:a16="http://schemas.microsoft.com/office/drawing/2014/main" id="{C814CDD6-2B59-8488-4EB8-82801B4D3F22}"/>
-              </a:ext>
-            </a:extLst>
-          </p:cNvPr>
-          <p:cNvSpPr txBox="1"/>
-          <p:nvPr/>
-        </p:nvSpPr>
-        <p:spPr>
-          <a:xfrm>
-            <a:off x="609441" y="4860334"/>
-            <a:ext cx="11199971" cy="1384995"/>
+            <a:off x="4496118" y="971350"/>
+            <a:ext cx="7543482" cy="5078313"/>
           </a:xfrm>
           <a:prstGeom prst="rect">
             <a:avLst/>
@@ -5115,64 +7461,1029 @@
           <a:lstStyle/>
           <a:p>
             <a:pPr algn="just"/>
-            <a:r>
-              <a:rPr lang="en-US" sz="1200" dirty="0">
-                <a:latin typeface="Arial" panose="020B0604020202020204" pitchFamily="34" charset="0"/>
-                <a:cs typeface="Arial" panose="020B0604020202020204" pitchFamily="34" charset="0"/>
-              </a:rPr>
-              <a:t>Comment results, determine above which grid value the effective index calculation does not change significantly</a:t>
-            </a:r>
-          </a:p>
-          <a:p>
-            <a:pPr algn="just"/>
-            <a:endParaRPr lang="en-US" sz="1200" dirty="0">
+            <a:endParaRPr lang="es-CO" sz="1200" noProof="0" dirty="0">
               <a:latin typeface="Arial" panose="020B0604020202020204" pitchFamily="34" charset="0"/>
               <a:cs typeface="Arial" panose="020B0604020202020204" pitchFamily="34" charset="0"/>
             </a:endParaRPr>
           </a:p>
           <a:p>
             <a:pPr algn="just"/>
-            <a:endParaRPr lang="en-US" sz="1200" dirty="0">
+            <a:r>
+              <a:rPr lang="es-CO" sz="1200" noProof="0" dirty="0">
+                <a:latin typeface="Arial" panose="020B0604020202020204" pitchFamily="34" charset="0"/>
+                <a:cs typeface="Arial" panose="020B0604020202020204" pitchFamily="34" charset="0"/>
+              </a:rPr>
+              <a:t>Realizamos la simulación de como cambia el </a:t>
+            </a:r>
+            <a:r>
+              <a:rPr lang="es-CO" sz="1200" noProof="0" dirty="0" err="1">
+                <a:latin typeface="Arial" panose="020B0604020202020204" pitchFamily="34" charset="0"/>
+                <a:cs typeface="Arial" panose="020B0604020202020204" pitchFamily="34" charset="0"/>
+              </a:rPr>
+              <a:t>indice</a:t>
+            </a:r>
+            <a:r>
+              <a:rPr lang="es-CO" sz="1200" noProof="0" dirty="0">
+                <a:latin typeface="Arial" panose="020B0604020202020204" pitchFamily="34" charset="0"/>
+                <a:cs typeface="Arial" panose="020B0604020202020204" pitchFamily="34" charset="0"/>
+              </a:rPr>
+              <a:t> efectivo a diferentes </a:t>
+            </a:r>
+            <a:r>
+              <a:rPr lang="es-CO" sz="1200" noProof="0" dirty="0" err="1">
+                <a:latin typeface="Arial" panose="020B0604020202020204" pitchFamily="34" charset="0"/>
+                <a:cs typeface="Arial" panose="020B0604020202020204" pitchFamily="34" charset="0"/>
+              </a:rPr>
+              <a:t>grid</a:t>
+            </a:r>
+            <a:r>
+              <a:rPr lang="es-CO" sz="1200" noProof="0" dirty="0">
+                <a:latin typeface="Arial" panose="020B0604020202020204" pitchFamily="34" charset="0"/>
+                <a:cs typeface="Arial" panose="020B0604020202020204" pitchFamily="34" charset="0"/>
+              </a:rPr>
+              <a:t> </a:t>
+            </a:r>
+            <a:r>
+              <a:rPr lang="es-CO" sz="1200" noProof="0" dirty="0" err="1">
+                <a:latin typeface="Arial" panose="020B0604020202020204" pitchFamily="34" charset="0"/>
+                <a:cs typeface="Arial" panose="020B0604020202020204" pitchFamily="34" charset="0"/>
+              </a:rPr>
+              <a:t>resolutions</a:t>
+            </a:r>
+            <a:r>
+              <a:rPr lang="es-CO" sz="1200" noProof="0" dirty="0">
+                <a:latin typeface="Arial" panose="020B0604020202020204" pitchFamily="34" charset="0"/>
+                <a:cs typeface="Arial" panose="020B0604020202020204" pitchFamily="34" charset="0"/>
+              </a:rPr>
+              <a:t>, para el caso de la </a:t>
+            </a:r>
+            <a:r>
+              <a:rPr lang="es-CO" sz="1200" noProof="0" dirty="0" err="1">
+                <a:latin typeface="Arial" panose="020B0604020202020204" pitchFamily="34" charset="0"/>
+                <a:cs typeface="Arial" panose="020B0604020202020204" pitchFamily="34" charset="0"/>
+              </a:rPr>
+              <a:t>deep</a:t>
+            </a:r>
+            <a:r>
+              <a:rPr lang="es-CO" sz="1200" noProof="0" dirty="0">
+                <a:latin typeface="Arial" panose="020B0604020202020204" pitchFamily="34" charset="0"/>
+                <a:cs typeface="Arial" panose="020B0604020202020204" pitchFamily="34" charset="0"/>
+              </a:rPr>
+              <a:t> </a:t>
+            </a:r>
+            <a:r>
+              <a:rPr lang="es-CO" sz="1200" noProof="0" dirty="0" err="1">
+                <a:latin typeface="Arial" panose="020B0604020202020204" pitchFamily="34" charset="0"/>
+                <a:cs typeface="Arial" panose="020B0604020202020204" pitchFamily="34" charset="0"/>
+              </a:rPr>
+              <a:t>waveguide</a:t>
+            </a:r>
+            <a:r>
+              <a:rPr lang="es-CO" sz="1200" noProof="0" dirty="0">
+                <a:latin typeface="Arial" panose="020B0604020202020204" pitchFamily="34" charset="0"/>
+                <a:cs typeface="Arial" panose="020B0604020202020204" pitchFamily="34" charset="0"/>
+              </a:rPr>
+              <a:t> para valores superiores a 50 de </a:t>
+            </a:r>
+            <a:r>
+              <a:rPr lang="es-CO" sz="1200" noProof="0" dirty="0" err="1">
+                <a:latin typeface="Arial" panose="020B0604020202020204" pitchFamily="34" charset="0"/>
+                <a:cs typeface="Arial" panose="020B0604020202020204" pitchFamily="34" charset="0"/>
+              </a:rPr>
+              <a:t>grid</a:t>
+            </a:r>
+            <a:r>
+              <a:rPr lang="es-CO" sz="1200" noProof="0" dirty="0">
+                <a:latin typeface="Arial" panose="020B0604020202020204" pitchFamily="34" charset="0"/>
+                <a:cs typeface="Arial" panose="020B0604020202020204" pitchFamily="34" charset="0"/>
+              </a:rPr>
+              <a:t> </a:t>
+            </a:r>
+            <a:r>
+              <a:rPr lang="es-CO" sz="1200" noProof="0" dirty="0" err="1">
+                <a:latin typeface="Arial" panose="020B0604020202020204" pitchFamily="34" charset="0"/>
+                <a:cs typeface="Arial" panose="020B0604020202020204" pitchFamily="34" charset="0"/>
+              </a:rPr>
+              <a:t>resolution</a:t>
+            </a:r>
+            <a:r>
+              <a:rPr lang="es-CO" sz="1200" noProof="0" dirty="0">
+                <a:latin typeface="Arial" panose="020B0604020202020204" pitchFamily="34" charset="0"/>
+                <a:cs typeface="Arial" panose="020B0604020202020204" pitchFamily="34" charset="0"/>
+              </a:rPr>
+              <a:t>   y al valor de 20, se tienen valores muy similares, es decir que no hay tanta variación entre los </a:t>
+            </a:r>
+            <a:r>
+              <a:rPr lang="es-CO" sz="1200" noProof="0" dirty="0" err="1">
+                <a:latin typeface="Arial" panose="020B0604020202020204" pitchFamily="34" charset="0"/>
+                <a:cs typeface="Arial" panose="020B0604020202020204" pitchFamily="34" charset="0"/>
+              </a:rPr>
+              <a:t>indices</a:t>
+            </a:r>
+            <a:r>
+              <a:rPr lang="es-CO" sz="1200" noProof="0" dirty="0">
+                <a:latin typeface="Arial" panose="020B0604020202020204" pitchFamily="34" charset="0"/>
+                <a:cs typeface="Arial" panose="020B0604020202020204" pitchFamily="34" charset="0"/>
+              </a:rPr>
+              <a:t> efectivos que da como resultado. Como </a:t>
+            </a:r>
+            <a:r>
+              <a:rPr lang="es-CO" sz="1200" noProof="0" dirty="0" err="1">
+                <a:latin typeface="Arial" panose="020B0604020202020204" pitchFamily="34" charset="0"/>
+                <a:cs typeface="Arial" panose="020B0604020202020204" pitchFamily="34" charset="0"/>
+              </a:rPr>
+              <a:t>temenos</a:t>
+            </a:r>
+            <a:r>
+              <a:rPr lang="es-CO" sz="1200" noProof="0" dirty="0">
+                <a:latin typeface="Arial" panose="020B0604020202020204" pitchFamily="34" charset="0"/>
+                <a:cs typeface="Arial" panose="020B0604020202020204" pitchFamily="34" charset="0"/>
+              </a:rPr>
+              <a:t> varios puntos que dan un resultado similar vamos a ver como varia el </a:t>
+            </a:r>
+            <a:r>
+              <a:rPr lang="es-CO" sz="1200" noProof="0" dirty="0" err="1">
+                <a:latin typeface="Arial" panose="020B0604020202020204" pitchFamily="34" charset="0"/>
+                <a:cs typeface="Arial" panose="020B0604020202020204" pitchFamily="34" charset="0"/>
+              </a:rPr>
+              <a:t>indice</a:t>
+            </a:r>
+            <a:r>
+              <a:rPr lang="es-CO" sz="1200" noProof="0" dirty="0">
+                <a:latin typeface="Arial" panose="020B0604020202020204" pitchFamily="34" charset="0"/>
+                <a:cs typeface="Arial" panose="020B0604020202020204" pitchFamily="34" charset="0"/>
+              </a:rPr>
+              <a:t> efectivo si variamos el </a:t>
+            </a:r>
+            <a:r>
+              <a:rPr lang="es-CO" sz="1200" noProof="0" dirty="0" err="1">
+                <a:latin typeface="Arial" panose="020B0604020202020204" pitchFamily="34" charset="0"/>
+                <a:cs typeface="Arial" panose="020B0604020202020204" pitchFamily="34" charset="0"/>
+              </a:rPr>
+              <a:t>max</a:t>
+            </a:r>
+            <a:r>
+              <a:rPr lang="es-CO" sz="1200" noProof="0" dirty="0">
+                <a:latin typeface="Arial" panose="020B0604020202020204" pitchFamily="34" charset="0"/>
+                <a:cs typeface="Arial" panose="020B0604020202020204" pitchFamily="34" charset="0"/>
+              </a:rPr>
+              <a:t> </a:t>
+            </a:r>
+            <a:r>
+              <a:rPr lang="es-CO" sz="1200" noProof="0" dirty="0" err="1">
+                <a:latin typeface="Arial" panose="020B0604020202020204" pitchFamily="34" charset="0"/>
+                <a:cs typeface="Arial" panose="020B0604020202020204" pitchFamily="34" charset="0"/>
+              </a:rPr>
+              <a:t>grid</a:t>
+            </a:r>
+            <a:r>
+              <a:rPr lang="es-CO" sz="1200" noProof="0" dirty="0">
+                <a:latin typeface="Arial" panose="020B0604020202020204" pitchFamily="34" charset="0"/>
+                <a:cs typeface="Arial" panose="020B0604020202020204" pitchFamily="34" charset="0"/>
+              </a:rPr>
+              <a:t> </a:t>
+            </a:r>
+            <a:r>
+              <a:rPr lang="es-CO" sz="1200" noProof="0" dirty="0" err="1">
+                <a:latin typeface="Arial" panose="020B0604020202020204" pitchFamily="34" charset="0"/>
+                <a:cs typeface="Arial" panose="020B0604020202020204" pitchFamily="34" charset="0"/>
+              </a:rPr>
+              <a:t>scaling</a:t>
+            </a:r>
+            <a:r>
+              <a:rPr lang="es-CO" sz="1200" noProof="0" dirty="0">
+                <a:latin typeface="Arial" panose="020B0604020202020204" pitchFamily="34" charset="0"/>
+                <a:cs typeface="Arial" panose="020B0604020202020204" pitchFamily="34" charset="0"/>
+              </a:rPr>
+              <a:t> para valore de 20, 50 y 60 de </a:t>
+            </a:r>
+            <a:r>
+              <a:rPr lang="es-CO" sz="1200" noProof="0" dirty="0" err="1">
+                <a:latin typeface="Arial" panose="020B0604020202020204" pitchFamily="34" charset="0"/>
+                <a:cs typeface="Arial" panose="020B0604020202020204" pitchFamily="34" charset="0"/>
+              </a:rPr>
+              <a:t>grid</a:t>
+            </a:r>
+            <a:r>
+              <a:rPr lang="es-CO" sz="1200" noProof="0" dirty="0">
+                <a:latin typeface="Arial" panose="020B0604020202020204" pitchFamily="34" charset="0"/>
+                <a:cs typeface="Arial" panose="020B0604020202020204" pitchFamily="34" charset="0"/>
+              </a:rPr>
+              <a:t> </a:t>
+            </a:r>
+            <a:r>
+              <a:rPr lang="es-CO" sz="1200" noProof="0" dirty="0" err="1">
+                <a:latin typeface="Arial" panose="020B0604020202020204" pitchFamily="34" charset="0"/>
+                <a:cs typeface="Arial" panose="020B0604020202020204" pitchFamily="34" charset="0"/>
+              </a:rPr>
+              <a:t>resolution</a:t>
+            </a:r>
+            <a:r>
+              <a:rPr lang="es-CO" sz="1200" noProof="0" dirty="0">
+                <a:latin typeface="Arial" panose="020B0604020202020204" pitchFamily="34" charset="0"/>
+                <a:cs typeface="Arial" panose="020B0604020202020204" pitchFamily="34" charset="0"/>
+              </a:rPr>
+              <a:t>.</a:t>
+            </a:r>
+          </a:p>
+          <a:p>
+            <a:pPr algn="just"/>
+            <a:endParaRPr lang="es-CO" sz="1200" noProof="0" dirty="0">
               <a:latin typeface="Arial" panose="020B0604020202020204" pitchFamily="34" charset="0"/>
               <a:cs typeface="Arial" panose="020B0604020202020204" pitchFamily="34" charset="0"/>
             </a:endParaRPr>
           </a:p>
           <a:p>
             <a:pPr algn="just"/>
-            <a:endParaRPr lang="en-US" sz="1200" dirty="0">
+            <a:r>
+              <a:rPr lang="es-CO" sz="1200" noProof="0" dirty="0">
+                <a:latin typeface="Arial" panose="020B0604020202020204" pitchFamily="34" charset="0"/>
+                <a:cs typeface="Arial" panose="020B0604020202020204" pitchFamily="34" charset="0"/>
+              </a:rPr>
+              <a:t>En el caso de 20, vemos que la gráfica no es tan estable, sin embargo en 1.30 el </a:t>
+            </a:r>
+            <a:r>
+              <a:rPr lang="es-CO" sz="1200" noProof="0" dirty="0" err="1">
+                <a:latin typeface="Arial" panose="020B0604020202020204" pitchFamily="34" charset="0"/>
+                <a:cs typeface="Arial" panose="020B0604020202020204" pitchFamily="34" charset="0"/>
+              </a:rPr>
+              <a:t>indice</a:t>
+            </a:r>
+            <a:r>
+              <a:rPr lang="es-CO" sz="1200" noProof="0" dirty="0">
+                <a:latin typeface="Arial" panose="020B0604020202020204" pitchFamily="34" charset="0"/>
+                <a:cs typeface="Arial" panose="020B0604020202020204" pitchFamily="34" charset="0"/>
+              </a:rPr>
+              <a:t> efectivo se parece a los </a:t>
+            </a:r>
+            <a:r>
+              <a:rPr lang="es-CO" sz="1200" noProof="0" dirty="0" err="1">
+                <a:latin typeface="Arial" panose="020B0604020202020204" pitchFamily="34" charset="0"/>
+                <a:cs typeface="Arial" panose="020B0604020202020204" pitchFamily="34" charset="0"/>
+              </a:rPr>
+              <a:t>resulatdos</a:t>
+            </a:r>
+            <a:r>
+              <a:rPr lang="es-CO" sz="1200" noProof="0" dirty="0">
+                <a:latin typeface="Arial" panose="020B0604020202020204" pitchFamily="34" charset="0"/>
+                <a:cs typeface="Arial" panose="020B0604020202020204" pitchFamily="34" charset="0"/>
+              </a:rPr>
+              <a:t> de las otras gráficas. Para el caso de 50 encontramos que en 3 valores de </a:t>
+            </a:r>
+            <a:r>
+              <a:rPr lang="es-CO" sz="1200" noProof="0" dirty="0" err="1">
+                <a:latin typeface="Arial" panose="020B0604020202020204" pitchFamily="34" charset="0"/>
+                <a:cs typeface="Arial" panose="020B0604020202020204" pitchFamily="34" charset="0"/>
+              </a:rPr>
+              <a:t>max</a:t>
+            </a:r>
+            <a:r>
+              <a:rPr lang="es-CO" sz="1200" noProof="0" dirty="0">
+                <a:latin typeface="Arial" panose="020B0604020202020204" pitchFamily="34" charset="0"/>
+                <a:cs typeface="Arial" panose="020B0604020202020204" pitchFamily="34" charset="0"/>
+              </a:rPr>
+              <a:t> </a:t>
+            </a:r>
+            <a:r>
+              <a:rPr lang="es-CO" sz="1200" noProof="0" dirty="0" err="1">
+                <a:latin typeface="Arial" panose="020B0604020202020204" pitchFamily="34" charset="0"/>
+                <a:cs typeface="Arial" panose="020B0604020202020204" pitchFamily="34" charset="0"/>
+              </a:rPr>
+              <a:t>grid</a:t>
+            </a:r>
+            <a:r>
+              <a:rPr lang="es-CO" sz="1200" noProof="0" dirty="0">
+                <a:latin typeface="Arial" panose="020B0604020202020204" pitchFamily="34" charset="0"/>
+                <a:cs typeface="Arial" panose="020B0604020202020204" pitchFamily="34" charset="0"/>
+              </a:rPr>
+              <a:t> </a:t>
+            </a:r>
+            <a:r>
+              <a:rPr lang="es-CO" sz="1200" noProof="0" dirty="0" err="1">
+                <a:latin typeface="Arial" panose="020B0604020202020204" pitchFamily="34" charset="0"/>
+                <a:cs typeface="Arial" panose="020B0604020202020204" pitchFamily="34" charset="0"/>
+              </a:rPr>
+              <a:t>scaling</a:t>
+            </a:r>
+            <a:r>
+              <a:rPr lang="es-CO" sz="1200" noProof="0" dirty="0">
+                <a:latin typeface="Arial" panose="020B0604020202020204" pitchFamily="34" charset="0"/>
+                <a:cs typeface="Arial" panose="020B0604020202020204" pitchFamily="34" charset="0"/>
+              </a:rPr>
+              <a:t> </a:t>
+            </a:r>
+            <a:r>
+              <a:rPr lang="es-CO" sz="1200" noProof="0" dirty="0" err="1">
+                <a:latin typeface="Arial" panose="020B0604020202020204" pitchFamily="34" charset="0"/>
+                <a:cs typeface="Arial" panose="020B0604020202020204" pitchFamily="34" charset="0"/>
+              </a:rPr>
+              <a:t>temenos</a:t>
+            </a:r>
+            <a:r>
+              <a:rPr lang="es-CO" sz="1200" noProof="0" dirty="0">
+                <a:latin typeface="Arial" panose="020B0604020202020204" pitchFamily="34" charset="0"/>
+                <a:cs typeface="Arial" panose="020B0604020202020204" pitchFamily="34" charset="0"/>
+              </a:rPr>
+              <a:t> un </a:t>
+            </a:r>
+            <a:r>
+              <a:rPr lang="es-CO" sz="1200" noProof="0" dirty="0" err="1">
+                <a:latin typeface="Arial" panose="020B0604020202020204" pitchFamily="34" charset="0"/>
+                <a:cs typeface="Arial" panose="020B0604020202020204" pitchFamily="34" charset="0"/>
+              </a:rPr>
+              <a:t>indice</a:t>
+            </a:r>
+            <a:r>
+              <a:rPr lang="es-CO" sz="1200" noProof="0" dirty="0">
+                <a:latin typeface="Arial" panose="020B0604020202020204" pitchFamily="34" charset="0"/>
+                <a:cs typeface="Arial" panose="020B0604020202020204" pitchFamily="34" charset="0"/>
+              </a:rPr>
+              <a:t> efectivo de 1.6054 aproximadamente. Por último, en el caso de 60 de resolución, en ese caso vemos como el </a:t>
+            </a:r>
+            <a:r>
+              <a:rPr lang="es-CO" sz="1200" noProof="0" dirty="0" err="1">
+                <a:latin typeface="Arial" panose="020B0604020202020204" pitchFamily="34" charset="0"/>
+                <a:cs typeface="Arial" panose="020B0604020202020204" pitchFamily="34" charset="0"/>
+              </a:rPr>
+              <a:t>max</a:t>
+            </a:r>
+            <a:r>
+              <a:rPr lang="es-CO" sz="1200" noProof="0" dirty="0">
+                <a:latin typeface="Arial" panose="020B0604020202020204" pitchFamily="34" charset="0"/>
+                <a:cs typeface="Arial" panose="020B0604020202020204" pitchFamily="34" charset="0"/>
+              </a:rPr>
+              <a:t> </a:t>
+            </a:r>
+            <a:r>
+              <a:rPr lang="es-CO" sz="1200" noProof="0" dirty="0" err="1">
+                <a:latin typeface="Arial" panose="020B0604020202020204" pitchFamily="34" charset="0"/>
+                <a:cs typeface="Arial" panose="020B0604020202020204" pitchFamily="34" charset="0"/>
+              </a:rPr>
+              <a:t>grid</a:t>
+            </a:r>
+            <a:r>
+              <a:rPr lang="es-CO" sz="1200" noProof="0" dirty="0">
+                <a:latin typeface="Arial" panose="020B0604020202020204" pitchFamily="34" charset="0"/>
+                <a:cs typeface="Arial" panose="020B0604020202020204" pitchFamily="34" charset="0"/>
+              </a:rPr>
+              <a:t> </a:t>
+            </a:r>
+            <a:r>
+              <a:rPr lang="es-CO" sz="1200" noProof="0" dirty="0" err="1">
+                <a:latin typeface="Arial" panose="020B0604020202020204" pitchFamily="34" charset="0"/>
+                <a:cs typeface="Arial" panose="020B0604020202020204" pitchFamily="34" charset="0"/>
+              </a:rPr>
+              <a:t>resolution</a:t>
+            </a:r>
+            <a:r>
+              <a:rPr lang="es-CO" sz="1200" noProof="0" dirty="0">
+                <a:latin typeface="Arial" panose="020B0604020202020204" pitchFamily="34" charset="0"/>
+                <a:cs typeface="Arial" panose="020B0604020202020204" pitchFamily="34" charset="0"/>
+              </a:rPr>
+              <a:t> tiene valores más parecidos a los que ya </a:t>
+            </a:r>
+            <a:r>
+              <a:rPr lang="es-CO" sz="1200" noProof="0" dirty="0" err="1">
+                <a:latin typeface="Arial" panose="020B0604020202020204" pitchFamily="34" charset="0"/>
+                <a:cs typeface="Arial" panose="020B0604020202020204" pitchFamily="34" charset="0"/>
+              </a:rPr>
+              <a:t>habiamos</a:t>
+            </a:r>
+            <a:r>
+              <a:rPr lang="es-CO" sz="1200" noProof="0" dirty="0">
+                <a:latin typeface="Arial" panose="020B0604020202020204" pitchFamily="34" charset="0"/>
+                <a:cs typeface="Arial" panose="020B0604020202020204" pitchFamily="34" charset="0"/>
+              </a:rPr>
+              <a:t> encontrado de </a:t>
+            </a:r>
+            <a:r>
+              <a:rPr lang="es-CO" sz="1200" noProof="0" dirty="0" err="1">
+                <a:latin typeface="Arial" panose="020B0604020202020204" pitchFamily="34" charset="0"/>
+                <a:cs typeface="Arial" panose="020B0604020202020204" pitchFamily="34" charset="0"/>
+              </a:rPr>
+              <a:t>indice</a:t>
+            </a:r>
+            <a:r>
+              <a:rPr lang="es-CO" sz="1200" noProof="0" dirty="0">
+                <a:latin typeface="Arial" panose="020B0604020202020204" pitchFamily="34" charset="0"/>
+                <a:cs typeface="Arial" panose="020B0604020202020204" pitchFamily="34" charset="0"/>
+              </a:rPr>
+              <a:t> efectivo, viendo que en el </a:t>
+            </a:r>
+            <a:r>
+              <a:rPr lang="es-CO" sz="1200" noProof="0" dirty="0" err="1">
+                <a:latin typeface="Arial" panose="020B0604020202020204" pitchFamily="34" charset="0"/>
+                <a:cs typeface="Arial" panose="020B0604020202020204" pitchFamily="34" charset="0"/>
+              </a:rPr>
+              <a:t>interval</a:t>
+            </a:r>
+            <a:r>
+              <a:rPr lang="es-CO" sz="1200" noProof="0" dirty="0">
+                <a:latin typeface="Arial" panose="020B0604020202020204" pitchFamily="34" charset="0"/>
+                <a:cs typeface="Arial" panose="020B0604020202020204" pitchFamily="34" charset="0"/>
+              </a:rPr>
+              <a:t> de simulación que </a:t>
+            </a:r>
+            <a:r>
+              <a:rPr lang="es-CO" sz="1200" noProof="0" dirty="0" err="1">
+                <a:latin typeface="Arial" panose="020B0604020202020204" pitchFamily="34" charset="0"/>
+                <a:cs typeface="Arial" panose="020B0604020202020204" pitchFamily="34" charset="0"/>
+              </a:rPr>
+              <a:t>temenos</a:t>
+            </a:r>
+            <a:r>
+              <a:rPr lang="es-CO" sz="1200" noProof="0" dirty="0">
+                <a:latin typeface="Arial" panose="020B0604020202020204" pitchFamily="34" charset="0"/>
+                <a:cs typeface="Arial" panose="020B0604020202020204" pitchFamily="34" charset="0"/>
+              </a:rPr>
+              <a:t> solo uno de ellos tiene una variación más grande, mientras que los </a:t>
+            </a:r>
+            <a:r>
+              <a:rPr lang="es-CO" sz="1200" noProof="0" dirty="0" err="1">
+                <a:latin typeface="Arial" panose="020B0604020202020204" pitchFamily="34" charset="0"/>
+                <a:cs typeface="Arial" panose="020B0604020202020204" pitchFamily="34" charset="0"/>
+              </a:rPr>
+              <a:t>demas</a:t>
+            </a:r>
+            <a:r>
+              <a:rPr lang="es-CO" sz="1200" noProof="0" dirty="0">
+                <a:latin typeface="Arial" panose="020B0604020202020204" pitchFamily="34" charset="0"/>
+                <a:cs typeface="Arial" panose="020B0604020202020204" pitchFamily="34" charset="0"/>
+              </a:rPr>
+              <a:t> son más parecidos. </a:t>
+            </a:r>
+          </a:p>
+          <a:p>
+            <a:pPr algn="just"/>
+            <a:endParaRPr lang="es-CO" sz="1200" noProof="0" dirty="0">
               <a:latin typeface="Arial" panose="020B0604020202020204" pitchFamily="34" charset="0"/>
               <a:cs typeface="Arial" panose="020B0604020202020204" pitchFamily="34" charset="0"/>
             </a:endParaRPr>
           </a:p>
           <a:p>
             <a:pPr algn="just"/>
-            <a:endParaRPr lang="en-US" sz="1200" dirty="0">
+            <a:r>
+              <a:rPr lang="es-CO" sz="1200" noProof="0" dirty="0">
+                <a:latin typeface="Arial" panose="020B0604020202020204" pitchFamily="34" charset="0"/>
+                <a:cs typeface="Arial" panose="020B0604020202020204" pitchFamily="34" charset="0"/>
+              </a:rPr>
+              <a:t>Debido al costo computacional y a que queremos </a:t>
+            </a:r>
+          </a:p>
+          <a:p>
+            <a:pPr algn="just"/>
+            <a:r>
+              <a:rPr lang="es-CO" sz="1200" noProof="0" dirty="0">
+                <a:latin typeface="Arial" panose="020B0604020202020204" pitchFamily="34" charset="0"/>
+                <a:cs typeface="Arial" panose="020B0604020202020204" pitchFamily="34" charset="0"/>
+              </a:rPr>
+              <a:t>tener el menor tiempo de simulación voy a escoger </a:t>
+            </a:r>
+          </a:p>
+          <a:p>
+            <a:pPr algn="just"/>
+            <a:r>
+              <a:rPr lang="es-CO" sz="1200" noProof="0" dirty="0">
+                <a:latin typeface="Arial" panose="020B0604020202020204" pitchFamily="34" charset="0"/>
+                <a:cs typeface="Arial" panose="020B0604020202020204" pitchFamily="34" charset="0"/>
+              </a:rPr>
+              <a:t>como parámetros el </a:t>
+            </a:r>
+            <a:r>
+              <a:rPr lang="es-CO" sz="1200" noProof="0" dirty="0" err="1">
+                <a:latin typeface="Arial" panose="020B0604020202020204" pitchFamily="34" charset="0"/>
+                <a:cs typeface="Arial" panose="020B0604020202020204" pitchFamily="34" charset="0"/>
+              </a:rPr>
+              <a:t>grid</a:t>
+            </a:r>
+            <a:r>
+              <a:rPr lang="es-CO" sz="1200" noProof="0" dirty="0">
+                <a:latin typeface="Arial" panose="020B0604020202020204" pitchFamily="34" charset="0"/>
+                <a:cs typeface="Arial" panose="020B0604020202020204" pitchFamily="34" charset="0"/>
+              </a:rPr>
+              <a:t> </a:t>
+            </a:r>
+            <a:r>
+              <a:rPr lang="es-CO" sz="1200" noProof="0" dirty="0" err="1">
+                <a:latin typeface="Arial" panose="020B0604020202020204" pitchFamily="34" charset="0"/>
+                <a:cs typeface="Arial" panose="020B0604020202020204" pitchFamily="34" charset="0"/>
+              </a:rPr>
+              <a:t>resolution</a:t>
+            </a:r>
+            <a:r>
+              <a:rPr lang="es-CO" sz="1200" noProof="0" dirty="0">
+                <a:latin typeface="Arial" panose="020B0604020202020204" pitchFamily="34" charset="0"/>
+                <a:cs typeface="Arial" panose="020B0604020202020204" pitchFamily="34" charset="0"/>
+              </a:rPr>
+              <a:t> igual a 20 y el </a:t>
+            </a:r>
+          </a:p>
+          <a:p>
+            <a:pPr algn="just"/>
+            <a:r>
+              <a:rPr lang="es-CO" sz="1200" noProof="0" dirty="0" err="1">
+                <a:latin typeface="Arial" panose="020B0604020202020204" pitchFamily="34" charset="0"/>
+                <a:cs typeface="Arial" panose="020B0604020202020204" pitchFamily="34" charset="0"/>
+              </a:rPr>
+              <a:t>max</a:t>
+            </a:r>
+            <a:r>
+              <a:rPr lang="es-CO" sz="1200" noProof="0" dirty="0">
+                <a:latin typeface="Arial" panose="020B0604020202020204" pitchFamily="34" charset="0"/>
+                <a:cs typeface="Arial" panose="020B0604020202020204" pitchFamily="34" charset="0"/>
+              </a:rPr>
+              <a:t> </a:t>
+            </a:r>
+            <a:r>
+              <a:rPr lang="es-CO" sz="1200" noProof="0" dirty="0" err="1">
+                <a:latin typeface="Arial" panose="020B0604020202020204" pitchFamily="34" charset="0"/>
+                <a:cs typeface="Arial" panose="020B0604020202020204" pitchFamily="34" charset="0"/>
+              </a:rPr>
+              <a:t>grid</a:t>
+            </a:r>
+            <a:r>
+              <a:rPr lang="es-CO" sz="1200" noProof="0" dirty="0">
+                <a:latin typeface="Arial" panose="020B0604020202020204" pitchFamily="34" charset="0"/>
+                <a:cs typeface="Arial" panose="020B0604020202020204" pitchFamily="34" charset="0"/>
+              </a:rPr>
+              <a:t> </a:t>
+            </a:r>
+            <a:r>
+              <a:rPr lang="es-CO" sz="1200" noProof="0" dirty="0" err="1">
+                <a:latin typeface="Arial" panose="020B0604020202020204" pitchFamily="34" charset="0"/>
+                <a:cs typeface="Arial" panose="020B0604020202020204" pitchFamily="34" charset="0"/>
+              </a:rPr>
+              <a:t>scaling</a:t>
+            </a:r>
+            <a:r>
+              <a:rPr lang="es-CO" sz="1200" noProof="0" dirty="0">
+                <a:latin typeface="Arial" panose="020B0604020202020204" pitchFamily="34" charset="0"/>
+                <a:cs typeface="Arial" panose="020B0604020202020204" pitchFamily="34" charset="0"/>
+              </a:rPr>
+              <a:t> de 1.30, ya que tiene un resultado </a:t>
+            </a:r>
+          </a:p>
+          <a:p>
+            <a:pPr algn="just"/>
+            <a:r>
+              <a:rPr lang="es-CO" sz="1200" noProof="0" dirty="0">
+                <a:latin typeface="Arial" panose="020B0604020202020204" pitchFamily="34" charset="0"/>
+                <a:cs typeface="Arial" panose="020B0604020202020204" pitchFamily="34" charset="0"/>
+              </a:rPr>
+              <a:t>muy similar a los que tienen mayor número de </a:t>
+            </a:r>
+          </a:p>
+          <a:p>
+            <a:pPr algn="just"/>
+            <a:r>
+              <a:rPr lang="es-CO" sz="1200" noProof="0" dirty="0">
+                <a:latin typeface="Arial" panose="020B0604020202020204" pitchFamily="34" charset="0"/>
+                <a:cs typeface="Arial" panose="020B0604020202020204" pitchFamily="34" charset="0"/>
+              </a:rPr>
+              <a:t>puntos de </a:t>
+            </a:r>
+            <a:r>
+              <a:rPr lang="es-CO" sz="1200" noProof="0" dirty="0" err="1">
+                <a:latin typeface="Arial" panose="020B0604020202020204" pitchFamily="34" charset="0"/>
+                <a:cs typeface="Arial" panose="020B0604020202020204" pitchFamily="34" charset="0"/>
+              </a:rPr>
+              <a:t>simuación</a:t>
+            </a:r>
+            <a:r>
+              <a:rPr lang="es-CO" sz="1200" noProof="0" dirty="0">
+                <a:latin typeface="Arial" panose="020B0604020202020204" pitchFamily="34" charset="0"/>
+                <a:cs typeface="Arial" panose="020B0604020202020204" pitchFamily="34" charset="0"/>
+              </a:rPr>
+              <a:t>. Con estos parámetros </a:t>
+            </a:r>
+          </a:p>
+          <a:p>
+            <a:pPr algn="just"/>
+            <a:r>
+              <a:rPr lang="es-CO" sz="1200" noProof="0" dirty="0">
+                <a:latin typeface="Arial" panose="020B0604020202020204" pitchFamily="34" charset="0"/>
+                <a:cs typeface="Arial" panose="020B0604020202020204" pitchFamily="34" charset="0"/>
+              </a:rPr>
+              <a:t>tendremos una malla de simulación como la </a:t>
+            </a:r>
+          </a:p>
+          <a:p>
+            <a:pPr algn="just"/>
+            <a:r>
+              <a:rPr lang="es-CO" sz="1200" noProof="0" dirty="0">
+                <a:latin typeface="Arial" panose="020B0604020202020204" pitchFamily="34" charset="0"/>
+                <a:cs typeface="Arial" panose="020B0604020202020204" pitchFamily="34" charset="0"/>
+              </a:rPr>
+              <a:t>que se observa en la imagen, en donde </a:t>
+            </a:r>
+          </a:p>
+          <a:p>
+            <a:pPr algn="just"/>
+            <a:r>
+              <a:rPr lang="es-CO" sz="1200" noProof="0" dirty="0">
+                <a:latin typeface="Arial" panose="020B0604020202020204" pitchFamily="34" charset="0"/>
+                <a:cs typeface="Arial" panose="020B0604020202020204" pitchFamily="34" charset="0"/>
+              </a:rPr>
+              <a:t>habrán más puntos de simulación, es decir, </a:t>
+            </a:r>
+          </a:p>
+          <a:p>
+            <a:pPr algn="just"/>
+            <a:r>
+              <a:rPr lang="es-CO" sz="1200" noProof="0" dirty="0">
+                <a:latin typeface="Arial" panose="020B0604020202020204" pitchFamily="34" charset="0"/>
+                <a:cs typeface="Arial" panose="020B0604020202020204" pitchFamily="34" charset="0"/>
+              </a:rPr>
+              <a:t>mayor resolución, cuando hay cambios de </a:t>
+            </a:r>
+            <a:r>
+              <a:rPr lang="es-CO" sz="1200" noProof="0" dirty="0" err="1">
+                <a:latin typeface="Arial" panose="020B0604020202020204" pitchFamily="34" charset="0"/>
+                <a:cs typeface="Arial" panose="020B0604020202020204" pitchFamily="34" charset="0"/>
+              </a:rPr>
+              <a:t>indice</a:t>
+            </a:r>
+            <a:r>
+              <a:rPr lang="es-CO" sz="1200" noProof="0" dirty="0">
+                <a:latin typeface="Arial" panose="020B0604020202020204" pitchFamily="34" charset="0"/>
+                <a:cs typeface="Arial" panose="020B0604020202020204" pitchFamily="34" charset="0"/>
+              </a:rPr>
+              <a:t> </a:t>
+            </a:r>
+          </a:p>
+          <a:p>
+            <a:pPr algn="just"/>
+            <a:r>
+              <a:rPr lang="es-CO" sz="1200" noProof="0" dirty="0">
+                <a:latin typeface="Arial" panose="020B0604020202020204" pitchFamily="34" charset="0"/>
+                <a:cs typeface="Arial" panose="020B0604020202020204" pitchFamily="34" charset="0"/>
+              </a:rPr>
+              <a:t>de refracción. </a:t>
+            </a:r>
+          </a:p>
+          <a:p>
+            <a:pPr algn="just"/>
+            <a:endParaRPr lang="es-CO" sz="1200" noProof="0" dirty="0">
               <a:latin typeface="Arial" panose="020B0604020202020204" pitchFamily="34" charset="0"/>
               <a:cs typeface="Arial" panose="020B0604020202020204" pitchFamily="34" charset="0"/>
             </a:endParaRPr>
           </a:p>
           <a:p>
             <a:pPr algn="just"/>
-            <a:endParaRPr lang="en-US" sz="1200" dirty="0">
+            <a:endParaRPr lang="es-CO" sz="1200" noProof="0" dirty="0">
               <a:latin typeface="Arial" panose="020B0604020202020204" pitchFamily="34" charset="0"/>
               <a:cs typeface="Arial" panose="020B0604020202020204" pitchFamily="34" charset="0"/>
             </a:endParaRPr>
           </a:p>
-          <a:p>
-            <a:pPr algn="just"/>
-            <a:endParaRPr lang="en-US" sz="1200" dirty="0">
-              <a:latin typeface="Arial" panose="020B0604020202020204" pitchFamily="34" charset="0"/>
-              <a:cs typeface="Arial" panose="020B0604020202020204" pitchFamily="34" charset="0"/>
+        </p:txBody>
+      </p:sp>
+      <p:pic>
+        <p:nvPicPr>
+          <p:cNvPr id="7" name="Imagen 6" descr="Gráfico, Gráfico de líneas&#10;&#10;El contenido generado por IA puede ser incorrecto.">
+            <a:extLst>
+              <a:ext uri="{FF2B5EF4-FFF2-40B4-BE49-F238E27FC236}">
+                <a16:creationId xmlns:a16="http://schemas.microsoft.com/office/drawing/2014/main" id="{51B25E00-5C8D-3A94-A9F8-655005DA4DA9}"/>
+              </a:ext>
+            </a:extLst>
+          </p:cNvPr>
+          <p:cNvPicPr>
+            <a:picLocks noChangeAspect="1"/>
+          </p:cNvPicPr>
+          <p:nvPr/>
+        </p:nvPicPr>
+        <p:blipFill>
+          <a:blip r:embed="rId5"/>
+          <a:stretch>
+            <a:fillRect/>
+          </a:stretch>
+        </p:blipFill>
+        <p:spPr>
+          <a:xfrm>
+            <a:off x="381159" y="1151212"/>
+            <a:ext cx="3960000" cy="2154167"/>
+          </a:xfrm>
+          <a:prstGeom prst="rect">
+            <a:avLst/>
+          </a:prstGeom>
+        </p:spPr>
+      </p:pic>
+      <p:pic>
+        <p:nvPicPr>
+          <p:cNvPr id="9" name="Imagen 8" descr="Gráfico, Gráfico de líneas&#10;&#10;El contenido generado por IA puede ser incorrecto.">
+            <a:extLst>
+              <a:ext uri="{FF2B5EF4-FFF2-40B4-BE49-F238E27FC236}">
+                <a16:creationId xmlns:a16="http://schemas.microsoft.com/office/drawing/2014/main" id="{31BDF932-C004-AB0C-5B72-0D108A1B6DAB}"/>
+              </a:ext>
+            </a:extLst>
+          </p:cNvPr>
+          <p:cNvPicPr>
+            <a:picLocks noChangeAspect="1"/>
+          </p:cNvPicPr>
+          <p:nvPr/>
+        </p:nvPicPr>
+        <p:blipFill>
+          <a:blip r:embed="rId6"/>
+          <a:stretch>
+            <a:fillRect/>
+          </a:stretch>
+        </p:blipFill>
+        <p:spPr>
+          <a:xfrm>
+            <a:off x="381159" y="3606424"/>
+            <a:ext cx="3960000" cy="2283650"/>
+          </a:xfrm>
+          <a:prstGeom prst="rect">
+            <a:avLst/>
+          </a:prstGeom>
+        </p:spPr>
+      </p:pic>
+      <p:pic>
+        <p:nvPicPr>
+          <p:cNvPr id="12" name="Imagen 11" descr="Imagen en blanco y negro&#10;&#10;El contenido generado por IA puede ser incorrecto.">
+            <a:extLst>
+              <a:ext uri="{FF2B5EF4-FFF2-40B4-BE49-F238E27FC236}">
+                <a16:creationId xmlns:a16="http://schemas.microsoft.com/office/drawing/2014/main" id="{B26B7113-5D88-050F-2247-6DBF0090C6A3}"/>
+              </a:ext>
+            </a:extLst>
+          </p:cNvPr>
+          <p:cNvPicPr>
+            <a:picLocks noChangeAspect="1"/>
+          </p:cNvPicPr>
+          <p:nvPr/>
+        </p:nvPicPr>
+        <p:blipFill>
+          <a:blip r:embed="rId7"/>
+          <a:stretch>
+            <a:fillRect/>
+          </a:stretch>
+        </p:blipFill>
+        <p:spPr>
+          <a:xfrm>
+            <a:off x="8610600" y="3435927"/>
+            <a:ext cx="3200241" cy="2387481"/>
+          </a:xfrm>
+          <a:prstGeom prst="rect">
+            <a:avLst/>
+          </a:prstGeom>
+        </p:spPr>
+      </p:pic>
+    </p:spTree>
+    <p:extLst>
+      <p:ext uri="{BB962C8B-B14F-4D97-AF65-F5344CB8AC3E}">
+        <p14:creationId xmlns:p14="http://schemas.microsoft.com/office/powerpoint/2010/main" val="730501311"/>
+      </p:ext>
+    </p:extLst>
+  </p:cSld>
+  <p:clrMapOvr>
+    <a:masterClrMapping/>
+  </p:clrMapOvr>
+</p:sld>
+</file>
+
+<file path=ppt/slides/slide4.xml><?xml version="1.0" encoding="utf-8"?>
+<p:sld xmlns:a="http://schemas.openxmlformats.org/drawingml/2006/main" xmlns:r="http://schemas.openxmlformats.org/officeDocument/2006/relationships" xmlns:p="http://schemas.openxmlformats.org/presentationml/2006/main">
+  <p:cSld>
+    <p:spTree>
+      <p:nvGrpSpPr>
+        <p:cNvPr id="1" name="">
+          <a:extLst>
+            <a:ext uri="{FF2B5EF4-FFF2-40B4-BE49-F238E27FC236}">
+              <a16:creationId xmlns:a16="http://schemas.microsoft.com/office/drawing/2014/main" id="{30500995-5BFF-2A2D-8B21-ECBBD7E3B57A}"/>
+            </a:ext>
+          </a:extLst>
+        </p:cNvPr>
+        <p:cNvGrpSpPr/>
+        <p:nvPr/>
+      </p:nvGrpSpPr>
+      <p:grpSpPr>
+        <a:xfrm>
+          <a:off x="0" y="0"/>
+          <a:ext cx="0" cy="0"/>
+          <a:chOff x="0" y="0"/>
+          <a:chExt cx="0" cy="0"/>
+        </a:xfrm>
+      </p:grpSpPr>
+      <p:sp>
+        <p:nvSpPr>
+          <p:cNvPr id="16" name="object 16">
+            <a:extLst>
+              <a:ext uri="{FF2B5EF4-FFF2-40B4-BE49-F238E27FC236}">
+                <a16:creationId xmlns:a16="http://schemas.microsoft.com/office/drawing/2014/main" id="{E27F5DA6-A71E-C3F5-906A-542C8088818B}"/>
+              </a:ext>
+            </a:extLst>
+          </p:cNvPr>
+          <p:cNvSpPr txBox="1">
+            <a:spLocks noGrp="1"/>
+          </p:cNvSpPr>
+          <p:nvPr>
+            <p:ph type="title"/>
+          </p:nvPr>
+        </p:nvSpPr>
+        <p:spPr>
+          <a:xfrm>
+            <a:off x="685800" y="161033"/>
+            <a:ext cx="10994410" cy="705321"/>
+          </a:xfrm>
+          <a:prstGeom prst="rect">
+            <a:avLst/>
+          </a:prstGeom>
+        </p:spPr>
+        <p:txBody>
+          <a:bodyPr vert="horz" wrap="square" lIns="0" tIns="12700" rIns="0" bIns="0" rtlCol="0">
+            <a:spAutoFit/>
+          </a:bodyPr>
+          <a:lstStyle/>
+          <a:p>
+            <a:pPr marL="12700">
+              <a:lnSpc>
+                <a:spcPct val="100000"/>
+              </a:lnSpc>
+              <a:spcBef>
+                <a:spcPts val="100"/>
+              </a:spcBef>
+            </a:pPr>
+            <a:r>
+              <a:rPr lang="es-CO" sz="2500" noProof="0" dirty="0" err="1"/>
+              <a:t>Learning</a:t>
+            </a:r>
+            <a:r>
+              <a:rPr lang="es-CO" sz="2500" noProof="0" dirty="0"/>
+              <a:t> </a:t>
+            </a:r>
+            <a:r>
+              <a:rPr lang="es-CO" sz="2500" noProof="0" dirty="0" err="1"/>
+              <a:t>outcome</a:t>
+            </a:r>
+            <a:r>
+              <a:rPr lang="es-CO" sz="2500" noProof="0" dirty="0"/>
+              <a:t> #1 – </a:t>
+            </a:r>
+            <a:r>
+              <a:rPr lang="es-CO" sz="2500" noProof="0" dirty="0" err="1"/>
+              <a:t>Convergence</a:t>
+            </a:r>
+            <a:r>
+              <a:rPr lang="es-CO" sz="2500" noProof="0" dirty="0"/>
+              <a:t> </a:t>
+            </a:r>
+            <a:r>
+              <a:rPr lang="es-CO" sz="2500" noProof="0" dirty="0" err="1"/>
+              <a:t>tests</a:t>
+            </a:r>
+            <a:br>
+              <a:rPr lang="es-CO" sz="2500" noProof="0" dirty="0"/>
+            </a:br>
+            <a:r>
+              <a:rPr lang="es-CO" b="0" noProof="0" dirty="0"/>
+              <a:t>DE </a:t>
+            </a:r>
+            <a:r>
+              <a:rPr lang="es-CO" b="0" noProof="0" dirty="0" err="1"/>
+              <a:t>waveguide</a:t>
+            </a:r>
+            <a:r>
+              <a:rPr lang="es-CO" b="0" noProof="0" dirty="0"/>
+              <a:t>, w = </a:t>
+            </a:r>
+            <a:r>
+              <a:rPr lang="es-CO" b="0" dirty="0"/>
+              <a:t>0.5</a:t>
+            </a:r>
+            <a:r>
+              <a:rPr lang="es-CO" b="0" noProof="0" dirty="0"/>
+              <a:t> µm, neff_TE0, </a:t>
+            </a:r>
+            <a:r>
+              <a:rPr lang="es-CO" b="0" noProof="0" dirty="0" err="1"/>
+              <a:t>wvl</a:t>
+            </a:r>
+            <a:r>
+              <a:rPr lang="es-CO" b="0" noProof="0" dirty="0"/>
+              <a:t> 1.55 µm.  Silicon </a:t>
+            </a:r>
+            <a:r>
+              <a:rPr lang="es-CO" b="0" noProof="0" dirty="0" err="1"/>
+              <a:t>On</a:t>
+            </a:r>
+            <a:r>
+              <a:rPr lang="es-CO" b="0" noProof="0" dirty="0"/>
+              <a:t> </a:t>
+            </a:r>
+            <a:r>
+              <a:rPr lang="es-CO" b="0" noProof="0" dirty="0" err="1"/>
+              <a:t>Insulator</a:t>
+            </a:r>
+            <a:endParaRPr lang="es-CO" sz="2500" b="0" noProof="0" dirty="0">
+              <a:latin typeface="+mj-lt"/>
+              <a:cs typeface="Lucida Sans"/>
             </a:endParaRPr>
           </a:p>
         </p:txBody>
       </p:sp>
-      <p:sp>
-        <p:nvSpPr>
-          <p:cNvPr id="2" name="Rectángulo 1">
+      <p:pic>
+        <p:nvPicPr>
+          <p:cNvPr id="83" name="Gráfico 82">
             <a:extLst>
               <a:ext uri="{FF2B5EF4-FFF2-40B4-BE49-F238E27FC236}">
-                <a16:creationId xmlns:a16="http://schemas.microsoft.com/office/drawing/2014/main" id="{029F2FF9-FEB4-7AA3-B3B4-EFA9CFA0E230}"/>
+                <a16:creationId xmlns:a16="http://schemas.microsoft.com/office/drawing/2014/main" id="{DAE737A7-101F-33E2-41EB-8CF84E6184D5}"/>
+              </a:ext>
+            </a:extLst>
+          </p:cNvPr>
+          <p:cNvPicPr>
+            <a:picLocks noChangeAspect="1"/>
+          </p:cNvPicPr>
+          <p:nvPr/>
+        </p:nvPicPr>
+        <p:blipFill>
+          <a:blip r:embed="rId3">
+            <a:extLst>
+              <a:ext uri="{96DAC541-7B7A-43D3-8B79-37D633B846F1}">
+                <asvg:svgBlip xmlns:asvg="http://schemas.microsoft.com/office/drawing/2016/SVG/main" r:embed="rId4"/>
+              </a:ext>
+            </a:extLst>
+          </a:blip>
+          <a:stretch>
+            <a:fillRect/>
+          </a:stretch>
+        </p:blipFill>
+        <p:spPr>
+          <a:xfrm>
+            <a:off x="5045006" y="6356057"/>
+            <a:ext cx="6409575" cy="363174"/>
+          </a:xfrm>
+          <a:prstGeom prst="rect">
+            <a:avLst/>
+          </a:prstGeom>
+        </p:spPr>
+      </p:pic>
+      <p:sp>
+        <p:nvSpPr>
+          <p:cNvPr id="84" name="Marcador de número de diapositiva 83">
+            <a:extLst>
+              <a:ext uri="{FF2B5EF4-FFF2-40B4-BE49-F238E27FC236}">
+                <a16:creationId xmlns:a16="http://schemas.microsoft.com/office/drawing/2014/main" id="{47C11785-1B59-5368-EB92-3D104840C51E}"/>
+              </a:ext>
+            </a:extLst>
+          </p:cNvPr>
+          <p:cNvSpPr>
+            <a:spLocks noGrp="1"/>
+          </p:cNvSpPr>
+          <p:nvPr>
+            <p:ph type="sldNum" sz="quarter" idx="7"/>
+          </p:nvPr>
+        </p:nvSpPr>
+        <p:spPr/>
+        <p:txBody>
+          <a:bodyPr/>
+          <a:lstStyle/>
+          <a:p>
+            <a:fld id="{B6F15528-21DE-4FAA-801E-634DDDAF4B2B}" type="slidenum">
+              <a:rPr lang="es-CO" noProof="0" smtClean="0"/>
+              <a:t>4</a:t>
+            </a:fld>
+            <a:endParaRPr lang="es-CO" noProof="0" dirty="0"/>
+          </a:p>
+        </p:txBody>
+      </p:sp>
+      <p:sp>
+        <p:nvSpPr>
+          <p:cNvPr id="3" name="Marcador de pie de página 2">
+            <a:extLst>
+              <a:ext uri="{FF2B5EF4-FFF2-40B4-BE49-F238E27FC236}">
+                <a16:creationId xmlns:a16="http://schemas.microsoft.com/office/drawing/2014/main" id="{8F3E2ADD-0EFD-A26F-F182-AB3F41A73E04}"/>
+              </a:ext>
+            </a:extLst>
+          </p:cNvPr>
+          <p:cNvSpPr>
+            <a:spLocks noGrp="1"/>
+          </p:cNvSpPr>
+          <p:nvPr>
+            <p:ph type="ftr" sz="quarter" idx="5"/>
+          </p:nvPr>
+        </p:nvSpPr>
+        <p:spPr/>
+        <p:txBody>
+          <a:bodyPr/>
+          <a:lstStyle/>
+          <a:p>
+            <a:pPr marL="12700">
+              <a:spcBef>
+                <a:spcPts val="15"/>
+              </a:spcBef>
+            </a:pPr>
+            <a:r>
+              <a:rPr lang="es-CO" spc="-5" noProof="0" dirty="0"/>
+              <a:t>LAB 1.0. WAVEGUIDES</a:t>
+            </a:r>
+          </a:p>
+        </p:txBody>
+      </p:sp>
+      <p:sp>
+        <p:nvSpPr>
+          <p:cNvPr id="6" name="Rectángulo 5">
+            <a:extLst>
+              <a:ext uri="{FF2B5EF4-FFF2-40B4-BE49-F238E27FC236}">
+                <a16:creationId xmlns:a16="http://schemas.microsoft.com/office/drawing/2014/main" id="{FD851BB8-16C4-0702-BEE3-8F741CACB607}"/>
               </a:ext>
             </a:extLst>
           </p:cNvPr>
@@ -5181,8 +8492,8 @@
         </p:nvSpPr>
         <p:spPr>
           <a:xfrm>
-            <a:off x="6322853" y="1447800"/>
-            <a:ext cx="5486559" cy="3306028"/>
+            <a:off x="304800" y="978277"/>
+            <a:ext cx="4114959" cy="5078313"/>
           </a:xfrm>
           <a:prstGeom prst="rect">
             <a:avLst/>
@@ -5215,16 +8526,16 @@
           <a:lstStyle/>
           <a:p>
             <a:pPr algn="ctr"/>
-            <a:endParaRPr lang="en-US"/>
+            <a:endParaRPr lang="es-CO" noProof="0" dirty="0"/>
           </a:p>
         </p:txBody>
       </p:sp>
       <p:sp>
         <p:nvSpPr>
-          <p:cNvPr id="4" name="CuadroTexto 3">
+          <p:cNvPr id="10" name="CuadroTexto 9">
             <a:extLst>
               <a:ext uri="{FF2B5EF4-FFF2-40B4-BE49-F238E27FC236}">
-                <a16:creationId xmlns:a16="http://schemas.microsoft.com/office/drawing/2014/main" id="{C2C94B57-6111-4070-F6BA-8C3B9C305618}"/>
+                <a16:creationId xmlns:a16="http://schemas.microsoft.com/office/drawing/2014/main" id="{B5896CD9-E412-27E5-448F-B478BBE54A10}"/>
               </a:ext>
             </a:extLst>
           </p:cNvPr>
@@ -5233,13 +8544,22 @@
         </p:nvSpPr>
         <p:spPr>
           <a:xfrm>
-            <a:off x="6792815" y="2698951"/>
-            <a:ext cx="4546634" cy="923330"/>
+            <a:off x="4496118" y="971350"/>
+            <a:ext cx="7543482" cy="5078313"/>
           </a:xfrm>
           <a:prstGeom prst="rect">
             <a:avLst/>
           </a:prstGeom>
-          <a:noFill/>
+          <a:solidFill>
+            <a:schemeClr val="bg1">
+              <a:lumMod val="95000"/>
+            </a:schemeClr>
+          </a:solidFill>
+          <a:ln w="28575">
+            <a:solidFill>
+              <a:srgbClr val="E0700D"/>
+            </a:solidFill>
+          </a:ln>
         </p:spPr>
         <p:txBody>
           <a:bodyPr wrap="square" rtlCol="0">
@@ -5247,41 +8567,548 @@
           </a:bodyPr>
           <a:lstStyle/>
           <a:p>
-            <a:pPr algn="ctr"/>
-            <a:r>
-              <a:rPr lang="en-US" b="1" dirty="0"/>
-              <a:t>deep</a:t>
-            </a:r>
-            <a:r>
-              <a:rPr lang="en-US" dirty="0"/>
-              <a:t> waveguide</a:t>
-            </a:r>
-          </a:p>
-          <a:p>
-            <a:pPr algn="ctr"/>
-            <a:endParaRPr lang="en-US" dirty="0"/>
-          </a:p>
-          <a:p>
-            <a:pPr algn="ctr"/>
-            <a:r>
-              <a:rPr lang="en-US" dirty="0"/>
-              <a:t>Paste neff_TE0 vs </a:t>
-            </a:r>
-            <a:r>
-              <a:rPr lang="en-US" dirty="0" err="1"/>
-              <a:t>max_grid_scaling</a:t>
-            </a:r>
-            <a:r>
-              <a:rPr lang="en-US" dirty="0"/>
-              <a:t> plot here</a:t>
-            </a:r>
+            <a:pPr algn="just"/>
+            <a:endParaRPr lang="es-CO" sz="1200" noProof="0" dirty="0">
+              <a:latin typeface="Arial" panose="020B0604020202020204" pitchFamily="34" charset="0"/>
+              <a:cs typeface="Arial" panose="020B0604020202020204" pitchFamily="34" charset="0"/>
+            </a:endParaRPr>
+          </a:p>
+          <a:p>
+            <a:pPr algn="just"/>
+            <a:r>
+              <a:rPr lang="es-CO" sz="1200" noProof="0" dirty="0">
+                <a:latin typeface="Arial" panose="020B0604020202020204" pitchFamily="34" charset="0"/>
+                <a:cs typeface="Arial" panose="020B0604020202020204" pitchFamily="34" charset="0"/>
+              </a:rPr>
+              <a:t>Ahora, en el caso de </a:t>
+            </a:r>
+            <a:r>
+              <a:rPr lang="es-CO" sz="1200" noProof="0" dirty="0" err="1">
+                <a:latin typeface="Arial" panose="020B0604020202020204" pitchFamily="34" charset="0"/>
+                <a:cs typeface="Arial" panose="020B0604020202020204" pitchFamily="34" charset="0"/>
+              </a:rPr>
+              <a:t>silicon</a:t>
+            </a:r>
+            <a:r>
+              <a:rPr lang="es-CO" sz="1200" noProof="0" dirty="0">
+                <a:latin typeface="Arial" panose="020B0604020202020204" pitchFamily="34" charset="0"/>
+                <a:cs typeface="Arial" panose="020B0604020202020204" pitchFamily="34" charset="0"/>
+              </a:rPr>
+              <a:t> </a:t>
+            </a:r>
+            <a:r>
+              <a:rPr lang="es-CO" sz="1200" noProof="0" dirty="0" err="1">
+                <a:latin typeface="Arial" panose="020B0604020202020204" pitchFamily="34" charset="0"/>
+                <a:cs typeface="Arial" panose="020B0604020202020204" pitchFamily="34" charset="0"/>
+              </a:rPr>
+              <a:t>on</a:t>
+            </a:r>
+            <a:r>
+              <a:rPr lang="es-CO" sz="1200" noProof="0" dirty="0">
+                <a:latin typeface="Arial" panose="020B0604020202020204" pitchFamily="34" charset="0"/>
+                <a:cs typeface="Arial" panose="020B0604020202020204" pitchFamily="34" charset="0"/>
+              </a:rPr>
+              <a:t> </a:t>
+            </a:r>
+            <a:r>
+              <a:rPr lang="es-CO" sz="1200" noProof="0" dirty="0" err="1">
+                <a:latin typeface="Arial" panose="020B0604020202020204" pitchFamily="34" charset="0"/>
+                <a:cs typeface="Arial" panose="020B0604020202020204" pitchFamily="34" charset="0"/>
+              </a:rPr>
+              <a:t>insulator</a:t>
+            </a:r>
+            <a:r>
+              <a:rPr lang="es-CO" sz="1200" noProof="0" dirty="0">
+                <a:latin typeface="Arial" panose="020B0604020202020204" pitchFamily="34" charset="0"/>
+                <a:cs typeface="Arial" panose="020B0604020202020204" pitchFamily="34" charset="0"/>
+              </a:rPr>
+              <a:t>, vemos como para valores de 2 y de 40 a 70 tenemos índices efectivos muy parecidos. Como en el caso anterior, se </a:t>
+            </a:r>
+            <a:r>
+              <a:rPr lang="es-CO" sz="1200" noProof="0" dirty="0" err="1">
+                <a:latin typeface="Arial" panose="020B0604020202020204" pitchFamily="34" charset="0"/>
+                <a:cs typeface="Arial" panose="020B0604020202020204" pitchFamily="34" charset="0"/>
+              </a:rPr>
+              <a:t>selecionaron</a:t>
+            </a:r>
+            <a:r>
+              <a:rPr lang="es-CO" sz="1200" noProof="0" dirty="0">
+                <a:latin typeface="Arial" panose="020B0604020202020204" pitchFamily="34" charset="0"/>
+                <a:cs typeface="Arial" panose="020B0604020202020204" pitchFamily="34" charset="0"/>
+              </a:rPr>
+              <a:t> 3 </a:t>
+            </a:r>
+            <a:r>
+              <a:rPr lang="es-CO" sz="1200" noProof="0" dirty="0" err="1">
+                <a:latin typeface="Arial" panose="020B0604020202020204" pitchFamily="34" charset="0"/>
+                <a:cs typeface="Arial" panose="020B0604020202020204" pitchFamily="34" charset="0"/>
+              </a:rPr>
+              <a:t>valors</a:t>
+            </a:r>
+            <a:r>
+              <a:rPr lang="es-CO" sz="1200" noProof="0" dirty="0">
+                <a:latin typeface="Arial" panose="020B0604020202020204" pitchFamily="34" charset="0"/>
+                <a:cs typeface="Arial" panose="020B0604020202020204" pitchFamily="34" charset="0"/>
+              </a:rPr>
+              <a:t> de </a:t>
+            </a:r>
+            <a:r>
+              <a:rPr lang="es-CO" sz="1200" noProof="0" dirty="0" err="1">
+                <a:latin typeface="Arial" panose="020B0604020202020204" pitchFamily="34" charset="0"/>
+                <a:cs typeface="Arial" panose="020B0604020202020204" pitchFamily="34" charset="0"/>
+              </a:rPr>
+              <a:t>grid</a:t>
+            </a:r>
+            <a:r>
+              <a:rPr lang="es-CO" sz="1200" noProof="0" dirty="0">
+                <a:latin typeface="Arial" panose="020B0604020202020204" pitchFamily="34" charset="0"/>
+                <a:cs typeface="Arial" panose="020B0604020202020204" pitchFamily="34" charset="0"/>
+              </a:rPr>
+              <a:t> </a:t>
+            </a:r>
+            <a:r>
+              <a:rPr lang="es-CO" sz="1200" noProof="0" dirty="0" err="1">
+                <a:latin typeface="Arial" panose="020B0604020202020204" pitchFamily="34" charset="0"/>
+                <a:cs typeface="Arial" panose="020B0604020202020204" pitchFamily="34" charset="0"/>
+              </a:rPr>
+              <a:t>resolution</a:t>
+            </a:r>
+            <a:r>
+              <a:rPr lang="es-CO" sz="1200" noProof="0" dirty="0">
+                <a:latin typeface="Arial" panose="020B0604020202020204" pitchFamily="34" charset="0"/>
+                <a:cs typeface="Arial" panose="020B0604020202020204" pitchFamily="34" charset="0"/>
+              </a:rPr>
+              <a:t> para ahora variar el </a:t>
+            </a:r>
+            <a:r>
+              <a:rPr lang="es-CO" sz="1200" noProof="0" dirty="0" err="1">
+                <a:latin typeface="Arial" panose="020B0604020202020204" pitchFamily="34" charset="0"/>
+                <a:cs typeface="Arial" panose="020B0604020202020204" pitchFamily="34" charset="0"/>
+              </a:rPr>
+              <a:t>max</a:t>
+            </a:r>
+            <a:r>
+              <a:rPr lang="es-CO" sz="1200" noProof="0" dirty="0">
+                <a:latin typeface="Arial" panose="020B0604020202020204" pitchFamily="34" charset="0"/>
+                <a:cs typeface="Arial" panose="020B0604020202020204" pitchFamily="34" charset="0"/>
+              </a:rPr>
+              <a:t> </a:t>
+            </a:r>
+            <a:r>
+              <a:rPr lang="es-CO" sz="1200" noProof="0" dirty="0" err="1">
+                <a:latin typeface="Arial" panose="020B0604020202020204" pitchFamily="34" charset="0"/>
+                <a:cs typeface="Arial" panose="020B0604020202020204" pitchFamily="34" charset="0"/>
+              </a:rPr>
+              <a:t>grid</a:t>
+            </a:r>
+            <a:r>
+              <a:rPr lang="es-CO" sz="1200" noProof="0" dirty="0">
+                <a:latin typeface="Arial" panose="020B0604020202020204" pitchFamily="34" charset="0"/>
+                <a:cs typeface="Arial" panose="020B0604020202020204" pitchFamily="34" charset="0"/>
+              </a:rPr>
+              <a:t> </a:t>
+            </a:r>
+            <a:r>
+              <a:rPr lang="es-CO" sz="1200" noProof="0" dirty="0" err="1">
+                <a:latin typeface="Arial" panose="020B0604020202020204" pitchFamily="34" charset="0"/>
+                <a:cs typeface="Arial" panose="020B0604020202020204" pitchFamily="34" charset="0"/>
+              </a:rPr>
+              <a:t>scaling</a:t>
+            </a:r>
+            <a:r>
+              <a:rPr lang="es-CO" sz="1200" noProof="0" dirty="0">
+                <a:latin typeface="Arial" panose="020B0604020202020204" pitchFamily="34" charset="0"/>
+                <a:cs typeface="Arial" panose="020B0604020202020204" pitchFamily="34" charset="0"/>
+              </a:rPr>
+              <a:t> y ver cuales son los valores que favorecen más esta </a:t>
+            </a:r>
+            <a:r>
+              <a:rPr lang="es-CO" sz="1200" noProof="0" dirty="0" err="1">
+                <a:latin typeface="Arial" panose="020B0604020202020204" pitchFamily="34" charset="0"/>
+                <a:cs typeface="Arial" panose="020B0604020202020204" pitchFamily="34" charset="0"/>
+              </a:rPr>
+              <a:t>waveguide</a:t>
+            </a:r>
+            <a:r>
+              <a:rPr lang="es-CO" sz="1200" noProof="0" dirty="0">
+                <a:latin typeface="Arial" panose="020B0604020202020204" pitchFamily="34" charset="0"/>
+                <a:cs typeface="Arial" panose="020B0604020202020204" pitchFamily="34" charset="0"/>
+              </a:rPr>
+              <a:t>. Se tomaron valores de 20, 40 y 50 de </a:t>
+            </a:r>
+            <a:r>
+              <a:rPr lang="es-CO" sz="1200" noProof="0" dirty="0" err="1">
+                <a:latin typeface="Arial" panose="020B0604020202020204" pitchFamily="34" charset="0"/>
+                <a:cs typeface="Arial" panose="020B0604020202020204" pitchFamily="34" charset="0"/>
+              </a:rPr>
+              <a:t>grid</a:t>
+            </a:r>
+            <a:r>
+              <a:rPr lang="es-CO" sz="1200" noProof="0" dirty="0">
+                <a:latin typeface="Arial" panose="020B0604020202020204" pitchFamily="34" charset="0"/>
+                <a:cs typeface="Arial" panose="020B0604020202020204" pitchFamily="34" charset="0"/>
+              </a:rPr>
+              <a:t> </a:t>
+            </a:r>
+            <a:r>
+              <a:rPr lang="es-CO" sz="1200" noProof="0" dirty="0" err="1">
+                <a:latin typeface="Arial" panose="020B0604020202020204" pitchFamily="34" charset="0"/>
+                <a:cs typeface="Arial" panose="020B0604020202020204" pitchFamily="34" charset="0"/>
+              </a:rPr>
+              <a:t>resolution</a:t>
+            </a:r>
+            <a:r>
+              <a:rPr lang="es-CO" sz="1200" noProof="0" dirty="0">
+                <a:latin typeface="Arial" panose="020B0604020202020204" pitchFamily="34" charset="0"/>
+                <a:cs typeface="Arial" panose="020B0604020202020204" pitchFamily="34" charset="0"/>
+              </a:rPr>
+              <a:t>. </a:t>
+            </a:r>
+          </a:p>
+          <a:p>
+            <a:pPr algn="just"/>
+            <a:endParaRPr lang="es-CO" sz="1200" dirty="0">
+              <a:latin typeface="Arial" panose="020B0604020202020204" pitchFamily="34" charset="0"/>
+              <a:cs typeface="Arial" panose="020B0604020202020204" pitchFamily="34" charset="0"/>
+            </a:endParaRPr>
+          </a:p>
+          <a:p>
+            <a:pPr algn="just"/>
+            <a:r>
+              <a:rPr lang="es-CO" sz="1200" noProof="0" dirty="0">
+                <a:latin typeface="Arial" panose="020B0604020202020204" pitchFamily="34" charset="0"/>
+                <a:cs typeface="Arial" panose="020B0604020202020204" pitchFamily="34" charset="0"/>
+              </a:rPr>
+              <a:t>Vemos que para 20 tenemos casi en toda la escala escogida el mismo índice efectivo, mientras que para valores más altos no tanto. Teniendo en cuenta el menor costo computacional y tiempo se escoge el valore de 1.30 para el </a:t>
+            </a:r>
+            <a:r>
+              <a:rPr lang="es-CO" sz="1200" noProof="0" dirty="0" err="1">
+                <a:latin typeface="Arial" panose="020B0604020202020204" pitchFamily="34" charset="0"/>
+                <a:cs typeface="Arial" panose="020B0604020202020204" pitchFamily="34" charset="0"/>
+              </a:rPr>
+              <a:t>max</a:t>
+            </a:r>
+            <a:r>
+              <a:rPr lang="es-CO" sz="1200" dirty="0">
+                <a:latin typeface="Arial" panose="020B0604020202020204" pitchFamily="34" charset="0"/>
+                <a:cs typeface="Arial" panose="020B0604020202020204" pitchFamily="34" charset="0"/>
+              </a:rPr>
+              <a:t> </a:t>
+            </a:r>
+            <a:r>
+              <a:rPr lang="es-CO" sz="1200" dirty="0" err="1">
+                <a:latin typeface="Arial" panose="020B0604020202020204" pitchFamily="34" charset="0"/>
+                <a:cs typeface="Arial" panose="020B0604020202020204" pitchFamily="34" charset="0"/>
+              </a:rPr>
+              <a:t>grid</a:t>
+            </a:r>
+            <a:r>
+              <a:rPr lang="es-CO" sz="1200" dirty="0">
+                <a:latin typeface="Arial" panose="020B0604020202020204" pitchFamily="34" charset="0"/>
+                <a:cs typeface="Arial" panose="020B0604020202020204" pitchFamily="34" charset="0"/>
+              </a:rPr>
+              <a:t> </a:t>
+            </a:r>
+            <a:r>
+              <a:rPr lang="es-CO" sz="1200" dirty="0" err="1">
+                <a:latin typeface="Arial" panose="020B0604020202020204" pitchFamily="34" charset="0"/>
+                <a:cs typeface="Arial" panose="020B0604020202020204" pitchFamily="34" charset="0"/>
+              </a:rPr>
+              <a:t>scaling</a:t>
+            </a:r>
+            <a:r>
+              <a:rPr lang="es-CO" sz="1200" dirty="0">
+                <a:latin typeface="Arial" panose="020B0604020202020204" pitchFamily="34" charset="0"/>
+                <a:cs typeface="Arial" panose="020B0604020202020204" pitchFamily="34" charset="0"/>
+              </a:rPr>
+              <a:t>, de manera que se tendrían las mismas especificaciones que para el caso anterior. A comparación del caso anterior, vemos que se podrían escoger diferentes valores de </a:t>
+            </a:r>
+            <a:r>
+              <a:rPr lang="es-CO" sz="1200" dirty="0" err="1">
+                <a:latin typeface="Arial" panose="020B0604020202020204" pitchFamily="34" charset="0"/>
+                <a:cs typeface="Arial" panose="020B0604020202020204" pitchFamily="34" charset="0"/>
+              </a:rPr>
+              <a:t>max</a:t>
+            </a:r>
+            <a:r>
+              <a:rPr lang="es-CO" sz="1200" dirty="0">
+                <a:latin typeface="Arial" panose="020B0604020202020204" pitchFamily="34" charset="0"/>
+                <a:cs typeface="Arial" panose="020B0604020202020204" pitchFamily="34" charset="0"/>
+              </a:rPr>
+              <a:t> </a:t>
+            </a:r>
+            <a:r>
+              <a:rPr lang="es-CO" sz="1200" dirty="0" err="1">
+                <a:latin typeface="Arial" panose="020B0604020202020204" pitchFamily="34" charset="0"/>
+                <a:cs typeface="Arial" panose="020B0604020202020204" pitchFamily="34" charset="0"/>
+              </a:rPr>
+              <a:t>grid</a:t>
+            </a:r>
+            <a:r>
+              <a:rPr lang="es-CO" sz="1200" dirty="0">
+                <a:latin typeface="Arial" panose="020B0604020202020204" pitchFamily="34" charset="0"/>
+                <a:cs typeface="Arial" panose="020B0604020202020204" pitchFamily="34" charset="0"/>
+              </a:rPr>
+              <a:t> para e mismo valor de 20 de </a:t>
+            </a:r>
+            <a:r>
+              <a:rPr lang="es-CO" sz="1200" dirty="0" err="1">
+                <a:latin typeface="Arial" panose="020B0604020202020204" pitchFamily="34" charset="0"/>
+                <a:cs typeface="Arial" panose="020B0604020202020204" pitchFamily="34" charset="0"/>
+              </a:rPr>
+              <a:t>grid</a:t>
+            </a:r>
+            <a:r>
+              <a:rPr lang="es-CO" sz="1200" dirty="0">
+                <a:latin typeface="Arial" panose="020B0604020202020204" pitchFamily="34" charset="0"/>
+                <a:cs typeface="Arial" panose="020B0604020202020204" pitchFamily="34" charset="0"/>
+              </a:rPr>
+              <a:t> </a:t>
+            </a:r>
+            <a:r>
+              <a:rPr lang="es-CO" sz="1200" dirty="0" err="1">
+                <a:latin typeface="Arial" panose="020B0604020202020204" pitchFamily="34" charset="0"/>
+                <a:cs typeface="Arial" panose="020B0604020202020204" pitchFamily="34" charset="0"/>
+              </a:rPr>
+              <a:t>resolution</a:t>
+            </a:r>
+            <a:r>
+              <a:rPr lang="es-CO" sz="1200" dirty="0">
+                <a:latin typeface="Arial" panose="020B0604020202020204" pitchFamily="34" charset="0"/>
+                <a:cs typeface="Arial" panose="020B0604020202020204" pitchFamily="34" charset="0"/>
+              </a:rPr>
+              <a:t>, así que se podrían simular muchos más puntos cuando hay cambios de índice de refracción sin que cambie el índice efectivo o adicionar más </a:t>
+            </a:r>
+            <a:r>
+              <a:rPr lang="es-CO" sz="1200" dirty="0" err="1">
+                <a:latin typeface="Arial" panose="020B0604020202020204" pitchFamily="34" charset="0"/>
+                <a:cs typeface="Arial" panose="020B0604020202020204" pitchFamily="34" charset="0"/>
+              </a:rPr>
+              <a:t>grid</a:t>
+            </a:r>
+            <a:r>
+              <a:rPr lang="es-CO" sz="1200" dirty="0">
+                <a:latin typeface="Arial" panose="020B0604020202020204" pitchFamily="34" charset="0"/>
+                <a:cs typeface="Arial" panose="020B0604020202020204" pitchFamily="34" charset="0"/>
+              </a:rPr>
+              <a:t> </a:t>
+            </a:r>
+            <a:r>
+              <a:rPr lang="es-CO" sz="1200" dirty="0" err="1">
+                <a:latin typeface="Arial" panose="020B0604020202020204" pitchFamily="34" charset="0"/>
+                <a:cs typeface="Arial" panose="020B0604020202020204" pitchFamily="34" charset="0"/>
+              </a:rPr>
+              <a:t>resolution</a:t>
+            </a:r>
+            <a:r>
+              <a:rPr lang="es-CO" sz="1200" dirty="0">
+                <a:latin typeface="Arial" panose="020B0604020202020204" pitchFamily="34" charset="0"/>
+                <a:cs typeface="Arial" panose="020B0604020202020204" pitchFamily="34" charset="0"/>
+              </a:rPr>
+              <a:t>. </a:t>
+            </a:r>
+          </a:p>
+          <a:p>
+            <a:pPr algn="just"/>
+            <a:endParaRPr lang="es-CO" sz="1200" noProof="0" dirty="0">
+              <a:latin typeface="Arial" panose="020B0604020202020204" pitchFamily="34" charset="0"/>
+              <a:cs typeface="Arial" panose="020B0604020202020204" pitchFamily="34" charset="0"/>
+            </a:endParaRPr>
+          </a:p>
+          <a:p>
+            <a:pPr algn="just"/>
+            <a:endParaRPr lang="es-CO" sz="1200" noProof="0" dirty="0">
+              <a:latin typeface="Arial" panose="020B0604020202020204" pitchFamily="34" charset="0"/>
+              <a:cs typeface="Arial" panose="020B0604020202020204" pitchFamily="34" charset="0"/>
+            </a:endParaRPr>
+          </a:p>
+          <a:p>
+            <a:pPr algn="just"/>
+            <a:endParaRPr lang="es-CO" sz="1200" dirty="0">
+              <a:latin typeface="Arial" panose="020B0604020202020204" pitchFamily="34" charset="0"/>
+              <a:cs typeface="Arial" panose="020B0604020202020204" pitchFamily="34" charset="0"/>
+            </a:endParaRPr>
+          </a:p>
+          <a:p>
+            <a:pPr algn="just"/>
+            <a:endParaRPr lang="es-CO" sz="1200" noProof="0" dirty="0">
+              <a:latin typeface="Arial" panose="020B0604020202020204" pitchFamily="34" charset="0"/>
+              <a:cs typeface="Arial" panose="020B0604020202020204" pitchFamily="34" charset="0"/>
+            </a:endParaRPr>
+          </a:p>
+          <a:p>
+            <a:pPr algn="just"/>
+            <a:endParaRPr lang="es-CO" sz="1200" dirty="0">
+              <a:latin typeface="Arial" panose="020B0604020202020204" pitchFamily="34" charset="0"/>
+              <a:cs typeface="Arial" panose="020B0604020202020204" pitchFamily="34" charset="0"/>
+            </a:endParaRPr>
+          </a:p>
+          <a:p>
+            <a:pPr algn="just"/>
+            <a:endParaRPr lang="es-CO" sz="1200" noProof="0" dirty="0">
+              <a:latin typeface="Arial" panose="020B0604020202020204" pitchFamily="34" charset="0"/>
+              <a:cs typeface="Arial" panose="020B0604020202020204" pitchFamily="34" charset="0"/>
+            </a:endParaRPr>
+          </a:p>
+          <a:p>
+            <a:pPr algn="just"/>
+            <a:endParaRPr lang="es-CO" sz="1200" dirty="0">
+              <a:latin typeface="Arial" panose="020B0604020202020204" pitchFamily="34" charset="0"/>
+              <a:cs typeface="Arial" panose="020B0604020202020204" pitchFamily="34" charset="0"/>
+            </a:endParaRPr>
+          </a:p>
+          <a:p>
+            <a:pPr algn="just"/>
+            <a:endParaRPr lang="es-CO" sz="1200" noProof="0" dirty="0">
+              <a:latin typeface="Arial" panose="020B0604020202020204" pitchFamily="34" charset="0"/>
+              <a:cs typeface="Arial" panose="020B0604020202020204" pitchFamily="34" charset="0"/>
+            </a:endParaRPr>
+          </a:p>
+          <a:p>
+            <a:pPr algn="just"/>
+            <a:endParaRPr lang="es-CO" sz="1200" dirty="0">
+              <a:latin typeface="Arial" panose="020B0604020202020204" pitchFamily="34" charset="0"/>
+              <a:cs typeface="Arial" panose="020B0604020202020204" pitchFamily="34" charset="0"/>
+            </a:endParaRPr>
+          </a:p>
+          <a:p>
+            <a:pPr algn="just"/>
+            <a:endParaRPr lang="es-CO" sz="1200" noProof="0" dirty="0">
+              <a:latin typeface="Arial" panose="020B0604020202020204" pitchFamily="34" charset="0"/>
+              <a:cs typeface="Arial" panose="020B0604020202020204" pitchFamily="34" charset="0"/>
+            </a:endParaRPr>
+          </a:p>
+          <a:p>
+            <a:pPr algn="just"/>
+            <a:endParaRPr lang="es-CO" sz="1200" dirty="0">
+              <a:latin typeface="Arial" panose="020B0604020202020204" pitchFamily="34" charset="0"/>
+              <a:cs typeface="Arial" panose="020B0604020202020204" pitchFamily="34" charset="0"/>
+            </a:endParaRPr>
+          </a:p>
+          <a:p>
+            <a:pPr algn="just"/>
+            <a:endParaRPr lang="es-CO" sz="1200" noProof="0" dirty="0">
+              <a:latin typeface="Arial" panose="020B0604020202020204" pitchFamily="34" charset="0"/>
+              <a:cs typeface="Arial" panose="020B0604020202020204" pitchFamily="34" charset="0"/>
+            </a:endParaRPr>
+          </a:p>
+          <a:p>
+            <a:pPr algn="just"/>
+            <a:endParaRPr lang="es-CO" sz="1200" noProof="0" dirty="0">
+              <a:latin typeface="Arial" panose="020B0604020202020204" pitchFamily="34" charset="0"/>
+              <a:cs typeface="Arial" panose="020B0604020202020204" pitchFamily="34" charset="0"/>
+            </a:endParaRPr>
+          </a:p>
+          <a:p>
+            <a:pPr algn="just"/>
+            <a:endParaRPr lang="es-CO" sz="1200" noProof="0" dirty="0">
+              <a:latin typeface="Arial" panose="020B0604020202020204" pitchFamily="34" charset="0"/>
+              <a:cs typeface="Arial" panose="020B0604020202020204" pitchFamily="34" charset="0"/>
+            </a:endParaRPr>
+          </a:p>
+          <a:p>
+            <a:pPr algn="just"/>
+            <a:endParaRPr lang="es-CO" sz="1200" noProof="0" dirty="0">
+              <a:latin typeface="Arial" panose="020B0604020202020204" pitchFamily="34" charset="0"/>
+              <a:cs typeface="Arial" panose="020B0604020202020204" pitchFamily="34" charset="0"/>
+            </a:endParaRPr>
           </a:p>
         </p:txBody>
       </p:sp>
+      <p:pic>
+        <p:nvPicPr>
+          <p:cNvPr id="4" name="Imagen 3">
+            <a:extLst>
+              <a:ext uri="{FF2B5EF4-FFF2-40B4-BE49-F238E27FC236}">
+                <a16:creationId xmlns:a16="http://schemas.microsoft.com/office/drawing/2014/main" id="{63105ECD-34F3-8AF2-69E7-3843C8ABAB28}"/>
+              </a:ext>
+            </a:extLst>
+          </p:cNvPr>
+          <p:cNvPicPr>
+            <a:picLocks noChangeAspect="1"/>
+          </p:cNvPicPr>
+          <p:nvPr/>
+        </p:nvPicPr>
+        <p:blipFill>
+          <a:blip r:embed="rId5"/>
+          <a:stretch>
+            <a:fillRect/>
+          </a:stretch>
+        </p:blipFill>
+        <p:spPr>
+          <a:xfrm>
+            <a:off x="381159" y="1203930"/>
+            <a:ext cx="3960000" cy="2176842"/>
+          </a:xfrm>
+          <a:prstGeom prst="rect">
+            <a:avLst/>
+          </a:prstGeom>
+        </p:spPr>
+      </p:pic>
+      <p:pic>
+        <p:nvPicPr>
+          <p:cNvPr id="8" name="Imagen 7">
+            <a:extLst>
+              <a:ext uri="{FF2B5EF4-FFF2-40B4-BE49-F238E27FC236}">
+                <a16:creationId xmlns:a16="http://schemas.microsoft.com/office/drawing/2014/main" id="{6C8393BB-9FAE-5E11-5052-2877EF0E73DC}"/>
+              </a:ext>
+            </a:extLst>
+          </p:cNvPr>
+          <p:cNvPicPr>
+            <a:picLocks noChangeAspect="1"/>
+          </p:cNvPicPr>
+          <p:nvPr/>
+        </p:nvPicPr>
+        <p:blipFill>
+          <a:blip r:embed="rId6"/>
+          <a:stretch>
+            <a:fillRect/>
+          </a:stretch>
+        </p:blipFill>
+        <p:spPr>
+          <a:xfrm>
+            <a:off x="381159" y="3515472"/>
+            <a:ext cx="3960000" cy="2336965"/>
+          </a:xfrm>
+          <a:prstGeom prst="rect">
+            <a:avLst/>
+          </a:prstGeom>
+        </p:spPr>
+      </p:pic>
+      <p:pic>
+        <p:nvPicPr>
+          <p:cNvPr id="13" name="Imagen 12">
+            <a:extLst>
+              <a:ext uri="{FF2B5EF4-FFF2-40B4-BE49-F238E27FC236}">
+                <a16:creationId xmlns:a16="http://schemas.microsoft.com/office/drawing/2014/main" id="{5198C039-470B-0805-480D-5FC2784296CD}"/>
+              </a:ext>
+            </a:extLst>
+          </p:cNvPr>
+          <p:cNvPicPr>
+            <a:picLocks noChangeAspect="1"/>
+          </p:cNvPicPr>
+          <p:nvPr/>
+        </p:nvPicPr>
+        <p:blipFill>
+          <a:blip r:embed="rId7"/>
+          <a:stretch>
+            <a:fillRect/>
+          </a:stretch>
+        </p:blipFill>
+        <p:spPr>
+          <a:xfrm>
+            <a:off x="6497193" y="3271660"/>
+            <a:ext cx="3505200" cy="2614990"/>
+          </a:xfrm>
+          <a:prstGeom prst="rect">
+            <a:avLst/>
+          </a:prstGeom>
+        </p:spPr>
+      </p:pic>
     </p:spTree>
     <p:extLst>
       <p:ext uri="{BB962C8B-B14F-4D97-AF65-F5344CB8AC3E}">
-        <p14:creationId xmlns:p14="http://schemas.microsoft.com/office/powerpoint/2010/main" val="730501311"/>
+        <p14:creationId xmlns:p14="http://schemas.microsoft.com/office/powerpoint/2010/main" val="1599155455"/>
       </p:ext>
     </p:extLst>
   </p:cSld>
@@ -5291,7 +9118,7 @@
 </p:sld>
 </file>
 
-<file path=ppt/slides/slide4.xml><?xml version="1.0" encoding="utf-8"?>
+<file path=ppt/slides/slide5.xml><?xml version="1.0" encoding="utf-8"?>
 <p:sld xmlns:a="http://schemas.openxmlformats.org/drawingml/2006/main" xmlns:r="http://schemas.openxmlformats.org/officeDocument/2006/relationships" xmlns:p="http://schemas.openxmlformats.org/presentationml/2006/main">
   <p:cSld>
     <p:spTree>
@@ -5354,20 +9181,56 @@
               </a:spcBef>
             </a:pPr>
             <a:r>
-              <a:rPr lang="en-US" sz="2500" dirty="0"/>
-              <a:t>Learning outcome #2 – Width dependence</a:t>
+              <a:rPr lang="es-CO" sz="2500" noProof="0" dirty="0" err="1"/>
+              <a:t>Learning</a:t>
+            </a:r>
+            <a:r>
+              <a:rPr lang="es-CO" sz="2500" noProof="0" dirty="0"/>
+              <a:t> </a:t>
+            </a:r>
+            <a:r>
+              <a:rPr lang="es-CO" sz="2500" noProof="0" dirty="0" err="1"/>
+              <a:t>outcome</a:t>
+            </a:r>
+            <a:r>
+              <a:rPr lang="es-CO" sz="2500" noProof="0" dirty="0"/>
+              <a:t> #2 – </a:t>
+            </a:r>
+            <a:r>
+              <a:rPr lang="es-CO" sz="2500" noProof="0" dirty="0" err="1"/>
+              <a:t>Width</a:t>
+            </a:r>
+            <a:r>
+              <a:rPr lang="es-CO" sz="2500" noProof="0" dirty="0"/>
+              <a:t> </a:t>
+            </a:r>
+            <a:r>
+              <a:rPr lang="es-CO" sz="2500" noProof="0" dirty="0" err="1"/>
+              <a:t>dependence</a:t>
             </a:r>
             <a:br>
-              <a:rPr lang="es-ES" sz="2500" spc="-5" dirty="0">
+              <a:rPr lang="es-CO" sz="2500" spc="-5" noProof="0" dirty="0">
                 <a:latin typeface="+mj-lt"/>
                 <a:cs typeface="Lucida Sans"/>
               </a:rPr>
             </a:br>
             <a:r>
-              <a:rPr lang="en-US" b="0" dirty="0"/>
-              <a:t>Width 0.6 - 1.6 µm (step 0.1 µm) – Wavelength 1.55 µm </a:t>
-            </a:r>
-            <a:endParaRPr sz="2500" b="0" dirty="0">
+              <a:rPr lang="es-CO" b="0" noProof="0" dirty="0" err="1"/>
+              <a:t>Width</a:t>
+            </a:r>
+            <a:r>
+              <a:rPr lang="es-CO" b="0" noProof="0" dirty="0"/>
+              <a:t> 0.6 - 1.6 µm (step 0.1 µm) – </a:t>
+            </a:r>
+            <a:r>
+              <a:rPr lang="es-CO" b="0" noProof="0" dirty="0" err="1"/>
+              <a:t>Wavelength</a:t>
+            </a:r>
+            <a:r>
+              <a:rPr lang="es-CO" b="0" noProof="0" dirty="0"/>
+              <a:t> 1.55 µm </a:t>
+            </a:r>
+            <a:endParaRPr lang="es-CO" sz="2500" b="0" noProof="0" dirty="0">
               <a:latin typeface="+mj-lt"/>
               <a:cs typeface="Lucida Sans"/>
             </a:endParaRPr>
@@ -5432,10 +9295,10 @@
           <a:lstStyle/>
           <a:p>
             <a:fld id="{B6F15528-21DE-4FAA-801E-634DDDAF4B2B}" type="slidenum">
-              <a:rPr lang="es-ES" smtClean="0"/>
-              <a:t>4</a:t>
+              <a:rPr lang="es-CO" noProof="0" smtClean="0"/>
+              <a:t>5</a:t>
             </a:fld>
-            <a:endParaRPr lang="es-ES"/>
+            <a:endParaRPr lang="es-CO" noProof="0" dirty="0"/>
           </a:p>
         </p:txBody>
       </p:sp>
@@ -5466,7 +9329,7 @@
               </a:spcBef>
             </a:pPr>
             <a:r>
-              <a:rPr lang="es-ES" spc="-5" dirty="0"/>
+              <a:rPr lang="es-CO" spc="-5" noProof="0" dirty="0"/>
               <a:t>LAB 0.1. MODESOLVER</a:t>
             </a:r>
           </a:p>
@@ -5487,7 +9350,7 @@
         <p:spPr>
           <a:xfrm>
             <a:off x="609441" y="4860334"/>
-            <a:ext cx="11199971" cy="1200329"/>
+            <a:ext cx="11199971" cy="1569660"/>
           </a:xfrm>
           <a:prstGeom prst="rect">
             <a:avLst/>
@@ -5511,61 +9374,278 @@
           <a:p>
             <a:pPr algn="just"/>
             <a:r>
-              <a:rPr lang="en-US" sz="1200" dirty="0">
-                <a:latin typeface="Arial" panose="020B0604020202020204" pitchFamily="34" charset="0"/>
-                <a:cs typeface="Arial" panose="020B0604020202020204" pitchFamily="34" charset="0"/>
-              </a:rPr>
-              <a:t>Comment results (neff changes this way with width, polarization behavior, </a:t>
-            </a:r>
-            <a:r>
-              <a:rPr lang="en-US" sz="1200" dirty="0" err="1">
-                <a:latin typeface="Arial" panose="020B0604020202020204" pitchFamily="34" charset="0"/>
-                <a:cs typeface="Arial" panose="020B0604020202020204" pitchFamily="34" charset="0"/>
-              </a:rPr>
-              <a:t>etc</a:t>
-            </a:r>
-            <a:r>
-              <a:rPr lang="en-US" sz="1200" dirty="0">
-                <a:latin typeface="Arial" panose="020B0604020202020204" pitchFamily="34" charset="0"/>
-                <a:cs typeface="Arial" panose="020B0604020202020204" pitchFamily="34" charset="0"/>
-              </a:rPr>
-              <a:t>…)</a:t>
-            </a:r>
-          </a:p>
-          <a:p>
-            <a:pPr algn="just"/>
-            <a:endParaRPr lang="en-US" sz="1200" dirty="0">
-              <a:latin typeface="Arial" panose="020B0604020202020204" pitchFamily="34" charset="0"/>
-              <a:cs typeface="Arial" panose="020B0604020202020204" pitchFamily="34" charset="0"/>
-            </a:endParaRPr>
-          </a:p>
-          <a:p>
-            <a:pPr algn="just"/>
-            <a:endParaRPr lang="en-US" sz="1200" dirty="0">
-              <a:latin typeface="Arial" panose="020B0604020202020204" pitchFamily="34" charset="0"/>
-              <a:cs typeface="Arial" panose="020B0604020202020204" pitchFamily="34" charset="0"/>
-            </a:endParaRPr>
-          </a:p>
-          <a:p>
-            <a:pPr algn="just"/>
-            <a:endParaRPr lang="en-US" sz="1200" dirty="0">
-              <a:latin typeface="Arial" panose="020B0604020202020204" pitchFamily="34" charset="0"/>
-              <a:cs typeface="Arial" panose="020B0604020202020204" pitchFamily="34" charset="0"/>
-            </a:endParaRPr>
-          </a:p>
-          <a:p>
-            <a:pPr algn="just"/>
-            <a:endParaRPr lang="en-US" sz="1200" dirty="0">
-              <a:latin typeface="Arial" panose="020B0604020202020204" pitchFamily="34" charset="0"/>
-              <a:cs typeface="Arial" panose="020B0604020202020204" pitchFamily="34" charset="0"/>
-            </a:endParaRPr>
-          </a:p>
-          <a:p>
-            <a:pPr algn="just"/>
-            <a:endParaRPr lang="en-US" sz="1200" dirty="0">
-              <a:latin typeface="Arial" panose="020B0604020202020204" pitchFamily="34" charset="0"/>
-              <a:cs typeface="Arial" panose="020B0604020202020204" pitchFamily="34" charset="0"/>
-            </a:endParaRPr>
+              <a:rPr lang="es-CO" sz="1200" noProof="0" dirty="0">
+                <a:latin typeface="Arial" panose="020B0604020202020204" pitchFamily="34" charset="0"/>
+                <a:cs typeface="Arial" panose="020B0604020202020204" pitchFamily="34" charset="0"/>
+              </a:rPr>
+              <a:t>Vemos como a mayor ancho de la </a:t>
+            </a:r>
+            <a:r>
+              <a:rPr lang="es-CO" sz="1200" noProof="0" dirty="0" err="1">
+                <a:latin typeface="Arial" panose="020B0604020202020204" pitchFamily="34" charset="0"/>
+                <a:cs typeface="Arial" panose="020B0604020202020204" pitchFamily="34" charset="0"/>
+              </a:rPr>
+              <a:t>guia</a:t>
+            </a:r>
+            <a:r>
+              <a:rPr lang="es-CO" sz="1200" noProof="0" dirty="0">
+                <a:latin typeface="Arial" panose="020B0604020202020204" pitchFamily="34" charset="0"/>
+                <a:cs typeface="Arial" panose="020B0604020202020204" pitchFamily="34" charset="0"/>
+              </a:rPr>
+              <a:t> de onda aumentan los modos de propagación, pues con 0.6 </a:t>
+            </a:r>
+            <a:r>
+              <a:rPr lang="es-CO" sz="1200" noProof="0" dirty="0" err="1">
+                <a:latin typeface="Arial" panose="020B0604020202020204" pitchFamily="34" charset="0"/>
+                <a:cs typeface="Arial" panose="020B0604020202020204" pitchFamily="34" charset="0"/>
+              </a:rPr>
+              <a:t>um</a:t>
+            </a:r>
+            <a:r>
+              <a:rPr lang="es-CO" sz="1200" noProof="0" dirty="0">
+                <a:latin typeface="Arial" panose="020B0604020202020204" pitchFamily="34" charset="0"/>
+                <a:cs typeface="Arial" panose="020B0604020202020204" pitchFamily="34" charset="0"/>
+              </a:rPr>
+              <a:t> </a:t>
+            </a:r>
+            <a:r>
+              <a:rPr lang="es-CO" sz="1200" noProof="0" dirty="0" err="1">
+                <a:latin typeface="Arial" panose="020B0604020202020204" pitchFamily="34" charset="0"/>
+                <a:cs typeface="Arial" panose="020B0604020202020204" pitchFamily="34" charset="0"/>
+              </a:rPr>
+              <a:t>temenos</a:t>
+            </a:r>
+            <a:r>
+              <a:rPr lang="es-CO" sz="1200" noProof="0" dirty="0">
+                <a:latin typeface="Arial" panose="020B0604020202020204" pitchFamily="34" charset="0"/>
+                <a:cs typeface="Arial" panose="020B0604020202020204" pitchFamily="34" charset="0"/>
+              </a:rPr>
+              <a:t> solo los modos </a:t>
+            </a:r>
+            <a:r>
+              <a:rPr lang="es-CO" sz="1200" noProof="0" dirty="0" err="1">
+                <a:latin typeface="Arial" panose="020B0604020202020204" pitchFamily="34" charset="0"/>
+                <a:cs typeface="Arial" panose="020B0604020202020204" pitchFamily="34" charset="0"/>
+              </a:rPr>
+              <a:t>fundamentals</a:t>
+            </a:r>
+            <a:r>
+              <a:rPr lang="es-CO" sz="1200" noProof="0" dirty="0">
+                <a:latin typeface="Arial" panose="020B0604020202020204" pitchFamily="34" charset="0"/>
+                <a:cs typeface="Arial" panose="020B0604020202020204" pitchFamily="34" charset="0"/>
+              </a:rPr>
+              <a:t> </a:t>
+            </a:r>
+            <a:r>
+              <a:rPr lang="es-CO" sz="1200" noProof="0" dirty="0" err="1">
+                <a:latin typeface="Arial" panose="020B0604020202020204" pitchFamily="34" charset="0"/>
+                <a:cs typeface="Arial" panose="020B0604020202020204" pitchFamily="34" charset="0"/>
+              </a:rPr>
+              <a:t>propagandose</a:t>
+            </a:r>
+            <a:r>
+              <a:rPr lang="es-CO" sz="1200" noProof="0" dirty="0">
+                <a:latin typeface="Arial" panose="020B0604020202020204" pitchFamily="34" charset="0"/>
+                <a:cs typeface="Arial" panose="020B0604020202020204" pitchFamily="34" charset="0"/>
+              </a:rPr>
+              <a:t>, de manera que, es una </a:t>
+            </a:r>
+            <a:r>
+              <a:rPr lang="es-CO" sz="1200" noProof="0" dirty="0" err="1">
+                <a:latin typeface="Arial" panose="020B0604020202020204" pitchFamily="34" charset="0"/>
+                <a:cs typeface="Arial" panose="020B0604020202020204" pitchFamily="34" charset="0"/>
+              </a:rPr>
+              <a:t>guia</a:t>
+            </a:r>
+            <a:r>
+              <a:rPr lang="es-CO" sz="1200" noProof="0" dirty="0">
+                <a:latin typeface="Arial" panose="020B0604020202020204" pitchFamily="34" charset="0"/>
+                <a:cs typeface="Arial" panose="020B0604020202020204" pitchFamily="34" charset="0"/>
+              </a:rPr>
+              <a:t> monomodal si controlamos la polarización con la que entra la luz, es decir que solo ingrese luz con polarización TE o TM. </a:t>
+            </a:r>
+            <a:r>
+              <a:rPr lang="es-CO" sz="1200" noProof="0" dirty="0" err="1">
+                <a:latin typeface="Arial" panose="020B0604020202020204" pitchFamily="34" charset="0"/>
+                <a:cs typeface="Arial" panose="020B0604020202020204" pitchFamily="34" charset="0"/>
+              </a:rPr>
+              <a:t>Tambien</a:t>
+            </a:r>
+            <a:r>
+              <a:rPr lang="es-CO" sz="1200" noProof="0" dirty="0">
+                <a:latin typeface="Arial" panose="020B0604020202020204" pitchFamily="34" charset="0"/>
+                <a:cs typeface="Arial" panose="020B0604020202020204" pitchFamily="34" charset="0"/>
+              </a:rPr>
+              <a:t> vemos como a medida que aumenta el ancho, aumenta el valor del </a:t>
+            </a:r>
+            <a:r>
+              <a:rPr lang="es-CO" sz="1200" noProof="0" dirty="0" err="1">
+                <a:latin typeface="Arial" panose="020B0604020202020204" pitchFamily="34" charset="0"/>
+                <a:cs typeface="Arial" panose="020B0604020202020204" pitchFamily="34" charset="0"/>
+              </a:rPr>
+              <a:t>indice</a:t>
+            </a:r>
+            <a:r>
+              <a:rPr lang="es-CO" sz="1200" noProof="0" dirty="0">
+                <a:latin typeface="Arial" panose="020B0604020202020204" pitchFamily="34" charset="0"/>
+                <a:cs typeface="Arial" panose="020B0604020202020204" pitchFamily="34" charset="0"/>
+              </a:rPr>
+              <a:t> efectivo, pasando de 1.51172534 para el primer modo hasta 1.63222705, teniendo una diferencia de 0.121 desde el </a:t>
+            </a:r>
+            <a:r>
+              <a:rPr lang="es-CO" sz="1200" noProof="0" dirty="0" err="1">
+                <a:latin typeface="Arial" panose="020B0604020202020204" pitchFamily="34" charset="0"/>
+                <a:cs typeface="Arial" panose="020B0604020202020204" pitchFamily="34" charset="0"/>
+              </a:rPr>
+              <a:t>indice</a:t>
+            </a:r>
+            <a:r>
+              <a:rPr lang="es-CO" sz="1200" noProof="0" dirty="0">
+                <a:latin typeface="Arial" panose="020B0604020202020204" pitchFamily="34" charset="0"/>
+                <a:cs typeface="Arial" panose="020B0604020202020204" pitchFamily="34" charset="0"/>
+              </a:rPr>
+              <a:t> inicial al final, este aumento nos muestra que al ampliar la sección transversal en x el modo se confina más dentro de la </a:t>
+            </a:r>
+            <a:r>
+              <a:rPr lang="es-CO" sz="1200" noProof="0" dirty="0" err="1">
+                <a:latin typeface="Arial" panose="020B0604020202020204" pitchFamily="34" charset="0"/>
+                <a:cs typeface="Arial" panose="020B0604020202020204" pitchFamily="34" charset="0"/>
+              </a:rPr>
+              <a:t>guia</a:t>
+            </a:r>
+            <a:r>
+              <a:rPr lang="es-CO" sz="1200" noProof="0" dirty="0">
+                <a:latin typeface="Arial" panose="020B0604020202020204" pitchFamily="34" charset="0"/>
+                <a:cs typeface="Arial" panose="020B0604020202020204" pitchFamily="34" charset="0"/>
+              </a:rPr>
+              <a:t> de onda. Otro </a:t>
+            </a:r>
+            <a:r>
+              <a:rPr lang="es-CO" sz="1200" noProof="0" dirty="0" err="1">
+                <a:latin typeface="Arial" panose="020B0604020202020204" pitchFamily="34" charset="0"/>
+                <a:cs typeface="Arial" panose="020B0604020202020204" pitchFamily="34" charset="0"/>
+              </a:rPr>
+              <a:t>aspect</a:t>
+            </a:r>
+            <a:r>
+              <a:rPr lang="es-CO" sz="1200" noProof="0" dirty="0">
+                <a:latin typeface="Arial" panose="020B0604020202020204" pitchFamily="34" charset="0"/>
+                <a:cs typeface="Arial" panose="020B0604020202020204" pitchFamily="34" charset="0"/>
+              </a:rPr>
+              <a:t> es que, al generarse ese aumento, provoca que para una medida de 1.6 </a:t>
+            </a:r>
+            <a:r>
+              <a:rPr lang="es-CO" sz="1200" noProof="0" dirty="0" err="1">
+                <a:latin typeface="Arial" panose="020B0604020202020204" pitchFamily="34" charset="0"/>
+                <a:cs typeface="Arial" panose="020B0604020202020204" pitchFamily="34" charset="0"/>
+              </a:rPr>
+              <a:t>um</a:t>
+            </a:r>
+            <a:r>
+              <a:rPr lang="es-CO" sz="1200" noProof="0" dirty="0">
+                <a:latin typeface="Arial" panose="020B0604020202020204" pitchFamily="34" charset="0"/>
+                <a:cs typeface="Arial" panose="020B0604020202020204" pitchFamily="34" charset="0"/>
+              </a:rPr>
+              <a:t> de ancho se empiecen a propagar otros modos, en este caso el modo 2 que es TE, y lo que nos muestra es que a medida que ensanchemos la </a:t>
+            </a:r>
+            <a:r>
+              <a:rPr lang="es-CO" sz="1200" noProof="0" dirty="0" err="1">
+                <a:latin typeface="Arial" panose="020B0604020202020204" pitchFamily="34" charset="0"/>
+                <a:cs typeface="Arial" panose="020B0604020202020204" pitchFamily="34" charset="0"/>
+              </a:rPr>
+              <a:t>seccion</a:t>
+            </a:r>
+            <a:r>
+              <a:rPr lang="es-CO" sz="1200" noProof="0" dirty="0">
+                <a:latin typeface="Arial" panose="020B0604020202020204" pitchFamily="34" charset="0"/>
+                <a:cs typeface="Arial" panose="020B0604020202020204" pitchFamily="34" charset="0"/>
+              </a:rPr>
+              <a:t> transversal, más modos se observarán, estos empezarán a viajar por el </a:t>
+            </a:r>
+            <a:r>
+              <a:rPr lang="es-CO" sz="1200" noProof="0" dirty="0" err="1">
+                <a:latin typeface="Arial" panose="020B0604020202020204" pitchFamily="34" charset="0"/>
+                <a:cs typeface="Arial" panose="020B0604020202020204" pitchFamily="34" charset="0"/>
+              </a:rPr>
+              <a:t>cladding</a:t>
+            </a:r>
+            <a:r>
+              <a:rPr lang="es-CO" sz="1200" noProof="0" dirty="0">
+                <a:latin typeface="Arial" panose="020B0604020202020204" pitchFamily="34" charset="0"/>
+                <a:cs typeface="Arial" panose="020B0604020202020204" pitchFamily="34" charset="0"/>
+              </a:rPr>
+              <a:t> es decir </a:t>
+            </a:r>
+            <a:r>
+              <a:rPr lang="es-CO" sz="1200" noProof="0" dirty="0" err="1">
+                <a:latin typeface="Arial" panose="020B0604020202020204" pitchFamily="34" charset="0"/>
+                <a:cs typeface="Arial" panose="020B0604020202020204" pitchFamily="34" charset="0"/>
+              </a:rPr>
+              <a:t>estaran</a:t>
+            </a:r>
+            <a:r>
+              <a:rPr lang="es-CO" sz="1200" noProof="0" dirty="0">
+                <a:latin typeface="Arial" panose="020B0604020202020204" pitchFamily="34" charset="0"/>
+                <a:cs typeface="Arial" panose="020B0604020202020204" pitchFamily="34" charset="0"/>
+              </a:rPr>
+              <a:t> menos confinados y luego a medida que se siga aumentando la sección transversal viajarán más </a:t>
+            </a:r>
+            <a:r>
+              <a:rPr lang="es-CO" sz="1200" noProof="0" dirty="0" err="1">
+                <a:latin typeface="Arial" panose="020B0604020202020204" pitchFamily="34" charset="0"/>
+                <a:cs typeface="Arial" panose="020B0604020202020204" pitchFamily="34" charset="0"/>
+              </a:rPr>
+              <a:t>cconfinados</a:t>
+            </a:r>
+            <a:r>
+              <a:rPr lang="es-CO" sz="1200" noProof="0" dirty="0">
+                <a:latin typeface="Arial" panose="020B0604020202020204" pitchFamily="34" charset="0"/>
+                <a:cs typeface="Arial" panose="020B0604020202020204" pitchFamily="34" charset="0"/>
+              </a:rPr>
+              <a:t>, sin embargo vemos que no se propagaran muy confinados debido a que la diferencia entre los </a:t>
+            </a:r>
+            <a:r>
+              <a:rPr lang="es-CO" sz="1200" noProof="0" dirty="0" err="1">
+                <a:latin typeface="Arial" panose="020B0604020202020204" pitchFamily="34" charset="0"/>
+                <a:cs typeface="Arial" panose="020B0604020202020204" pitchFamily="34" charset="0"/>
+              </a:rPr>
+              <a:t>indices</a:t>
+            </a:r>
+            <a:r>
+              <a:rPr lang="es-CO" sz="1200" noProof="0" dirty="0">
+                <a:latin typeface="Arial" panose="020B0604020202020204" pitchFamily="34" charset="0"/>
+                <a:cs typeface="Arial" panose="020B0604020202020204" pitchFamily="34" charset="0"/>
+              </a:rPr>
+              <a:t> no es la suficiente como para que se </a:t>
+            </a:r>
+            <a:r>
+              <a:rPr lang="es-CO" sz="1200" noProof="0" dirty="0" err="1">
+                <a:latin typeface="Arial" panose="020B0604020202020204" pitchFamily="34" charset="0"/>
+                <a:cs typeface="Arial" panose="020B0604020202020204" pitchFamily="34" charset="0"/>
+              </a:rPr>
+              <a:t>propage</a:t>
+            </a:r>
+            <a:r>
+              <a:rPr lang="es-CO" sz="1200" noProof="0" dirty="0">
+                <a:latin typeface="Arial" panose="020B0604020202020204" pitchFamily="34" charset="0"/>
+                <a:cs typeface="Arial" panose="020B0604020202020204" pitchFamily="34" charset="0"/>
+              </a:rPr>
+              <a:t> por el </a:t>
+            </a:r>
+            <a:r>
+              <a:rPr lang="es-CO" sz="1200" noProof="0" dirty="0" err="1">
+                <a:latin typeface="Arial" panose="020B0604020202020204" pitchFamily="34" charset="0"/>
+                <a:cs typeface="Arial" panose="020B0604020202020204" pitchFamily="34" charset="0"/>
+              </a:rPr>
+              <a:t>core</a:t>
+            </a:r>
+            <a:r>
+              <a:rPr lang="es-CO" sz="1200" noProof="0" dirty="0">
+                <a:latin typeface="Arial" panose="020B0604020202020204" pitchFamily="34" charset="0"/>
+                <a:cs typeface="Arial" panose="020B0604020202020204" pitchFamily="34" charset="0"/>
+              </a:rPr>
+              <a:t>. </a:t>
+            </a:r>
           </a:p>
         </p:txBody>
       </p:sp>
@@ -5584,7 +9664,7 @@
         <p:spPr>
           <a:xfrm>
             <a:off x="609441" y="1418373"/>
-            <a:ext cx="11199971" cy="3306028"/>
+            <a:ext cx="11199971" cy="3284358"/>
           </a:xfrm>
           <a:prstGeom prst="rect">
             <a:avLst/>
@@ -5617,7 +9697,7 @@
           <a:lstStyle/>
           <a:p>
             <a:pPr algn="ctr"/>
-            <a:endParaRPr lang="en-US"/>
+            <a:endParaRPr lang="es-CO" noProof="0" dirty="0"/>
           </a:p>
         </p:txBody>
       </p:sp>
@@ -5651,27 +9731,75 @@
           <a:p>
             <a:pPr algn="ctr"/>
             <a:r>
-              <a:rPr lang="en-US" b="1" dirty="0"/>
+              <a:rPr lang="es-CO" b="1" noProof="0" dirty="0" err="1"/>
               <a:t>deep</a:t>
             </a:r>
             <a:r>
-              <a:rPr lang="en-US" dirty="0"/>
-              <a:t> waveguide</a:t>
-            </a:r>
+              <a:rPr lang="es-CO" noProof="0" dirty="0"/>
+              <a:t> </a:t>
+            </a:r>
+            <a:r>
+              <a:rPr lang="es-CO" noProof="0" dirty="0" err="1"/>
+              <a:t>waveguide</a:t>
+            </a:r>
+            <a:endParaRPr lang="es-CO" noProof="0" dirty="0"/>
           </a:p>
           <a:p>
             <a:pPr algn="ctr"/>
-            <a:endParaRPr lang="en-US" dirty="0"/>
+            <a:endParaRPr lang="es-CO" noProof="0" dirty="0"/>
           </a:p>
           <a:p>
             <a:pPr algn="ctr"/>
             <a:r>
-              <a:rPr lang="en-US" dirty="0"/>
-              <a:t>Paste plot here</a:t>
-            </a:r>
+              <a:rPr lang="es-CO" noProof="0" dirty="0"/>
+              <a:t>Paste </a:t>
+            </a:r>
+            <a:r>
+              <a:rPr lang="es-CO" noProof="0" dirty="0" err="1"/>
+              <a:t>plot</a:t>
+            </a:r>
+            <a:r>
+              <a:rPr lang="es-CO" noProof="0" dirty="0"/>
+              <a:t> </a:t>
+            </a:r>
+            <a:r>
+              <a:rPr lang="es-CO" noProof="0" dirty="0" err="1"/>
+              <a:t>here</a:t>
+            </a:r>
+            <a:endParaRPr lang="es-CO" noProof="0" dirty="0"/>
           </a:p>
         </p:txBody>
       </p:sp>
+      <p:pic>
+        <p:nvPicPr>
+          <p:cNvPr id="9" name="Imagen 8" descr="Gráfico, Gráfico de líneas&#10;&#10;El contenido generado por IA puede ser incorrecto.">
+            <a:extLst>
+              <a:ext uri="{FF2B5EF4-FFF2-40B4-BE49-F238E27FC236}">
+                <a16:creationId xmlns:a16="http://schemas.microsoft.com/office/drawing/2014/main" id="{AF9D2DA8-18A5-1B1F-B7B3-D07D9BD9B16D}"/>
+              </a:ext>
+            </a:extLst>
+          </p:cNvPr>
+          <p:cNvPicPr>
+            <a:picLocks noChangeAspect="1"/>
+          </p:cNvPicPr>
+          <p:nvPr/>
+        </p:nvPicPr>
+        <p:blipFill>
+          <a:blip r:embed="rId5"/>
+          <a:stretch>
+            <a:fillRect/>
+          </a:stretch>
+        </p:blipFill>
+        <p:spPr>
+          <a:xfrm>
+            <a:off x="3352800" y="1524000"/>
+            <a:ext cx="5295900" cy="3082970"/>
+          </a:xfrm>
+          <a:prstGeom prst="rect">
+            <a:avLst/>
+          </a:prstGeom>
+        </p:spPr>
+      </p:pic>
     </p:spTree>
     <p:extLst>
       <p:ext uri="{BB962C8B-B14F-4D97-AF65-F5344CB8AC3E}">
@@ -5685,7 +9813,7 @@
 </p:sld>
 </file>
 
-<file path=ppt/slides/slide5.xml><?xml version="1.0" encoding="utf-8"?>
+<file path=ppt/slides/slide6.xml><?xml version="1.0" encoding="utf-8"?>
 <p:sld xmlns:a="http://schemas.openxmlformats.org/drawingml/2006/main" xmlns:r="http://schemas.openxmlformats.org/officeDocument/2006/relationships" xmlns:p="http://schemas.openxmlformats.org/presentationml/2006/main">
   <p:cSld>
     <p:spTree>
@@ -5693,7 +9821,7 @@
         <p:cNvPr id="1" name="">
           <a:extLst>
             <a:ext uri="{FF2B5EF4-FFF2-40B4-BE49-F238E27FC236}">
-              <a16:creationId xmlns:a16="http://schemas.microsoft.com/office/drawing/2014/main" id="{9E1DA0F9-B230-D9FC-3CE7-03BD08CF54F7}"/>
+              <a16:creationId xmlns:a16="http://schemas.microsoft.com/office/drawing/2014/main" id="{C6CFDE26-0831-AE14-A0A4-8A79E15035ED}"/>
             </a:ext>
           </a:extLst>
         </p:cNvPr>
@@ -5708,387 +9836,120 @@
           <a:chExt cx="0" cy="0"/>
         </a:xfrm>
       </p:grpSpPr>
-      <mc:AlternateContent xmlns:mc="http://schemas.openxmlformats.org/markup-compatibility/2006">
-        <mc:Choice xmlns:a14="http://schemas.microsoft.com/office/drawing/2010/main" Requires="a14">
-          <p:sp>
-            <p:nvSpPr>
-              <p:cNvPr id="16" name="object 16">
-                <a:extLst>
-                  <a:ext uri="{FF2B5EF4-FFF2-40B4-BE49-F238E27FC236}">
-                    <a16:creationId xmlns:a16="http://schemas.microsoft.com/office/drawing/2014/main" id="{394400B4-EE16-8E85-AB54-E82FE3B29345}"/>
-                  </a:ext>
-                </a:extLst>
-              </p:cNvPr>
-              <p:cNvSpPr txBox="1">
-                <a:spLocks noGrp="1"/>
-              </p:cNvSpPr>
-              <p:nvPr>
-                <p:ph type="title"/>
-              </p:nvPr>
-            </p:nvSpPr>
-            <p:spPr>
-              <a:xfrm>
-                <a:off x="685800" y="408883"/>
-                <a:ext cx="10994410" cy="1071255"/>
-              </a:xfrm>
-              <a:prstGeom prst="rect">
-                <a:avLst/>
-              </a:prstGeom>
-            </p:spPr>
-            <p:txBody>
-              <a:bodyPr vert="horz" wrap="square" lIns="0" tIns="12700" rIns="0" bIns="0" rtlCol="0">
-                <a:spAutoFit/>
-              </a:bodyPr>
-              <a:lstStyle/>
-              <a:p>
-                <a:pPr marL="12700">
-                  <a:lnSpc>
-                    <a:spcPct val="100000"/>
-                  </a:lnSpc>
-                  <a:spcBef>
-                    <a:spcPts val="100"/>
-                  </a:spcBef>
-                </a:pPr>
-                <a:r>
-                  <a:rPr lang="en-US" sz="2500" dirty="0"/>
-                  <a:t>Learning outcome #3 – Waveguide compact model</a:t>
-                </a:r>
-                <a:br>
-                  <a:rPr lang="en-US" sz="2500" spc="-5" dirty="0">
-                    <a:latin typeface="+mj-lt"/>
-                    <a:cs typeface="Lucida Sans"/>
-                  </a:rPr>
-                </a:br>
-                <a:r>
-                  <a:rPr lang="en-US" b="0" dirty="0"/>
-                  <a:t>Let’s model the waveguide using a second order polynomial: </a:t>
-                </a:r>
-                <a:br>
-                  <a:rPr lang="en-US" b="0" dirty="0"/>
-                </a:br>
-                <a14:m>
-                  <m:oMathPara xmlns:m="http://schemas.openxmlformats.org/officeDocument/2006/math">
-                    <m:oMathParaPr>
-                      <m:jc m:val="centerGroup"/>
-                    </m:oMathParaPr>
-                    <m:oMath xmlns:m="http://schemas.openxmlformats.org/officeDocument/2006/math">
-                      <m:sSub>
-                        <m:sSubPr>
-                          <m:ctrlPr>
-                            <a:rPr lang="es-ES" b="0" i="1" smtClean="0">
-                              <a:latin typeface="Cambria Math" panose="02040503050406030204" pitchFamily="18" charset="0"/>
-                            </a:rPr>
-                          </m:ctrlPr>
-                        </m:sSubPr>
-                        <m:e>
-                          <m:r>
-                            <a:rPr lang="es-ES" b="0" i="1" smtClean="0">
-                              <a:latin typeface="Cambria Math" panose="02040503050406030204" pitchFamily="18" charset="0"/>
-                            </a:rPr>
-                            <m:t>𝑛</m:t>
-                          </m:r>
-                        </m:e>
-                        <m:sub>
-                          <m:r>
-                            <a:rPr lang="es-ES" b="0" i="1" smtClean="0">
-                              <a:latin typeface="Cambria Math" panose="02040503050406030204" pitchFamily="18" charset="0"/>
-                            </a:rPr>
-                            <m:t>𝑒𝑓𝑓</m:t>
-                          </m:r>
-                        </m:sub>
-                      </m:sSub>
-                      <m:d>
-                        <m:dPr>
-                          <m:ctrlPr>
-                            <a:rPr lang="es-ES" b="0" i="1" smtClean="0">
-                              <a:latin typeface="Cambria Math" panose="02040503050406030204" pitchFamily="18" charset="0"/>
-                            </a:rPr>
-                          </m:ctrlPr>
-                        </m:dPr>
-                        <m:e>
-                          <m:r>
-                            <a:rPr lang="es-ES" b="0" i="1" smtClean="0">
-                              <a:latin typeface="Cambria Math" panose="02040503050406030204" pitchFamily="18" charset="0"/>
-                            </a:rPr>
-                            <m:t>𝜆</m:t>
-                          </m:r>
-                        </m:e>
-                      </m:d>
-                      <m:r>
-                        <a:rPr lang="es-ES" b="0" i="1" smtClean="0">
-                          <a:latin typeface="Cambria Math" panose="02040503050406030204" pitchFamily="18" charset="0"/>
-                        </a:rPr>
-                        <m:t>=</m:t>
-                      </m:r>
-                      <m:sSub>
-                        <m:sSubPr>
-                          <m:ctrlPr>
-                            <a:rPr lang="es-ES" b="0" i="1" smtClean="0">
-                              <a:latin typeface="Cambria Math" panose="02040503050406030204" pitchFamily="18" charset="0"/>
-                            </a:rPr>
-                          </m:ctrlPr>
-                        </m:sSubPr>
-                        <m:e>
-                          <m:r>
-                            <a:rPr lang="es-ES" b="0" i="1" smtClean="0">
-                              <a:latin typeface="Cambria Math" panose="02040503050406030204" pitchFamily="18" charset="0"/>
-                            </a:rPr>
-                            <m:t>𝑛</m:t>
-                          </m:r>
-                        </m:e>
-                        <m:sub>
-                          <m:r>
-                            <a:rPr lang="es-ES" b="0" i="1" smtClean="0">
-                              <a:latin typeface="Cambria Math" panose="02040503050406030204" pitchFamily="18" charset="0"/>
-                            </a:rPr>
-                            <m:t>1</m:t>
-                          </m:r>
-                        </m:sub>
-                      </m:sSub>
-                      <m:r>
-                        <a:rPr lang="es-ES" b="0" i="1" smtClean="0">
-                          <a:latin typeface="Cambria Math" panose="02040503050406030204" pitchFamily="18" charset="0"/>
-                        </a:rPr>
-                        <m:t>+</m:t>
-                      </m:r>
-                      <m:sSub>
-                        <m:sSubPr>
-                          <m:ctrlPr>
-                            <a:rPr lang="es-ES" b="0" i="1" smtClean="0">
-                              <a:latin typeface="Cambria Math" panose="02040503050406030204" pitchFamily="18" charset="0"/>
-                            </a:rPr>
-                          </m:ctrlPr>
-                        </m:sSubPr>
-                        <m:e>
-                          <m:r>
-                            <a:rPr lang="es-ES" b="0" i="1" smtClean="0">
-                              <a:latin typeface="Cambria Math" panose="02040503050406030204" pitchFamily="18" charset="0"/>
-                            </a:rPr>
-                            <m:t>𝑛</m:t>
-                          </m:r>
-                        </m:e>
-                        <m:sub>
-                          <m:r>
-                            <a:rPr lang="es-ES" b="0" i="1" smtClean="0">
-                              <a:latin typeface="Cambria Math" panose="02040503050406030204" pitchFamily="18" charset="0"/>
-                            </a:rPr>
-                            <m:t>2</m:t>
-                          </m:r>
-                        </m:sub>
-                      </m:sSub>
-                      <m:d>
-                        <m:dPr>
-                          <m:ctrlPr>
-                            <a:rPr lang="es-ES" b="0" i="1" smtClean="0">
-                              <a:latin typeface="Cambria Math" panose="02040503050406030204" pitchFamily="18" charset="0"/>
-                            </a:rPr>
-                          </m:ctrlPr>
-                        </m:dPr>
-                        <m:e>
-                          <m:r>
-                            <a:rPr lang="es-ES" b="0" i="1" smtClean="0">
-                              <a:latin typeface="Cambria Math" panose="02040503050406030204" pitchFamily="18" charset="0"/>
-                            </a:rPr>
-                            <m:t>𝜆</m:t>
-                          </m:r>
-                          <m:r>
-                            <a:rPr lang="es-ES" b="0" i="1" smtClean="0">
-                              <a:latin typeface="Cambria Math" panose="02040503050406030204" pitchFamily="18" charset="0"/>
-                            </a:rPr>
-                            <m:t>−</m:t>
-                          </m:r>
-                          <m:sSub>
-                            <m:sSubPr>
-                              <m:ctrlPr>
-                                <a:rPr lang="es-ES" b="0" i="1" smtClean="0">
-                                  <a:latin typeface="Cambria Math" panose="02040503050406030204" pitchFamily="18" charset="0"/>
-                                </a:rPr>
-                              </m:ctrlPr>
-                            </m:sSubPr>
-                            <m:e>
-                              <m:r>
-                                <a:rPr lang="es-ES" b="0" i="1" smtClean="0">
-                                  <a:latin typeface="Cambria Math" panose="02040503050406030204" pitchFamily="18" charset="0"/>
-                                </a:rPr>
-                                <m:t>𝜆</m:t>
-                              </m:r>
-                            </m:e>
-                            <m:sub>
-                              <m:r>
-                                <a:rPr lang="es-ES" b="0" i="1" smtClean="0">
-                                  <a:latin typeface="Cambria Math" panose="02040503050406030204" pitchFamily="18" charset="0"/>
-                                </a:rPr>
-                                <m:t>0</m:t>
-                              </m:r>
-                            </m:sub>
-                          </m:sSub>
-                        </m:e>
-                      </m:d>
-                      <m:r>
-                        <a:rPr lang="es-ES" b="0" i="1" smtClean="0">
-                          <a:latin typeface="Cambria Math" panose="02040503050406030204" pitchFamily="18" charset="0"/>
-                        </a:rPr>
-                        <m:t>+</m:t>
-                      </m:r>
-                      <m:sSub>
-                        <m:sSubPr>
-                          <m:ctrlPr>
-                            <a:rPr lang="es-ES" b="0" i="1" smtClean="0">
-                              <a:latin typeface="Cambria Math" panose="02040503050406030204" pitchFamily="18" charset="0"/>
-                            </a:rPr>
-                          </m:ctrlPr>
-                        </m:sSubPr>
-                        <m:e>
-                          <m:r>
-                            <a:rPr lang="es-ES" b="0" i="1" smtClean="0">
-                              <a:latin typeface="Cambria Math" panose="02040503050406030204" pitchFamily="18" charset="0"/>
-                            </a:rPr>
-                            <m:t>𝑛</m:t>
-                          </m:r>
-                        </m:e>
-                        <m:sub>
-                          <m:r>
-                            <a:rPr lang="es-ES" b="0" i="1" smtClean="0">
-                              <a:latin typeface="Cambria Math" panose="02040503050406030204" pitchFamily="18" charset="0"/>
-                            </a:rPr>
-                            <m:t>3</m:t>
-                          </m:r>
-                        </m:sub>
-                      </m:sSub>
-                      <m:sSup>
-                        <m:sSupPr>
-                          <m:ctrlPr>
-                            <a:rPr lang="es-ES" b="0" i="1" smtClean="0">
-                              <a:latin typeface="Cambria Math" panose="02040503050406030204" pitchFamily="18" charset="0"/>
-                            </a:rPr>
-                          </m:ctrlPr>
-                        </m:sSupPr>
-                        <m:e>
-                          <m:d>
-                            <m:dPr>
-                              <m:ctrlPr>
-                                <a:rPr lang="es-ES" b="0" i="1" smtClean="0">
-                                  <a:latin typeface="Cambria Math" panose="02040503050406030204" pitchFamily="18" charset="0"/>
-                                </a:rPr>
-                              </m:ctrlPr>
-                            </m:dPr>
-                            <m:e>
-                              <m:r>
-                                <a:rPr lang="es-ES" b="0" i="1" smtClean="0">
-                                  <a:latin typeface="Cambria Math" panose="02040503050406030204" pitchFamily="18" charset="0"/>
-                                </a:rPr>
-                                <m:t>𝜆</m:t>
-                              </m:r>
-                              <m:r>
-                                <a:rPr lang="es-ES" b="0" i="1" smtClean="0">
-                                  <a:latin typeface="Cambria Math" panose="02040503050406030204" pitchFamily="18" charset="0"/>
-                                </a:rPr>
-                                <m:t>−</m:t>
-                              </m:r>
-                              <m:sSub>
-                                <m:sSubPr>
-                                  <m:ctrlPr>
-                                    <a:rPr lang="es-ES" b="0" i="1" smtClean="0">
-                                      <a:latin typeface="Cambria Math" panose="02040503050406030204" pitchFamily="18" charset="0"/>
-                                    </a:rPr>
-                                  </m:ctrlPr>
-                                </m:sSubPr>
-                                <m:e>
-                                  <m:r>
-                                    <a:rPr lang="es-ES" b="0" i="1" smtClean="0">
-                                      <a:latin typeface="Cambria Math" panose="02040503050406030204" pitchFamily="18" charset="0"/>
-                                    </a:rPr>
-                                    <m:t>𝜆</m:t>
-                                  </m:r>
-                                </m:e>
-                                <m:sub>
-                                  <m:r>
-                                    <a:rPr lang="es-ES" b="0" i="1" smtClean="0">
-                                      <a:latin typeface="Cambria Math" panose="02040503050406030204" pitchFamily="18" charset="0"/>
-                                    </a:rPr>
-                                    <m:t>0</m:t>
-                                  </m:r>
-                                </m:sub>
-                              </m:sSub>
-                            </m:e>
-                          </m:d>
-                        </m:e>
-                        <m:sup>
-                          <m:r>
-                            <a:rPr lang="es-ES" b="0" i="1" smtClean="0">
-                              <a:latin typeface="Cambria Math" panose="02040503050406030204" pitchFamily="18" charset="0"/>
-                            </a:rPr>
-                            <m:t>2</m:t>
-                          </m:r>
-                        </m:sup>
-                      </m:sSup>
-                    </m:oMath>
-                  </m:oMathPara>
-                </a14:m>
-                <a:br>
-                  <a:rPr lang="en-US" b="0" dirty="0"/>
-                </a:br>
-                <a:endParaRPr lang="en-US" sz="2500" b="0" dirty="0">
-                  <a:latin typeface="+mj-lt"/>
-                  <a:cs typeface="Lucida Sans"/>
-                </a:endParaRPr>
-              </a:p>
-            </p:txBody>
-          </p:sp>
-        </mc:Choice>
-        <mc:Fallback>
-          <p:sp>
-            <p:nvSpPr>
-              <p:cNvPr id="16" name="object 16">
-                <a:extLst>
-                  <a:ext uri="{FF2B5EF4-FFF2-40B4-BE49-F238E27FC236}">
-                    <a16:creationId xmlns:a16="http://schemas.microsoft.com/office/drawing/2014/main" id="{394400B4-EE16-8E85-AB54-E82FE3B29345}"/>
-                  </a:ext>
-                </a:extLst>
-              </p:cNvPr>
-              <p:cNvSpPr txBox="1">
-                <a:spLocks noGrp="1" noRot="1" noChangeAspect="1" noMove="1" noResize="1" noEditPoints="1" noAdjustHandles="1" noChangeArrowheads="1" noChangeShapeType="1" noTextEdit="1"/>
-              </p:cNvSpPr>
-              <p:nvPr>
-                <p:ph type="title"/>
-              </p:nvPr>
-            </p:nvSpPr>
-            <p:spPr>
-              <a:xfrm>
-                <a:off x="685800" y="408883"/>
-                <a:ext cx="10994410" cy="1071255"/>
-              </a:xfrm>
-              <a:prstGeom prst="rect">
-                <a:avLst/>
-              </a:prstGeom>
-              <a:blipFill>
-                <a:blip r:embed="rId3"/>
-                <a:stretch>
-                  <a:fillRect l="-1664" t="-7386" b="-4545"/>
-                </a:stretch>
-              </a:blipFill>
-            </p:spPr>
-            <p:txBody>
-              <a:bodyPr/>
-              <a:lstStyle/>
-              <a:p>
-                <a:r>
-                  <a:rPr lang="es-ES">
-                    <a:noFill/>
-                  </a:rPr>
-                  <a:t> </a:t>
-                </a:r>
-              </a:p>
-            </p:txBody>
-          </p:sp>
-        </mc:Fallback>
-      </mc:AlternateContent>
+      <p:sp>
+        <p:nvSpPr>
+          <p:cNvPr id="16" name="object 16">
+            <a:extLst>
+              <a:ext uri="{FF2B5EF4-FFF2-40B4-BE49-F238E27FC236}">
+                <a16:creationId xmlns:a16="http://schemas.microsoft.com/office/drawing/2014/main" id="{4FF0576C-921C-E6F0-0DE7-4696498D3114}"/>
+              </a:ext>
+            </a:extLst>
+          </p:cNvPr>
+          <p:cNvSpPr txBox="1">
+            <a:spLocks noGrp="1"/>
+          </p:cNvSpPr>
+          <p:nvPr>
+            <p:ph type="title"/>
+          </p:nvPr>
+        </p:nvSpPr>
+        <p:spPr>
+          <a:xfrm>
+            <a:off x="685800" y="408883"/>
+            <a:ext cx="10994410" cy="705321"/>
+          </a:xfrm>
+          <a:prstGeom prst="rect">
+            <a:avLst/>
+          </a:prstGeom>
+        </p:spPr>
+        <p:txBody>
+          <a:bodyPr vert="horz" wrap="square" lIns="0" tIns="12700" rIns="0" bIns="0" rtlCol="0">
+            <a:spAutoFit/>
+          </a:bodyPr>
+          <a:lstStyle/>
+          <a:p>
+            <a:pPr marL="12700">
+              <a:lnSpc>
+                <a:spcPct val="100000"/>
+              </a:lnSpc>
+              <a:spcBef>
+                <a:spcPts val="100"/>
+              </a:spcBef>
+            </a:pPr>
+            <a:r>
+              <a:rPr lang="es-CO" sz="2500" noProof="0" dirty="0" err="1"/>
+              <a:t>Learning</a:t>
+            </a:r>
+            <a:r>
+              <a:rPr lang="es-CO" sz="2500" noProof="0" dirty="0"/>
+              <a:t> </a:t>
+            </a:r>
+            <a:r>
+              <a:rPr lang="es-CO" sz="2500" noProof="0" dirty="0" err="1"/>
+              <a:t>outcome</a:t>
+            </a:r>
+            <a:r>
+              <a:rPr lang="es-CO" sz="2500" noProof="0" dirty="0"/>
+              <a:t> #2 – </a:t>
+            </a:r>
+            <a:r>
+              <a:rPr lang="es-CO" sz="2500" noProof="0" dirty="0" err="1"/>
+              <a:t>Width</a:t>
+            </a:r>
+            <a:r>
+              <a:rPr lang="es-CO" sz="2500" noProof="0" dirty="0"/>
+              <a:t> </a:t>
+            </a:r>
+            <a:r>
+              <a:rPr lang="es-CO" sz="2500" noProof="0" dirty="0" err="1"/>
+              <a:t>dependence</a:t>
+            </a:r>
+            <a:br>
+              <a:rPr lang="es-CO" sz="2500" spc="-5" noProof="0" dirty="0">
+                <a:latin typeface="+mj-lt"/>
+                <a:cs typeface="Lucida Sans"/>
+              </a:rPr>
+            </a:br>
+            <a:r>
+              <a:rPr lang="es-CO" b="0" noProof="0" dirty="0" err="1"/>
+              <a:t>Width</a:t>
+            </a:r>
+            <a:r>
+              <a:rPr lang="es-CO" b="0" noProof="0" dirty="0"/>
+              <a:t> 0.3 - 1 µm (step 0.1 µm) – </a:t>
+            </a:r>
+            <a:r>
+              <a:rPr lang="es-CO" b="0" noProof="0" dirty="0" err="1"/>
+              <a:t>Wavelength</a:t>
+            </a:r>
+            <a:r>
+              <a:rPr lang="es-CO" b="0" noProof="0" dirty="0"/>
+              <a:t> 1.55 µm – Silicon </a:t>
+            </a:r>
+            <a:r>
+              <a:rPr lang="es-CO" b="0" noProof="0" dirty="0" err="1"/>
+              <a:t>On</a:t>
+            </a:r>
+            <a:r>
+              <a:rPr lang="es-CO" b="0" noProof="0" dirty="0"/>
+              <a:t> </a:t>
+            </a:r>
+            <a:r>
+              <a:rPr lang="es-CO" b="0" noProof="0" dirty="0" err="1"/>
+              <a:t>Insulator</a:t>
+            </a:r>
+            <a:endParaRPr lang="es-CO" sz="2500" b="0" noProof="0" dirty="0">
+              <a:latin typeface="+mj-lt"/>
+              <a:cs typeface="Lucida Sans"/>
+            </a:endParaRPr>
+          </a:p>
+        </p:txBody>
+      </p:sp>
       <p:pic>
         <p:nvPicPr>
           <p:cNvPr id="83" name="Gráfico 82">
             <a:extLst>
               <a:ext uri="{FF2B5EF4-FFF2-40B4-BE49-F238E27FC236}">
-                <a16:creationId xmlns:a16="http://schemas.microsoft.com/office/drawing/2014/main" id="{4D53B68D-17ED-7EFB-F2B4-10DA7A772E17}"/>
+                <a16:creationId xmlns:a16="http://schemas.microsoft.com/office/drawing/2014/main" id="{BDC69D14-8D7A-18EE-2BAF-3B3B9B0B26B4}"/>
               </a:ext>
             </a:extLst>
           </p:cNvPr>
@@ -6098,10 +9959,10 @@
           <p:nvPr/>
         </p:nvPicPr>
         <p:blipFill>
-          <a:blip r:embed="rId4">
+          <a:blip r:embed="rId3">
             <a:extLst>
               <a:ext uri="{96DAC541-7B7A-43D3-8B79-37D633B846F1}">
-                <asvg:svgBlip xmlns:asvg="http://schemas.microsoft.com/office/drawing/2016/SVG/main" r:embed="rId5"/>
+                <asvg:svgBlip xmlns:asvg="http://schemas.microsoft.com/office/drawing/2016/SVG/main" r:embed="rId4"/>
               </a:ext>
             </a:extLst>
           </a:blip>
@@ -6124,7 +9985,7 @@
           <p:cNvPr id="84" name="Marcador de número de diapositiva 83">
             <a:extLst>
               <a:ext uri="{FF2B5EF4-FFF2-40B4-BE49-F238E27FC236}">
-                <a16:creationId xmlns:a16="http://schemas.microsoft.com/office/drawing/2014/main" id="{09AB8697-C1EE-6E9A-6550-ACA2C3AE6630}"/>
+                <a16:creationId xmlns:a16="http://schemas.microsoft.com/office/drawing/2014/main" id="{781E96DC-A7EE-87DF-BA93-E9B116B97194}"/>
               </a:ext>
             </a:extLst>
           </p:cNvPr>
@@ -6141,10 +10002,10 @@
           <a:lstStyle/>
           <a:p>
             <a:fld id="{B6F15528-21DE-4FAA-801E-634DDDAF4B2B}" type="slidenum">
-              <a:rPr lang="es-ES" smtClean="0"/>
-              <a:t>5</a:t>
+              <a:rPr lang="es-CO" noProof="0" smtClean="0"/>
+              <a:t>6</a:t>
             </a:fld>
-            <a:endParaRPr lang="es-ES"/>
+            <a:endParaRPr lang="es-CO" noProof="0" dirty="0"/>
           </a:p>
         </p:txBody>
       </p:sp>
@@ -6153,7 +10014,7 @@
           <p:cNvPr id="3" name="Marcador de pie de página 2">
             <a:extLst>
               <a:ext uri="{FF2B5EF4-FFF2-40B4-BE49-F238E27FC236}">
-                <a16:creationId xmlns:a16="http://schemas.microsoft.com/office/drawing/2014/main" id="{970D4A6C-5B37-EDF5-6242-74B16127E96B}"/>
+                <a16:creationId xmlns:a16="http://schemas.microsoft.com/office/drawing/2014/main" id="{5CC879E4-F8D5-CF29-86C4-18251D06548E}"/>
               </a:ext>
             </a:extLst>
           </p:cNvPr>
@@ -6175,535 +10036,220 @@
               </a:spcBef>
             </a:pPr>
             <a:r>
-              <a:rPr lang="es-ES" spc="-5"/>
-              <a:t>LAB 1.0. WAVEGUIDES</a:t>
-            </a:r>
-            <a:endParaRPr lang="es-ES" spc="-5" dirty="0"/>
+              <a:rPr lang="es-CO" spc="-5" noProof="0" dirty="0"/>
+              <a:t>LAB 0.1. MODESOLVER</a:t>
+            </a:r>
           </a:p>
         </p:txBody>
       </p:sp>
-      <mc:AlternateContent xmlns:mc="http://schemas.openxmlformats.org/markup-compatibility/2006" xmlns:a14="http://schemas.microsoft.com/office/drawing/2010/main">
-        <mc:Choice Requires="a14">
-          <p:sp>
-            <p:nvSpPr>
-              <p:cNvPr id="2" name="CuadroTexto 1">
-                <a:extLst>
-                  <a:ext uri="{FF2B5EF4-FFF2-40B4-BE49-F238E27FC236}">
-                    <a16:creationId xmlns:a16="http://schemas.microsoft.com/office/drawing/2014/main" id="{A440F587-93A3-E474-C0B0-883BB9DAFD85}"/>
-                  </a:ext>
-                </a:extLst>
-              </p:cNvPr>
-              <p:cNvSpPr txBox="1"/>
-              <p:nvPr/>
-            </p:nvSpPr>
-            <p:spPr>
-              <a:xfrm>
-                <a:off x="609441" y="4860334"/>
-                <a:ext cx="11198542" cy="1361911"/>
-              </a:xfrm>
-              <a:prstGeom prst="rect">
-                <a:avLst/>
-              </a:prstGeom>
-              <a:solidFill>
-                <a:schemeClr val="bg1">
-                  <a:lumMod val="95000"/>
-                </a:schemeClr>
-              </a:solidFill>
-              <a:ln w="28575">
-                <a:solidFill>
-                  <a:srgbClr val="E0700D"/>
-                </a:solidFill>
-              </a:ln>
-            </p:spPr>
-            <p:txBody>
-              <a:bodyPr wrap="square" rtlCol="0">
-                <a:spAutoFit/>
-              </a:bodyPr>
-              <a:lstStyle/>
-              <a:p>
-                <a:pPr algn="just"/>
-                <a:r>
-                  <a:rPr lang="en-US" sz="1200" dirty="0">
-                    <a:latin typeface="Arial" panose="020B0604020202020204" pitchFamily="34" charset="0"/>
-                    <a:cs typeface="Arial" panose="020B0604020202020204" pitchFamily="34" charset="0"/>
-                  </a:rPr>
-                  <a:t>Find the second-degree polynomial coefficients and relate them with the group index and the dispersion parameter. </a:t>
-                </a:r>
-                <a14:m>
-                  <m:oMath xmlns:m="http://schemas.openxmlformats.org/officeDocument/2006/math">
-                    <m:d>
-                      <m:dPr>
-                        <m:begChr m:val="{"/>
-                        <m:endChr m:val=""/>
-                        <m:ctrlPr>
-                          <a:rPr lang="es-ES" sz="1200" b="0" i="1" smtClean="0">
-                            <a:latin typeface="Cambria Math" panose="02040503050406030204" pitchFamily="18" charset="0"/>
-                            <a:cs typeface="Arial" panose="020B0604020202020204" pitchFamily="34" charset="0"/>
-                          </a:rPr>
-                        </m:ctrlPr>
-                      </m:dPr>
-                      <m:e>
-                        <m:eqArr>
-                          <m:eqArrPr>
-                            <m:ctrlPr>
-                              <a:rPr lang="es-ES" sz="1200" b="0" i="1" smtClean="0">
-                                <a:latin typeface="Cambria Math" panose="02040503050406030204" pitchFamily="18" charset="0"/>
-                                <a:cs typeface="Arial" panose="020B0604020202020204" pitchFamily="34" charset="0"/>
-                              </a:rPr>
-                            </m:ctrlPr>
-                          </m:eqArrPr>
-                          <m:e>
-                            <m:sSub>
-                              <m:sSubPr>
-                                <m:ctrlPr>
-                                  <a:rPr lang="es-ES" sz="1200" b="0" i="1" smtClean="0">
-                                    <a:latin typeface="Cambria Math" panose="02040503050406030204" pitchFamily="18" charset="0"/>
-                                    <a:cs typeface="Arial" panose="020B0604020202020204" pitchFamily="34" charset="0"/>
-                                  </a:rPr>
-                                </m:ctrlPr>
-                              </m:sSubPr>
-                              <m:e>
-                                <m:r>
-                                  <a:rPr lang="es-ES" sz="1200" b="0" i="1" smtClean="0">
-                                    <a:latin typeface="Cambria Math" panose="02040503050406030204" pitchFamily="18" charset="0"/>
-                                    <a:cs typeface="Arial" panose="020B0604020202020204" pitchFamily="34" charset="0"/>
-                                  </a:rPr>
-                                  <m:t>𝑛</m:t>
-                                </m:r>
-                              </m:e>
-                              <m:sub>
-                                <m:r>
-                                  <a:rPr lang="es-ES" sz="1200" b="0" i="1" smtClean="0">
-                                    <a:latin typeface="Cambria Math" panose="02040503050406030204" pitchFamily="18" charset="0"/>
-                                    <a:cs typeface="Arial" panose="020B0604020202020204" pitchFamily="34" charset="0"/>
-                                  </a:rPr>
-                                  <m:t>𝑒𝑓𝑓</m:t>
-                                </m:r>
-                              </m:sub>
-                            </m:sSub>
-                            <m:r>
-                              <a:rPr lang="es-ES" sz="1200" b="0" i="1" smtClean="0">
-                                <a:latin typeface="Cambria Math" panose="02040503050406030204" pitchFamily="18" charset="0"/>
-                                <a:cs typeface="Arial" panose="020B0604020202020204" pitchFamily="34" charset="0"/>
-                              </a:rPr>
-                              <m:t>=</m:t>
-                            </m:r>
-                            <m:sSub>
-                              <m:sSubPr>
-                                <m:ctrlPr>
-                                  <a:rPr lang="es-ES" sz="1200" b="0" i="1" smtClean="0">
-                                    <a:latin typeface="Cambria Math" panose="02040503050406030204" pitchFamily="18" charset="0"/>
-                                    <a:cs typeface="Arial" panose="020B0604020202020204" pitchFamily="34" charset="0"/>
-                                  </a:rPr>
-                                </m:ctrlPr>
-                              </m:sSubPr>
-                              <m:e>
-                                <m:r>
-                                  <a:rPr lang="es-ES" sz="1200" b="0" i="1" smtClean="0">
-                                    <a:latin typeface="Cambria Math" panose="02040503050406030204" pitchFamily="18" charset="0"/>
-                                    <a:cs typeface="Arial" panose="020B0604020202020204" pitchFamily="34" charset="0"/>
-                                  </a:rPr>
-                                  <m:t>𝑛</m:t>
-                                </m:r>
-                              </m:e>
-                              <m:sub>
-                                <m:r>
-                                  <a:rPr lang="es-ES" sz="1200" b="0" i="1" smtClean="0">
-                                    <a:latin typeface="Cambria Math" panose="02040503050406030204" pitchFamily="18" charset="0"/>
-                                    <a:cs typeface="Arial" panose="020B0604020202020204" pitchFamily="34" charset="0"/>
-                                  </a:rPr>
-                                  <m:t>1</m:t>
-                                </m:r>
-                              </m:sub>
-                            </m:sSub>
-                          </m:e>
-                          <m:e>
-                            <m:sSub>
-                              <m:sSubPr>
-                                <m:ctrlPr>
-                                  <a:rPr lang="es-ES" sz="1200" b="0" i="1" smtClean="0">
-                                    <a:latin typeface="Cambria Math" panose="02040503050406030204" pitchFamily="18" charset="0"/>
-                                    <a:cs typeface="Arial" panose="020B0604020202020204" pitchFamily="34" charset="0"/>
-                                  </a:rPr>
-                                </m:ctrlPr>
-                              </m:sSubPr>
-                              <m:e>
-                                <m:r>
-                                  <a:rPr lang="es-ES" sz="1200" b="0" i="1" smtClean="0">
-                                    <a:latin typeface="Cambria Math" panose="02040503050406030204" pitchFamily="18" charset="0"/>
-                                    <a:cs typeface="Arial" panose="020B0604020202020204" pitchFamily="34" charset="0"/>
-                                  </a:rPr>
-                                  <m:t>𝑛</m:t>
-                                </m:r>
-                              </m:e>
-                              <m:sub>
-                                <m:r>
-                                  <a:rPr lang="es-ES" sz="1200" b="0" i="1" smtClean="0">
-                                    <a:latin typeface="Cambria Math" panose="02040503050406030204" pitchFamily="18" charset="0"/>
-                                    <a:cs typeface="Arial" panose="020B0604020202020204" pitchFamily="34" charset="0"/>
-                                  </a:rPr>
-                                  <m:t>𝑔</m:t>
-                                </m:r>
-                              </m:sub>
-                            </m:sSub>
-                            <m:r>
-                              <a:rPr lang="es-ES" sz="1200" b="0" i="1" smtClean="0">
-                                <a:latin typeface="Cambria Math" panose="02040503050406030204" pitchFamily="18" charset="0"/>
-                                <a:cs typeface="Arial" panose="020B0604020202020204" pitchFamily="34" charset="0"/>
-                              </a:rPr>
-                              <m:t>=</m:t>
-                            </m:r>
-                            <m:sSub>
-                              <m:sSubPr>
-                                <m:ctrlPr>
-                                  <a:rPr lang="es-ES" sz="1200" b="0" i="1" smtClean="0">
-                                    <a:latin typeface="Cambria Math" panose="02040503050406030204" pitchFamily="18" charset="0"/>
-                                    <a:cs typeface="Arial" panose="020B0604020202020204" pitchFamily="34" charset="0"/>
-                                  </a:rPr>
-                                </m:ctrlPr>
-                              </m:sSubPr>
-                              <m:e>
-                                <m:r>
-                                  <a:rPr lang="es-ES" sz="1200" b="0" i="1" smtClean="0">
-                                    <a:latin typeface="Cambria Math" panose="02040503050406030204" pitchFamily="18" charset="0"/>
-                                    <a:cs typeface="Arial" panose="020B0604020202020204" pitchFamily="34" charset="0"/>
-                                  </a:rPr>
-                                  <m:t>𝑛</m:t>
-                                </m:r>
-                              </m:e>
-                              <m:sub>
-                                <m:r>
-                                  <a:rPr lang="es-ES" sz="1200" b="0" i="1" smtClean="0">
-                                    <a:latin typeface="Cambria Math" panose="02040503050406030204" pitchFamily="18" charset="0"/>
-                                    <a:cs typeface="Arial" panose="020B0604020202020204" pitchFamily="34" charset="0"/>
-                                  </a:rPr>
-                                  <m:t>1</m:t>
-                                </m:r>
-                              </m:sub>
-                            </m:sSub>
-                            <m:r>
-                              <a:rPr lang="es-ES" sz="1200" b="0" i="1" smtClean="0">
-                                <a:latin typeface="Cambria Math" panose="02040503050406030204" pitchFamily="18" charset="0"/>
-                                <a:cs typeface="Arial" panose="020B0604020202020204" pitchFamily="34" charset="0"/>
-                              </a:rPr>
-                              <m:t>−</m:t>
-                            </m:r>
-                            <m:sSub>
-                              <m:sSubPr>
-                                <m:ctrlPr>
-                                  <a:rPr lang="es-ES" sz="1200" b="0" i="1" smtClean="0">
-                                    <a:latin typeface="Cambria Math" panose="02040503050406030204" pitchFamily="18" charset="0"/>
-                                    <a:cs typeface="Arial" panose="020B0604020202020204" pitchFamily="34" charset="0"/>
-                                  </a:rPr>
-                                </m:ctrlPr>
-                              </m:sSubPr>
-                              <m:e>
-                                <m:r>
-                                  <a:rPr lang="es-ES" sz="1200" b="0" i="1" smtClean="0">
-                                    <a:latin typeface="Cambria Math" panose="02040503050406030204" pitchFamily="18" charset="0"/>
-                                    <a:cs typeface="Arial" panose="020B0604020202020204" pitchFamily="34" charset="0"/>
-                                  </a:rPr>
-                                  <m:t>𝑛</m:t>
-                                </m:r>
-                              </m:e>
-                              <m:sub>
-                                <m:r>
-                                  <a:rPr lang="es-ES" sz="1200" b="0" i="1" smtClean="0">
-                                    <a:latin typeface="Cambria Math" panose="02040503050406030204" pitchFamily="18" charset="0"/>
-                                    <a:cs typeface="Arial" panose="020B0604020202020204" pitchFamily="34" charset="0"/>
-                                  </a:rPr>
-                                  <m:t>2</m:t>
-                                </m:r>
-                              </m:sub>
-                            </m:sSub>
-                            <m:sSub>
-                              <m:sSubPr>
-                                <m:ctrlPr>
-                                  <a:rPr lang="es-ES" sz="1200" b="0" i="1" smtClean="0">
-                                    <a:latin typeface="Cambria Math" panose="02040503050406030204" pitchFamily="18" charset="0"/>
-                                    <a:cs typeface="Arial" panose="020B0604020202020204" pitchFamily="34" charset="0"/>
-                                  </a:rPr>
-                                </m:ctrlPr>
-                              </m:sSubPr>
-                              <m:e>
-                                <m:r>
-                                  <a:rPr lang="es-ES" sz="1200" b="0" i="1" smtClean="0">
-                                    <a:latin typeface="Cambria Math" panose="02040503050406030204" pitchFamily="18" charset="0"/>
-                                    <a:cs typeface="Arial" panose="020B0604020202020204" pitchFamily="34" charset="0"/>
-                                  </a:rPr>
-                                  <m:t>𝜆</m:t>
-                                </m:r>
-                              </m:e>
-                              <m:sub>
-                                <m:r>
-                                  <a:rPr lang="es-ES" sz="1200" b="0" i="1" smtClean="0">
-                                    <a:latin typeface="Cambria Math" panose="02040503050406030204" pitchFamily="18" charset="0"/>
-                                    <a:cs typeface="Arial" panose="020B0604020202020204" pitchFamily="34" charset="0"/>
-                                  </a:rPr>
-                                  <m:t>0</m:t>
-                                </m:r>
-                              </m:sub>
-                            </m:sSub>
-                          </m:e>
-                          <m:e>
-                            <m:r>
-                              <a:rPr lang="es-ES" sz="1200" b="0" i="1" smtClean="0">
-                                <a:latin typeface="Cambria Math" panose="02040503050406030204" pitchFamily="18" charset="0"/>
-                                <a:cs typeface="Arial" panose="020B0604020202020204" pitchFamily="34" charset="0"/>
-                              </a:rPr>
-                              <m:t>𝐷</m:t>
-                            </m:r>
-                            <m:r>
-                              <a:rPr lang="es-ES" sz="1200" b="0" i="1" smtClean="0">
-                                <a:latin typeface="Cambria Math" panose="02040503050406030204" pitchFamily="18" charset="0"/>
-                                <a:cs typeface="Arial" panose="020B0604020202020204" pitchFamily="34" charset="0"/>
-                              </a:rPr>
-                              <m:t>=−</m:t>
-                            </m:r>
-                            <m:f>
-                              <m:fPr>
-                                <m:ctrlPr>
-                                  <a:rPr lang="es-ES" sz="1200" b="0" i="1" smtClean="0">
-                                    <a:latin typeface="Cambria Math" panose="02040503050406030204" pitchFamily="18" charset="0"/>
-                                    <a:cs typeface="Arial" panose="020B0604020202020204" pitchFamily="34" charset="0"/>
-                                  </a:rPr>
-                                </m:ctrlPr>
-                              </m:fPr>
-                              <m:num>
-                                <m:r>
-                                  <a:rPr lang="es-ES" sz="1200" b="0" i="1" smtClean="0">
-                                    <a:latin typeface="Cambria Math" panose="02040503050406030204" pitchFamily="18" charset="0"/>
-                                    <a:cs typeface="Arial" panose="020B0604020202020204" pitchFamily="34" charset="0"/>
-                                  </a:rPr>
-                                  <m:t>2</m:t>
-                                </m:r>
-                                <m:sSub>
-                                  <m:sSubPr>
-                                    <m:ctrlPr>
-                                      <a:rPr lang="es-ES" sz="1200" b="0" i="1" smtClean="0">
-                                        <a:latin typeface="Cambria Math" panose="02040503050406030204" pitchFamily="18" charset="0"/>
-                                        <a:cs typeface="Arial" panose="020B0604020202020204" pitchFamily="34" charset="0"/>
-                                      </a:rPr>
-                                    </m:ctrlPr>
-                                  </m:sSubPr>
-                                  <m:e>
-                                    <m:r>
-                                      <a:rPr lang="es-ES" sz="1200" b="0" i="1" smtClean="0">
-                                        <a:latin typeface="Cambria Math" panose="02040503050406030204" pitchFamily="18" charset="0"/>
-                                        <a:cs typeface="Arial" panose="020B0604020202020204" pitchFamily="34" charset="0"/>
-                                      </a:rPr>
-                                      <m:t>𝜆</m:t>
-                                    </m:r>
-                                  </m:e>
-                                  <m:sub>
-                                    <m:r>
-                                      <a:rPr lang="es-ES" sz="1200" b="0" i="1" smtClean="0">
-                                        <a:latin typeface="Cambria Math" panose="02040503050406030204" pitchFamily="18" charset="0"/>
-                                        <a:cs typeface="Arial" panose="020B0604020202020204" pitchFamily="34" charset="0"/>
-                                      </a:rPr>
-                                      <m:t>0</m:t>
-                                    </m:r>
-                                  </m:sub>
-                                </m:sSub>
-                                <m:sSub>
-                                  <m:sSubPr>
-                                    <m:ctrlPr>
-                                      <a:rPr lang="es-ES" sz="1200" b="0" i="1" smtClean="0">
-                                        <a:latin typeface="Cambria Math" panose="02040503050406030204" pitchFamily="18" charset="0"/>
-                                        <a:cs typeface="Arial" panose="020B0604020202020204" pitchFamily="34" charset="0"/>
-                                      </a:rPr>
-                                    </m:ctrlPr>
-                                  </m:sSubPr>
-                                  <m:e>
-                                    <m:r>
-                                      <a:rPr lang="es-ES" sz="1200" b="0" i="1" smtClean="0">
-                                        <a:latin typeface="Cambria Math" panose="02040503050406030204" pitchFamily="18" charset="0"/>
-                                        <a:cs typeface="Arial" panose="020B0604020202020204" pitchFamily="34" charset="0"/>
-                                      </a:rPr>
-                                      <m:t>𝑛</m:t>
-                                    </m:r>
-                                  </m:e>
-                                  <m:sub>
-                                    <m:r>
-                                      <a:rPr lang="es-ES" sz="1200" b="0" i="1" smtClean="0">
-                                        <a:latin typeface="Cambria Math" panose="02040503050406030204" pitchFamily="18" charset="0"/>
-                                        <a:cs typeface="Arial" panose="020B0604020202020204" pitchFamily="34" charset="0"/>
-                                      </a:rPr>
-                                      <m:t>3</m:t>
-                                    </m:r>
-                                  </m:sub>
-                                </m:sSub>
-                              </m:num>
-                              <m:den>
-                                <m:r>
-                                  <a:rPr lang="es-ES" sz="1200" b="0" i="1" smtClean="0">
-                                    <a:latin typeface="Cambria Math" panose="02040503050406030204" pitchFamily="18" charset="0"/>
-                                    <a:cs typeface="Arial" panose="020B0604020202020204" pitchFamily="34" charset="0"/>
-                                  </a:rPr>
-                                  <m:t>𝑐</m:t>
-                                </m:r>
-                              </m:den>
-                            </m:f>
-                            <m:d>
-                              <m:dPr>
-                                <m:begChr m:val="["/>
-                                <m:endChr m:val="]"/>
-                                <m:ctrlPr>
-                                  <a:rPr lang="es-ES" sz="1200" b="0" i="1" smtClean="0">
-                                    <a:latin typeface="Cambria Math" panose="02040503050406030204" pitchFamily="18" charset="0"/>
-                                    <a:cs typeface="Arial" panose="020B0604020202020204" pitchFamily="34" charset="0"/>
-                                  </a:rPr>
-                                </m:ctrlPr>
-                              </m:dPr>
-                              <m:e>
-                                <m:f>
-                                  <m:fPr>
-                                    <m:ctrlPr>
-                                      <a:rPr lang="es-ES" sz="1200" b="0" i="1" smtClean="0">
-                                        <a:latin typeface="Cambria Math" panose="02040503050406030204" pitchFamily="18" charset="0"/>
-                                        <a:cs typeface="Arial" panose="020B0604020202020204" pitchFamily="34" charset="0"/>
-                                      </a:rPr>
-                                    </m:ctrlPr>
-                                  </m:fPr>
-                                  <m:num>
-                                    <m:sSup>
-                                      <m:sSupPr>
-                                        <m:ctrlPr>
-                                          <a:rPr lang="es-ES" sz="1200" b="0" i="1" smtClean="0">
-                                            <a:latin typeface="Cambria Math" panose="02040503050406030204" pitchFamily="18" charset="0"/>
-                                            <a:cs typeface="Arial" panose="020B0604020202020204" pitchFamily="34" charset="0"/>
-                                          </a:rPr>
-                                        </m:ctrlPr>
-                                      </m:sSupPr>
-                                      <m:e>
-                                        <m:r>
-                                          <a:rPr lang="es-ES" sz="1200" b="0" i="1" smtClean="0">
-                                            <a:latin typeface="Cambria Math" panose="02040503050406030204" pitchFamily="18" charset="0"/>
-                                            <a:cs typeface="Arial" panose="020B0604020202020204" pitchFamily="34" charset="0"/>
-                                          </a:rPr>
-                                          <m:t>𝑠</m:t>
-                                        </m:r>
-                                      </m:e>
-                                      <m:sup>
-                                        <m:r>
-                                          <a:rPr lang="es-ES" sz="1200" b="0" i="1" smtClean="0">
-                                            <a:latin typeface="Cambria Math" panose="02040503050406030204" pitchFamily="18" charset="0"/>
-                                            <a:cs typeface="Arial" panose="020B0604020202020204" pitchFamily="34" charset="0"/>
-                                          </a:rPr>
-                                          <m:t>2</m:t>
-                                        </m:r>
-                                      </m:sup>
-                                    </m:sSup>
-                                  </m:num>
-                                  <m:den>
-                                    <m:r>
-                                      <a:rPr lang="es-ES" sz="1200" b="0" i="1" smtClean="0">
-                                        <a:latin typeface="Cambria Math" panose="02040503050406030204" pitchFamily="18" charset="0"/>
-                                        <a:cs typeface="Arial" panose="020B0604020202020204" pitchFamily="34" charset="0"/>
-                                      </a:rPr>
-                                      <m:t>𝑚</m:t>
-                                    </m:r>
-                                  </m:den>
-                                </m:f>
-                              </m:e>
-                            </m:d>
-                          </m:e>
-                        </m:eqArr>
-                      </m:e>
-                    </m:d>
-                  </m:oMath>
-                </a14:m>
-                <a:endParaRPr lang="es-ES" sz="1200" b="0" dirty="0">
-                  <a:latin typeface="Arial" panose="020B0604020202020204" pitchFamily="34" charset="0"/>
-                  <a:cs typeface="Arial" panose="020B0604020202020204" pitchFamily="34" charset="0"/>
-                </a:endParaRPr>
-              </a:p>
-              <a:p>
-                <a:pPr algn="just"/>
-                <a:r>
-                  <a:rPr lang="en-US" sz="1200" dirty="0">
-                    <a:latin typeface="Arial" panose="020B0604020202020204" pitchFamily="34" charset="0"/>
-                    <a:cs typeface="Arial" panose="020B0604020202020204" pitchFamily="34" charset="0"/>
-                  </a:rPr>
-                  <a:t> </a:t>
-                </a:r>
-              </a:p>
-              <a:p>
-                <a:pPr algn="just"/>
-                <a:r>
-                  <a:rPr lang="en-US" sz="1200" dirty="0">
-                    <a:latin typeface="Arial" panose="020B0604020202020204" pitchFamily="34" charset="0"/>
-                    <a:cs typeface="Arial" panose="020B0604020202020204" pitchFamily="34" charset="0"/>
-                  </a:rPr>
-                  <a:t>Comment on the results found for the TE0 and TM0 for both deep and shallow waveguides. </a:t>
-                </a:r>
-              </a:p>
-              <a:p>
-                <a:pPr algn="just"/>
-                <a:endParaRPr lang="en-US" sz="1200" dirty="0">
-                  <a:latin typeface="Arial" panose="020B0604020202020204" pitchFamily="34" charset="0"/>
-                  <a:cs typeface="Arial" panose="020B0604020202020204" pitchFamily="34" charset="0"/>
-                </a:endParaRPr>
-              </a:p>
-            </p:txBody>
-          </p:sp>
-        </mc:Choice>
-        <mc:Fallback xmlns="">
-          <p:sp>
-            <p:nvSpPr>
-              <p:cNvPr id="2" name="CuadroTexto 1">
-                <a:extLst>
-                  <a:ext uri="{FF2B5EF4-FFF2-40B4-BE49-F238E27FC236}">
-                    <a16:creationId xmlns:a16="http://schemas.microsoft.com/office/drawing/2014/main" id="{A440F587-93A3-E474-C0B0-883BB9DAFD85}"/>
-                  </a:ext>
-                </a:extLst>
-              </p:cNvPr>
-              <p:cNvSpPr txBox="1">
-                <a:spLocks noRot="1" noChangeAspect="1" noMove="1" noResize="1" noEditPoints="1" noAdjustHandles="1" noChangeArrowheads="1" noChangeShapeType="1" noTextEdit="1"/>
-              </p:cNvSpPr>
-              <p:nvPr/>
-            </p:nvSpPr>
-            <p:spPr>
-              <a:xfrm>
-                <a:off x="609441" y="4860334"/>
-                <a:ext cx="11198542" cy="1361911"/>
-              </a:xfrm>
-              <a:prstGeom prst="rect">
-                <a:avLst/>
-              </a:prstGeom>
-              <a:blipFill>
-                <a:blip r:embed="rId6"/>
-                <a:stretch>
-                  <a:fillRect/>
-                </a:stretch>
-              </a:blipFill>
-              <a:ln w="28575">
-                <a:solidFill>
-                  <a:srgbClr val="E0700D"/>
-                </a:solidFill>
-              </a:ln>
-            </p:spPr>
-            <p:txBody>
-              <a:bodyPr/>
-              <a:lstStyle/>
-              <a:p>
-                <a:r>
-                  <a:rPr lang="es-ES">
-                    <a:noFill/>
-                  </a:rPr>
-                  <a:t> </a:t>
-                </a:r>
-              </a:p>
-            </p:txBody>
-          </p:sp>
-        </mc:Fallback>
-      </mc:AlternateContent>
-      <p:sp>
-        <p:nvSpPr>
-          <p:cNvPr id="5" name="Rectángulo 4">
+      <p:sp>
+        <p:nvSpPr>
+          <p:cNvPr id="2" name="CuadroTexto 1">
             <a:extLst>
               <a:ext uri="{FF2B5EF4-FFF2-40B4-BE49-F238E27FC236}">
-                <a16:creationId xmlns:a16="http://schemas.microsoft.com/office/drawing/2014/main" id="{A6B92C76-6772-2E00-346F-532321092C04}"/>
+                <a16:creationId xmlns:a16="http://schemas.microsoft.com/office/drawing/2014/main" id="{DE977BA9-63D1-A3AC-3821-011EF304D0A2}"/>
+              </a:ext>
+            </a:extLst>
+          </p:cNvPr>
+          <p:cNvSpPr txBox="1"/>
+          <p:nvPr/>
+        </p:nvSpPr>
+        <p:spPr>
+          <a:xfrm>
+            <a:off x="609441" y="4538008"/>
+            <a:ext cx="11199971" cy="1754326"/>
+          </a:xfrm>
+          <a:prstGeom prst="rect">
+            <a:avLst/>
+          </a:prstGeom>
+          <a:solidFill>
+            <a:schemeClr val="bg1">
+              <a:lumMod val="95000"/>
+            </a:schemeClr>
+          </a:solidFill>
+          <a:ln w="28575">
+            <a:solidFill>
+              <a:srgbClr val="E0700D"/>
+            </a:solidFill>
+          </a:ln>
+        </p:spPr>
+        <p:txBody>
+          <a:bodyPr wrap="square" rtlCol="0">
+            <a:spAutoFit/>
+          </a:bodyPr>
+          <a:lstStyle/>
+          <a:p>
+            <a:pPr algn="just"/>
+            <a:r>
+              <a:rPr lang="es-CO" sz="1200" noProof="0" dirty="0">
+                <a:latin typeface="Arial" panose="020B0604020202020204" pitchFamily="34" charset="0"/>
+                <a:cs typeface="Arial" panose="020B0604020202020204" pitchFamily="34" charset="0"/>
+              </a:rPr>
+              <a:t>Se observa que con esta tecnología, cuando se aumenta el ancho de la guía de onda se propagan modos más rápidamente, pues mientras que </a:t>
+            </a:r>
+            <a:r>
+              <a:rPr lang="es-CO" sz="1200" noProof="0" dirty="0" err="1">
+                <a:latin typeface="Arial" panose="020B0604020202020204" pitchFamily="34" charset="0"/>
+                <a:cs typeface="Arial" panose="020B0604020202020204" pitchFamily="34" charset="0"/>
+              </a:rPr>
+              <a:t>SiNx</a:t>
+            </a:r>
+            <a:r>
+              <a:rPr lang="es-CO" sz="1200" noProof="0" dirty="0">
+                <a:latin typeface="Arial" panose="020B0604020202020204" pitchFamily="34" charset="0"/>
+                <a:cs typeface="Arial" panose="020B0604020202020204" pitchFamily="34" charset="0"/>
+              </a:rPr>
+              <a:t> después de aumentar 0.7 </a:t>
+            </a:r>
+            <a:r>
+              <a:rPr lang="es-CO" sz="1200" noProof="0" dirty="0" err="1">
+                <a:latin typeface="Arial" panose="020B0604020202020204" pitchFamily="34" charset="0"/>
+                <a:cs typeface="Arial" panose="020B0604020202020204" pitchFamily="34" charset="0"/>
+              </a:rPr>
+              <a:t>um</a:t>
+            </a:r>
+            <a:r>
+              <a:rPr lang="es-CO" sz="1200" noProof="0" dirty="0">
+                <a:latin typeface="Arial" panose="020B0604020202020204" pitchFamily="34" charset="0"/>
+                <a:cs typeface="Arial" panose="020B0604020202020204" pitchFamily="34" charset="0"/>
+              </a:rPr>
+              <a:t> empezaba a propagarse un modo de orden superior, en SOI después de aumentar 0.2 </a:t>
+            </a:r>
+            <a:r>
+              <a:rPr lang="es-CO" sz="1200" noProof="0" dirty="0" err="1">
+                <a:latin typeface="Arial" panose="020B0604020202020204" pitchFamily="34" charset="0"/>
+                <a:cs typeface="Arial" panose="020B0604020202020204" pitchFamily="34" charset="0"/>
+              </a:rPr>
+              <a:t>um</a:t>
+            </a:r>
+            <a:r>
+              <a:rPr lang="es-CO" sz="1200" noProof="0" dirty="0">
+                <a:latin typeface="Arial" panose="020B0604020202020204" pitchFamily="34" charset="0"/>
+                <a:cs typeface="Arial" panose="020B0604020202020204" pitchFamily="34" charset="0"/>
+              </a:rPr>
+              <a:t> ya se propagan modos de orden superior, esto se debe tener muy en cuenta a la hora de fabricar, ya que si queremos una guía monomodo en una polarización, podría estar más propensa a tener errores fabricarla con SOI. </a:t>
+            </a:r>
+          </a:p>
+          <a:p>
+            <a:pPr algn="just"/>
+            <a:r>
+              <a:rPr lang="es-CO" sz="1200" dirty="0">
+                <a:latin typeface="Arial" panose="020B0604020202020204" pitchFamily="34" charset="0"/>
+                <a:cs typeface="Arial" panose="020B0604020202020204" pitchFamily="34" charset="0"/>
+              </a:rPr>
+              <a:t>También, es importante resaltar que en SOI, vemos como hay conversión de polarización en los 0.7 </a:t>
+            </a:r>
+            <a:r>
+              <a:rPr lang="es-CO" sz="1200" dirty="0" err="1">
+                <a:latin typeface="Arial" panose="020B0604020202020204" pitchFamily="34" charset="0"/>
+                <a:cs typeface="Arial" panose="020B0604020202020204" pitchFamily="34" charset="0"/>
+              </a:rPr>
+              <a:t>um</a:t>
+            </a:r>
+            <a:r>
+              <a:rPr lang="es-CO" sz="1200" dirty="0">
+                <a:latin typeface="Arial" panose="020B0604020202020204" pitchFamily="34" charset="0"/>
+                <a:cs typeface="Arial" panose="020B0604020202020204" pitchFamily="34" charset="0"/>
+              </a:rPr>
+              <a:t> de </a:t>
+            </a:r>
+            <a:r>
+              <a:rPr lang="es-CO" sz="1200" dirty="0" err="1">
+                <a:latin typeface="Arial" panose="020B0604020202020204" pitchFamily="34" charset="0"/>
+                <a:cs typeface="Arial" panose="020B0604020202020204" pitchFamily="34" charset="0"/>
+              </a:rPr>
+              <a:t>width</a:t>
+            </a:r>
+            <a:r>
+              <a:rPr lang="es-CO" sz="1200" dirty="0">
+                <a:latin typeface="Arial" panose="020B0604020202020204" pitchFamily="34" charset="0"/>
+                <a:cs typeface="Arial" panose="020B0604020202020204" pitchFamily="34" charset="0"/>
+              </a:rPr>
+              <a:t>, </a:t>
+            </a:r>
+            <a:r>
+              <a:rPr lang="es-CO" sz="1200" dirty="0" err="1">
+                <a:latin typeface="Arial" panose="020B0604020202020204" pitchFamily="34" charset="0"/>
+                <a:cs typeface="Arial" panose="020B0604020202020204" pitchFamily="34" charset="0"/>
+              </a:rPr>
+              <a:t>endonde</a:t>
+            </a:r>
+            <a:r>
+              <a:rPr lang="es-CO" sz="1200" dirty="0">
+                <a:latin typeface="Arial" panose="020B0604020202020204" pitchFamily="34" charset="0"/>
+                <a:cs typeface="Arial" panose="020B0604020202020204" pitchFamily="34" charset="0"/>
+              </a:rPr>
+              <a:t> el modo 1 pasa de polarización magnética a eléctrica, esto también ocurre para modos superiores en los que pasan de una a otra. </a:t>
+            </a:r>
+            <a:endParaRPr lang="es-CO" sz="1200" noProof="0" dirty="0">
+              <a:latin typeface="Arial" panose="020B0604020202020204" pitchFamily="34" charset="0"/>
+              <a:cs typeface="Arial" panose="020B0604020202020204" pitchFamily="34" charset="0"/>
+            </a:endParaRPr>
+          </a:p>
+          <a:p>
+            <a:pPr algn="just"/>
+            <a:r>
+              <a:rPr lang="es-CO" sz="1200" dirty="0">
+                <a:latin typeface="Arial" panose="020B0604020202020204" pitchFamily="34" charset="0"/>
+                <a:cs typeface="Arial" panose="020B0604020202020204" pitchFamily="34" charset="0"/>
+              </a:rPr>
+              <a:t>El índice efectivo del modo 0 pasa de 1.79 a 2.72, teniendo una diferencia de 0.93, por lo que el aumentar el ancho de la fibra hace que los modos se confinen mucho más. Si lo comparamos con el </a:t>
+            </a:r>
+            <a:r>
+              <a:rPr lang="es-CO" sz="1200" dirty="0" err="1">
+                <a:latin typeface="Arial" panose="020B0604020202020204" pitchFamily="34" charset="0"/>
+                <a:cs typeface="Arial" panose="020B0604020202020204" pitchFamily="34" charset="0"/>
+              </a:rPr>
+              <a:t>SiNx</a:t>
+            </a:r>
+            <a:r>
+              <a:rPr lang="es-CO" sz="1200" dirty="0">
+                <a:latin typeface="Arial" panose="020B0604020202020204" pitchFamily="34" charset="0"/>
+                <a:cs typeface="Arial" panose="020B0604020202020204" pitchFamily="34" charset="0"/>
+              </a:rPr>
+              <a:t> que tuvo un crecimiento para el modo 0 de 0.121, notamos que es 7.68 veces más, esto tiene que ver con la diferencia entre los índices de refracción del </a:t>
+            </a:r>
+            <a:r>
+              <a:rPr lang="es-CO" sz="1200" dirty="0" err="1">
+                <a:latin typeface="Arial" panose="020B0604020202020204" pitchFamily="34" charset="0"/>
+                <a:cs typeface="Arial" panose="020B0604020202020204" pitchFamily="34" charset="0"/>
+              </a:rPr>
+              <a:t>cladding</a:t>
+            </a:r>
+            <a:r>
+              <a:rPr lang="es-CO" sz="1200" dirty="0">
+                <a:latin typeface="Arial" panose="020B0604020202020204" pitchFamily="34" charset="0"/>
+                <a:cs typeface="Arial" panose="020B0604020202020204" pitchFamily="34" charset="0"/>
+              </a:rPr>
+              <a:t> y del </a:t>
+            </a:r>
+            <a:r>
+              <a:rPr lang="es-CO" sz="1200" dirty="0" err="1">
+                <a:latin typeface="Arial" panose="020B0604020202020204" pitchFamily="34" charset="0"/>
+                <a:cs typeface="Arial" panose="020B0604020202020204" pitchFamily="34" charset="0"/>
+              </a:rPr>
+              <a:t>core</a:t>
+            </a:r>
+            <a:r>
+              <a:rPr lang="es-CO" sz="1200" dirty="0">
+                <a:latin typeface="Arial" panose="020B0604020202020204" pitchFamily="34" charset="0"/>
+                <a:cs typeface="Arial" panose="020B0604020202020204" pitchFamily="34" charset="0"/>
+              </a:rPr>
+              <a:t>, ya que en SOI ese contraste es mucho más grande, lo que a su vez le permite confinar más los modos. </a:t>
+            </a:r>
+            <a:endParaRPr lang="es-CO" sz="1200" noProof="0" dirty="0">
+              <a:latin typeface="Arial" panose="020B0604020202020204" pitchFamily="34" charset="0"/>
+              <a:cs typeface="Arial" panose="020B0604020202020204" pitchFamily="34" charset="0"/>
+            </a:endParaRPr>
+          </a:p>
+        </p:txBody>
+      </p:sp>
+      <p:sp>
+        <p:nvSpPr>
+          <p:cNvPr id="7" name="Rectángulo 6">
+            <a:extLst>
+              <a:ext uri="{FF2B5EF4-FFF2-40B4-BE49-F238E27FC236}">
+                <a16:creationId xmlns:a16="http://schemas.microsoft.com/office/drawing/2014/main" id="{B4966147-56E4-AF36-B4E5-D67DCD6AB9A3}"/>
               </a:ext>
             </a:extLst>
           </p:cNvPr>
@@ -6712,8 +10258,8 @@
         </p:nvSpPr>
         <p:spPr>
           <a:xfrm>
-            <a:off x="609441" y="1447800"/>
-            <a:ext cx="5486559" cy="3306028"/>
+            <a:off x="609441" y="1295400"/>
+            <a:ext cx="11199971" cy="3284358"/>
           </a:xfrm>
           <a:prstGeom prst="rect">
             <a:avLst/>
@@ -6746,16 +10292,1229 @@
           <a:lstStyle/>
           <a:p>
             <a:pPr algn="ctr"/>
-            <a:endParaRPr lang="en-US"/>
+            <a:endParaRPr lang="es-CO" noProof="0" dirty="0"/>
           </a:p>
         </p:txBody>
       </p:sp>
       <p:sp>
         <p:nvSpPr>
-          <p:cNvPr id="6" name="Rectángulo 5">
+          <p:cNvPr id="8" name="CuadroTexto 7">
             <a:extLst>
               <a:ext uri="{FF2B5EF4-FFF2-40B4-BE49-F238E27FC236}">
-                <a16:creationId xmlns:a16="http://schemas.microsoft.com/office/drawing/2014/main" id="{2886628E-6E58-1F7E-B6C6-432B9A228397}"/>
+                <a16:creationId xmlns:a16="http://schemas.microsoft.com/office/drawing/2014/main" id="{6A634A27-6B4B-7FF3-3617-F7496A83A668}"/>
+              </a:ext>
+            </a:extLst>
+          </p:cNvPr>
+          <p:cNvSpPr txBox="1"/>
+          <p:nvPr/>
+        </p:nvSpPr>
+        <p:spPr>
+          <a:xfrm>
+            <a:off x="2286000" y="2671278"/>
+            <a:ext cx="7718580" cy="923330"/>
+          </a:xfrm>
+          <a:prstGeom prst="rect">
+            <a:avLst/>
+          </a:prstGeom>
+          <a:noFill/>
+        </p:spPr>
+        <p:txBody>
+          <a:bodyPr wrap="square" rtlCol="0">
+            <a:spAutoFit/>
+          </a:bodyPr>
+          <a:lstStyle/>
+          <a:p>
+            <a:pPr algn="ctr"/>
+            <a:r>
+              <a:rPr lang="es-CO" b="1" noProof="0" dirty="0" err="1"/>
+              <a:t>deep</a:t>
+            </a:r>
+            <a:r>
+              <a:rPr lang="es-CO" noProof="0" dirty="0"/>
+              <a:t> </a:t>
+            </a:r>
+            <a:r>
+              <a:rPr lang="es-CO" noProof="0" dirty="0" err="1"/>
+              <a:t>waveguide</a:t>
+            </a:r>
+            <a:endParaRPr lang="es-CO" noProof="0" dirty="0"/>
+          </a:p>
+          <a:p>
+            <a:pPr algn="ctr"/>
+            <a:endParaRPr lang="es-CO" noProof="0" dirty="0"/>
+          </a:p>
+          <a:p>
+            <a:pPr algn="ctr"/>
+            <a:r>
+              <a:rPr lang="es-CO" noProof="0" dirty="0"/>
+              <a:t>Paste </a:t>
+            </a:r>
+            <a:r>
+              <a:rPr lang="es-CO" noProof="0" dirty="0" err="1"/>
+              <a:t>plot</a:t>
+            </a:r>
+            <a:r>
+              <a:rPr lang="es-CO" noProof="0" dirty="0"/>
+              <a:t> </a:t>
+            </a:r>
+            <a:r>
+              <a:rPr lang="es-CO" noProof="0" dirty="0" err="1"/>
+              <a:t>here</a:t>
+            </a:r>
+            <a:endParaRPr lang="es-CO" noProof="0" dirty="0"/>
+          </a:p>
+        </p:txBody>
+      </p:sp>
+      <p:pic>
+        <p:nvPicPr>
+          <p:cNvPr id="5" name="Imagen 4">
+            <a:extLst>
+              <a:ext uri="{FF2B5EF4-FFF2-40B4-BE49-F238E27FC236}">
+                <a16:creationId xmlns:a16="http://schemas.microsoft.com/office/drawing/2014/main" id="{81876288-F10C-8879-8A29-A48857CD2936}"/>
+              </a:ext>
+            </a:extLst>
+          </p:cNvPr>
+          <p:cNvPicPr>
+            <a:picLocks noChangeAspect="1"/>
+          </p:cNvPicPr>
+          <p:nvPr/>
+        </p:nvPicPr>
+        <p:blipFill>
+          <a:blip r:embed="rId5"/>
+          <a:stretch>
+            <a:fillRect/>
+          </a:stretch>
+        </p:blipFill>
+        <p:spPr>
+          <a:xfrm>
+            <a:off x="3562653" y="1396779"/>
+            <a:ext cx="5293546" cy="3081600"/>
+          </a:xfrm>
+          <a:prstGeom prst="rect">
+            <a:avLst/>
+          </a:prstGeom>
+        </p:spPr>
+      </p:pic>
+    </p:spTree>
+    <p:extLst>
+      <p:ext uri="{BB962C8B-B14F-4D97-AF65-F5344CB8AC3E}">
+        <p14:creationId xmlns:p14="http://schemas.microsoft.com/office/powerpoint/2010/main" val="3208766791"/>
+      </p:ext>
+    </p:extLst>
+  </p:cSld>
+  <p:clrMapOvr>
+    <a:masterClrMapping/>
+  </p:clrMapOvr>
+</p:sld>
+</file>
+
+<file path=ppt/slides/slide7.xml><?xml version="1.0" encoding="utf-8"?>
+<p:sld xmlns:a="http://schemas.openxmlformats.org/drawingml/2006/main" xmlns:r="http://schemas.openxmlformats.org/officeDocument/2006/relationships" xmlns:p="http://schemas.openxmlformats.org/presentationml/2006/main">
+  <p:cSld>
+    <p:spTree>
+      <p:nvGrpSpPr>
+        <p:cNvPr id="1" name="">
+          <a:extLst>
+            <a:ext uri="{FF2B5EF4-FFF2-40B4-BE49-F238E27FC236}">
+              <a16:creationId xmlns:a16="http://schemas.microsoft.com/office/drawing/2014/main" id="{9E1DA0F9-B230-D9FC-3CE7-03BD08CF54F7}"/>
+            </a:ext>
+          </a:extLst>
+        </p:cNvPr>
+        <p:cNvGrpSpPr/>
+        <p:nvPr/>
+      </p:nvGrpSpPr>
+      <p:grpSpPr>
+        <a:xfrm>
+          <a:off x="0" y="0"/>
+          <a:ext cx="0" cy="0"/>
+          <a:chOff x="0" y="0"/>
+          <a:chExt cx="0" cy="0"/>
+        </a:xfrm>
+      </p:grpSpPr>
+      <mc:AlternateContent xmlns:mc="http://schemas.openxmlformats.org/markup-compatibility/2006" xmlns:a14="http://schemas.microsoft.com/office/drawing/2010/main">
+        <mc:Choice Requires="a14">
+          <p:sp>
+            <p:nvSpPr>
+              <p:cNvPr id="16" name="object 16">
+                <a:extLst>
+                  <a:ext uri="{FF2B5EF4-FFF2-40B4-BE49-F238E27FC236}">
+                    <a16:creationId xmlns:a16="http://schemas.microsoft.com/office/drawing/2014/main" id="{394400B4-EE16-8E85-AB54-E82FE3B29345}"/>
+                  </a:ext>
+                </a:extLst>
+              </p:cNvPr>
+              <p:cNvSpPr txBox="1">
+                <a:spLocks noGrp="1"/>
+              </p:cNvSpPr>
+              <p:nvPr>
+                <p:ph type="title"/>
+              </p:nvPr>
+            </p:nvSpPr>
+            <p:spPr>
+              <a:xfrm>
+                <a:off x="685800" y="152400"/>
+                <a:ext cx="10994410" cy="1071255"/>
+              </a:xfrm>
+              <a:prstGeom prst="rect">
+                <a:avLst/>
+              </a:prstGeom>
+            </p:spPr>
+            <p:txBody>
+              <a:bodyPr vert="horz" wrap="square" lIns="0" tIns="12700" rIns="0" bIns="0" rtlCol="0">
+                <a:spAutoFit/>
+              </a:bodyPr>
+              <a:lstStyle/>
+              <a:p>
+                <a:pPr marL="12700">
+                  <a:lnSpc>
+                    <a:spcPct val="100000"/>
+                  </a:lnSpc>
+                  <a:spcBef>
+                    <a:spcPts val="100"/>
+                  </a:spcBef>
+                </a:pPr>
+                <a:r>
+                  <a:rPr lang="es-CO" sz="2500" noProof="0" dirty="0" err="1"/>
+                  <a:t>Learning</a:t>
+                </a:r>
+                <a:r>
+                  <a:rPr lang="es-CO" sz="2500" noProof="0" dirty="0"/>
+                  <a:t> </a:t>
+                </a:r>
+                <a:r>
+                  <a:rPr lang="es-CO" sz="2500" noProof="0" dirty="0" err="1"/>
+                  <a:t>outcome</a:t>
+                </a:r>
+                <a:r>
+                  <a:rPr lang="es-CO" sz="2500" noProof="0" dirty="0"/>
+                  <a:t> #3 – </a:t>
+                </a:r>
+                <a:r>
+                  <a:rPr lang="es-CO" sz="2500" noProof="0" dirty="0" err="1"/>
+                  <a:t>Waveguide</a:t>
+                </a:r>
+                <a:r>
+                  <a:rPr lang="es-CO" sz="2500" noProof="0" dirty="0"/>
+                  <a:t> compact </a:t>
+                </a:r>
+                <a:r>
+                  <a:rPr lang="es-CO" sz="2500" noProof="0" dirty="0" err="1"/>
+                  <a:t>model</a:t>
+                </a:r>
+                <a:br>
+                  <a:rPr lang="es-CO" sz="2500" spc="-5" noProof="0" dirty="0">
+                    <a:latin typeface="+mj-lt"/>
+                    <a:cs typeface="Lucida Sans"/>
+                  </a:rPr>
+                </a:br>
+                <a:r>
+                  <a:rPr lang="es-CO" b="0" noProof="0" dirty="0" err="1"/>
+                  <a:t>Let’s</a:t>
+                </a:r>
+                <a:r>
+                  <a:rPr lang="es-CO" b="0" noProof="0" dirty="0"/>
+                  <a:t> </a:t>
+                </a:r>
+                <a:r>
+                  <a:rPr lang="es-CO" b="0" noProof="0" dirty="0" err="1"/>
+                  <a:t>model</a:t>
+                </a:r>
+                <a:r>
+                  <a:rPr lang="es-CO" b="0" noProof="0" dirty="0"/>
+                  <a:t> the </a:t>
+                </a:r>
+                <a:r>
+                  <a:rPr lang="es-CO" b="0" noProof="0" dirty="0" err="1"/>
+                  <a:t>waveguide</a:t>
+                </a:r>
+                <a:r>
+                  <a:rPr lang="es-CO" b="0" noProof="0" dirty="0"/>
+                  <a:t> </a:t>
+                </a:r>
+                <a:r>
+                  <a:rPr lang="es-CO" b="0" noProof="0" dirty="0" err="1"/>
+                  <a:t>using</a:t>
+                </a:r>
+                <a:r>
+                  <a:rPr lang="es-CO" b="0" noProof="0" dirty="0"/>
+                  <a:t> a </a:t>
+                </a:r>
+                <a:r>
+                  <a:rPr lang="es-CO" b="0" noProof="0" dirty="0" err="1"/>
+                  <a:t>second</a:t>
+                </a:r>
+                <a:r>
+                  <a:rPr lang="es-CO" b="0" noProof="0" dirty="0"/>
+                  <a:t> </a:t>
+                </a:r>
+                <a:r>
+                  <a:rPr lang="es-CO" b="0" noProof="0" dirty="0" err="1"/>
+                  <a:t>order</a:t>
+                </a:r>
+                <a:r>
+                  <a:rPr lang="es-CO" b="0" noProof="0" dirty="0"/>
+                  <a:t> </a:t>
+                </a:r>
+                <a:r>
+                  <a:rPr lang="es-CO" b="0" noProof="0" dirty="0" err="1"/>
+                  <a:t>polynomial</a:t>
+                </a:r>
+                <a:r>
+                  <a:rPr lang="es-CO" b="0" noProof="0" dirty="0"/>
+                  <a:t>: </a:t>
+                </a:r>
+                <a:br>
+                  <a:rPr lang="es-CO" b="0" noProof="0" dirty="0"/>
+                </a:br>
+                <a14:m>
+                  <m:oMathPara xmlns:m="http://schemas.openxmlformats.org/officeDocument/2006/math">
+                    <m:oMathParaPr>
+                      <m:jc m:val="centerGroup"/>
+                    </m:oMathParaPr>
+                    <m:oMath xmlns:m="http://schemas.openxmlformats.org/officeDocument/2006/math">
+                      <m:sSub>
+                        <m:sSubPr>
+                          <m:ctrlPr>
+                            <a:rPr lang="es-CO" b="0" i="1" noProof="0" smtClean="0">
+                              <a:latin typeface="Cambria Math" panose="02040503050406030204" pitchFamily="18" charset="0"/>
+                            </a:rPr>
+                          </m:ctrlPr>
+                        </m:sSubPr>
+                        <m:e>
+                          <m:r>
+                            <a:rPr lang="es-CO" b="0" i="1" noProof="0" smtClean="0">
+                              <a:latin typeface="Cambria Math" panose="02040503050406030204" pitchFamily="18" charset="0"/>
+                            </a:rPr>
+                            <m:t>𝑛</m:t>
+                          </m:r>
+                        </m:e>
+                        <m:sub>
+                          <m:r>
+                            <a:rPr lang="es-CO" b="0" i="1" noProof="0" smtClean="0">
+                              <a:latin typeface="Cambria Math" panose="02040503050406030204" pitchFamily="18" charset="0"/>
+                            </a:rPr>
+                            <m:t>𝑒𝑓𝑓</m:t>
+                          </m:r>
+                        </m:sub>
+                      </m:sSub>
+                      <m:d>
+                        <m:dPr>
+                          <m:ctrlPr>
+                            <a:rPr lang="es-CO" b="0" i="1" noProof="0" smtClean="0">
+                              <a:latin typeface="Cambria Math" panose="02040503050406030204" pitchFamily="18" charset="0"/>
+                            </a:rPr>
+                          </m:ctrlPr>
+                        </m:dPr>
+                        <m:e>
+                          <m:r>
+                            <a:rPr lang="es-CO" b="0" i="1" noProof="0" smtClean="0">
+                              <a:latin typeface="Cambria Math" panose="02040503050406030204" pitchFamily="18" charset="0"/>
+                            </a:rPr>
+                            <m:t>𝜆</m:t>
+                          </m:r>
+                        </m:e>
+                      </m:d>
+                      <m:r>
+                        <a:rPr lang="es-CO" b="0" i="1" noProof="0" smtClean="0">
+                          <a:latin typeface="Cambria Math" panose="02040503050406030204" pitchFamily="18" charset="0"/>
+                        </a:rPr>
+                        <m:t>=</m:t>
+                      </m:r>
+                      <m:sSub>
+                        <m:sSubPr>
+                          <m:ctrlPr>
+                            <a:rPr lang="es-CO" b="0" i="1" noProof="0" smtClean="0">
+                              <a:latin typeface="Cambria Math" panose="02040503050406030204" pitchFamily="18" charset="0"/>
+                            </a:rPr>
+                          </m:ctrlPr>
+                        </m:sSubPr>
+                        <m:e>
+                          <m:r>
+                            <a:rPr lang="es-CO" b="0" i="1" noProof="0" smtClean="0">
+                              <a:latin typeface="Cambria Math" panose="02040503050406030204" pitchFamily="18" charset="0"/>
+                            </a:rPr>
+                            <m:t>𝑛</m:t>
+                          </m:r>
+                        </m:e>
+                        <m:sub>
+                          <m:r>
+                            <a:rPr lang="es-CO" b="0" i="1" noProof="0" smtClean="0">
+                              <a:latin typeface="Cambria Math" panose="02040503050406030204" pitchFamily="18" charset="0"/>
+                            </a:rPr>
+                            <m:t>1</m:t>
+                          </m:r>
+                        </m:sub>
+                      </m:sSub>
+                      <m:r>
+                        <a:rPr lang="es-CO" b="0" i="1" noProof="0" smtClean="0">
+                          <a:latin typeface="Cambria Math" panose="02040503050406030204" pitchFamily="18" charset="0"/>
+                        </a:rPr>
+                        <m:t>+</m:t>
+                      </m:r>
+                      <m:sSub>
+                        <m:sSubPr>
+                          <m:ctrlPr>
+                            <a:rPr lang="es-CO" b="0" i="1" noProof="0" smtClean="0">
+                              <a:latin typeface="Cambria Math" panose="02040503050406030204" pitchFamily="18" charset="0"/>
+                            </a:rPr>
+                          </m:ctrlPr>
+                        </m:sSubPr>
+                        <m:e>
+                          <m:r>
+                            <a:rPr lang="es-CO" b="0" i="1" noProof="0" smtClean="0">
+                              <a:latin typeface="Cambria Math" panose="02040503050406030204" pitchFamily="18" charset="0"/>
+                            </a:rPr>
+                            <m:t>𝑛</m:t>
+                          </m:r>
+                        </m:e>
+                        <m:sub>
+                          <m:r>
+                            <a:rPr lang="es-CO" b="0" i="1" noProof="0" smtClean="0">
+                              <a:latin typeface="Cambria Math" panose="02040503050406030204" pitchFamily="18" charset="0"/>
+                            </a:rPr>
+                            <m:t>2</m:t>
+                          </m:r>
+                        </m:sub>
+                      </m:sSub>
+                      <m:d>
+                        <m:dPr>
+                          <m:ctrlPr>
+                            <a:rPr lang="es-CO" b="0" i="1" noProof="0" smtClean="0">
+                              <a:latin typeface="Cambria Math" panose="02040503050406030204" pitchFamily="18" charset="0"/>
+                            </a:rPr>
+                          </m:ctrlPr>
+                        </m:dPr>
+                        <m:e>
+                          <m:r>
+                            <a:rPr lang="es-CO" b="0" i="1" noProof="0" smtClean="0">
+                              <a:latin typeface="Cambria Math" panose="02040503050406030204" pitchFamily="18" charset="0"/>
+                            </a:rPr>
+                            <m:t>𝜆</m:t>
+                          </m:r>
+                          <m:r>
+                            <a:rPr lang="es-CO" b="0" i="1" noProof="0" smtClean="0">
+                              <a:latin typeface="Cambria Math" panose="02040503050406030204" pitchFamily="18" charset="0"/>
+                            </a:rPr>
+                            <m:t>−</m:t>
+                          </m:r>
+                          <m:sSub>
+                            <m:sSubPr>
+                              <m:ctrlPr>
+                                <a:rPr lang="es-CO" b="0" i="1" noProof="0" smtClean="0">
+                                  <a:latin typeface="Cambria Math" panose="02040503050406030204" pitchFamily="18" charset="0"/>
+                                </a:rPr>
+                              </m:ctrlPr>
+                            </m:sSubPr>
+                            <m:e>
+                              <m:r>
+                                <a:rPr lang="es-CO" b="0" i="1" noProof="0" smtClean="0">
+                                  <a:latin typeface="Cambria Math" panose="02040503050406030204" pitchFamily="18" charset="0"/>
+                                </a:rPr>
+                                <m:t>𝜆</m:t>
+                              </m:r>
+                            </m:e>
+                            <m:sub>
+                              <m:r>
+                                <a:rPr lang="es-CO" b="0" i="1" noProof="0" smtClean="0">
+                                  <a:latin typeface="Cambria Math" panose="02040503050406030204" pitchFamily="18" charset="0"/>
+                                </a:rPr>
+                                <m:t>0</m:t>
+                              </m:r>
+                            </m:sub>
+                          </m:sSub>
+                        </m:e>
+                      </m:d>
+                      <m:r>
+                        <a:rPr lang="es-CO" b="0" i="1" noProof="0" smtClean="0">
+                          <a:latin typeface="Cambria Math" panose="02040503050406030204" pitchFamily="18" charset="0"/>
+                        </a:rPr>
+                        <m:t>+</m:t>
+                      </m:r>
+                      <m:sSub>
+                        <m:sSubPr>
+                          <m:ctrlPr>
+                            <a:rPr lang="es-CO" b="0" i="1" noProof="0" smtClean="0">
+                              <a:latin typeface="Cambria Math" panose="02040503050406030204" pitchFamily="18" charset="0"/>
+                            </a:rPr>
+                          </m:ctrlPr>
+                        </m:sSubPr>
+                        <m:e>
+                          <m:r>
+                            <a:rPr lang="es-CO" b="0" i="1" noProof="0" smtClean="0">
+                              <a:latin typeface="Cambria Math" panose="02040503050406030204" pitchFamily="18" charset="0"/>
+                            </a:rPr>
+                            <m:t>𝑛</m:t>
+                          </m:r>
+                        </m:e>
+                        <m:sub>
+                          <m:r>
+                            <a:rPr lang="es-CO" b="0" i="1" noProof="0" smtClean="0">
+                              <a:latin typeface="Cambria Math" panose="02040503050406030204" pitchFamily="18" charset="0"/>
+                            </a:rPr>
+                            <m:t>3</m:t>
+                          </m:r>
+                        </m:sub>
+                      </m:sSub>
+                      <m:sSup>
+                        <m:sSupPr>
+                          <m:ctrlPr>
+                            <a:rPr lang="es-CO" b="0" i="1" noProof="0" smtClean="0">
+                              <a:latin typeface="Cambria Math" panose="02040503050406030204" pitchFamily="18" charset="0"/>
+                            </a:rPr>
+                          </m:ctrlPr>
+                        </m:sSupPr>
+                        <m:e>
+                          <m:d>
+                            <m:dPr>
+                              <m:ctrlPr>
+                                <a:rPr lang="es-CO" b="0" i="1" noProof="0" smtClean="0">
+                                  <a:latin typeface="Cambria Math" panose="02040503050406030204" pitchFamily="18" charset="0"/>
+                                </a:rPr>
+                              </m:ctrlPr>
+                            </m:dPr>
+                            <m:e>
+                              <m:r>
+                                <a:rPr lang="es-CO" b="0" i="1" noProof="0" smtClean="0">
+                                  <a:latin typeface="Cambria Math" panose="02040503050406030204" pitchFamily="18" charset="0"/>
+                                </a:rPr>
+                                <m:t>𝜆</m:t>
+                              </m:r>
+                              <m:r>
+                                <a:rPr lang="es-CO" b="0" i="1" noProof="0" smtClean="0">
+                                  <a:latin typeface="Cambria Math" panose="02040503050406030204" pitchFamily="18" charset="0"/>
+                                </a:rPr>
+                                <m:t>−</m:t>
+                              </m:r>
+                              <m:sSub>
+                                <m:sSubPr>
+                                  <m:ctrlPr>
+                                    <a:rPr lang="es-CO" b="0" i="1" noProof="0" smtClean="0">
+                                      <a:latin typeface="Cambria Math" panose="02040503050406030204" pitchFamily="18" charset="0"/>
+                                    </a:rPr>
+                                  </m:ctrlPr>
+                                </m:sSubPr>
+                                <m:e>
+                                  <m:r>
+                                    <a:rPr lang="es-CO" b="0" i="1" noProof="0" smtClean="0">
+                                      <a:latin typeface="Cambria Math" panose="02040503050406030204" pitchFamily="18" charset="0"/>
+                                    </a:rPr>
+                                    <m:t>𝜆</m:t>
+                                  </m:r>
+                                </m:e>
+                                <m:sub>
+                                  <m:r>
+                                    <a:rPr lang="es-CO" b="0" i="1" noProof="0" smtClean="0">
+                                      <a:latin typeface="Cambria Math" panose="02040503050406030204" pitchFamily="18" charset="0"/>
+                                    </a:rPr>
+                                    <m:t>0</m:t>
+                                  </m:r>
+                                </m:sub>
+                              </m:sSub>
+                            </m:e>
+                          </m:d>
+                        </m:e>
+                        <m:sup>
+                          <m:r>
+                            <a:rPr lang="es-CO" b="0" i="1" noProof="0" smtClean="0">
+                              <a:latin typeface="Cambria Math" panose="02040503050406030204" pitchFamily="18" charset="0"/>
+                            </a:rPr>
+                            <m:t>2</m:t>
+                          </m:r>
+                        </m:sup>
+                      </m:sSup>
+                    </m:oMath>
+                  </m:oMathPara>
+                </a14:m>
+                <a:br>
+                  <a:rPr lang="es-CO" b="0" noProof="0" dirty="0"/>
+                </a:br>
+                <a:endParaRPr lang="es-CO" sz="2500" b="0" noProof="0" dirty="0">
+                  <a:latin typeface="+mj-lt"/>
+                  <a:cs typeface="Lucida Sans"/>
+                </a:endParaRPr>
+              </a:p>
+            </p:txBody>
+          </p:sp>
+        </mc:Choice>
+        <mc:Fallback xmlns="">
+          <p:sp>
+            <p:nvSpPr>
+              <p:cNvPr id="16" name="object 16">
+                <a:extLst>
+                  <a:ext uri="{FF2B5EF4-FFF2-40B4-BE49-F238E27FC236}">
+                    <a16:creationId xmlns:a16="http://schemas.microsoft.com/office/drawing/2014/main" id="{394400B4-EE16-8E85-AB54-E82FE3B29345}"/>
+                  </a:ext>
+                </a:extLst>
+              </p:cNvPr>
+              <p:cNvSpPr txBox="1">
+                <a:spLocks noGrp="1" noRot="1" noChangeAspect="1" noMove="1" noResize="1" noEditPoints="1" noAdjustHandles="1" noChangeArrowheads="1" noChangeShapeType="1" noTextEdit="1"/>
+              </p:cNvSpPr>
+              <p:nvPr>
+                <p:ph type="title"/>
+              </p:nvPr>
+            </p:nvSpPr>
+            <p:spPr>
+              <a:xfrm>
+                <a:off x="685800" y="152400"/>
+                <a:ext cx="10994410" cy="1071255"/>
+              </a:xfrm>
+              <a:prstGeom prst="rect">
+                <a:avLst/>
+              </a:prstGeom>
+              <a:blipFill>
+                <a:blip r:embed="rId3"/>
+                <a:stretch>
+                  <a:fillRect l="-1664" t="-7386" b="-4545"/>
+                </a:stretch>
+              </a:blipFill>
+            </p:spPr>
+            <p:txBody>
+              <a:bodyPr/>
+              <a:lstStyle/>
+              <a:p>
+                <a:r>
+                  <a:rPr lang="es-CO">
+                    <a:noFill/>
+                  </a:rPr>
+                  <a:t> </a:t>
+                </a:r>
+              </a:p>
+            </p:txBody>
+          </p:sp>
+        </mc:Fallback>
+      </mc:AlternateContent>
+      <p:pic>
+        <p:nvPicPr>
+          <p:cNvPr id="83" name="Gráfico 82">
+            <a:extLst>
+              <a:ext uri="{FF2B5EF4-FFF2-40B4-BE49-F238E27FC236}">
+                <a16:creationId xmlns:a16="http://schemas.microsoft.com/office/drawing/2014/main" id="{4D53B68D-17ED-7EFB-F2B4-10DA7A772E17}"/>
+              </a:ext>
+            </a:extLst>
+          </p:cNvPr>
+          <p:cNvPicPr>
+            <a:picLocks noChangeAspect="1"/>
+          </p:cNvPicPr>
+          <p:nvPr/>
+        </p:nvPicPr>
+        <p:blipFill>
+          <a:blip r:embed="rId4">
+            <a:extLst>
+              <a:ext uri="{96DAC541-7B7A-43D3-8B79-37D633B846F1}">
+                <asvg:svgBlip xmlns:asvg="http://schemas.microsoft.com/office/drawing/2016/SVG/main" r:embed="rId5"/>
+              </a:ext>
+            </a:extLst>
+          </a:blip>
+          <a:stretch>
+            <a:fillRect/>
+          </a:stretch>
+        </p:blipFill>
+        <p:spPr>
+          <a:xfrm>
+            <a:off x="5045006" y="6356057"/>
+            <a:ext cx="6409575" cy="363174"/>
+          </a:xfrm>
+          <a:prstGeom prst="rect">
+            <a:avLst/>
+          </a:prstGeom>
+        </p:spPr>
+      </p:pic>
+      <p:sp>
+        <p:nvSpPr>
+          <p:cNvPr id="84" name="Marcador de número de diapositiva 83">
+            <a:extLst>
+              <a:ext uri="{FF2B5EF4-FFF2-40B4-BE49-F238E27FC236}">
+                <a16:creationId xmlns:a16="http://schemas.microsoft.com/office/drawing/2014/main" id="{09AB8697-C1EE-6E9A-6550-ACA2C3AE6630}"/>
+              </a:ext>
+            </a:extLst>
+          </p:cNvPr>
+          <p:cNvSpPr>
+            <a:spLocks noGrp="1"/>
+          </p:cNvSpPr>
+          <p:nvPr>
+            <p:ph type="sldNum" sz="quarter" idx="7"/>
+          </p:nvPr>
+        </p:nvSpPr>
+        <p:spPr/>
+        <p:txBody>
+          <a:bodyPr/>
+          <a:lstStyle/>
+          <a:p>
+            <a:fld id="{B6F15528-21DE-4FAA-801E-634DDDAF4B2B}" type="slidenum">
+              <a:rPr lang="es-CO" noProof="0" smtClean="0"/>
+              <a:t>7</a:t>
+            </a:fld>
+            <a:endParaRPr lang="es-CO" noProof="0" dirty="0"/>
+          </a:p>
+        </p:txBody>
+      </p:sp>
+      <p:sp>
+        <p:nvSpPr>
+          <p:cNvPr id="3" name="Marcador de pie de página 2">
+            <a:extLst>
+              <a:ext uri="{FF2B5EF4-FFF2-40B4-BE49-F238E27FC236}">
+                <a16:creationId xmlns:a16="http://schemas.microsoft.com/office/drawing/2014/main" id="{970D4A6C-5B37-EDF5-6242-74B16127E96B}"/>
+              </a:ext>
+            </a:extLst>
+          </p:cNvPr>
+          <p:cNvSpPr>
+            <a:spLocks noGrp="1"/>
+          </p:cNvSpPr>
+          <p:nvPr>
+            <p:ph type="ftr" sz="quarter" idx="5"/>
+          </p:nvPr>
+        </p:nvSpPr>
+        <p:spPr/>
+        <p:txBody>
+          <a:bodyPr/>
+          <a:lstStyle/>
+          <a:p>
+            <a:pPr marL="12700">
+              <a:spcBef>
+                <a:spcPts val="15"/>
+              </a:spcBef>
+            </a:pPr>
+            <a:r>
+              <a:rPr lang="es-CO" spc="-5" noProof="0" dirty="0"/>
+              <a:t>LAB 1.0. WAVEGUIDES</a:t>
+            </a:r>
+          </a:p>
+        </p:txBody>
+      </p:sp>
+      <mc:AlternateContent xmlns:mc="http://schemas.openxmlformats.org/markup-compatibility/2006" xmlns:a14="http://schemas.microsoft.com/office/drawing/2010/main">
+        <mc:Choice Requires="a14">
+          <p:sp>
+            <p:nvSpPr>
+              <p:cNvPr id="2" name="CuadroTexto 1">
+                <a:extLst>
+                  <a:ext uri="{FF2B5EF4-FFF2-40B4-BE49-F238E27FC236}">
+                    <a16:creationId xmlns:a16="http://schemas.microsoft.com/office/drawing/2014/main" id="{A440F587-93A3-E474-C0B0-883BB9DAFD85}"/>
+                  </a:ext>
+                </a:extLst>
+              </p:cNvPr>
+              <p:cNvSpPr txBox="1"/>
+              <p:nvPr/>
+            </p:nvSpPr>
+            <p:spPr>
+              <a:xfrm>
+                <a:off x="609441" y="4141710"/>
+                <a:ext cx="11198542" cy="4903586"/>
+              </a:xfrm>
+              <a:prstGeom prst="rect">
+                <a:avLst/>
+              </a:prstGeom>
+              <a:solidFill>
+                <a:schemeClr val="bg1">
+                  <a:lumMod val="95000"/>
+                </a:schemeClr>
+              </a:solidFill>
+              <a:ln w="28575">
+                <a:solidFill>
+                  <a:srgbClr val="E0700D"/>
+                </a:solidFill>
+              </a:ln>
+            </p:spPr>
+            <p:txBody>
+              <a:bodyPr wrap="square" rtlCol="0">
+                <a:spAutoFit/>
+              </a:bodyPr>
+              <a:lstStyle/>
+              <a:p>
+                <a:pPr algn="just"/>
+                <a:r>
+                  <a:rPr lang="es-CO" sz="1200" noProof="0" dirty="0">
+                    <a:latin typeface="Arial" panose="020B0604020202020204" pitchFamily="34" charset="0"/>
+                    <a:cs typeface="Arial" panose="020B0604020202020204" pitchFamily="34" charset="0"/>
+                  </a:rPr>
+                  <a:t>En las gráficas observamos como </a:t>
+                </a:r>
+                <a:r>
+                  <a:rPr lang="es-CO" sz="1200" dirty="0" err="1">
+                    <a:latin typeface="Arial" panose="020B0604020202020204" pitchFamily="34" charset="0"/>
+                    <a:cs typeface="Arial" panose="020B0604020202020204" pitchFamily="34" charset="0"/>
+                  </a:rPr>
+                  <a:t>second-degree</a:t>
+                </a:r>
+                <a:r>
+                  <a:rPr lang="es-CO" sz="1200" dirty="0">
+                    <a:latin typeface="Arial" panose="020B0604020202020204" pitchFamily="34" charset="0"/>
+                    <a:cs typeface="Arial" panose="020B0604020202020204" pitchFamily="34" charset="0"/>
+                  </a:rPr>
+                  <a:t> </a:t>
+                </a:r>
+                <a:r>
+                  <a:rPr lang="es-CO" sz="1200" dirty="0" err="1">
+                    <a:latin typeface="Arial" panose="020B0604020202020204" pitchFamily="34" charset="0"/>
+                    <a:cs typeface="Arial" panose="020B0604020202020204" pitchFamily="34" charset="0"/>
+                  </a:rPr>
+                  <a:t>polynomial</a:t>
+                </a:r>
+                <a:r>
+                  <a:rPr lang="es-CO" sz="1200" dirty="0">
+                    <a:latin typeface="Arial" panose="020B0604020202020204" pitchFamily="34" charset="0"/>
+                    <a:cs typeface="Arial" panose="020B0604020202020204" pitchFamily="34" charset="0"/>
+                  </a:rPr>
+                  <a:t> </a:t>
+                </a:r>
+                <a:r>
+                  <a:rPr lang="es-CO" sz="1200" dirty="0" err="1">
+                    <a:latin typeface="Arial" panose="020B0604020202020204" pitchFamily="34" charset="0"/>
+                    <a:cs typeface="Arial" panose="020B0604020202020204" pitchFamily="34" charset="0"/>
+                  </a:rPr>
+                  <a:t>fit</a:t>
+                </a:r>
+                <a:r>
+                  <a:rPr lang="es-CO" sz="1200" dirty="0">
+                    <a:latin typeface="Arial" panose="020B0604020202020204" pitchFamily="34" charset="0"/>
+                    <a:cs typeface="Arial" panose="020B0604020202020204" pitchFamily="34" charset="0"/>
+                  </a:rPr>
+                  <a:t> es una muy </a:t>
+                </a:r>
+                <a:r>
+                  <a:rPr lang="es-CO" sz="1200" dirty="0" err="1">
+                    <a:latin typeface="Arial" panose="020B0604020202020204" pitchFamily="34" charset="0"/>
+                    <a:cs typeface="Arial" panose="020B0604020202020204" pitchFamily="34" charset="0"/>
+                  </a:rPr>
+                  <a:t>biena</a:t>
+                </a:r>
+                <a:r>
+                  <a:rPr lang="es-CO" sz="1200" dirty="0">
+                    <a:latin typeface="Arial" panose="020B0604020202020204" pitchFamily="34" charset="0"/>
+                    <a:cs typeface="Arial" panose="020B0604020202020204" pitchFamily="34" charset="0"/>
+                  </a:rPr>
+                  <a:t> representación de los campos obtenidos en ambos casos. Con esta representación se obtuvieron los resultados presentados en la siguiente tabla:</a:t>
+                </a:r>
+              </a:p>
+              <a:p>
+                <a:pPr algn="just"/>
+                <a:endParaRPr lang="es-CO" sz="1200" dirty="0">
+                  <a:latin typeface="Arial" panose="020B0604020202020204" pitchFamily="34" charset="0"/>
+                  <a:cs typeface="Arial" panose="020B0604020202020204" pitchFamily="34" charset="0"/>
+                </a:endParaRPr>
+              </a:p>
+              <a:p>
+                <a:pPr algn="just"/>
+                <a:endParaRPr lang="es-CO" sz="1200" dirty="0">
+                  <a:latin typeface="Arial" panose="020B0604020202020204" pitchFamily="34" charset="0"/>
+                  <a:cs typeface="Arial" panose="020B0604020202020204" pitchFamily="34" charset="0"/>
+                </a:endParaRPr>
+              </a:p>
+              <a:p>
+                <a:pPr algn="just"/>
+                <a:endParaRPr lang="es-CO" sz="1200" dirty="0">
+                  <a:latin typeface="Arial" panose="020B0604020202020204" pitchFamily="34" charset="0"/>
+                  <a:cs typeface="Arial" panose="020B0604020202020204" pitchFamily="34" charset="0"/>
+                </a:endParaRPr>
+              </a:p>
+              <a:p>
+                <a:pPr algn="just"/>
+                <a:endParaRPr lang="es-CO" sz="1200" dirty="0">
+                  <a:latin typeface="Arial" panose="020B0604020202020204" pitchFamily="34" charset="0"/>
+                  <a:cs typeface="Arial" panose="020B0604020202020204" pitchFamily="34" charset="0"/>
+                </a:endParaRPr>
+              </a:p>
+              <a:p>
+                <a:pPr algn="just"/>
+                <a:endParaRPr lang="es-CO" sz="1200" dirty="0">
+                  <a:latin typeface="Arial" panose="020B0604020202020204" pitchFamily="34" charset="0"/>
+                  <a:cs typeface="Arial" panose="020B0604020202020204" pitchFamily="34" charset="0"/>
+                </a:endParaRPr>
+              </a:p>
+              <a:p>
+                <a:pPr algn="just"/>
+                <a:endParaRPr lang="es-CO" sz="1200" dirty="0">
+                  <a:latin typeface="Arial" panose="020B0604020202020204" pitchFamily="34" charset="0"/>
+                  <a:cs typeface="Arial" panose="020B0604020202020204" pitchFamily="34" charset="0"/>
+                </a:endParaRPr>
+              </a:p>
+              <a:p>
+                <a:pPr algn="just"/>
+                <a:endParaRPr lang="es-CO" sz="1200" noProof="0" dirty="0">
+                  <a:latin typeface="Arial" panose="020B0604020202020204" pitchFamily="34" charset="0"/>
+                  <a:cs typeface="Arial" panose="020B0604020202020204" pitchFamily="34" charset="0"/>
+                </a:endParaRPr>
+              </a:p>
+              <a:p>
+                <a:pPr algn="just"/>
+                <a:r>
+                  <a:rPr lang="es-CO" sz="1200" dirty="0">
+                    <a:latin typeface="Arial" panose="020B0604020202020204" pitchFamily="34" charset="0"/>
+                    <a:cs typeface="Arial" panose="020B0604020202020204" pitchFamily="34" charset="0"/>
+                  </a:rPr>
+                  <a:t>En el caso de la </a:t>
+                </a:r>
+                <a:r>
+                  <a:rPr lang="es-CO" sz="1200" dirty="0" err="1">
+                    <a:latin typeface="Arial" panose="020B0604020202020204" pitchFamily="34" charset="0"/>
+                    <a:cs typeface="Arial" panose="020B0604020202020204" pitchFamily="34" charset="0"/>
+                  </a:rPr>
+                  <a:t>shallow</a:t>
+                </a:r>
+                <a:r>
+                  <a:rPr lang="es-CO" sz="1200" dirty="0">
+                    <a:latin typeface="Arial" panose="020B0604020202020204" pitchFamily="34" charset="0"/>
+                    <a:cs typeface="Arial" panose="020B0604020202020204" pitchFamily="34" charset="0"/>
+                  </a:rPr>
+                  <a:t> </a:t>
+                </a:r>
+                <a:r>
+                  <a:rPr lang="es-CO" sz="1200" dirty="0" err="1">
+                    <a:latin typeface="Arial" panose="020B0604020202020204" pitchFamily="34" charset="0"/>
+                    <a:cs typeface="Arial" panose="020B0604020202020204" pitchFamily="34" charset="0"/>
+                  </a:rPr>
+                  <a:t>waveguide</a:t>
+                </a:r>
+                <a:r>
+                  <a:rPr lang="es-CO" sz="1200" dirty="0">
+                    <a:latin typeface="Arial" panose="020B0604020202020204" pitchFamily="34" charset="0"/>
+                    <a:cs typeface="Arial" panose="020B0604020202020204" pitchFamily="34" charset="0"/>
+                  </a:rPr>
+                  <a:t> los modos TE0 y TM0 están viajando más confinados a comparación de la Deep </a:t>
+                </a:r>
+                <a:r>
+                  <a:rPr lang="es-CO" sz="1200" dirty="0" err="1">
+                    <a:latin typeface="Arial" panose="020B0604020202020204" pitchFamily="34" charset="0"/>
+                    <a:cs typeface="Arial" panose="020B0604020202020204" pitchFamily="34" charset="0"/>
+                  </a:rPr>
+                  <a:t>waveguide</a:t>
+                </a:r>
+                <a:r>
+                  <a:rPr lang="es-CO" sz="1200" dirty="0">
+                    <a:latin typeface="Arial" panose="020B0604020202020204" pitchFamily="34" charset="0"/>
+                    <a:cs typeface="Arial" panose="020B0604020202020204" pitchFamily="34" charset="0"/>
+                  </a:rPr>
+                  <a:t>, esto es debido a que en la guía </a:t>
+                </a:r>
+                <a:r>
+                  <a:rPr lang="es-CO" sz="1200" dirty="0" err="1">
+                    <a:latin typeface="Arial" panose="020B0604020202020204" pitchFamily="34" charset="0"/>
+                    <a:cs typeface="Arial" panose="020B0604020202020204" pitchFamily="34" charset="0"/>
+                  </a:rPr>
+                  <a:t>shallow</a:t>
+                </a:r>
+                <a:r>
+                  <a:rPr lang="es-CO" sz="1200" dirty="0">
+                    <a:latin typeface="Arial" panose="020B0604020202020204" pitchFamily="34" charset="0"/>
+                    <a:cs typeface="Arial" panose="020B0604020202020204" pitchFamily="34" charset="0"/>
+                  </a:rPr>
+                  <a:t> pusimos un </a:t>
+                </a:r>
+                <a:r>
+                  <a:rPr lang="es-CO" sz="1200" dirty="0" err="1">
+                    <a:latin typeface="Arial" panose="020B0604020202020204" pitchFamily="34" charset="0"/>
+                    <a:cs typeface="Arial" panose="020B0604020202020204" pitchFamily="34" charset="0"/>
+                  </a:rPr>
+                  <a:t>slab</a:t>
+                </a:r>
+                <a:r>
+                  <a:rPr lang="es-CO" sz="1200" dirty="0">
+                    <a:latin typeface="Arial" panose="020B0604020202020204" pitchFamily="34" charset="0"/>
+                    <a:cs typeface="Arial" panose="020B0604020202020204" pitchFamily="34" charset="0"/>
+                  </a:rPr>
+                  <a:t> que logra capturar un poco más de energía del modo. Con respecto a los índices de grupo vemos que en la Deep wave guide se introduce un poco más de retardo que en la guía </a:t>
+                </a:r>
+                <a:r>
+                  <a:rPr lang="es-CO" sz="1200" dirty="0" err="1">
+                    <a:latin typeface="Arial" panose="020B0604020202020204" pitchFamily="34" charset="0"/>
+                    <a:cs typeface="Arial" panose="020B0604020202020204" pitchFamily="34" charset="0"/>
+                  </a:rPr>
+                  <a:t>shallow</a:t>
+                </a:r>
+                <a:r>
+                  <a:rPr lang="es-CO" sz="1200" dirty="0">
+                    <a:latin typeface="Arial" panose="020B0604020202020204" pitchFamily="34" charset="0"/>
+                    <a:cs typeface="Arial" panose="020B0604020202020204" pitchFamily="34" charset="0"/>
+                  </a:rPr>
+                  <a:t>, además el modo TE viaja con más retardo que el modo TM.</a:t>
+                </a:r>
+              </a:p>
+              <a:p>
+                <a:pPr algn="just"/>
+                <a:r>
+                  <a:rPr lang="es-CO" sz="1200" dirty="0" err="1">
+                    <a:latin typeface="Arial" panose="020B0604020202020204" pitchFamily="34" charset="0"/>
+                    <a:cs typeface="Arial" panose="020B0604020202020204" pitchFamily="34" charset="0"/>
+                  </a:rPr>
+                  <a:t>Tambien</a:t>
+                </a:r>
+                <a:r>
+                  <a:rPr lang="es-CO" sz="1200" dirty="0">
+                    <a:latin typeface="Arial" panose="020B0604020202020204" pitchFamily="34" charset="0"/>
+                    <a:cs typeface="Arial" panose="020B0604020202020204" pitchFamily="34" charset="0"/>
+                  </a:rPr>
+                  <a:t> se observa una relación y es que entre mayor es el confinamiento menor es el índice de grupo. Aquí tendríamos que evaluar que se busca en el dispositivo, si buscamos un retraso d </a:t>
+                </a:r>
+                <a:r>
+                  <a:rPr lang="es-CO" sz="1200" dirty="0" err="1">
+                    <a:latin typeface="Arial" panose="020B0604020202020204" pitchFamily="34" charset="0"/>
+                    <a:cs typeface="Arial" panose="020B0604020202020204" pitchFamily="34" charset="0"/>
+                  </a:rPr>
+                  <a:t>ela</a:t>
+                </a:r>
+                <a:r>
+                  <a:rPr lang="es-CO" sz="1200" dirty="0">
+                    <a:latin typeface="Arial" panose="020B0604020202020204" pitchFamily="34" charset="0"/>
+                    <a:cs typeface="Arial" panose="020B0604020202020204" pitchFamily="34" charset="0"/>
+                  </a:rPr>
+                  <a:t> señal o no, esto podría tal vez generar un desfase si es lo que queremos. También tenemos en cuenta que el FSR depende del índice de grupo, pues </a:t>
+                </a:r>
+              </a:p>
+              <a:p>
+                <a:pPr algn="just"/>
+                <a:endParaRPr lang="es-CO" sz="1200" dirty="0">
+                  <a:latin typeface="Arial" panose="020B0604020202020204" pitchFamily="34" charset="0"/>
+                  <a:cs typeface="Arial" panose="020B0604020202020204" pitchFamily="34" charset="0"/>
+                </a:endParaRPr>
+              </a:p>
+              <a:p>
+                <a:pPr algn="just"/>
+                <a14:m>
+                  <m:oMathPara xmlns:m="http://schemas.openxmlformats.org/officeDocument/2006/math">
+                    <m:oMathParaPr>
+                      <m:jc m:val="centerGroup"/>
+                    </m:oMathParaPr>
+                    <m:oMath xmlns:m="http://schemas.openxmlformats.org/officeDocument/2006/math">
+                      <m:r>
+                        <a:rPr lang="es-ES" sz="1200" b="0" i="1" smtClean="0">
+                          <a:latin typeface="Cambria Math" panose="02040503050406030204" pitchFamily="18" charset="0"/>
+                          <a:cs typeface="Arial" panose="020B0604020202020204" pitchFamily="34" charset="0"/>
+                        </a:rPr>
+                        <m:t>𝐹𝑆𝑅</m:t>
+                      </m:r>
+                      <m:r>
+                        <a:rPr lang="es-ES" sz="1200" b="0" i="1" smtClean="0">
+                          <a:latin typeface="Cambria Math" panose="02040503050406030204" pitchFamily="18" charset="0"/>
+                          <a:ea typeface="Cambria Math" panose="02040503050406030204" pitchFamily="18" charset="0"/>
+                          <a:cs typeface="Arial" panose="020B0604020202020204" pitchFamily="34" charset="0"/>
+                        </a:rPr>
+                        <m:t>∝</m:t>
+                      </m:r>
+                      <m:f>
+                        <m:fPr>
+                          <m:ctrlPr>
+                            <a:rPr lang="es-ES" sz="1200" b="0" i="1" smtClean="0">
+                              <a:latin typeface="Cambria Math" panose="02040503050406030204" pitchFamily="18" charset="0"/>
+                              <a:ea typeface="Cambria Math" panose="02040503050406030204" pitchFamily="18" charset="0"/>
+                              <a:cs typeface="Arial" panose="020B0604020202020204" pitchFamily="34" charset="0"/>
+                            </a:rPr>
+                          </m:ctrlPr>
+                        </m:fPr>
+                        <m:num>
+                          <m:r>
+                            <a:rPr lang="es-ES" sz="1200" b="0" i="1" smtClean="0">
+                              <a:latin typeface="Cambria Math" panose="02040503050406030204" pitchFamily="18" charset="0"/>
+                              <a:ea typeface="Cambria Math" panose="02040503050406030204" pitchFamily="18" charset="0"/>
+                              <a:cs typeface="Arial" panose="020B0604020202020204" pitchFamily="34" charset="0"/>
+                            </a:rPr>
+                            <m:t>1</m:t>
+                          </m:r>
+                        </m:num>
+                        <m:den>
+                          <m:r>
+                            <a:rPr lang="es-ES" sz="1200" b="0" i="1" smtClean="0">
+                              <a:latin typeface="Cambria Math" panose="02040503050406030204" pitchFamily="18" charset="0"/>
+                              <a:ea typeface="Cambria Math" panose="02040503050406030204" pitchFamily="18" charset="0"/>
+                              <a:cs typeface="Arial" panose="020B0604020202020204" pitchFamily="34" charset="0"/>
+                            </a:rPr>
+                            <m:t>𝑛𝑔</m:t>
+                          </m:r>
+                        </m:den>
+                      </m:f>
+                    </m:oMath>
+                  </m:oMathPara>
+                </a14:m>
+                <a:endParaRPr lang="es-CO" sz="1200" dirty="0">
+                  <a:latin typeface="Arial" panose="020B0604020202020204" pitchFamily="34" charset="0"/>
+                  <a:cs typeface="Arial" panose="020B0604020202020204" pitchFamily="34" charset="0"/>
+                </a:endParaRPr>
+              </a:p>
+              <a:p>
+                <a:pPr algn="just"/>
+                <a:endParaRPr lang="es-CO" sz="1200" noProof="0" dirty="0">
+                  <a:latin typeface="Arial" panose="020B0604020202020204" pitchFamily="34" charset="0"/>
+                  <a:cs typeface="Arial" panose="020B0604020202020204" pitchFamily="34" charset="0"/>
+                </a:endParaRPr>
+              </a:p>
+              <a:p>
+                <a:pPr algn="just"/>
+                <a:r>
+                  <a:rPr lang="es-CO" sz="1200" dirty="0">
+                    <a:latin typeface="Arial" panose="020B0604020202020204" pitchFamily="34" charset="0"/>
+                    <a:cs typeface="Arial" panose="020B0604020202020204" pitchFamily="34" charset="0"/>
+                  </a:rPr>
+                  <a:t>Así que si buscamos un FSR grande podríamos buscar que nuestra guía de onda haga que este índice sea pequeño, de lo contrario haríamos que este aumente.</a:t>
+                </a:r>
+              </a:p>
+              <a:p>
+                <a:pPr algn="just"/>
+                <a:endParaRPr lang="es-CO" sz="1200" noProof="0" dirty="0">
+                  <a:latin typeface="Arial" panose="020B0604020202020204" pitchFamily="34" charset="0"/>
+                  <a:cs typeface="Arial" panose="020B0604020202020204" pitchFamily="34" charset="0"/>
+                </a:endParaRPr>
+              </a:p>
+              <a:p>
+                <a:pPr algn="just"/>
+                <a:endParaRPr lang="es-CO" sz="1200" noProof="0" dirty="0">
+                  <a:latin typeface="Arial" panose="020B0604020202020204" pitchFamily="34" charset="0"/>
+                  <a:cs typeface="Arial" panose="020B0604020202020204" pitchFamily="34" charset="0"/>
+                </a:endParaRPr>
+              </a:p>
+              <a:p>
+                <a:pPr algn="just"/>
+                <a:r>
+                  <a:rPr lang="es-CO" sz="1200" dirty="0">
+                    <a:latin typeface="Arial" panose="020B0604020202020204" pitchFamily="34" charset="0"/>
+                    <a:cs typeface="Arial" panose="020B0604020202020204" pitchFamily="34" charset="0"/>
+                  </a:rPr>
+                  <a:t>Ahora con respecto a la dispersión vemos que tenemos muy poca dispersión, lo cual es positivo, ya que en ninguna de las </a:t>
+                </a:r>
+                <a:r>
+                  <a:rPr lang="es-CO" sz="1200" dirty="0" err="1">
+                    <a:latin typeface="Arial" panose="020B0604020202020204" pitchFamily="34" charset="0"/>
+                    <a:cs typeface="Arial" panose="020B0604020202020204" pitchFamily="34" charset="0"/>
+                  </a:rPr>
+                  <a:t>guias</a:t>
+                </a:r>
+                <a:r>
+                  <a:rPr lang="es-CO" sz="1200" dirty="0">
+                    <a:latin typeface="Arial" panose="020B0604020202020204" pitchFamily="34" charset="0"/>
+                    <a:cs typeface="Arial" panose="020B0604020202020204" pitchFamily="34" charset="0"/>
+                  </a:rPr>
+                  <a:t> de onda se estaría deformando tanto la señal que ingresa a ella, en este caso vemos que en particular el caso TM0 de la Deep </a:t>
+                </a:r>
+                <a:r>
+                  <a:rPr lang="es-CO" sz="1200" dirty="0" err="1">
+                    <a:latin typeface="Arial" panose="020B0604020202020204" pitchFamily="34" charset="0"/>
+                    <a:cs typeface="Arial" panose="020B0604020202020204" pitchFamily="34" charset="0"/>
+                  </a:rPr>
+                  <a:t>waveguide</a:t>
+                </a:r>
+                <a:r>
+                  <a:rPr lang="es-CO" sz="1200" dirty="0">
+                    <a:latin typeface="Arial" panose="020B0604020202020204" pitchFamily="34" charset="0"/>
+                    <a:cs typeface="Arial" panose="020B0604020202020204" pitchFamily="34" charset="0"/>
+                  </a:rPr>
+                  <a:t> se </a:t>
+                </a:r>
+                <a:r>
+                  <a:rPr lang="es-CO" sz="1200" dirty="0" err="1">
+                    <a:latin typeface="Arial" panose="020B0604020202020204" pitchFamily="34" charset="0"/>
+                    <a:cs typeface="Arial" panose="020B0604020202020204" pitchFamily="34" charset="0"/>
+                  </a:rPr>
+                  <a:t>deporma</a:t>
+                </a:r>
+                <a:r>
+                  <a:rPr lang="es-CO" sz="1200" dirty="0">
+                    <a:latin typeface="Arial" panose="020B0604020202020204" pitchFamily="34" charset="0"/>
+                    <a:cs typeface="Arial" panose="020B0604020202020204" pitchFamily="34" charset="0"/>
+                  </a:rPr>
+                  <a:t> casi el doble que los otros modos. Con respecto al TE0 vemos que son muy parecidos para ambas </a:t>
+                </a:r>
+                <a:r>
+                  <a:rPr lang="es-CO" sz="1200" dirty="0" err="1">
+                    <a:latin typeface="Arial" panose="020B0604020202020204" pitchFamily="34" charset="0"/>
+                    <a:cs typeface="Arial" panose="020B0604020202020204" pitchFamily="34" charset="0"/>
+                  </a:rPr>
+                  <a:t>guias</a:t>
+                </a:r>
+                <a:r>
+                  <a:rPr lang="es-CO" sz="1200" dirty="0">
+                    <a:latin typeface="Arial" panose="020B0604020202020204" pitchFamily="34" charset="0"/>
+                    <a:cs typeface="Arial" panose="020B0604020202020204" pitchFamily="34" charset="0"/>
+                  </a:rPr>
+                  <a:t>, esto puede deberse a que el crecimiento </a:t>
+                </a:r>
+                <a:r>
+                  <a:rPr lang="es-CO" sz="1200" dirty="0" err="1">
+                    <a:latin typeface="Arial" panose="020B0604020202020204" pitchFamily="34" charset="0"/>
+                    <a:cs typeface="Arial" panose="020B0604020202020204" pitchFamily="34" charset="0"/>
+                  </a:rPr>
+                  <a:t>parabolico</a:t>
+                </a:r>
+                <a:r>
+                  <a:rPr lang="es-CO" sz="1200" dirty="0">
+                    <a:latin typeface="Arial" panose="020B0604020202020204" pitchFamily="34" charset="0"/>
+                    <a:cs typeface="Arial" panose="020B0604020202020204" pitchFamily="34" charset="0"/>
+                  </a:rPr>
+                  <a:t> en ambos casos es muy parecido, es decir el </a:t>
+                </a:r>
+                <a:r>
+                  <a:rPr lang="es-CO" sz="1200" dirty="0" err="1">
+                    <a:latin typeface="Arial" panose="020B0604020202020204" pitchFamily="34" charset="0"/>
+                    <a:cs typeface="Arial" panose="020B0604020202020204" pitchFamily="34" charset="0"/>
+                  </a:rPr>
+                  <a:t>infdice</a:t>
+                </a:r>
+                <a:r>
+                  <a:rPr lang="es-CO" sz="1200" dirty="0">
+                    <a:latin typeface="Arial" panose="020B0604020202020204" pitchFamily="34" charset="0"/>
+                    <a:cs typeface="Arial" panose="020B0604020202020204" pitchFamily="34" charset="0"/>
+                  </a:rPr>
+                  <a:t> efectivo varia en una cantidad similar al aumentar la longitud de onda, es decir que n_3 es parecido en la aproximación. </a:t>
+                </a:r>
+                <a:endParaRPr lang="es-CO" sz="1200" noProof="0" dirty="0">
+                  <a:latin typeface="Arial" panose="020B0604020202020204" pitchFamily="34" charset="0"/>
+                  <a:cs typeface="Arial" panose="020B0604020202020204" pitchFamily="34" charset="0"/>
+                </a:endParaRPr>
+              </a:p>
+            </p:txBody>
+          </p:sp>
+        </mc:Choice>
+        <mc:Fallback xmlns="">
+          <p:sp>
+            <p:nvSpPr>
+              <p:cNvPr id="2" name="CuadroTexto 1">
+                <a:extLst>
+                  <a:ext uri="{FF2B5EF4-FFF2-40B4-BE49-F238E27FC236}">
+                    <a16:creationId xmlns:a16="http://schemas.microsoft.com/office/drawing/2014/main" id="{A440F587-93A3-E474-C0B0-883BB9DAFD85}"/>
+                  </a:ext>
+                </a:extLst>
+              </p:cNvPr>
+              <p:cNvSpPr txBox="1">
+                <a:spLocks noRot="1" noChangeAspect="1" noMove="1" noResize="1" noEditPoints="1" noAdjustHandles="1" noChangeArrowheads="1" noChangeShapeType="1" noTextEdit="1"/>
+              </p:cNvSpPr>
+              <p:nvPr/>
+            </p:nvSpPr>
+            <p:spPr>
+              <a:xfrm>
+                <a:off x="609441" y="4141710"/>
+                <a:ext cx="11198542" cy="4903586"/>
+              </a:xfrm>
+              <a:prstGeom prst="rect">
+                <a:avLst/>
+              </a:prstGeom>
+              <a:blipFill>
+                <a:blip r:embed="rId6"/>
+                <a:stretch>
+                  <a:fillRect/>
+                </a:stretch>
+              </a:blipFill>
+              <a:ln w="28575">
+                <a:solidFill>
+                  <a:srgbClr val="E0700D"/>
+                </a:solidFill>
+              </a:ln>
+            </p:spPr>
+            <p:txBody>
+              <a:bodyPr/>
+              <a:lstStyle/>
+              <a:p>
+                <a:r>
+                  <a:rPr lang="es-CO">
+                    <a:noFill/>
+                  </a:rPr>
+                  <a:t> </a:t>
+                </a:r>
+              </a:p>
+            </p:txBody>
+          </p:sp>
+        </mc:Fallback>
+      </mc:AlternateContent>
+      <p:sp>
+        <p:nvSpPr>
+          <p:cNvPr id="5" name="Rectángulo 4">
+            <a:extLst>
+              <a:ext uri="{FF2B5EF4-FFF2-40B4-BE49-F238E27FC236}">
+                <a16:creationId xmlns:a16="http://schemas.microsoft.com/office/drawing/2014/main" id="{A6B92C76-6772-2E00-346F-532321092C04}"/>
               </a:ext>
             </a:extLst>
           </p:cNvPr>
@@ -6764,8 +11523,8 @@
         </p:nvSpPr>
         <p:spPr>
           <a:xfrm>
-            <a:off x="6321424" y="1447800"/>
-            <a:ext cx="5486559" cy="3306028"/>
+            <a:off x="609441" y="1447800"/>
+            <a:ext cx="5486559" cy="2610410"/>
           </a:xfrm>
           <a:prstGeom prst="rect">
             <a:avLst/>
@@ -6798,876 +11557,16 @@
           <a:lstStyle/>
           <a:p>
             <a:pPr algn="ctr"/>
-            <a:endParaRPr lang="en-US"/>
+            <a:endParaRPr lang="es-CO" noProof="0" dirty="0"/>
           </a:p>
         </p:txBody>
       </p:sp>
-      <mc:AlternateContent xmlns:mc="http://schemas.openxmlformats.org/markup-compatibility/2006" xmlns:a14="http://schemas.microsoft.com/office/drawing/2010/main">
-        <mc:Choice Requires="a14">
-          <p:sp>
-            <p:nvSpPr>
-              <p:cNvPr id="9" name="CuadroTexto 8">
-                <a:extLst>
-                  <a:ext uri="{FF2B5EF4-FFF2-40B4-BE49-F238E27FC236}">
-                    <a16:creationId xmlns:a16="http://schemas.microsoft.com/office/drawing/2014/main" id="{C59B6428-4395-242F-54D8-A9FC610F2D7A}"/>
-                  </a:ext>
-                </a:extLst>
-              </p:cNvPr>
-              <p:cNvSpPr txBox="1"/>
-              <p:nvPr/>
-            </p:nvSpPr>
-            <p:spPr>
-              <a:xfrm>
-                <a:off x="609440" y="2709096"/>
-                <a:ext cx="5486559" cy="1200329"/>
-              </a:xfrm>
-              <a:prstGeom prst="rect">
-                <a:avLst/>
-              </a:prstGeom>
-              <a:noFill/>
-            </p:spPr>
-            <p:txBody>
-              <a:bodyPr wrap="square" rtlCol="0">
-                <a:spAutoFit/>
-              </a:bodyPr>
-              <a:lstStyle/>
-              <a:p>
-                <a:pPr algn="ctr"/>
-                <a:r>
-                  <a:rPr lang="en-US" b="1" dirty="0"/>
-                  <a:t>deep</a:t>
-                </a:r>
-                <a:r>
-                  <a:rPr lang="en-US" dirty="0"/>
-                  <a:t> waveguide</a:t>
-                </a:r>
-              </a:p>
-              <a:p>
-                <a:pPr algn="ctr"/>
-                <a:endParaRPr lang="en-US" dirty="0"/>
-              </a:p>
-              <a:p>
-                <a:pPr algn="ctr"/>
-                <a:r>
-                  <a:rPr lang="en-US" b="1" dirty="0"/>
-                  <a:t>neff_TE0 vs </a:t>
-                </a:r>
-                <a14:m>
-                  <m:oMath xmlns:m="http://schemas.openxmlformats.org/officeDocument/2006/math">
-                    <m:r>
-                      <a:rPr lang="es-ES" b="1" i="1" smtClean="0">
-                        <a:latin typeface="Cambria Math" panose="02040503050406030204" pitchFamily="18" charset="0"/>
-                      </a:rPr>
-                      <m:t>𝝀</m:t>
-                    </m:r>
-                  </m:oMath>
-                </a14:m>
-                <a:r>
-                  <a:rPr lang="en-US" b="1" dirty="0"/>
-                  <a:t> </a:t>
-                </a:r>
-                <a:r>
-                  <a:rPr lang="en-US" dirty="0"/>
-                  <a:t>with the second-degree polynomial fit  </a:t>
-                </a:r>
-              </a:p>
-              <a:p>
-                <a:pPr algn="ctr"/>
-                <a:r>
-                  <a:rPr lang="en-US" dirty="0"/>
-                  <a:t>&amp; </a:t>
-                </a:r>
-                <a:r>
-                  <a:rPr lang="en-US" b="1" dirty="0"/>
-                  <a:t>neff_TM0 vs </a:t>
-                </a:r>
-                <a14:m>
-                  <m:oMath xmlns:m="http://schemas.openxmlformats.org/officeDocument/2006/math">
-                    <m:r>
-                      <a:rPr lang="es-ES" b="1" i="1">
-                        <a:latin typeface="Cambria Math" panose="02040503050406030204" pitchFamily="18" charset="0"/>
-                      </a:rPr>
-                      <m:t>𝝀</m:t>
-                    </m:r>
-                  </m:oMath>
-                </a14:m>
-                <a:r>
-                  <a:rPr lang="en-US" b="1" dirty="0"/>
-                  <a:t> </a:t>
-                </a:r>
-                <a:r>
-                  <a:rPr lang="en-US" dirty="0"/>
-                  <a:t>with the second-degree polynomial fit </a:t>
-                </a:r>
-              </a:p>
-            </p:txBody>
-          </p:sp>
-        </mc:Choice>
-        <mc:Fallback xmlns="">
-          <p:sp>
-            <p:nvSpPr>
-              <p:cNvPr id="9" name="CuadroTexto 8">
-                <a:extLst>
-                  <a:ext uri="{FF2B5EF4-FFF2-40B4-BE49-F238E27FC236}">
-                    <a16:creationId xmlns:a16="http://schemas.microsoft.com/office/drawing/2014/main" id="{C59B6428-4395-242F-54D8-A9FC610F2D7A}"/>
-                  </a:ext>
-                </a:extLst>
-              </p:cNvPr>
-              <p:cNvSpPr txBox="1">
-                <a:spLocks noRot="1" noChangeAspect="1" noMove="1" noResize="1" noEditPoints="1" noAdjustHandles="1" noChangeArrowheads="1" noChangeShapeType="1" noTextEdit="1"/>
-              </p:cNvSpPr>
-              <p:nvPr/>
-            </p:nvSpPr>
-            <p:spPr>
-              <a:xfrm>
-                <a:off x="609440" y="2709096"/>
-                <a:ext cx="5486559" cy="1200329"/>
-              </a:xfrm>
-              <a:prstGeom prst="rect">
-                <a:avLst/>
-              </a:prstGeom>
-              <a:blipFill>
-                <a:blip r:embed="rId7"/>
-                <a:stretch>
-                  <a:fillRect t="-2538" r="-556" b="-7107"/>
-                </a:stretch>
-              </a:blipFill>
-            </p:spPr>
-            <p:txBody>
-              <a:bodyPr/>
-              <a:lstStyle/>
-              <a:p>
-                <a:r>
-                  <a:rPr lang="es-ES">
-                    <a:noFill/>
-                  </a:rPr>
-                  <a:t> </a:t>
-                </a:r>
-              </a:p>
-            </p:txBody>
-          </p:sp>
-        </mc:Fallback>
-      </mc:AlternateContent>
-      <mc:AlternateContent xmlns:mc="http://schemas.openxmlformats.org/markup-compatibility/2006" xmlns:a14="http://schemas.microsoft.com/office/drawing/2010/main">
-        <mc:Choice Requires="a14">
-          <p:sp>
-            <p:nvSpPr>
-              <p:cNvPr id="10" name="CuadroTexto 9">
-                <a:extLst>
-                  <a:ext uri="{FF2B5EF4-FFF2-40B4-BE49-F238E27FC236}">
-                    <a16:creationId xmlns:a16="http://schemas.microsoft.com/office/drawing/2014/main" id="{9320AF78-1FC6-19F4-8E0B-8A414F20C6DE}"/>
-                  </a:ext>
-                </a:extLst>
-              </p:cNvPr>
-              <p:cNvSpPr txBox="1"/>
-              <p:nvPr/>
-            </p:nvSpPr>
-            <p:spPr>
-              <a:xfrm>
-                <a:off x="6321421" y="2709096"/>
-                <a:ext cx="5486559" cy="1200329"/>
-              </a:xfrm>
-              <a:prstGeom prst="rect">
-                <a:avLst/>
-              </a:prstGeom>
-              <a:noFill/>
-            </p:spPr>
-            <p:txBody>
-              <a:bodyPr wrap="square" rtlCol="0">
-                <a:spAutoFit/>
-              </a:bodyPr>
-              <a:lstStyle/>
-              <a:p>
-                <a:pPr algn="ctr"/>
-                <a:r>
-                  <a:rPr lang="en-US" b="1" dirty="0"/>
-                  <a:t>shallow</a:t>
-                </a:r>
-                <a:r>
-                  <a:rPr lang="en-US" dirty="0"/>
-                  <a:t> waveguide</a:t>
-                </a:r>
-              </a:p>
-              <a:p>
-                <a:pPr algn="ctr"/>
-                <a:endParaRPr lang="en-US" dirty="0"/>
-              </a:p>
-              <a:p>
-                <a:pPr algn="ctr"/>
-                <a:r>
-                  <a:rPr lang="en-US" b="1" dirty="0"/>
-                  <a:t>neff_TE0 vs </a:t>
-                </a:r>
-                <a14:m>
-                  <m:oMath xmlns:m="http://schemas.openxmlformats.org/officeDocument/2006/math">
-                    <m:r>
-                      <a:rPr lang="es-ES" b="1" i="1">
-                        <a:latin typeface="Cambria Math" panose="02040503050406030204" pitchFamily="18" charset="0"/>
-                      </a:rPr>
-                      <m:t>𝝀</m:t>
-                    </m:r>
-                  </m:oMath>
-                </a14:m>
-                <a:r>
-                  <a:rPr lang="en-US" b="1" dirty="0"/>
-                  <a:t> </a:t>
-                </a:r>
-                <a:r>
-                  <a:rPr lang="en-US" dirty="0"/>
-                  <a:t>with the second-degree polynomial fit  </a:t>
-                </a:r>
-              </a:p>
-              <a:p>
-                <a:pPr algn="ctr"/>
-                <a:r>
-                  <a:rPr lang="en-US" dirty="0"/>
-                  <a:t>&amp; </a:t>
-                </a:r>
-                <a:r>
-                  <a:rPr lang="en-US" b="1" dirty="0"/>
-                  <a:t>neff_TM0 vs </a:t>
-                </a:r>
-                <a14:m>
-                  <m:oMath xmlns:m="http://schemas.openxmlformats.org/officeDocument/2006/math">
-                    <m:r>
-                      <a:rPr lang="es-ES" b="1" i="1">
-                        <a:latin typeface="Cambria Math" panose="02040503050406030204" pitchFamily="18" charset="0"/>
-                      </a:rPr>
-                      <m:t>𝝀</m:t>
-                    </m:r>
-                  </m:oMath>
-                </a14:m>
-                <a:r>
-                  <a:rPr lang="en-US" b="1" dirty="0"/>
-                  <a:t> </a:t>
-                </a:r>
-                <a:r>
-                  <a:rPr lang="en-US" dirty="0"/>
-                  <a:t>with the second-degree polynomial fit </a:t>
-                </a:r>
-              </a:p>
-            </p:txBody>
-          </p:sp>
-        </mc:Choice>
-        <mc:Fallback xmlns="">
-          <p:sp>
-            <p:nvSpPr>
-              <p:cNvPr id="10" name="CuadroTexto 9">
-                <a:extLst>
-                  <a:ext uri="{FF2B5EF4-FFF2-40B4-BE49-F238E27FC236}">
-                    <a16:creationId xmlns:a16="http://schemas.microsoft.com/office/drawing/2014/main" id="{9320AF78-1FC6-19F4-8E0B-8A414F20C6DE}"/>
-                  </a:ext>
-                </a:extLst>
-              </p:cNvPr>
-              <p:cNvSpPr txBox="1">
-                <a:spLocks noRot="1" noChangeAspect="1" noMove="1" noResize="1" noEditPoints="1" noAdjustHandles="1" noChangeArrowheads="1" noChangeShapeType="1" noTextEdit="1"/>
-              </p:cNvSpPr>
-              <p:nvPr/>
-            </p:nvSpPr>
-            <p:spPr>
-              <a:xfrm>
-                <a:off x="6321421" y="2709096"/>
-                <a:ext cx="5486559" cy="1200329"/>
-              </a:xfrm>
-              <a:prstGeom prst="rect">
-                <a:avLst/>
-              </a:prstGeom>
-              <a:blipFill>
-                <a:blip r:embed="rId8"/>
-                <a:stretch>
-                  <a:fillRect t="-2538" r="-556" b="-7107"/>
-                </a:stretch>
-              </a:blipFill>
-            </p:spPr>
-            <p:txBody>
-              <a:bodyPr/>
-              <a:lstStyle/>
-              <a:p>
-                <a:r>
-                  <a:rPr lang="es-ES">
-                    <a:noFill/>
-                  </a:rPr>
-                  <a:t> </a:t>
-                </a:r>
-              </a:p>
-            </p:txBody>
-          </p:sp>
-        </mc:Fallback>
-      </mc:AlternateContent>
-      <p:sp>
-        <p:nvSpPr>
-          <p:cNvPr id="8" name="CuadroTexto 7">
+      <p:sp>
+        <p:nvSpPr>
+          <p:cNvPr id="6" name="Rectángulo 5">
             <a:extLst>
               <a:ext uri="{FF2B5EF4-FFF2-40B4-BE49-F238E27FC236}">
-                <a16:creationId xmlns:a16="http://schemas.microsoft.com/office/drawing/2014/main" id="{0F38E924-A0E7-A039-C837-916BA77FE89B}"/>
-              </a:ext>
-            </a:extLst>
-          </p:cNvPr>
-          <p:cNvSpPr txBox="1"/>
-          <p:nvPr/>
-        </p:nvSpPr>
-        <p:spPr>
-          <a:xfrm>
-            <a:off x="6347361" y="4498712"/>
-            <a:ext cx="5486560" cy="276999"/>
-          </a:xfrm>
-          <a:prstGeom prst="rect">
-            <a:avLst/>
-          </a:prstGeom>
-          <a:noFill/>
-        </p:spPr>
-        <p:txBody>
-          <a:bodyPr wrap="square">
-            <a:spAutoFit/>
-          </a:bodyPr>
-          <a:lstStyle/>
-          <a:p>
-            <a:pPr algn="r"/>
-            <a:r>
-              <a:rPr lang="en-US" sz="1200" b="1" dirty="0">
-                <a:solidFill>
-                  <a:schemeClr val="tx1"/>
-                </a:solidFill>
-                <a:latin typeface="Arial" panose="020B0604020202020204" pitchFamily="34" charset="0"/>
-                <a:cs typeface="Arial" panose="020B0604020202020204" pitchFamily="34" charset="0"/>
-              </a:rPr>
-              <a:t>slab: 150nm</a:t>
-            </a:r>
-            <a:endParaRPr lang="en-US" sz="1200" dirty="0">
-              <a:solidFill>
-                <a:schemeClr val="tx1"/>
-              </a:solidFill>
-              <a:latin typeface="Arial" panose="020B0604020202020204" pitchFamily="34" charset="0"/>
-              <a:cs typeface="Arial" panose="020B0604020202020204" pitchFamily="34" charset="0"/>
-            </a:endParaRPr>
-          </a:p>
-        </p:txBody>
-      </p:sp>
-    </p:spTree>
-    <p:extLst>
-      <p:ext uri="{BB962C8B-B14F-4D97-AF65-F5344CB8AC3E}">
-        <p14:creationId xmlns:p14="http://schemas.microsoft.com/office/powerpoint/2010/main" val="236054401"/>
-      </p:ext>
-    </p:extLst>
-  </p:cSld>
-  <p:clrMapOvr>
-    <a:masterClrMapping/>
-  </p:clrMapOvr>
-</p:sld>
-</file>
-
-<file path=ppt/slides/slide6.xml><?xml version="1.0" encoding="utf-8"?>
-<p:sld xmlns:a="http://schemas.openxmlformats.org/drawingml/2006/main" xmlns:r="http://schemas.openxmlformats.org/officeDocument/2006/relationships" xmlns:p="http://schemas.openxmlformats.org/presentationml/2006/main">
-  <p:cSld>
-    <p:spTree>
-      <p:nvGrpSpPr>
-        <p:cNvPr id="1" name="">
-          <a:extLst>
-            <a:ext uri="{FF2B5EF4-FFF2-40B4-BE49-F238E27FC236}">
-              <a16:creationId xmlns:a16="http://schemas.microsoft.com/office/drawing/2014/main" id="{25434E70-43B1-3881-1771-20FB4358471D}"/>
-            </a:ext>
-          </a:extLst>
-        </p:cNvPr>
-        <p:cNvGrpSpPr/>
-        <p:nvPr/>
-      </p:nvGrpSpPr>
-      <p:grpSpPr>
-        <a:xfrm>
-          <a:off x="0" y="0"/>
-          <a:ext cx="0" cy="0"/>
-          <a:chOff x="0" y="0"/>
-          <a:chExt cx="0" cy="0"/>
-        </a:xfrm>
-      </p:grpSpPr>
-      <p:sp>
-        <p:nvSpPr>
-          <p:cNvPr id="16" name="object 16">
-            <a:extLst>
-              <a:ext uri="{FF2B5EF4-FFF2-40B4-BE49-F238E27FC236}">
-                <a16:creationId xmlns:a16="http://schemas.microsoft.com/office/drawing/2014/main" id="{742C31CE-19F0-B995-0997-9A2D6A879BF7}"/>
-              </a:ext>
-            </a:extLst>
-          </p:cNvPr>
-          <p:cNvSpPr txBox="1">
-            <a:spLocks noGrp="1"/>
-          </p:cNvSpPr>
-          <p:nvPr>
-            <p:ph type="title"/>
-          </p:nvPr>
-        </p:nvSpPr>
-        <p:spPr>
-          <a:xfrm>
-            <a:off x="685800" y="408883"/>
-            <a:ext cx="10994410" cy="1090042"/>
-          </a:xfrm>
-          <a:prstGeom prst="rect">
-            <a:avLst/>
-          </a:prstGeom>
-        </p:spPr>
-        <p:txBody>
-          <a:bodyPr vert="horz" wrap="square" lIns="0" tIns="12700" rIns="0" bIns="0" rtlCol="0">
-            <a:spAutoFit/>
-          </a:bodyPr>
-          <a:lstStyle/>
-          <a:p>
-            <a:pPr marL="12700">
-              <a:lnSpc>
-                <a:spcPct val="100000"/>
-              </a:lnSpc>
-              <a:spcBef>
-                <a:spcPts val="100"/>
-              </a:spcBef>
-            </a:pPr>
-            <a:r>
-              <a:rPr lang="en-US" sz="2500" dirty="0"/>
-              <a:t>Learning outcome #4 – Bend waveguide radius vs. loss – deep</a:t>
-            </a:r>
-            <a:br>
-              <a:rPr lang="en-US" sz="2500" dirty="0"/>
-            </a:br>
-            <a:r>
-              <a:rPr lang="en-US" b="0" dirty="0"/>
-              <a:t>Find  neff_TE0 for </a:t>
-            </a:r>
-            <a:r>
-              <a:rPr lang="en-US" b="0" dirty="0" err="1"/>
-              <a:t>wvl</a:t>
-            </a:r>
-            <a:r>
-              <a:rPr lang="en-US" b="0" dirty="0"/>
-              <a:t> 1.55 µm, width 1.0 µm for R=25,50,75,100, 125,150 µm</a:t>
-            </a:r>
-            <a:br>
-              <a:rPr lang="en-US" sz="2500" dirty="0"/>
-            </a:br>
-            <a:endParaRPr lang="en-US" sz="2500" b="0" dirty="0">
-              <a:latin typeface="+mj-lt"/>
-              <a:cs typeface="Lucida Sans"/>
-            </a:endParaRPr>
-          </a:p>
-        </p:txBody>
-      </p:sp>
-      <p:pic>
-        <p:nvPicPr>
-          <p:cNvPr id="83" name="Gráfico 82">
-            <a:extLst>
-              <a:ext uri="{FF2B5EF4-FFF2-40B4-BE49-F238E27FC236}">
-                <a16:creationId xmlns:a16="http://schemas.microsoft.com/office/drawing/2014/main" id="{D688A609-F3DC-EE34-C536-683E70F32EAE}"/>
-              </a:ext>
-            </a:extLst>
-          </p:cNvPr>
-          <p:cNvPicPr>
-            <a:picLocks noChangeAspect="1"/>
-          </p:cNvPicPr>
-          <p:nvPr/>
-        </p:nvPicPr>
-        <p:blipFill>
-          <a:blip r:embed="rId3">
-            <a:extLst>
-              <a:ext uri="{96DAC541-7B7A-43D3-8B79-37D633B846F1}">
-                <asvg:svgBlip xmlns:asvg="http://schemas.microsoft.com/office/drawing/2016/SVG/main" r:embed="rId4"/>
-              </a:ext>
-            </a:extLst>
-          </a:blip>
-          <a:stretch>
-            <a:fillRect/>
-          </a:stretch>
-        </p:blipFill>
-        <p:spPr>
-          <a:xfrm>
-            <a:off x="5045006" y="6356057"/>
-            <a:ext cx="6409575" cy="363174"/>
-          </a:xfrm>
-          <a:prstGeom prst="rect">
-            <a:avLst/>
-          </a:prstGeom>
-        </p:spPr>
-      </p:pic>
-      <p:sp>
-        <p:nvSpPr>
-          <p:cNvPr id="84" name="Marcador de número de diapositiva 83">
-            <a:extLst>
-              <a:ext uri="{FF2B5EF4-FFF2-40B4-BE49-F238E27FC236}">
-                <a16:creationId xmlns:a16="http://schemas.microsoft.com/office/drawing/2014/main" id="{B6C672C6-89D4-7E67-2B94-811D081786A7}"/>
-              </a:ext>
-            </a:extLst>
-          </p:cNvPr>
-          <p:cNvSpPr>
-            <a:spLocks noGrp="1"/>
-          </p:cNvSpPr>
-          <p:nvPr>
-            <p:ph type="sldNum" sz="quarter" idx="7"/>
-          </p:nvPr>
-        </p:nvSpPr>
-        <p:spPr/>
-        <p:txBody>
-          <a:bodyPr/>
-          <a:lstStyle/>
-          <a:p>
-            <a:fld id="{B6F15528-21DE-4FAA-801E-634DDDAF4B2B}" type="slidenum">
-              <a:rPr lang="es-ES" smtClean="0"/>
-              <a:t>6</a:t>
-            </a:fld>
-            <a:endParaRPr lang="es-ES"/>
-          </a:p>
-        </p:txBody>
-      </p:sp>
-      <p:sp>
-        <p:nvSpPr>
-          <p:cNvPr id="3" name="Marcador de pie de página 2">
-            <a:extLst>
-              <a:ext uri="{FF2B5EF4-FFF2-40B4-BE49-F238E27FC236}">
-                <a16:creationId xmlns:a16="http://schemas.microsoft.com/office/drawing/2014/main" id="{AA1F4313-D710-7A3E-7A8F-EB77DEE3C1A7}"/>
-              </a:ext>
-            </a:extLst>
-          </p:cNvPr>
-          <p:cNvSpPr>
-            <a:spLocks noGrp="1"/>
-          </p:cNvSpPr>
-          <p:nvPr>
-            <p:ph type="ftr" sz="quarter" idx="5"/>
-          </p:nvPr>
-        </p:nvSpPr>
-        <p:spPr/>
-        <p:txBody>
-          <a:bodyPr/>
-          <a:lstStyle/>
-          <a:p>
-            <a:pPr marL="12700">
-              <a:spcBef>
-                <a:spcPts val="15"/>
-              </a:spcBef>
-            </a:pPr>
-            <a:r>
-              <a:rPr lang="es-ES" spc="-5"/>
-              <a:t>LAB 1.0. WAVEGUIDES</a:t>
-            </a:r>
-            <a:endParaRPr lang="es-ES" spc="-5" dirty="0"/>
-          </a:p>
-        </p:txBody>
-      </p:sp>
-      <p:sp>
-        <p:nvSpPr>
-          <p:cNvPr id="2" name="CuadroTexto 1">
-            <a:extLst>
-              <a:ext uri="{FF2B5EF4-FFF2-40B4-BE49-F238E27FC236}">
-                <a16:creationId xmlns:a16="http://schemas.microsoft.com/office/drawing/2014/main" id="{FDE3A197-9508-F9F1-1FEB-FF883D78C151}"/>
-              </a:ext>
-            </a:extLst>
-          </p:cNvPr>
-          <p:cNvSpPr txBox="1"/>
-          <p:nvPr/>
-        </p:nvSpPr>
-        <p:spPr>
-          <a:xfrm>
-            <a:off x="609441" y="4860334"/>
-            <a:ext cx="11199971" cy="1200329"/>
-          </a:xfrm>
-          <a:prstGeom prst="rect">
-            <a:avLst/>
-          </a:prstGeom>
-          <a:solidFill>
-            <a:schemeClr val="bg1">
-              <a:lumMod val="95000"/>
-            </a:schemeClr>
-          </a:solidFill>
-          <a:ln w="28575">
-            <a:solidFill>
-              <a:srgbClr val="E0700D"/>
-            </a:solidFill>
-          </a:ln>
-        </p:spPr>
-        <p:txBody>
-          <a:bodyPr wrap="square" rtlCol="0">
-            <a:spAutoFit/>
-          </a:bodyPr>
-          <a:lstStyle/>
-          <a:p>
-            <a:pPr algn="just"/>
-            <a:r>
-              <a:rPr lang="en-US" sz="1200" dirty="0">
-                <a:latin typeface="Arial" panose="020B0604020202020204" pitchFamily="34" charset="0"/>
-                <a:cs typeface="Arial" panose="020B0604020202020204" pitchFamily="34" charset="0"/>
-              </a:rPr>
-              <a:t>Comment results, which is the safe radius, consider safe means less than 0.1 dB/90º.</a:t>
-            </a:r>
-          </a:p>
-          <a:p>
-            <a:pPr algn="just"/>
-            <a:endParaRPr lang="en-US" sz="1200" u="sng" dirty="0">
-              <a:latin typeface="Arial" panose="020B0604020202020204" pitchFamily="34" charset="0"/>
-              <a:cs typeface="Arial" panose="020B0604020202020204" pitchFamily="34" charset="0"/>
-            </a:endParaRPr>
-          </a:p>
-          <a:p>
-            <a:pPr algn="just"/>
-            <a:endParaRPr lang="en-US" sz="1200" dirty="0">
-              <a:latin typeface="Arial" panose="020B0604020202020204" pitchFamily="34" charset="0"/>
-              <a:cs typeface="Arial" panose="020B0604020202020204" pitchFamily="34" charset="0"/>
-            </a:endParaRPr>
-          </a:p>
-          <a:p>
-            <a:pPr algn="just"/>
-            <a:endParaRPr lang="en-US" sz="1200" dirty="0">
-              <a:latin typeface="Arial" panose="020B0604020202020204" pitchFamily="34" charset="0"/>
-              <a:cs typeface="Arial" panose="020B0604020202020204" pitchFamily="34" charset="0"/>
-            </a:endParaRPr>
-          </a:p>
-          <a:p>
-            <a:pPr algn="just"/>
-            <a:endParaRPr lang="en-US" sz="1200" dirty="0">
-              <a:latin typeface="Arial" panose="020B0604020202020204" pitchFamily="34" charset="0"/>
-              <a:cs typeface="Arial" panose="020B0604020202020204" pitchFamily="34" charset="0"/>
-            </a:endParaRPr>
-          </a:p>
-          <a:p>
-            <a:pPr algn="just"/>
-            <a:endParaRPr lang="en-US" sz="1200" dirty="0">
-              <a:latin typeface="Arial" panose="020B0604020202020204" pitchFamily="34" charset="0"/>
-              <a:cs typeface="Arial" panose="020B0604020202020204" pitchFamily="34" charset="0"/>
-            </a:endParaRPr>
-          </a:p>
-        </p:txBody>
-      </p:sp>
-      <mc:AlternateContent xmlns:mc="http://schemas.openxmlformats.org/markup-compatibility/2006" xmlns:a14="http://schemas.microsoft.com/office/drawing/2010/main">
-        <mc:Choice Requires="a14">
-          <p:sp>
-            <p:nvSpPr>
-              <p:cNvPr id="6" name="CuadroTexto 5">
-                <a:extLst>
-                  <a:ext uri="{FF2B5EF4-FFF2-40B4-BE49-F238E27FC236}">
-                    <a16:creationId xmlns:a16="http://schemas.microsoft.com/office/drawing/2014/main" id="{409FBBBB-69CA-B7E5-7176-8227F2788CF5}"/>
-                  </a:ext>
-                </a:extLst>
-              </p:cNvPr>
-              <p:cNvSpPr txBox="1"/>
-              <p:nvPr/>
-            </p:nvSpPr>
-            <p:spPr>
-              <a:xfrm>
-                <a:off x="9941529" y="4179383"/>
-                <a:ext cx="1856534" cy="439608"/>
-              </a:xfrm>
-              <a:prstGeom prst="rect">
-                <a:avLst/>
-              </a:prstGeom>
-              <a:noFill/>
-            </p:spPr>
-            <p:txBody>
-              <a:bodyPr wrap="none" lIns="0" tIns="0" rIns="0" bIns="0" rtlCol="0">
-                <a:spAutoFit/>
-              </a:bodyPr>
-              <a:lstStyle/>
-              <a:p>
-                <a14:m>
-                  <m:oMath xmlns:m="http://schemas.openxmlformats.org/officeDocument/2006/math">
-                    <m:r>
-                      <a:rPr lang="es-ES" sz="1800" b="0" i="1" smtClean="0">
-                        <a:latin typeface="Cambria Math" panose="02040503050406030204" pitchFamily="18" charset="0"/>
-                      </a:rPr>
-                      <m:t>𝛼</m:t>
-                    </m:r>
-                    <m:d>
-                      <m:dPr>
-                        <m:begChr m:val="["/>
-                        <m:endChr m:val="]"/>
-                        <m:ctrlPr>
-                          <a:rPr lang="es-ES" sz="1800" b="0" i="1" smtClean="0">
-                            <a:latin typeface="Cambria Math" panose="02040503050406030204" pitchFamily="18" charset="0"/>
-                          </a:rPr>
-                        </m:ctrlPr>
-                      </m:dPr>
-                      <m:e>
-                        <m:f>
-                          <m:fPr>
-                            <m:ctrlPr>
-                              <a:rPr lang="es-ES" sz="1800" b="0" i="1" smtClean="0">
-                                <a:latin typeface="Cambria Math" panose="02040503050406030204" pitchFamily="18" charset="0"/>
-                              </a:rPr>
-                            </m:ctrlPr>
-                          </m:fPr>
-                          <m:num>
-                            <m:r>
-                              <a:rPr lang="es-ES" sz="1800" b="0" i="1" smtClean="0">
-                                <a:latin typeface="Cambria Math" panose="02040503050406030204" pitchFamily="18" charset="0"/>
-                              </a:rPr>
-                              <m:t>𝑑𝐵</m:t>
-                            </m:r>
-                          </m:num>
-                          <m:den>
-                            <m:r>
-                              <a:rPr lang="es-ES" sz="1800" b="0" i="1" smtClean="0">
-                                <a:latin typeface="Cambria Math" panose="02040503050406030204" pitchFamily="18" charset="0"/>
-                              </a:rPr>
-                              <m:t>90</m:t>
-                            </m:r>
-                            <m:r>
-                              <a:rPr lang="es-ES" sz="1800" b="0" i="1" smtClean="0">
-                                <a:latin typeface="Cambria Math" panose="02040503050406030204" pitchFamily="18" charset="0"/>
-                                <a:ea typeface="Cambria Math" panose="02040503050406030204" pitchFamily="18" charset="0"/>
-                              </a:rPr>
-                              <m:t>°</m:t>
-                            </m:r>
-                          </m:den>
-                        </m:f>
-                      </m:e>
-                    </m:d>
-                    <m:r>
-                      <a:rPr lang="es-ES" sz="1800" b="0" i="1" smtClean="0">
-                        <a:latin typeface="Cambria Math" panose="02040503050406030204" pitchFamily="18" charset="0"/>
-                      </a:rPr>
-                      <m:t>=</m:t>
-                    </m:r>
-                  </m:oMath>
-                </a14:m>
-                <a:r>
-                  <a:rPr lang="es-ES" sz="1800" dirty="0"/>
-                  <a:t> </a:t>
-                </a:r>
-                <a14:m>
-                  <m:oMath xmlns:m="http://schemas.openxmlformats.org/officeDocument/2006/math">
-                    <m:r>
-                      <m:rPr>
-                        <m:sty m:val="p"/>
-                      </m:rPr>
-                      <a:rPr lang="es-ES" sz="1800" b="0" i="0" smtClean="0">
-                        <a:latin typeface="Cambria Math" panose="02040503050406030204" pitchFamily="18" charset="0"/>
-                      </a:rPr>
-                      <m:t>R</m:t>
-                    </m:r>
-                    <m:f>
-                      <m:fPr>
-                        <m:ctrlPr>
-                          <a:rPr lang="es-ES" sz="1800" b="0" i="1" smtClean="0">
-                            <a:latin typeface="Cambria Math" panose="02040503050406030204" pitchFamily="18" charset="0"/>
-                          </a:rPr>
-                        </m:ctrlPr>
-                      </m:fPr>
-                      <m:num>
-                        <m:r>
-                          <a:rPr lang="es-ES" sz="1800" b="0" i="1" smtClean="0">
-                            <a:latin typeface="Cambria Math" panose="02040503050406030204" pitchFamily="18" charset="0"/>
-                          </a:rPr>
-                          <m:t>𝜋</m:t>
-                        </m:r>
-                      </m:num>
-                      <m:den>
-                        <m:r>
-                          <a:rPr lang="es-ES" sz="1800" b="0" i="1" smtClean="0">
-                            <a:latin typeface="Cambria Math" panose="02040503050406030204" pitchFamily="18" charset="0"/>
-                          </a:rPr>
-                          <m:t>2</m:t>
-                        </m:r>
-                      </m:den>
-                    </m:f>
-                    <m:r>
-                      <a:rPr lang="es-ES" sz="1800" i="1">
-                        <a:latin typeface="Cambria Math" panose="02040503050406030204" pitchFamily="18" charset="0"/>
-                      </a:rPr>
-                      <m:t>𝛼</m:t>
-                    </m:r>
-                    <m:d>
-                      <m:dPr>
-                        <m:begChr m:val="["/>
-                        <m:endChr m:val="]"/>
-                        <m:ctrlPr>
-                          <a:rPr lang="es-ES" sz="1800" i="1">
-                            <a:latin typeface="Cambria Math" panose="02040503050406030204" pitchFamily="18" charset="0"/>
-                          </a:rPr>
-                        </m:ctrlPr>
-                      </m:dPr>
-                      <m:e>
-                        <m:f>
-                          <m:fPr>
-                            <m:ctrlPr>
-                              <a:rPr lang="es-ES" sz="1800" i="1">
-                                <a:latin typeface="Cambria Math" panose="02040503050406030204" pitchFamily="18" charset="0"/>
-                              </a:rPr>
-                            </m:ctrlPr>
-                          </m:fPr>
-                          <m:num>
-                            <m:r>
-                              <a:rPr lang="es-ES" sz="1800" i="1">
-                                <a:latin typeface="Cambria Math" panose="02040503050406030204" pitchFamily="18" charset="0"/>
-                              </a:rPr>
-                              <m:t>𝑑𝐵</m:t>
-                            </m:r>
-                          </m:num>
-                          <m:den>
-                            <m:r>
-                              <a:rPr lang="es-ES" sz="1800" i="1">
-                                <a:latin typeface="Cambria Math" panose="02040503050406030204" pitchFamily="18" charset="0"/>
-                              </a:rPr>
-                              <m:t>µ</m:t>
-                            </m:r>
-                            <m:r>
-                              <a:rPr lang="es-ES" sz="1800" i="1">
-                                <a:latin typeface="Cambria Math" panose="02040503050406030204" pitchFamily="18" charset="0"/>
-                              </a:rPr>
-                              <m:t>𝑚</m:t>
-                            </m:r>
-                          </m:den>
-                        </m:f>
-                      </m:e>
-                    </m:d>
-                  </m:oMath>
-                </a14:m>
-                <a:endParaRPr lang="en-US" sz="1800" dirty="0"/>
-              </a:p>
-            </p:txBody>
-          </p:sp>
-        </mc:Choice>
-        <mc:Fallback xmlns="">
-          <p:sp>
-            <p:nvSpPr>
-              <p:cNvPr id="6" name="CuadroTexto 5">
-                <a:extLst>
-                  <a:ext uri="{FF2B5EF4-FFF2-40B4-BE49-F238E27FC236}">
-                    <a16:creationId xmlns:a16="http://schemas.microsoft.com/office/drawing/2014/main" id="{409FBBBB-69CA-B7E5-7176-8227F2788CF5}"/>
-                  </a:ext>
-                </a:extLst>
-              </p:cNvPr>
-              <p:cNvSpPr txBox="1">
-                <a:spLocks noRot="1" noChangeAspect="1" noMove="1" noResize="1" noEditPoints="1" noAdjustHandles="1" noChangeArrowheads="1" noChangeShapeType="1" noTextEdit="1"/>
-              </p:cNvSpPr>
-              <p:nvPr/>
-            </p:nvSpPr>
-            <p:spPr>
-              <a:xfrm>
-                <a:off x="9941529" y="4179383"/>
-                <a:ext cx="1856534" cy="439608"/>
-              </a:xfrm>
-              <a:prstGeom prst="rect">
-                <a:avLst/>
-              </a:prstGeom>
-              <a:blipFill>
-                <a:blip r:embed="rId5"/>
-                <a:stretch>
-                  <a:fillRect l="-3289" b="-13889"/>
-                </a:stretch>
-              </a:blipFill>
-            </p:spPr>
-            <p:txBody>
-              <a:bodyPr/>
-              <a:lstStyle/>
-              <a:p>
-                <a:r>
-                  <a:rPr lang="es-ES">
-                    <a:noFill/>
-                  </a:rPr>
-                  <a:t> </a:t>
-                </a:r>
-              </a:p>
-            </p:txBody>
-          </p:sp>
-        </mc:Fallback>
-      </mc:AlternateContent>
-      <p:sp>
-        <p:nvSpPr>
-          <p:cNvPr id="7" name="Rectángulo 6">
-            <a:extLst>
-              <a:ext uri="{FF2B5EF4-FFF2-40B4-BE49-F238E27FC236}">
-                <a16:creationId xmlns:a16="http://schemas.microsoft.com/office/drawing/2014/main" id="{B5FE8755-B0BF-14B7-64E6-4BBB2560B9A6}"/>
+                <a16:creationId xmlns:a16="http://schemas.microsoft.com/office/drawing/2014/main" id="{2886628E-6E58-1F7E-B6C6-432B9A228397}"/>
               </a:ext>
             </a:extLst>
           </p:cNvPr>
@@ -7676,8 +11575,8 @@
         </p:nvSpPr>
         <p:spPr>
           <a:xfrm>
-            <a:off x="609441" y="1418373"/>
-            <a:ext cx="11199971" cy="3306028"/>
+            <a:off x="6321424" y="1447800"/>
+            <a:ext cx="5486559" cy="2610410"/>
           </a:xfrm>
           <a:prstGeom prst="rect">
             <a:avLst/>
@@ -7710,65 +11609,137 @@
           <a:lstStyle/>
           <a:p>
             <a:pPr algn="ctr"/>
-            <a:endParaRPr lang="en-US"/>
+            <a:endParaRPr lang="es-CO" noProof="0" dirty="0"/>
           </a:p>
         </p:txBody>
       </p:sp>
-      <p:sp>
-        <p:nvSpPr>
-          <p:cNvPr id="8" name="CuadroTexto 7">
+      <p:pic>
+        <p:nvPicPr>
+          <p:cNvPr id="17" name="Imagen 16" descr="Gráfico, Gráfico de líneas&#10;&#10;El contenido generado por IA puede ser incorrecto.">
             <a:extLst>
               <a:ext uri="{FF2B5EF4-FFF2-40B4-BE49-F238E27FC236}">
-                <a16:creationId xmlns:a16="http://schemas.microsoft.com/office/drawing/2014/main" id="{331EBD86-BA6C-68C9-2D38-FC8CFBA7ADC4}"/>
+                <a16:creationId xmlns:a16="http://schemas.microsoft.com/office/drawing/2014/main" id="{BE94B7BA-BEA9-77DB-25D4-B0C1E1B7A340}"/>
               </a:ext>
             </a:extLst>
           </p:cNvPr>
-          <p:cNvSpPr txBox="1"/>
+          <p:cNvPicPr>
+            <a:picLocks noChangeAspect="1"/>
+          </p:cNvPicPr>
           <p:nvPr/>
-        </p:nvSpPr>
+        </p:nvPicPr>
+        <p:blipFill>
+          <a:blip r:embed="rId7"/>
+          <a:stretch>
+            <a:fillRect/>
+          </a:stretch>
+        </p:blipFill>
         <p:spPr>
           <a:xfrm>
-            <a:off x="2978141" y="2784355"/>
-            <a:ext cx="6235717" cy="923330"/>
+            <a:off x="6463911" y="1518600"/>
+            <a:ext cx="4862769" cy="2520000"/>
           </a:xfrm>
           <a:prstGeom prst="rect">
             <a:avLst/>
           </a:prstGeom>
-          <a:noFill/>
         </p:spPr>
-        <p:txBody>
-          <a:bodyPr wrap="square" rtlCol="0">
-            <a:spAutoFit/>
-          </a:bodyPr>
-          <a:lstStyle/>
-          <a:p>
-            <a:pPr algn="ctr"/>
-            <a:r>
-              <a:rPr lang="en-US" b="1" dirty="0"/>
-              <a:t>deep</a:t>
-            </a:r>
-            <a:r>
-              <a:rPr lang="en-US" dirty="0"/>
-              <a:t> waveguide</a:t>
-            </a:r>
-          </a:p>
-          <a:p>
-            <a:pPr algn="ctr"/>
-            <a:endParaRPr lang="en-US" dirty="0"/>
-          </a:p>
-          <a:p>
-            <a:pPr algn="ctr"/>
-            <a:r>
-              <a:rPr lang="en-US" dirty="0"/>
-              <a:t>Paste dB/90º neff_TE0 &amp; neff_TM0 vs R</a:t>
-            </a:r>
-          </a:p>
-        </p:txBody>
-      </p:sp>
+      </p:pic>
+      <p:pic>
+        <p:nvPicPr>
+          <p:cNvPr id="19" name="Imagen 18" descr="Gráfico, Gráfico de líneas&#10;&#10;El contenido generado por IA puede ser incorrecto.">
+            <a:extLst>
+              <a:ext uri="{FF2B5EF4-FFF2-40B4-BE49-F238E27FC236}">
+                <a16:creationId xmlns:a16="http://schemas.microsoft.com/office/drawing/2014/main" id="{E5F3E715-F114-4B12-4BFA-AFC8E512D656}"/>
+              </a:ext>
+            </a:extLst>
+          </p:cNvPr>
+          <p:cNvPicPr>
+            <a:picLocks noChangeAspect="1"/>
+          </p:cNvPicPr>
+          <p:nvPr/>
+        </p:nvPicPr>
+        <p:blipFill>
+          <a:blip r:embed="rId8"/>
+          <a:stretch>
+            <a:fillRect/>
+          </a:stretch>
+        </p:blipFill>
+        <p:spPr>
+          <a:xfrm>
+            <a:off x="977351" y="1518600"/>
+            <a:ext cx="4862770" cy="2520000"/>
+          </a:xfrm>
+          <a:prstGeom prst="rect">
+            <a:avLst/>
+          </a:prstGeom>
+        </p:spPr>
+      </p:pic>
+      <p:graphicFrame>
+        <p:nvGraphicFramePr>
+          <p:cNvPr id="11" name="Objeto 10">
+            <a:extLst>
+              <a:ext uri="{FF2B5EF4-FFF2-40B4-BE49-F238E27FC236}">
+                <a16:creationId xmlns:a16="http://schemas.microsoft.com/office/drawing/2014/main" id="{6E37E43D-E55A-5DBF-D13B-37751B48B169}"/>
+              </a:ext>
+            </a:extLst>
+          </p:cNvPr>
+          <p:cNvGraphicFramePr>
+            <a:graphicFrameLocks noChangeAspect="1"/>
+          </p:cNvGraphicFramePr>
+          <p:nvPr/>
+        </p:nvGraphicFramePr>
+        <p:xfrm>
+          <a:off x="3810000" y="4703476"/>
+          <a:ext cx="3819525" cy="1000125"/>
+        </p:xfrm>
+        <a:graphic>
+          <a:graphicData uri="http://schemas.openxmlformats.org/presentationml/2006/ole">
+            <mc:AlternateContent xmlns:mc="http://schemas.openxmlformats.org/markup-compatibility/2006">
+              <mc:Choice xmlns:v="urn:schemas-microsoft-com:vml" Requires="v">
+                <p:oleObj name="Worksheet" r:id="rId9" imgW="3819552" imgH="1000026" progId="Excel.Sheet.12">
+                  <p:embed/>
+                </p:oleObj>
+              </mc:Choice>
+              <mc:Fallback>
+                <p:oleObj name="Worksheet" r:id="rId9" imgW="3819552" imgH="1000026" progId="Excel.Sheet.12">
+                  <p:embed/>
+                  <p:pic>
+                    <p:nvPicPr>
+                      <p:cNvPr id="11" name="Objeto 10">
+                        <a:extLst>
+                          <a:ext uri="{FF2B5EF4-FFF2-40B4-BE49-F238E27FC236}">
+                            <a16:creationId xmlns:a16="http://schemas.microsoft.com/office/drawing/2014/main" id="{6E37E43D-E55A-5DBF-D13B-37751B48B169}"/>
+                          </a:ext>
+                        </a:extLst>
+                      </p:cNvPr>
+                      <p:cNvPicPr/>
+                      <p:nvPr/>
+                    </p:nvPicPr>
+                    <p:blipFill>
+                      <a:blip r:embed="rId10"/>
+                      <a:stretch>
+                        <a:fillRect/>
+                      </a:stretch>
+                    </p:blipFill>
+                    <p:spPr>
+                      <a:xfrm>
+                        <a:off x="3810000" y="4703476"/>
+                        <a:ext cx="3819525" cy="1000125"/>
+                      </a:xfrm>
+                      <a:prstGeom prst="rect">
+                        <a:avLst/>
+                      </a:prstGeom>
+                    </p:spPr>
+                  </p:pic>
+                </p:oleObj>
+              </mc:Fallback>
+            </mc:AlternateContent>
+          </a:graphicData>
+        </a:graphic>
+      </p:graphicFrame>
     </p:spTree>
     <p:extLst>
       <p:ext uri="{BB962C8B-B14F-4D97-AF65-F5344CB8AC3E}">
-        <p14:creationId xmlns:p14="http://schemas.microsoft.com/office/powerpoint/2010/main" val="3660438245"/>
+        <p14:creationId xmlns:p14="http://schemas.microsoft.com/office/powerpoint/2010/main" val="236054401"/>
       </p:ext>
     </p:extLst>
   </p:cSld>
@@ -7778,12 +11749,18 @@
 </p:sld>
 </file>
 
-<file path=ppt/slides/slide7.xml><?xml version="1.0" encoding="utf-8"?>
+<file path=ppt/slides/slide8.xml><?xml version="1.0" encoding="utf-8"?>
 <p:sld xmlns:a="http://schemas.openxmlformats.org/drawingml/2006/main" xmlns:r="http://schemas.openxmlformats.org/officeDocument/2006/relationships" xmlns:p="http://schemas.openxmlformats.org/presentationml/2006/main">
   <p:cSld>
     <p:spTree>
       <p:nvGrpSpPr>
-        <p:cNvPr id="1" name=""/>
+        <p:cNvPr id="1" name="">
+          <a:extLst>
+            <a:ext uri="{FF2B5EF4-FFF2-40B4-BE49-F238E27FC236}">
+              <a16:creationId xmlns:a16="http://schemas.microsoft.com/office/drawing/2014/main" id="{A19B645C-5BE0-570F-5327-694745F96930}"/>
+            </a:ext>
+          </a:extLst>
+        </p:cNvPr>
         <p:cNvGrpSpPr/>
         <p:nvPr/>
       </p:nvGrpSpPr>
@@ -7797,36 +11774,13 @@
       </p:grpSpPr>
       <p:sp>
         <p:nvSpPr>
-          <p:cNvPr id="3" name="object 3"/>
-          <p:cNvSpPr/>
-          <p:nvPr/>
-        </p:nvSpPr>
-        <p:spPr>
-          <a:xfrm>
-            <a:off x="3945635" y="2636520"/>
-            <a:ext cx="8246363" cy="1584959"/>
-          </a:xfrm>
-          <a:prstGeom prst="rect">
-            <a:avLst/>
-          </a:prstGeom>
-          <a:blipFill>
-            <a:blip r:embed="rId2" cstate="print"/>
-            <a:stretch>
-              <a:fillRect/>
-            </a:stretch>
-          </a:blipFill>
-        </p:spPr>
-        <p:txBody>
-          <a:bodyPr wrap="square" lIns="0" tIns="0" rIns="0" bIns="0" rtlCol="0"/>
-          <a:lstStyle/>
-          <a:p>
-            <a:endParaRPr/>
-          </a:p>
-        </p:txBody>
-      </p:sp>
-      <p:sp>
-        <p:nvSpPr>
-          <p:cNvPr id="4" name="object 4"/>
+          <p:cNvPr id="16" name="object 16">
+            <a:extLst>
+              <a:ext uri="{FF2B5EF4-FFF2-40B4-BE49-F238E27FC236}">
+                <a16:creationId xmlns:a16="http://schemas.microsoft.com/office/drawing/2014/main" id="{87E1AE8D-9ACF-2354-CC59-BFABC15F7292}"/>
+              </a:ext>
+            </a:extLst>
+          </p:cNvPr>
           <p:cNvSpPr txBox="1">
             <a:spLocks noGrp="1"/>
           </p:cNvSpPr>
@@ -7836,15 +11790,15 @@
         </p:nvSpPr>
         <p:spPr>
           <a:xfrm>
-            <a:off x="4513326" y="3165729"/>
-            <a:ext cx="2233295" cy="513715"/>
+            <a:off x="685800" y="408883"/>
+            <a:ext cx="10994410" cy="1090042"/>
           </a:xfrm>
           <a:prstGeom prst="rect">
             <a:avLst/>
           </a:prstGeom>
         </p:spPr>
         <p:txBody>
-          <a:bodyPr vert="horz" wrap="square" lIns="0" tIns="13335" rIns="0" bIns="0" rtlCol="0">
+          <a:bodyPr vert="horz" wrap="square" lIns="0" tIns="12700" rIns="0" bIns="0" rtlCol="0">
             <a:spAutoFit/>
           </a:bodyPr>
           <a:lstStyle/>
@@ -7854,52 +11808,148 @@
                 <a:spcPct val="100000"/>
               </a:lnSpc>
               <a:spcBef>
-                <a:spcPts val="105"/>
+                <a:spcPts val="100"/>
               </a:spcBef>
             </a:pPr>
             <a:r>
-              <a:rPr sz="3200" b="1" spc="-5" dirty="0">
-                <a:solidFill>
-                  <a:srgbClr val="FFFFFF"/>
-                </a:solidFill>
-                <a:latin typeface="Lucida Sans"/>
-                <a:cs typeface="Lucida Sans"/>
-              </a:rPr>
-              <a:t>Thank</a:t>
-            </a:r>
-            <a:r>
-              <a:rPr sz="3200" b="1" spc="-55" dirty="0">
-                <a:solidFill>
-                  <a:srgbClr val="FFFFFF"/>
-                </a:solidFill>
-                <a:latin typeface="Lucida Sans"/>
-                <a:cs typeface="Lucida Sans"/>
-              </a:rPr>
+              <a:rPr lang="es-CO" sz="2500" noProof="0" dirty="0" err="1"/>
+              <a:t>Learning</a:t>
+            </a:r>
+            <a:r>
+              <a:rPr lang="es-CO" sz="2500" noProof="0" dirty="0"/>
               <a:t> </a:t>
             </a:r>
             <a:r>
-              <a:rPr sz="3200" b="1" dirty="0">
-                <a:solidFill>
-                  <a:srgbClr val="FFFFFF"/>
-                </a:solidFill>
-                <a:latin typeface="Lucida Sans"/>
-                <a:cs typeface="Lucida Sans"/>
-              </a:rPr>
-              <a:t>you</a:t>
-            </a:r>
-            <a:endParaRPr sz="3200">
-              <a:latin typeface="Lucida Sans"/>
+              <a:rPr lang="es-CO" sz="2500" noProof="0" dirty="0" err="1"/>
+              <a:t>outcome</a:t>
+            </a:r>
+            <a:r>
+              <a:rPr lang="es-CO" sz="2500" noProof="0" dirty="0"/>
+              <a:t> #4 – Bend </a:t>
+            </a:r>
+            <a:r>
+              <a:rPr lang="es-CO" sz="2500" noProof="0" dirty="0" err="1"/>
+              <a:t>waveguide</a:t>
+            </a:r>
+            <a:r>
+              <a:rPr lang="es-CO" sz="2500" noProof="0" dirty="0"/>
+              <a:t> </a:t>
+            </a:r>
+            <a:r>
+              <a:rPr lang="es-CO" sz="2500" noProof="0" dirty="0" err="1"/>
+              <a:t>radius</a:t>
+            </a:r>
+            <a:r>
+              <a:rPr lang="es-CO" sz="2500" noProof="0" dirty="0"/>
+              <a:t> vs. </a:t>
+            </a:r>
+            <a:r>
+              <a:rPr lang="es-CO" sz="2500" noProof="0" dirty="0" err="1"/>
+              <a:t>loss</a:t>
+            </a:r>
+            <a:r>
+              <a:rPr lang="es-CO" sz="2500" noProof="0" dirty="0"/>
+              <a:t> – </a:t>
+            </a:r>
+            <a:r>
+              <a:rPr lang="es-CO" sz="2500" noProof="0" dirty="0" err="1"/>
+              <a:t>deep</a:t>
+            </a:r>
+            <a:br>
+              <a:rPr lang="es-CO" sz="2500" noProof="0" dirty="0"/>
+            </a:br>
+            <a:r>
+              <a:rPr lang="es-CO" b="0" noProof="0" dirty="0" err="1"/>
+              <a:t>Find</a:t>
+            </a:r>
+            <a:r>
+              <a:rPr lang="es-CO" b="0" noProof="0" dirty="0"/>
+              <a:t>  neff_TE0 </a:t>
+            </a:r>
+            <a:r>
+              <a:rPr lang="es-CO" b="0" noProof="0" dirty="0" err="1"/>
+              <a:t>for</a:t>
+            </a:r>
+            <a:r>
+              <a:rPr lang="es-CO" b="0" noProof="0" dirty="0"/>
+              <a:t> </a:t>
+            </a:r>
+            <a:r>
+              <a:rPr lang="es-CO" b="0" noProof="0" dirty="0" err="1"/>
+              <a:t>wvl</a:t>
+            </a:r>
+            <a:r>
+              <a:rPr lang="es-CO" b="0" noProof="0" dirty="0"/>
+              <a:t> 1.55 µm, </a:t>
+            </a:r>
+            <a:r>
+              <a:rPr lang="es-CO" b="0" noProof="0" dirty="0" err="1"/>
+              <a:t>width</a:t>
+            </a:r>
+            <a:r>
+              <a:rPr lang="es-CO" b="0" noProof="0" dirty="0"/>
+              <a:t> 1.0 µm </a:t>
+            </a:r>
+            <a:r>
+              <a:rPr lang="es-CO" b="0" noProof="0" dirty="0" err="1"/>
+              <a:t>for</a:t>
+            </a:r>
+            <a:r>
+              <a:rPr lang="es-CO" b="0" noProof="0" dirty="0"/>
+              <a:t> R=25,50,75,100, 125,150 µm</a:t>
+            </a:r>
+            <a:br>
+              <a:rPr lang="es-CO" sz="2500" noProof="0" dirty="0"/>
+            </a:br>
+            <a:endParaRPr lang="es-CO" sz="2500" b="0" noProof="0" dirty="0">
+              <a:latin typeface="+mj-lt"/>
               <a:cs typeface="Lucida Sans"/>
             </a:endParaRPr>
           </a:p>
         </p:txBody>
       </p:sp>
-      <p:sp>
-        <p:nvSpPr>
-          <p:cNvPr id="5" name="Marcador de número de diapositiva 4">
+      <p:pic>
+        <p:nvPicPr>
+          <p:cNvPr id="83" name="Gráfico 82">
             <a:extLst>
               <a:ext uri="{FF2B5EF4-FFF2-40B4-BE49-F238E27FC236}">
-                <a16:creationId xmlns:a16="http://schemas.microsoft.com/office/drawing/2014/main" id="{B052DA19-AD24-7D24-2AE9-51F8F5A7F5E0}"/>
+                <a16:creationId xmlns:a16="http://schemas.microsoft.com/office/drawing/2014/main" id="{A24EF32E-6ED2-B963-7636-898BBEDBA6E3}"/>
+              </a:ext>
+            </a:extLst>
+          </p:cNvPr>
+          <p:cNvPicPr>
+            <a:picLocks noChangeAspect="1"/>
+          </p:cNvPicPr>
+          <p:nvPr/>
+        </p:nvPicPr>
+        <p:blipFill>
+          <a:blip r:embed="rId3">
+            <a:extLst>
+              <a:ext uri="{96DAC541-7B7A-43D3-8B79-37D633B846F1}">
+                <asvg:svgBlip xmlns:asvg="http://schemas.microsoft.com/office/drawing/2016/SVG/main" r:embed="rId4"/>
+              </a:ext>
+            </a:extLst>
+          </a:blip>
+          <a:stretch>
+            <a:fillRect/>
+          </a:stretch>
+        </p:blipFill>
+        <p:spPr>
+          <a:xfrm>
+            <a:off x="5045006" y="6356057"/>
+            <a:ext cx="6409575" cy="363174"/>
+          </a:xfrm>
+          <a:prstGeom prst="rect">
+            <a:avLst/>
+          </a:prstGeom>
+        </p:spPr>
+      </p:pic>
+      <p:sp>
+        <p:nvSpPr>
+          <p:cNvPr id="84" name="Marcador de número de diapositiva 83">
+            <a:extLst>
+              <a:ext uri="{FF2B5EF4-FFF2-40B4-BE49-F238E27FC236}">
+                <a16:creationId xmlns:a16="http://schemas.microsoft.com/office/drawing/2014/main" id="{8D4647FB-800E-DA36-C2FE-7C8EA6DC9691}"/>
               </a:ext>
             </a:extLst>
           </p:cNvPr>
@@ -7916,14 +11966,1042 @@
           <a:lstStyle/>
           <a:p>
             <a:fld id="{B6F15528-21DE-4FAA-801E-634DDDAF4B2B}" type="slidenum">
-              <a:rPr lang="es-ES" smtClean="0"/>
-              <a:t>7</a:t>
+              <a:rPr lang="es-CO" noProof="0" smtClean="0"/>
+              <a:t>8</a:t>
             </a:fld>
-            <a:endParaRPr lang="es-ES"/>
+            <a:endParaRPr lang="es-CO" noProof="0" dirty="0"/>
           </a:p>
         </p:txBody>
       </p:sp>
+      <p:sp>
+        <p:nvSpPr>
+          <p:cNvPr id="3" name="Marcador de pie de página 2">
+            <a:extLst>
+              <a:ext uri="{FF2B5EF4-FFF2-40B4-BE49-F238E27FC236}">
+                <a16:creationId xmlns:a16="http://schemas.microsoft.com/office/drawing/2014/main" id="{958FB840-E1F5-33DD-9DAB-429D7F76EDEC}"/>
+              </a:ext>
+            </a:extLst>
+          </p:cNvPr>
+          <p:cNvSpPr>
+            <a:spLocks noGrp="1"/>
+          </p:cNvSpPr>
+          <p:nvPr>
+            <p:ph type="ftr" sz="quarter" idx="5"/>
+          </p:nvPr>
+        </p:nvSpPr>
+        <p:spPr/>
+        <p:txBody>
+          <a:bodyPr/>
+          <a:lstStyle/>
+          <a:p>
+            <a:pPr marL="12700">
+              <a:spcBef>
+                <a:spcPts val="15"/>
+              </a:spcBef>
+            </a:pPr>
+            <a:r>
+              <a:rPr lang="es-CO" spc="-5" noProof="0" dirty="0"/>
+              <a:t>LAB 1.0. WAVEGUIDES</a:t>
+            </a:r>
+          </a:p>
+        </p:txBody>
+      </p:sp>
+      <p:sp>
+        <p:nvSpPr>
+          <p:cNvPr id="2" name="CuadroTexto 1">
+            <a:extLst>
+              <a:ext uri="{FF2B5EF4-FFF2-40B4-BE49-F238E27FC236}">
+                <a16:creationId xmlns:a16="http://schemas.microsoft.com/office/drawing/2014/main" id="{A37F1F9D-67A3-DD8C-671F-BABC77D09ACF}"/>
+              </a:ext>
+            </a:extLst>
+          </p:cNvPr>
+          <p:cNvSpPr txBox="1"/>
+          <p:nvPr/>
+        </p:nvSpPr>
+        <p:spPr>
+          <a:xfrm>
+            <a:off x="384408" y="4860334"/>
+            <a:ext cx="11578992" cy="1384995"/>
+          </a:xfrm>
+          <a:prstGeom prst="rect">
+            <a:avLst/>
+          </a:prstGeom>
+          <a:solidFill>
+            <a:schemeClr val="bg1">
+              <a:lumMod val="95000"/>
+            </a:schemeClr>
+          </a:solidFill>
+          <a:ln w="28575">
+            <a:solidFill>
+              <a:srgbClr val="E0700D"/>
+            </a:solidFill>
+          </a:ln>
+        </p:spPr>
+        <p:txBody>
+          <a:bodyPr wrap="square" rtlCol="0">
+            <a:spAutoFit/>
+          </a:bodyPr>
+          <a:lstStyle/>
+          <a:p>
+            <a:pPr algn="just"/>
+            <a:r>
+              <a:rPr lang="es-CO" sz="1200" noProof="0" dirty="0">
+                <a:latin typeface="Arial" panose="020B0604020202020204" pitchFamily="34" charset="0"/>
+                <a:cs typeface="Arial" panose="020B0604020202020204" pitchFamily="34" charset="0"/>
+              </a:rPr>
+              <a:t>Primero miramos como cambia el índice efectivo con respecto al radio de curvatura, encontramos que, en ambos casos (TE0 y TM0) </a:t>
+            </a:r>
+            <a:r>
+              <a:rPr lang="es-CO" sz="1200" dirty="0">
+                <a:latin typeface="Arial" panose="020B0604020202020204" pitchFamily="34" charset="0"/>
+                <a:cs typeface="Arial" panose="020B0604020202020204" pitchFamily="34" charset="0"/>
+              </a:rPr>
+              <a:t>a medida que aumenta el radio de curvatura se disminuye el índice efectivo, es decir, que viajan cada vez menos confinados los modos, acercándose cada vez más al índice de refracción del </a:t>
+            </a:r>
+            <a:r>
+              <a:rPr lang="es-CO" sz="1200" dirty="0" err="1">
+                <a:latin typeface="Arial" panose="020B0604020202020204" pitchFamily="34" charset="0"/>
+                <a:cs typeface="Arial" panose="020B0604020202020204" pitchFamily="34" charset="0"/>
+              </a:rPr>
+              <a:t>cladding</a:t>
+            </a:r>
+            <a:r>
+              <a:rPr lang="es-CO" sz="1200" dirty="0">
+                <a:latin typeface="Arial" panose="020B0604020202020204" pitchFamily="34" charset="0"/>
+                <a:cs typeface="Arial" panose="020B0604020202020204" pitchFamily="34" charset="0"/>
+              </a:rPr>
+              <a:t>. También en ambos casos la variación es muy muy pequeña, pues si observamos la primera gráfica vemos como es casi nula a comparación de la escala que se maneja allí. </a:t>
+            </a:r>
+            <a:r>
+              <a:rPr lang="es-CO" sz="1200" noProof="0" dirty="0">
+                <a:latin typeface="Arial" panose="020B0604020202020204" pitchFamily="34" charset="0"/>
+                <a:cs typeface="Arial" panose="020B0604020202020204" pitchFamily="34" charset="0"/>
+              </a:rPr>
+              <a:t> </a:t>
+            </a:r>
+          </a:p>
+          <a:p>
+            <a:pPr algn="just"/>
+            <a:endParaRPr lang="es-CO" sz="1200" noProof="0" dirty="0">
+              <a:latin typeface="Arial" panose="020B0604020202020204" pitchFamily="34" charset="0"/>
+              <a:cs typeface="Arial" panose="020B0604020202020204" pitchFamily="34" charset="0"/>
+            </a:endParaRPr>
+          </a:p>
+          <a:p>
+            <a:pPr algn="just"/>
+            <a:endParaRPr lang="es-CO" sz="1200" noProof="0" dirty="0">
+              <a:latin typeface="Arial" panose="020B0604020202020204" pitchFamily="34" charset="0"/>
+              <a:cs typeface="Arial" panose="020B0604020202020204" pitchFamily="34" charset="0"/>
+            </a:endParaRPr>
+          </a:p>
+          <a:p>
+            <a:pPr algn="just"/>
+            <a:endParaRPr lang="es-CO" sz="1200" noProof="0" dirty="0">
+              <a:latin typeface="Arial" panose="020B0604020202020204" pitchFamily="34" charset="0"/>
+              <a:cs typeface="Arial" panose="020B0604020202020204" pitchFamily="34" charset="0"/>
+            </a:endParaRPr>
+          </a:p>
+        </p:txBody>
+      </p:sp>
+      <p:sp>
+        <p:nvSpPr>
+          <p:cNvPr id="7" name="Rectángulo 6">
+            <a:extLst>
+              <a:ext uri="{FF2B5EF4-FFF2-40B4-BE49-F238E27FC236}">
+                <a16:creationId xmlns:a16="http://schemas.microsoft.com/office/drawing/2014/main" id="{4F23A60D-C265-66E7-2CFE-E46C0ED91B71}"/>
+              </a:ext>
+            </a:extLst>
+          </p:cNvPr>
+          <p:cNvSpPr/>
+          <p:nvPr/>
+        </p:nvSpPr>
+        <p:spPr>
+          <a:xfrm>
+            <a:off x="384407" y="1418373"/>
+            <a:ext cx="11578993" cy="3306028"/>
+          </a:xfrm>
+          <a:prstGeom prst="rect">
+            <a:avLst/>
+          </a:prstGeom>
+          <a:noFill/>
+          <a:ln w="28575">
+            <a:solidFill>
+              <a:srgbClr val="E0700D"/>
+            </a:solidFill>
+          </a:ln>
+        </p:spPr>
+        <p:style>
+          <a:lnRef idx="2">
+            <a:schemeClr val="accent1">
+              <a:shade val="15000"/>
+            </a:schemeClr>
+          </a:lnRef>
+          <a:fillRef idx="1">
+            <a:schemeClr val="accent1"/>
+          </a:fillRef>
+          <a:effectRef idx="0">
+            <a:schemeClr val="accent1"/>
+          </a:effectRef>
+          <a:fontRef idx="minor">
+            <a:schemeClr val="lt1"/>
+          </a:fontRef>
+        </p:style>
+        <p:txBody>
+          <a:bodyPr rtlCol="0" anchor="ctr"/>
+          <a:lstStyle/>
+          <a:p>
+            <a:pPr algn="ctr"/>
+            <a:endParaRPr lang="es-CO" noProof="0" dirty="0"/>
+          </a:p>
+        </p:txBody>
+      </p:sp>
+      <p:pic>
+        <p:nvPicPr>
+          <p:cNvPr id="6" name="Imagen 5">
+            <a:extLst>
+              <a:ext uri="{FF2B5EF4-FFF2-40B4-BE49-F238E27FC236}">
+                <a16:creationId xmlns:a16="http://schemas.microsoft.com/office/drawing/2014/main" id="{C8881E33-4973-CE6F-FF02-90A7E17A6ECA}"/>
+              </a:ext>
+            </a:extLst>
+          </p:cNvPr>
+          <p:cNvPicPr>
+            <a:picLocks noChangeAspect="1"/>
+          </p:cNvPicPr>
+          <p:nvPr/>
+        </p:nvPicPr>
+        <p:blipFill>
+          <a:blip r:embed="rId5"/>
+          <a:stretch>
+            <a:fillRect/>
+          </a:stretch>
+        </p:blipFill>
+        <p:spPr>
+          <a:xfrm>
+            <a:off x="4182950" y="1599603"/>
+            <a:ext cx="3816000" cy="2520000"/>
+          </a:xfrm>
+          <a:prstGeom prst="rect">
+            <a:avLst/>
+          </a:prstGeom>
+        </p:spPr>
+      </p:pic>
+      <p:pic>
+        <p:nvPicPr>
+          <p:cNvPr id="11" name="Imagen 10">
+            <a:extLst>
+              <a:ext uri="{FF2B5EF4-FFF2-40B4-BE49-F238E27FC236}">
+                <a16:creationId xmlns:a16="http://schemas.microsoft.com/office/drawing/2014/main" id="{15D1BE85-4493-1427-0BAF-44F363E72E27}"/>
+              </a:ext>
+            </a:extLst>
+          </p:cNvPr>
+          <p:cNvPicPr>
+            <a:picLocks noChangeAspect="1"/>
+          </p:cNvPicPr>
+          <p:nvPr/>
+        </p:nvPicPr>
+        <p:blipFill>
+          <a:blip r:embed="rId6"/>
+          <a:stretch>
+            <a:fillRect/>
+          </a:stretch>
+        </p:blipFill>
+        <p:spPr>
+          <a:xfrm>
+            <a:off x="7997131" y="1600222"/>
+            <a:ext cx="3810462" cy="2520000"/>
+          </a:xfrm>
+          <a:prstGeom prst="rect">
+            <a:avLst/>
+          </a:prstGeom>
+        </p:spPr>
+      </p:pic>
+      <p:pic>
+        <p:nvPicPr>
+          <p:cNvPr id="15" name="Imagen 14">
+            <a:extLst>
+              <a:ext uri="{FF2B5EF4-FFF2-40B4-BE49-F238E27FC236}">
+                <a16:creationId xmlns:a16="http://schemas.microsoft.com/office/drawing/2014/main" id="{4FD8E334-D474-A5DC-4D0D-2F704BC628CA}"/>
+              </a:ext>
+            </a:extLst>
+          </p:cNvPr>
+          <p:cNvPicPr>
+            <a:picLocks noChangeAspect="1"/>
+          </p:cNvPicPr>
+          <p:nvPr/>
+        </p:nvPicPr>
+        <p:blipFill>
+          <a:blip r:embed="rId7"/>
+          <a:stretch>
+            <a:fillRect/>
+          </a:stretch>
+        </p:blipFill>
+        <p:spPr>
+          <a:xfrm>
+            <a:off x="510950" y="1599603"/>
+            <a:ext cx="3672000" cy="2520000"/>
+          </a:xfrm>
+          <a:prstGeom prst="rect">
+            <a:avLst/>
+          </a:prstGeom>
+        </p:spPr>
+      </p:pic>
     </p:spTree>
+    <p:extLst>
+      <p:ext uri="{BB962C8B-B14F-4D97-AF65-F5344CB8AC3E}">
+        <p14:creationId xmlns:p14="http://schemas.microsoft.com/office/powerpoint/2010/main" val="1614917316"/>
+      </p:ext>
+    </p:extLst>
+  </p:cSld>
+  <p:clrMapOvr>
+    <a:masterClrMapping/>
+  </p:clrMapOvr>
+</p:sld>
+</file>
+
+<file path=ppt/slides/slide9.xml><?xml version="1.0" encoding="utf-8"?>
+<p:sld xmlns:a="http://schemas.openxmlformats.org/drawingml/2006/main" xmlns:r="http://schemas.openxmlformats.org/officeDocument/2006/relationships" xmlns:p="http://schemas.openxmlformats.org/presentationml/2006/main">
+  <p:cSld>
+    <p:spTree>
+      <p:nvGrpSpPr>
+        <p:cNvPr id="1" name="">
+          <a:extLst>
+            <a:ext uri="{FF2B5EF4-FFF2-40B4-BE49-F238E27FC236}">
+              <a16:creationId xmlns:a16="http://schemas.microsoft.com/office/drawing/2014/main" id="{25434E70-43B1-3881-1771-20FB4358471D}"/>
+            </a:ext>
+          </a:extLst>
+        </p:cNvPr>
+        <p:cNvGrpSpPr/>
+        <p:nvPr/>
+      </p:nvGrpSpPr>
+      <p:grpSpPr>
+        <a:xfrm>
+          <a:off x="0" y="0"/>
+          <a:ext cx="0" cy="0"/>
+          <a:chOff x="0" y="0"/>
+          <a:chExt cx="0" cy="0"/>
+        </a:xfrm>
+      </p:grpSpPr>
+      <p:sp>
+        <p:nvSpPr>
+          <p:cNvPr id="16" name="object 16">
+            <a:extLst>
+              <a:ext uri="{FF2B5EF4-FFF2-40B4-BE49-F238E27FC236}">
+                <a16:creationId xmlns:a16="http://schemas.microsoft.com/office/drawing/2014/main" id="{742C31CE-19F0-B995-0997-9A2D6A879BF7}"/>
+              </a:ext>
+            </a:extLst>
+          </p:cNvPr>
+          <p:cNvSpPr txBox="1">
+            <a:spLocks noGrp="1"/>
+          </p:cNvSpPr>
+          <p:nvPr>
+            <p:ph type="title"/>
+          </p:nvPr>
+        </p:nvSpPr>
+        <p:spPr>
+          <a:xfrm>
+            <a:off x="685800" y="408883"/>
+            <a:ext cx="10994410" cy="1090042"/>
+          </a:xfrm>
+          <a:prstGeom prst="rect">
+            <a:avLst/>
+          </a:prstGeom>
+        </p:spPr>
+        <p:txBody>
+          <a:bodyPr vert="horz" wrap="square" lIns="0" tIns="12700" rIns="0" bIns="0" rtlCol="0">
+            <a:spAutoFit/>
+          </a:bodyPr>
+          <a:lstStyle/>
+          <a:p>
+            <a:pPr marL="12700">
+              <a:lnSpc>
+                <a:spcPct val="100000"/>
+              </a:lnSpc>
+              <a:spcBef>
+                <a:spcPts val="100"/>
+              </a:spcBef>
+            </a:pPr>
+            <a:r>
+              <a:rPr lang="es-CO" sz="2500" noProof="0" dirty="0" err="1"/>
+              <a:t>Learning</a:t>
+            </a:r>
+            <a:r>
+              <a:rPr lang="es-CO" sz="2500" noProof="0" dirty="0"/>
+              <a:t> </a:t>
+            </a:r>
+            <a:r>
+              <a:rPr lang="es-CO" sz="2500" noProof="0" dirty="0" err="1"/>
+              <a:t>outcome</a:t>
+            </a:r>
+            <a:r>
+              <a:rPr lang="es-CO" sz="2500" noProof="0" dirty="0"/>
+              <a:t> #4 – Bend </a:t>
+            </a:r>
+            <a:r>
+              <a:rPr lang="es-CO" sz="2500" noProof="0" dirty="0" err="1"/>
+              <a:t>waveguide</a:t>
+            </a:r>
+            <a:r>
+              <a:rPr lang="es-CO" sz="2500" noProof="0" dirty="0"/>
+              <a:t> </a:t>
+            </a:r>
+            <a:r>
+              <a:rPr lang="es-CO" sz="2500" noProof="0" dirty="0" err="1"/>
+              <a:t>radius</a:t>
+            </a:r>
+            <a:r>
+              <a:rPr lang="es-CO" sz="2500" noProof="0" dirty="0"/>
+              <a:t> vs. </a:t>
+            </a:r>
+            <a:r>
+              <a:rPr lang="es-CO" sz="2500" noProof="0" dirty="0" err="1"/>
+              <a:t>loss</a:t>
+            </a:r>
+            <a:r>
+              <a:rPr lang="es-CO" sz="2500" noProof="0" dirty="0"/>
+              <a:t> – </a:t>
+            </a:r>
+            <a:r>
+              <a:rPr lang="es-CO" sz="2500" noProof="0" dirty="0" err="1"/>
+              <a:t>deep</a:t>
+            </a:r>
+            <a:br>
+              <a:rPr lang="es-CO" sz="2500" noProof="0" dirty="0"/>
+            </a:br>
+            <a:r>
+              <a:rPr lang="es-CO" b="0" noProof="0" dirty="0" err="1"/>
+              <a:t>Find</a:t>
+            </a:r>
+            <a:r>
+              <a:rPr lang="es-CO" b="0" noProof="0" dirty="0"/>
+              <a:t>  neff_TE0 </a:t>
+            </a:r>
+            <a:r>
+              <a:rPr lang="es-CO" b="0" noProof="0" dirty="0" err="1"/>
+              <a:t>for</a:t>
+            </a:r>
+            <a:r>
+              <a:rPr lang="es-CO" b="0" noProof="0" dirty="0"/>
+              <a:t> </a:t>
+            </a:r>
+            <a:r>
+              <a:rPr lang="es-CO" b="0" noProof="0" dirty="0" err="1"/>
+              <a:t>wvl</a:t>
+            </a:r>
+            <a:r>
+              <a:rPr lang="es-CO" b="0" noProof="0" dirty="0"/>
+              <a:t> 1.55 µm, </a:t>
+            </a:r>
+            <a:r>
+              <a:rPr lang="es-CO" b="0" noProof="0" dirty="0" err="1"/>
+              <a:t>width</a:t>
+            </a:r>
+            <a:r>
+              <a:rPr lang="es-CO" b="0" noProof="0" dirty="0"/>
+              <a:t> 1.0 µm </a:t>
+            </a:r>
+            <a:r>
+              <a:rPr lang="es-CO" b="0" noProof="0" dirty="0" err="1"/>
+              <a:t>for</a:t>
+            </a:r>
+            <a:r>
+              <a:rPr lang="es-CO" b="0" noProof="0" dirty="0"/>
+              <a:t> R=25,50,75,100, 125,150 µm</a:t>
+            </a:r>
+            <a:br>
+              <a:rPr lang="es-CO" sz="2500" noProof="0" dirty="0"/>
+            </a:br>
+            <a:endParaRPr lang="es-CO" sz="2500" b="0" noProof="0" dirty="0">
+              <a:latin typeface="+mj-lt"/>
+              <a:cs typeface="Lucida Sans"/>
+            </a:endParaRPr>
+          </a:p>
+        </p:txBody>
+      </p:sp>
+      <p:pic>
+        <p:nvPicPr>
+          <p:cNvPr id="83" name="Gráfico 82">
+            <a:extLst>
+              <a:ext uri="{FF2B5EF4-FFF2-40B4-BE49-F238E27FC236}">
+                <a16:creationId xmlns:a16="http://schemas.microsoft.com/office/drawing/2014/main" id="{D688A609-F3DC-EE34-C536-683E70F32EAE}"/>
+              </a:ext>
+            </a:extLst>
+          </p:cNvPr>
+          <p:cNvPicPr>
+            <a:picLocks noChangeAspect="1"/>
+          </p:cNvPicPr>
+          <p:nvPr/>
+        </p:nvPicPr>
+        <p:blipFill>
+          <a:blip r:embed="rId3">
+            <a:extLst>
+              <a:ext uri="{96DAC541-7B7A-43D3-8B79-37D633B846F1}">
+                <asvg:svgBlip xmlns:asvg="http://schemas.microsoft.com/office/drawing/2016/SVG/main" r:embed="rId4"/>
+              </a:ext>
+            </a:extLst>
+          </a:blip>
+          <a:stretch>
+            <a:fillRect/>
+          </a:stretch>
+        </p:blipFill>
+        <p:spPr>
+          <a:xfrm>
+            <a:off x="5045006" y="6356057"/>
+            <a:ext cx="6409575" cy="363174"/>
+          </a:xfrm>
+          <a:prstGeom prst="rect">
+            <a:avLst/>
+          </a:prstGeom>
+        </p:spPr>
+      </p:pic>
+      <p:sp>
+        <p:nvSpPr>
+          <p:cNvPr id="84" name="Marcador de número de diapositiva 83">
+            <a:extLst>
+              <a:ext uri="{FF2B5EF4-FFF2-40B4-BE49-F238E27FC236}">
+                <a16:creationId xmlns:a16="http://schemas.microsoft.com/office/drawing/2014/main" id="{B6C672C6-89D4-7E67-2B94-811D081786A7}"/>
+              </a:ext>
+            </a:extLst>
+          </p:cNvPr>
+          <p:cNvSpPr>
+            <a:spLocks noGrp="1"/>
+          </p:cNvSpPr>
+          <p:nvPr>
+            <p:ph type="sldNum" sz="quarter" idx="7"/>
+          </p:nvPr>
+        </p:nvSpPr>
+        <p:spPr/>
+        <p:txBody>
+          <a:bodyPr/>
+          <a:lstStyle/>
+          <a:p>
+            <a:fld id="{B6F15528-21DE-4FAA-801E-634DDDAF4B2B}" type="slidenum">
+              <a:rPr lang="es-CO" noProof="0" smtClean="0"/>
+              <a:t>9</a:t>
+            </a:fld>
+            <a:endParaRPr lang="es-CO" noProof="0" dirty="0"/>
+          </a:p>
+        </p:txBody>
+      </p:sp>
+      <p:sp>
+        <p:nvSpPr>
+          <p:cNvPr id="3" name="Marcador de pie de página 2">
+            <a:extLst>
+              <a:ext uri="{FF2B5EF4-FFF2-40B4-BE49-F238E27FC236}">
+                <a16:creationId xmlns:a16="http://schemas.microsoft.com/office/drawing/2014/main" id="{AA1F4313-D710-7A3E-7A8F-EB77DEE3C1A7}"/>
+              </a:ext>
+            </a:extLst>
+          </p:cNvPr>
+          <p:cNvSpPr>
+            <a:spLocks noGrp="1"/>
+          </p:cNvSpPr>
+          <p:nvPr>
+            <p:ph type="ftr" sz="quarter" idx="5"/>
+          </p:nvPr>
+        </p:nvSpPr>
+        <p:spPr/>
+        <p:txBody>
+          <a:bodyPr/>
+          <a:lstStyle/>
+          <a:p>
+            <a:pPr marL="12700">
+              <a:spcBef>
+                <a:spcPts val="15"/>
+              </a:spcBef>
+            </a:pPr>
+            <a:r>
+              <a:rPr lang="es-CO" spc="-5" noProof="0" dirty="0"/>
+              <a:t>LAB 1.0. WAVEGUIDES</a:t>
+            </a:r>
+          </a:p>
+        </p:txBody>
+      </p:sp>
+      <p:sp>
+        <p:nvSpPr>
+          <p:cNvPr id="2" name="CuadroTexto 1">
+            <a:extLst>
+              <a:ext uri="{FF2B5EF4-FFF2-40B4-BE49-F238E27FC236}">
+                <a16:creationId xmlns:a16="http://schemas.microsoft.com/office/drawing/2014/main" id="{FDE3A197-9508-F9F1-1FEB-FF883D78C151}"/>
+              </a:ext>
+            </a:extLst>
+          </p:cNvPr>
+          <p:cNvSpPr txBox="1"/>
+          <p:nvPr/>
+        </p:nvSpPr>
+        <p:spPr>
+          <a:xfrm>
+            <a:off x="6670198" y="1397590"/>
+            <a:ext cx="5165997" cy="4524315"/>
+          </a:xfrm>
+          <a:prstGeom prst="rect">
+            <a:avLst/>
+          </a:prstGeom>
+          <a:solidFill>
+            <a:schemeClr val="bg1">
+              <a:lumMod val="95000"/>
+            </a:schemeClr>
+          </a:solidFill>
+          <a:ln w="28575">
+            <a:solidFill>
+              <a:srgbClr val="E0700D"/>
+            </a:solidFill>
+          </a:ln>
+        </p:spPr>
+        <p:txBody>
+          <a:bodyPr wrap="square" rtlCol="0">
+            <a:spAutoFit/>
+          </a:bodyPr>
+          <a:lstStyle/>
+          <a:p>
+            <a:pPr algn="just"/>
+            <a:r>
+              <a:rPr lang="es-CO" sz="1200" noProof="0" dirty="0" err="1">
+                <a:latin typeface="Arial" panose="020B0604020202020204" pitchFamily="34" charset="0"/>
+                <a:cs typeface="Arial" panose="020B0604020202020204" pitchFamily="34" charset="0"/>
+              </a:rPr>
+              <a:t>Comment</a:t>
+            </a:r>
+            <a:r>
+              <a:rPr lang="es-CO" sz="1200" noProof="0" dirty="0">
+                <a:latin typeface="Arial" panose="020B0604020202020204" pitchFamily="34" charset="0"/>
+                <a:cs typeface="Arial" panose="020B0604020202020204" pitchFamily="34" charset="0"/>
+              </a:rPr>
+              <a:t> </a:t>
+            </a:r>
+            <a:r>
+              <a:rPr lang="es-CO" sz="1200" noProof="0" dirty="0" err="1">
+                <a:latin typeface="Arial" panose="020B0604020202020204" pitchFamily="34" charset="0"/>
+                <a:cs typeface="Arial" panose="020B0604020202020204" pitchFamily="34" charset="0"/>
+              </a:rPr>
+              <a:t>results</a:t>
+            </a:r>
+            <a:r>
+              <a:rPr lang="es-CO" sz="1200" noProof="0" dirty="0">
+                <a:latin typeface="Arial" panose="020B0604020202020204" pitchFamily="34" charset="0"/>
+                <a:cs typeface="Arial" panose="020B0604020202020204" pitchFamily="34" charset="0"/>
+              </a:rPr>
+              <a:t>, </a:t>
+            </a:r>
+            <a:r>
+              <a:rPr lang="es-CO" sz="1200" noProof="0" dirty="0" err="1">
+                <a:latin typeface="Arial" panose="020B0604020202020204" pitchFamily="34" charset="0"/>
+                <a:cs typeface="Arial" panose="020B0604020202020204" pitchFamily="34" charset="0"/>
+              </a:rPr>
+              <a:t>which</a:t>
+            </a:r>
+            <a:r>
+              <a:rPr lang="es-CO" sz="1200" noProof="0" dirty="0">
+                <a:latin typeface="Arial" panose="020B0604020202020204" pitchFamily="34" charset="0"/>
+                <a:cs typeface="Arial" panose="020B0604020202020204" pitchFamily="34" charset="0"/>
+              </a:rPr>
+              <a:t> </a:t>
+            </a:r>
+            <a:r>
+              <a:rPr lang="es-CO" sz="1200" noProof="0" dirty="0" err="1">
+                <a:latin typeface="Arial" panose="020B0604020202020204" pitchFamily="34" charset="0"/>
+                <a:cs typeface="Arial" panose="020B0604020202020204" pitchFamily="34" charset="0"/>
+              </a:rPr>
+              <a:t>is</a:t>
+            </a:r>
+            <a:r>
+              <a:rPr lang="es-CO" sz="1200" noProof="0" dirty="0">
+                <a:latin typeface="Arial" panose="020B0604020202020204" pitchFamily="34" charset="0"/>
+                <a:cs typeface="Arial" panose="020B0604020202020204" pitchFamily="34" charset="0"/>
+              </a:rPr>
+              <a:t> the </a:t>
+            </a:r>
+            <a:r>
+              <a:rPr lang="es-CO" sz="1200" noProof="0" dirty="0" err="1">
+                <a:latin typeface="Arial" panose="020B0604020202020204" pitchFamily="34" charset="0"/>
+                <a:cs typeface="Arial" panose="020B0604020202020204" pitchFamily="34" charset="0"/>
+              </a:rPr>
+              <a:t>safe</a:t>
+            </a:r>
+            <a:r>
+              <a:rPr lang="es-CO" sz="1200" noProof="0" dirty="0">
+                <a:latin typeface="Arial" panose="020B0604020202020204" pitchFamily="34" charset="0"/>
+                <a:cs typeface="Arial" panose="020B0604020202020204" pitchFamily="34" charset="0"/>
+              </a:rPr>
+              <a:t> </a:t>
+            </a:r>
+            <a:r>
+              <a:rPr lang="es-CO" sz="1200" noProof="0" dirty="0" err="1">
+                <a:latin typeface="Arial" panose="020B0604020202020204" pitchFamily="34" charset="0"/>
+                <a:cs typeface="Arial" panose="020B0604020202020204" pitchFamily="34" charset="0"/>
+              </a:rPr>
+              <a:t>radius</a:t>
+            </a:r>
+            <a:r>
+              <a:rPr lang="es-CO" sz="1200" noProof="0" dirty="0">
+                <a:latin typeface="Arial" panose="020B0604020202020204" pitchFamily="34" charset="0"/>
+                <a:cs typeface="Arial" panose="020B0604020202020204" pitchFamily="34" charset="0"/>
+              </a:rPr>
+              <a:t>, </a:t>
+            </a:r>
+            <a:r>
+              <a:rPr lang="es-CO" sz="1200" noProof="0" dirty="0" err="1">
+                <a:latin typeface="Arial" panose="020B0604020202020204" pitchFamily="34" charset="0"/>
+                <a:cs typeface="Arial" panose="020B0604020202020204" pitchFamily="34" charset="0"/>
+              </a:rPr>
+              <a:t>consider</a:t>
+            </a:r>
+            <a:r>
+              <a:rPr lang="es-CO" sz="1200" noProof="0" dirty="0">
+                <a:latin typeface="Arial" panose="020B0604020202020204" pitchFamily="34" charset="0"/>
+                <a:cs typeface="Arial" panose="020B0604020202020204" pitchFamily="34" charset="0"/>
+              </a:rPr>
+              <a:t> </a:t>
+            </a:r>
+            <a:r>
+              <a:rPr lang="es-CO" sz="1200" noProof="0" dirty="0" err="1">
+                <a:latin typeface="Arial" panose="020B0604020202020204" pitchFamily="34" charset="0"/>
+                <a:cs typeface="Arial" panose="020B0604020202020204" pitchFamily="34" charset="0"/>
+              </a:rPr>
+              <a:t>safe</a:t>
+            </a:r>
+            <a:r>
+              <a:rPr lang="es-CO" sz="1200" noProof="0" dirty="0">
+                <a:latin typeface="Arial" panose="020B0604020202020204" pitchFamily="34" charset="0"/>
+                <a:cs typeface="Arial" panose="020B0604020202020204" pitchFamily="34" charset="0"/>
+              </a:rPr>
+              <a:t> </a:t>
+            </a:r>
+            <a:r>
+              <a:rPr lang="es-CO" sz="1200" noProof="0" dirty="0" err="1">
+                <a:latin typeface="Arial" panose="020B0604020202020204" pitchFamily="34" charset="0"/>
+                <a:cs typeface="Arial" panose="020B0604020202020204" pitchFamily="34" charset="0"/>
+              </a:rPr>
+              <a:t>means</a:t>
+            </a:r>
+            <a:r>
+              <a:rPr lang="es-CO" sz="1200" noProof="0" dirty="0">
+                <a:latin typeface="Arial" panose="020B0604020202020204" pitchFamily="34" charset="0"/>
+                <a:cs typeface="Arial" panose="020B0604020202020204" pitchFamily="34" charset="0"/>
+              </a:rPr>
+              <a:t> </a:t>
+            </a:r>
+            <a:r>
+              <a:rPr lang="es-CO" sz="1200" noProof="0" dirty="0" err="1">
+                <a:latin typeface="Arial" panose="020B0604020202020204" pitchFamily="34" charset="0"/>
+                <a:cs typeface="Arial" panose="020B0604020202020204" pitchFamily="34" charset="0"/>
+              </a:rPr>
+              <a:t>less</a:t>
+            </a:r>
+            <a:r>
+              <a:rPr lang="es-CO" sz="1200" noProof="0" dirty="0">
+                <a:latin typeface="Arial" panose="020B0604020202020204" pitchFamily="34" charset="0"/>
+                <a:cs typeface="Arial" panose="020B0604020202020204" pitchFamily="34" charset="0"/>
+              </a:rPr>
+              <a:t> </a:t>
+            </a:r>
+            <a:r>
+              <a:rPr lang="es-CO" sz="1200" noProof="0" dirty="0" err="1">
+                <a:latin typeface="Arial" panose="020B0604020202020204" pitchFamily="34" charset="0"/>
+                <a:cs typeface="Arial" panose="020B0604020202020204" pitchFamily="34" charset="0"/>
+              </a:rPr>
+              <a:t>than</a:t>
+            </a:r>
+            <a:r>
+              <a:rPr lang="es-CO" sz="1200" noProof="0" dirty="0">
+                <a:latin typeface="Arial" panose="020B0604020202020204" pitchFamily="34" charset="0"/>
+                <a:cs typeface="Arial" panose="020B0604020202020204" pitchFamily="34" charset="0"/>
+              </a:rPr>
+              <a:t> 0.1 dB/90º.</a:t>
+            </a:r>
+          </a:p>
+          <a:p>
+            <a:pPr algn="just"/>
+            <a:endParaRPr lang="es-CO" sz="1200" dirty="0">
+              <a:latin typeface="Arial" panose="020B0604020202020204" pitchFamily="34" charset="0"/>
+              <a:cs typeface="Arial" panose="020B0604020202020204" pitchFamily="34" charset="0"/>
+            </a:endParaRPr>
+          </a:p>
+          <a:p>
+            <a:pPr algn="just"/>
+            <a:r>
+              <a:rPr lang="es-CO" sz="1200" noProof="0" dirty="0">
+                <a:latin typeface="Arial" panose="020B0604020202020204" pitchFamily="34" charset="0"/>
+                <a:cs typeface="Arial" panose="020B0604020202020204" pitchFamily="34" charset="0"/>
+              </a:rPr>
+              <a:t>Ahora, si vemos las perdidas encontramos que en el caso de las perdidas de modo, estas disminuyen a medida que aumentamos el tamaño del radio, esto es debido a que al aumentar el radio no choca tan directamente con un cambio de índice de refracción que se encuentra en las paredes de la guía. </a:t>
+            </a:r>
+          </a:p>
+          <a:p>
+            <a:pPr algn="just"/>
+            <a:endParaRPr lang="es-CO" sz="1200" dirty="0">
+              <a:latin typeface="Arial" panose="020B0604020202020204" pitchFamily="34" charset="0"/>
+              <a:cs typeface="Arial" panose="020B0604020202020204" pitchFamily="34" charset="0"/>
+            </a:endParaRPr>
+          </a:p>
+          <a:p>
+            <a:pPr algn="just"/>
+            <a:r>
+              <a:rPr lang="es-CO" sz="1200" noProof="0" dirty="0">
+                <a:latin typeface="Arial" panose="020B0604020202020204" pitchFamily="34" charset="0"/>
+                <a:cs typeface="Arial" panose="020B0604020202020204" pitchFamily="34" charset="0"/>
+              </a:rPr>
+              <a:t>En el caso del modo TE0 y TM0 vemos como las perdidas de propagación se vuelven más importantes a medida que aumentamos el tamaño del radio, siendo para TE0 desde los 70 </a:t>
+            </a:r>
+            <a:r>
+              <a:rPr lang="es-CO" sz="1200" noProof="0" dirty="0" err="1">
+                <a:latin typeface="Arial" panose="020B0604020202020204" pitchFamily="34" charset="0"/>
+                <a:cs typeface="Arial" panose="020B0604020202020204" pitchFamily="34" charset="0"/>
+              </a:rPr>
+              <a:t>um</a:t>
+            </a:r>
+            <a:r>
+              <a:rPr lang="es-CO" sz="1200" noProof="0" dirty="0">
+                <a:latin typeface="Arial" panose="020B0604020202020204" pitchFamily="34" charset="0"/>
+                <a:cs typeface="Arial" panose="020B0604020202020204" pitchFamily="34" charset="0"/>
+              </a:rPr>
+              <a:t> el comportamiento que siguen las perdidas totales. Por esta razón es necesario encontrar un balance entre los dos tipos de perdidas contemplados, en este caso, un radio de curvatura que nos proporcionaría las menores perdidas estaría alrededor de los 65 </a:t>
+            </a:r>
+            <a:r>
+              <a:rPr lang="es-CO" sz="1200" noProof="0" dirty="0" err="1">
+                <a:latin typeface="Arial" panose="020B0604020202020204" pitchFamily="34" charset="0"/>
+                <a:cs typeface="Arial" panose="020B0604020202020204" pitchFamily="34" charset="0"/>
+              </a:rPr>
+              <a:t>um</a:t>
+            </a:r>
+            <a:r>
+              <a:rPr lang="es-CO" sz="1200" noProof="0" dirty="0">
+                <a:latin typeface="Arial" panose="020B0604020202020204" pitchFamily="34" charset="0"/>
+                <a:cs typeface="Arial" panose="020B0604020202020204" pitchFamily="34" charset="0"/>
+              </a:rPr>
+              <a:t>, ese valor sería el radio seguro para el modo TE0</a:t>
+            </a:r>
+            <a:r>
+              <a:rPr lang="es-CO" sz="1200" dirty="0">
+                <a:latin typeface="Arial" panose="020B0604020202020204" pitchFamily="34" charset="0"/>
+                <a:cs typeface="Arial" panose="020B0604020202020204" pitchFamily="34" charset="0"/>
+              </a:rPr>
+              <a:t>. </a:t>
+            </a:r>
+            <a:r>
+              <a:rPr lang="es-CO" sz="1200" noProof="0" dirty="0">
+                <a:latin typeface="Arial" panose="020B0604020202020204" pitchFamily="34" charset="0"/>
+                <a:cs typeface="Arial" panose="020B0604020202020204" pitchFamily="34" charset="0"/>
+              </a:rPr>
+              <a:t> </a:t>
+            </a:r>
+          </a:p>
+          <a:p>
+            <a:pPr algn="just"/>
+            <a:endParaRPr lang="es-CO" sz="1200" dirty="0">
+              <a:latin typeface="Arial" panose="020B0604020202020204" pitchFamily="34" charset="0"/>
+              <a:cs typeface="Arial" panose="020B0604020202020204" pitchFamily="34" charset="0"/>
+            </a:endParaRPr>
+          </a:p>
+          <a:p>
+            <a:pPr algn="just"/>
+            <a:r>
+              <a:rPr lang="es-CO" sz="1200" noProof="0" dirty="0">
+                <a:latin typeface="Arial" panose="020B0604020202020204" pitchFamily="34" charset="0"/>
+                <a:cs typeface="Arial" panose="020B0604020202020204" pitchFamily="34" charset="0"/>
+              </a:rPr>
+              <a:t>En el caso del modo TM0 vemos como tenemos mayores perdidas y adicionalmente para los 150 </a:t>
+            </a:r>
+            <a:r>
+              <a:rPr lang="es-CO" sz="1200" noProof="0" dirty="0" err="1">
+                <a:latin typeface="Arial" panose="020B0604020202020204" pitchFamily="34" charset="0"/>
+                <a:cs typeface="Arial" panose="020B0604020202020204" pitchFamily="34" charset="0"/>
+              </a:rPr>
+              <a:t>um</a:t>
+            </a:r>
+            <a:r>
+              <a:rPr lang="es-CO" sz="1200" noProof="0" dirty="0">
+                <a:latin typeface="Arial" panose="020B0604020202020204" pitchFamily="34" charset="0"/>
+                <a:cs typeface="Arial" panose="020B0604020202020204" pitchFamily="34" charset="0"/>
+              </a:rPr>
+              <a:t> aun no se rige el comportamiento final por las perdidas de propagación, sino que probablemente allí es donde empiece a dominar. Por lo que si buscamos propagar el modo TM0 en esta guía, es necesario tener radios de curvatura más grandes que en el caso del TE0.</a:t>
+            </a:r>
+          </a:p>
+          <a:p>
+            <a:pPr algn="just"/>
+            <a:endParaRPr lang="es-CO" sz="1200" noProof="0" dirty="0">
+              <a:latin typeface="Arial" panose="020B0604020202020204" pitchFamily="34" charset="0"/>
+              <a:cs typeface="Arial" panose="020B0604020202020204" pitchFamily="34" charset="0"/>
+            </a:endParaRPr>
+          </a:p>
+        </p:txBody>
+      </p:sp>
+      <p:sp>
+        <p:nvSpPr>
+          <p:cNvPr id="7" name="Rectángulo 6">
+            <a:extLst>
+              <a:ext uri="{FF2B5EF4-FFF2-40B4-BE49-F238E27FC236}">
+                <a16:creationId xmlns:a16="http://schemas.microsoft.com/office/drawing/2014/main" id="{B5FE8755-B0BF-14B7-64E6-4BBB2560B9A6}"/>
+              </a:ext>
+            </a:extLst>
+          </p:cNvPr>
+          <p:cNvSpPr/>
+          <p:nvPr/>
+        </p:nvSpPr>
+        <p:spPr>
+          <a:xfrm>
+            <a:off x="304800" y="1418372"/>
+            <a:ext cx="6264002" cy="4677627"/>
+          </a:xfrm>
+          <a:prstGeom prst="rect">
+            <a:avLst/>
+          </a:prstGeom>
+          <a:noFill/>
+          <a:ln w="28575">
+            <a:solidFill>
+              <a:srgbClr val="E0700D"/>
+            </a:solidFill>
+          </a:ln>
+        </p:spPr>
+        <p:style>
+          <a:lnRef idx="2">
+            <a:schemeClr val="accent1">
+              <a:shade val="15000"/>
+            </a:schemeClr>
+          </a:lnRef>
+          <a:fillRef idx="1">
+            <a:schemeClr val="accent1"/>
+          </a:fillRef>
+          <a:effectRef idx="0">
+            <a:schemeClr val="accent1"/>
+          </a:effectRef>
+          <a:fontRef idx="minor">
+            <a:schemeClr val="lt1"/>
+          </a:fontRef>
+        </p:style>
+        <p:txBody>
+          <a:bodyPr rtlCol="0" anchor="ctr"/>
+          <a:lstStyle/>
+          <a:p>
+            <a:pPr algn="ctr"/>
+            <a:endParaRPr lang="es-CO" noProof="0" dirty="0"/>
+          </a:p>
+        </p:txBody>
+      </p:sp>
+      <p:pic>
+        <p:nvPicPr>
+          <p:cNvPr id="10" name="Imagen 9">
+            <a:extLst>
+              <a:ext uri="{FF2B5EF4-FFF2-40B4-BE49-F238E27FC236}">
+                <a16:creationId xmlns:a16="http://schemas.microsoft.com/office/drawing/2014/main" id="{F8C1959B-E2C3-46CD-3B61-6D7126E9B0F7}"/>
+              </a:ext>
+            </a:extLst>
+          </p:cNvPr>
+          <p:cNvPicPr>
+            <a:picLocks noChangeAspect="1"/>
+          </p:cNvPicPr>
+          <p:nvPr/>
+        </p:nvPicPr>
+        <p:blipFill>
+          <a:blip r:embed="rId5"/>
+          <a:stretch>
+            <a:fillRect/>
+          </a:stretch>
+        </p:blipFill>
+        <p:spPr>
+          <a:xfrm>
+            <a:off x="457201" y="1470434"/>
+            <a:ext cx="2880000" cy="2232368"/>
+          </a:xfrm>
+          <a:prstGeom prst="rect">
+            <a:avLst/>
+          </a:prstGeom>
+        </p:spPr>
+      </p:pic>
+      <p:pic>
+        <p:nvPicPr>
+          <p:cNvPr id="12" name="Imagen 11">
+            <a:extLst>
+              <a:ext uri="{FF2B5EF4-FFF2-40B4-BE49-F238E27FC236}">
+                <a16:creationId xmlns:a16="http://schemas.microsoft.com/office/drawing/2014/main" id="{569F9F3D-9E5D-BE0E-DF2D-B4844690F3C4}"/>
+              </a:ext>
+            </a:extLst>
+          </p:cNvPr>
+          <p:cNvPicPr>
+            <a:picLocks noChangeAspect="1"/>
+          </p:cNvPicPr>
+          <p:nvPr/>
+        </p:nvPicPr>
+        <p:blipFill>
+          <a:blip r:embed="rId6"/>
+          <a:stretch>
+            <a:fillRect/>
+          </a:stretch>
+        </p:blipFill>
+        <p:spPr>
+          <a:xfrm>
+            <a:off x="3410888" y="1498925"/>
+            <a:ext cx="2880000" cy="2275000"/>
+          </a:xfrm>
+          <a:prstGeom prst="rect">
+            <a:avLst/>
+          </a:prstGeom>
+        </p:spPr>
+      </p:pic>
+      <p:pic>
+        <p:nvPicPr>
+          <p:cNvPr id="15" name="Imagen 14">
+            <a:extLst>
+              <a:ext uri="{FF2B5EF4-FFF2-40B4-BE49-F238E27FC236}">
+                <a16:creationId xmlns:a16="http://schemas.microsoft.com/office/drawing/2014/main" id="{F49F4D02-C865-893E-90D1-967FDA1464FF}"/>
+              </a:ext>
+            </a:extLst>
+          </p:cNvPr>
+          <p:cNvPicPr>
+            <a:picLocks noChangeAspect="1"/>
+          </p:cNvPicPr>
+          <p:nvPr/>
+        </p:nvPicPr>
+        <p:blipFill>
+          <a:blip r:embed="rId7"/>
+          <a:stretch>
+            <a:fillRect/>
+          </a:stretch>
+        </p:blipFill>
+        <p:spPr>
+          <a:xfrm>
+            <a:off x="457201" y="3842604"/>
+            <a:ext cx="2880000" cy="2087518"/>
+          </a:xfrm>
+          <a:prstGeom prst="rect">
+            <a:avLst/>
+          </a:prstGeom>
+        </p:spPr>
+      </p:pic>
+      <p:pic>
+        <p:nvPicPr>
+          <p:cNvPr id="18" name="Imagen 17">
+            <a:extLst>
+              <a:ext uri="{FF2B5EF4-FFF2-40B4-BE49-F238E27FC236}">
+                <a16:creationId xmlns:a16="http://schemas.microsoft.com/office/drawing/2014/main" id="{710E201C-7B5D-8CAA-F915-87FA252D8C64}"/>
+              </a:ext>
+            </a:extLst>
+          </p:cNvPr>
+          <p:cNvPicPr>
+            <a:picLocks noChangeAspect="1"/>
+          </p:cNvPicPr>
+          <p:nvPr/>
+        </p:nvPicPr>
+        <p:blipFill>
+          <a:blip r:embed="rId8"/>
+          <a:stretch>
+            <a:fillRect/>
+          </a:stretch>
+        </p:blipFill>
+        <p:spPr>
+          <a:xfrm>
+            <a:off x="3410888" y="3655122"/>
+            <a:ext cx="2880000" cy="2275000"/>
+          </a:xfrm>
+          <a:prstGeom prst="rect">
+            <a:avLst/>
+          </a:prstGeom>
+        </p:spPr>
+      </p:pic>
+    </p:spTree>
+    <p:extLst>
+      <p:ext uri="{BB962C8B-B14F-4D97-AF65-F5344CB8AC3E}">
+        <p14:creationId xmlns:p14="http://schemas.microsoft.com/office/powerpoint/2010/main" val="3660438245"/>
+      </p:ext>
+    </p:extLst>
   </p:cSld>
   <p:clrMapOvr>
     <a:masterClrMapping/>

--- a/LabBook_10.pptx
+++ b/LabBook_10.pptx
@@ -397,7 +397,7 @@
           <a:p>
             <a:fld id="{8438F8DC-35B0-48E6-A86E-42F1F08DD00F}" type="datetimeFigureOut">
               <a:rPr lang="es-ES" smtClean="0"/>
-              <a:t>03/03/2026</a:t>
+              <a:t>07/03/2026</a:t>
             </a:fld>
             <a:endParaRPr lang="es-ES"/>
           </a:p>
@@ -574,7 +574,7 @@
           <a:p>
             <a:fld id="{FACBDC12-F39B-4B97-8F4D-6734F9D366FF}" type="datetimeFigureOut">
               <a:rPr lang="es-ES" smtClean="0"/>
-              <a:t>03/03/2026</a:t>
+              <a:t>04/03/2026</a:t>
             </a:fld>
             <a:endParaRPr lang="es-ES"/>
           </a:p>
@@ -3617,7 +3617,7 @@
         <p:spPr>
           <a:xfrm>
             <a:off x="609600" y="4860334"/>
-            <a:ext cx="11199971" cy="1200329"/>
+            <a:ext cx="11199971" cy="830997"/>
           </a:xfrm>
           <a:prstGeom prst="rect">
             <a:avLst/>
@@ -3641,349 +3641,13 @@
           <a:p>
             <a:pPr algn="just"/>
             <a:r>
-              <a:rPr lang="es-CO" sz="1200" noProof="0" dirty="0" err="1">
+              <a:rPr lang="en-US" sz="1200" dirty="0">
                 <a:latin typeface="Arial" panose="020B0604020202020204" pitchFamily="34" charset="0"/>
                 <a:cs typeface="Arial" panose="020B0604020202020204" pitchFamily="34" charset="0"/>
               </a:rPr>
-              <a:t>Comment</a:t>
-            </a:r>
-            <a:r>
-              <a:rPr lang="es-CO" sz="1200" noProof="0" dirty="0">
-                <a:latin typeface="Arial" panose="020B0604020202020204" pitchFamily="34" charset="0"/>
-                <a:cs typeface="Arial" panose="020B0604020202020204" pitchFamily="34" charset="0"/>
-              </a:rPr>
-              <a:t> </a:t>
-            </a:r>
-            <a:r>
-              <a:rPr lang="es-CO" sz="1200" noProof="0" dirty="0" err="1">
-                <a:latin typeface="Arial" panose="020B0604020202020204" pitchFamily="34" charset="0"/>
-                <a:cs typeface="Arial" panose="020B0604020202020204" pitchFamily="34" charset="0"/>
-              </a:rPr>
-              <a:t>results</a:t>
-            </a:r>
-            <a:r>
-              <a:rPr lang="es-CO" sz="1200" noProof="0" dirty="0">
-                <a:latin typeface="Arial" panose="020B0604020202020204" pitchFamily="34" charset="0"/>
-                <a:cs typeface="Arial" panose="020B0604020202020204" pitchFamily="34" charset="0"/>
-              </a:rPr>
-              <a:t>, </a:t>
-            </a:r>
-            <a:r>
-              <a:rPr lang="es-CO" sz="1200" noProof="0" dirty="0" err="1">
-                <a:latin typeface="Arial" panose="020B0604020202020204" pitchFamily="34" charset="0"/>
-                <a:cs typeface="Arial" panose="020B0604020202020204" pitchFamily="34" charset="0"/>
-              </a:rPr>
-              <a:t>which</a:t>
-            </a:r>
-            <a:r>
-              <a:rPr lang="es-CO" sz="1200" noProof="0" dirty="0">
-                <a:latin typeface="Arial" panose="020B0604020202020204" pitchFamily="34" charset="0"/>
-                <a:cs typeface="Arial" panose="020B0604020202020204" pitchFamily="34" charset="0"/>
-              </a:rPr>
-              <a:t> </a:t>
-            </a:r>
-            <a:r>
-              <a:rPr lang="es-CO" sz="1200" noProof="0" dirty="0" err="1">
-                <a:latin typeface="Arial" panose="020B0604020202020204" pitchFamily="34" charset="0"/>
-                <a:cs typeface="Arial" panose="020B0604020202020204" pitchFamily="34" charset="0"/>
-              </a:rPr>
-              <a:t>is</a:t>
-            </a:r>
-            <a:r>
-              <a:rPr lang="es-CO" sz="1200" noProof="0" dirty="0">
-                <a:latin typeface="Arial" panose="020B0604020202020204" pitchFamily="34" charset="0"/>
-                <a:cs typeface="Arial" panose="020B0604020202020204" pitchFamily="34" charset="0"/>
-              </a:rPr>
-              <a:t> the </a:t>
-            </a:r>
-            <a:r>
-              <a:rPr lang="es-CO" sz="1200" noProof="0" dirty="0" err="1">
-                <a:latin typeface="Arial" panose="020B0604020202020204" pitchFamily="34" charset="0"/>
-                <a:cs typeface="Arial" panose="020B0604020202020204" pitchFamily="34" charset="0"/>
-              </a:rPr>
-              <a:t>safe</a:t>
-            </a:r>
-            <a:r>
-              <a:rPr lang="es-CO" sz="1200" noProof="0" dirty="0">
-                <a:latin typeface="Arial" panose="020B0604020202020204" pitchFamily="34" charset="0"/>
-                <a:cs typeface="Arial" panose="020B0604020202020204" pitchFamily="34" charset="0"/>
-              </a:rPr>
-              <a:t> </a:t>
-            </a:r>
-            <a:r>
-              <a:rPr lang="es-CO" sz="1200" noProof="0" dirty="0" err="1">
-                <a:latin typeface="Arial" panose="020B0604020202020204" pitchFamily="34" charset="0"/>
-                <a:cs typeface="Arial" panose="020B0604020202020204" pitchFamily="34" charset="0"/>
-              </a:rPr>
-              <a:t>radius</a:t>
-            </a:r>
-            <a:r>
-              <a:rPr lang="es-CO" sz="1200" noProof="0" dirty="0">
-                <a:latin typeface="Arial" panose="020B0604020202020204" pitchFamily="34" charset="0"/>
-                <a:cs typeface="Arial" panose="020B0604020202020204" pitchFamily="34" charset="0"/>
-              </a:rPr>
-              <a:t>, </a:t>
-            </a:r>
-            <a:r>
-              <a:rPr lang="es-CO" sz="1200" noProof="0" dirty="0" err="1">
-                <a:latin typeface="Arial" panose="020B0604020202020204" pitchFamily="34" charset="0"/>
-                <a:cs typeface="Arial" panose="020B0604020202020204" pitchFamily="34" charset="0"/>
-              </a:rPr>
-              <a:t>consider</a:t>
-            </a:r>
-            <a:r>
-              <a:rPr lang="es-CO" sz="1200" noProof="0" dirty="0">
-                <a:latin typeface="Arial" panose="020B0604020202020204" pitchFamily="34" charset="0"/>
-                <a:cs typeface="Arial" panose="020B0604020202020204" pitchFamily="34" charset="0"/>
-              </a:rPr>
-              <a:t> </a:t>
-            </a:r>
-            <a:r>
-              <a:rPr lang="es-CO" sz="1200" noProof="0" dirty="0" err="1">
-                <a:latin typeface="Arial" panose="020B0604020202020204" pitchFamily="34" charset="0"/>
-                <a:cs typeface="Arial" panose="020B0604020202020204" pitchFamily="34" charset="0"/>
-              </a:rPr>
-              <a:t>safe</a:t>
-            </a:r>
-            <a:r>
-              <a:rPr lang="es-CO" sz="1200" noProof="0" dirty="0">
-                <a:latin typeface="Arial" panose="020B0604020202020204" pitchFamily="34" charset="0"/>
-                <a:cs typeface="Arial" panose="020B0604020202020204" pitchFamily="34" charset="0"/>
-              </a:rPr>
-              <a:t> </a:t>
-            </a:r>
-            <a:r>
-              <a:rPr lang="es-CO" sz="1200" noProof="0" dirty="0" err="1">
-                <a:latin typeface="Arial" panose="020B0604020202020204" pitchFamily="34" charset="0"/>
-                <a:cs typeface="Arial" panose="020B0604020202020204" pitchFamily="34" charset="0"/>
-              </a:rPr>
-              <a:t>means</a:t>
-            </a:r>
-            <a:r>
-              <a:rPr lang="es-CO" sz="1200" noProof="0" dirty="0">
-                <a:latin typeface="Arial" panose="020B0604020202020204" pitchFamily="34" charset="0"/>
-                <a:cs typeface="Arial" panose="020B0604020202020204" pitchFamily="34" charset="0"/>
-              </a:rPr>
-              <a:t> </a:t>
-            </a:r>
-            <a:r>
-              <a:rPr lang="es-CO" sz="1200" noProof="0" dirty="0" err="1">
-                <a:latin typeface="Arial" panose="020B0604020202020204" pitchFamily="34" charset="0"/>
-                <a:cs typeface="Arial" panose="020B0604020202020204" pitchFamily="34" charset="0"/>
-              </a:rPr>
-              <a:t>less</a:t>
-            </a:r>
-            <a:r>
-              <a:rPr lang="es-CO" sz="1200" noProof="0" dirty="0">
-                <a:latin typeface="Arial" panose="020B0604020202020204" pitchFamily="34" charset="0"/>
-                <a:cs typeface="Arial" panose="020B0604020202020204" pitchFamily="34" charset="0"/>
-              </a:rPr>
-              <a:t> </a:t>
-            </a:r>
-            <a:r>
-              <a:rPr lang="es-CO" sz="1200" noProof="0" dirty="0" err="1">
-                <a:latin typeface="Arial" panose="020B0604020202020204" pitchFamily="34" charset="0"/>
-                <a:cs typeface="Arial" panose="020B0604020202020204" pitchFamily="34" charset="0"/>
-              </a:rPr>
-              <a:t>than</a:t>
-            </a:r>
-            <a:r>
-              <a:rPr lang="es-CO" sz="1200" noProof="0" dirty="0">
-                <a:latin typeface="Arial" panose="020B0604020202020204" pitchFamily="34" charset="0"/>
-                <a:cs typeface="Arial" panose="020B0604020202020204" pitchFamily="34" charset="0"/>
-              </a:rPr>
-              <a:t> 0.1 dB/90º.</a:t>
-            </a:r>
-          </a:p>
-          <a:p>
-            <a:pPr algn="just"/>
+              <a:t>Now, in the case of a 1.2 µm width deep waveguide at a wavelength of 1.5 µm, the safe radius would be approximately 85 µm. This value is larger than in the previous case, where the safe radius was around 65 µm. This difference may be caused by both the change in wavelength and the increase in the core width.</a:t>
+            </a:r>
             <a:endParaRPr lang="es-CO" sz="1200" dirty="0">
-              <a:latin typeface="Arial" panose="020B0604020202020204" pitchFamily="34" charset="0"/>
-              <a:cs typeface="Arial" panose="020B0604020202020204" pitchFamily="34" charset="0"/>
-            </a:endParaRPr>
-          </a:p>
-          <a:p>
-            <a:pPr algn="just"/>
-            <a:r>
-              <a:rPr lang="es-CO" sz="1200" noProof="0" dirty="0">
-                <a:latin typeface="Arial" panose="020B0604020202020204" pitchFamily="34" charset="0"/>
-                <a:cs typeface="Arial" panose="020B0604020202020204" pitchFamily="34" charset="0"/>
-              </a:rPr>
-              <a:t>Ahora, en el caso de  </a:t>
-            </a:r>
-            <a:r>
-              <a:rPr lang="en-US" sz="1200" dirty="0"/>
-              <a:t>1.2 um width deep waveguides at 1.5 um, </a:t>
-            </a:r>
-            <a:r>
-              <a:rPr lang="es-CO" sz="1200" noProof="0" dirty="0"/>
-              <a:t>el</a:t>
-            </a:r>
-            <a:r>
-              <a:rPr lang="en-US" sz="1200" dirty="0"/>
-              <a:t> radio Seguro </a:t>
-            </a:r>
-            <a:r>
-              <a:rPr lang="en-US" sz="1200" dirty="0" err="1"/>
-              <a:t>sería</a:t>
-            </a:r>
-            <a:r>
-              <a:rPr lang="en-US" sz="1200" dirty="0"/>
-              <a:t> de 85 um </a:t>
-            </a:r>
-            <a:r>
-              <a:rPr lang="en-US" sz="1200" dirty="0" err="1"/>
-              <a:t>aproximadamente</a:t>
-            </a:r>
-            <a:r>
-              <a:rPr lang="en-US" sz="1200" dirty="0"/>
-              <a:t>, </a:t>
-            </a:r>
-            <a:r>
-              <a:rPr lang="en-US" sz="1200" dirty="0" err="1"/>
-              <a:t>este</a:t>
-            </a:r>
-            <a:r>
-              <a:rPr lang="en-US" sz="1200" dirty="0"/>
-              <a:t> valor es </a:t>
-            </a:r>
-            <a:r>
-              <a:rPr lang="en-US" sz="1200" dirty="0" err="1"/>
-              <a:t>más</a:t>
-            </a:r>
-            <a:r>
-              <a:rPr lang="en-US" sz="1200" dirty="0"/>
-              <a:t> grande </a:t>
-            </a:r>
-            <a:r>
-              <a:rPr lang="en-US" sz="1200" dirty="0" err="1"/>
-              <a:t>que</a:t>
-            </a:r>
-            <a:r>
-              <a:rPr lang="en-US" sz="1200" dirty="0"/>
-              <a:t> </a:t>
-            </a:r>
-            <a:r>
-              <a:rPr lang="en-US" sz="1200" dirty="0" err="1"/>
-              <a:t>en</a:t>
-            </a:r>
-            <a:r>
-              <a:rPr lang="en-US" sz="1200" dirty="0"/>
-              <a:t> </a:t>
-            </a:r>
-            <a:r>
-              <a:rPr lang="en-US" sz="1200" dirty="0" err="1"/>
-              <a:t>el</a:t>
-            </a:r>
-            <a:r>
-              <a:rPr lang="en-US" sz="1200" dirty="0"/>
-              <a:t> </a:t>
-            </a:r>
-            <a:r>
-              <a:rPr lang="en-US" sz="1200" dirty="0" err="1"/>
-              <a:t>caso</a:t>
-            </a:r>
-            <a:r>
-              <a:rPr lang="en-US" sz="1200" dirty="0"/>
-              <a:t> anterior </a:t>
-            </a:r>
-            <a:r>
-              <a:rPr lang="en-US" sz="1200" dirty="0" err="1"/>
-              <a:t>que</a:t>
-            </a:r>
-            <a:r>
-              <a:rPr lang="en-US" sz="1200" dirty="0"/>
-              <a:t> </a:t>
-            </a:r>
-            <a:r>
-              <a:rPr lang="en-US" sz="1200" dirty="0" err="1"/>
-              <a:t>teniamos</a:t>
-            </a:r>
-            <a:r>
-              <a:rPr lang="en-US" sz="1200" dirty="0"/>
-              <a:t> un radio de 65 um. Esta </a:t>
-            </a:r>
-            <a:r>
-              <a:rPr lang="en-US" sz="1200" dirty="0" err="1"/>
-              <a:t>diferencia</a:t>
-            </a:r>
-            <a:r>
-              <a:rPr lang="en-US" sz="1200" dirty="0"/>
-              <a:t> </a:t>
-            </a:r>
-            <a:r>
-              <a:rPr lang="en-US" sz="1200" dirty="0" err="1"/>
-              <a:t>puede</a:t>
-            </a:r>
-            <a:r>
-              <a:rPr lang="en-US" sz="1200" dirty="0"/>
-              <a:t> </a:t>
-            </a:r>
-            <a:r>
-              <a:rPr lang="en-US" sz="1200" dirty="0" err="1"/>
-              <a:t>estar</a:t>
-            </a:r>
-            <a:r>
-              <a:rPr lang="en-US" sz="1200" dirty="0"/>
-              <a:t> dada tanto </a:t>
-            </a:r>
-            <a:r>
-              <a:rPr lang="en-US" sz="1200" dirty="0" err="1"/>
-              <a:t>por</a:t>
-            </a:r>
-            <a:r>
-              <a:rPr lang="en-US" sz="1200" dirty="0"/>
-              <a:t> </a:t>
-            </a:r>
-            <a:r>
-              <a:rPr lang="en-US" sz="1200" dirty="0" err="1"/>
-              <a:t>el</a:t>
-            </a:r>
-            <a:r>
-              <a:rPr lang="en-US" sz="1200" dirty="0"/>
-              <a:t> </a:t>
-            </a:r>
-            <a:r>
-              <a:rPr lang="en-US" sz="1200" dirty="0" err="1"/>
-              <a:t>cambio</a:t>
-            </a:r>
-            <a:r>
-              <a:rPr lang="en-US" sz="1200" dirty="0"/>
-              <a:t> de longitude de </a:t>
-            </a:r>
-            <a:r>
-              <a:rPr lang="en-US" sz="1200" dirty="0" err="1"/>
-              <a:t>onda</a:t>
-            </a:r>
-            <a:r>
-              <a:rPr lang="en-US" sz="1200" dirty="0"/>
-              <a:t> </a:t>
-            </a:r>
-            <a:r>
-              <a:rPr lang="en-US" sz="1200" dirty="0" err="1"/>
-              <a:t>como</a:t>
-            </a:r>
-            <a:r>
-              <a:rPr lang="en-US" sz="1200" dirty="0"/>
-              <a:t> de </a:t>
-            </a:r>
-            <a:r>
-              <a:rPr lang="en-US" sz="1200" dirty="0" err="1"/>
-              <a:t>aumentar</a:t>
-            </a:r>
-            <a:r>
-              <a:rPr lang="en-US" sz="1200" dirty="0"/>
-              <a:t> </a:t>
-            </a:r>
-            <a:r>
-              <a:rPr lang="en-US" sz="1200" dirty="0" err="1"/>
-              <a:t>el</a:t>
-            </a:r>
-            <a:r>
-              <a:rPr lang="en-US" sz="1200" dirty="0"/>
-              <a:t> ancho del core. </a:t>
-            </a:r>
-            <a:endParaRPr lang="es-CO" sz="1200" noProof="0" dirty="0">
               <a:latin typeface="Arial" panose="020B0604020202020204" pitchFamily="34" charset="0"/>
               <a:cs typeface="Arial" panose="020B0604020202020204" pitchFamily="34" charset="0"/>
             </a:endParaRPr>
@@ -4470,7 +4134,11 @@
             </a:br>
             <a:r>
               <a:rPr lang="en-US" b="0" dirty="0"/>
-              <a:t>Use the code provided in this section to calculate the safe radius for 0.5 um width deep waveguides at 1.55 um – Silicon On Insulator</a:t>
+              <a:t>Use the code provided in this section to calculate the safe radius for 0.5 um width deep waveguides at 1.55 um – </a:t>
+            </a:r>
+            <a:r>
+              <a:rPr lang="en-US" i="1" dirty="0"/>
+              <a:t>Silicon On Insulator</a:t>
             </a:r>
             <a:br>
               <a:rPr lang="en-US" b="0" dirty="0"/>
@@ -4598,7 +4266,7 @@
         <p:spPr>
           <a:xfrm>
             <a:off x="609600" y="4860334"/>
-            <a:ext cx="11199971" cy="1384995"/>
+            <a:ext cx="11199971" cy="1015663"/>
           </a:xfrm>
           <a:prstGeom prst="rect">
             <a:avLst/>
@@ -4622,61 +4290,40 @@
           <a:p>
             <a:pPr algn="just"/>
             <a:r>
-              <a:rPr lang="es-ES" sz="1200" noProof="0" dirty="0">
+              <a:rPr lang="en-US" sz="1200" noProof="0" dirty="0">
                 <a:latin typeface="Arial" panose="020B0604020202020204" pitchFamily="34" charset="0"/>
                 <a:cs typeface="Arial" panose="020B0604020202020204" pitchFamily="34" charset="0"/>
               </a:rPr>
-              <a:t>En este caso que es el de SOI, vemos que un radio seguro sería alrededor de los 15 </a:t>
-            </a:r>
-            <a:r>
-              <a:rPr lang="es-ES" sz="1200" noProof="0" dirty="0" err="1">
+              <a:t>Finally, for the </a:t>
+            </a:r>
+            <a:r>
+              <a:rPr lang="en-US" sz="1200" b="1" noProof="0" dirty="0">
                 <a:latin typeface="Arial" panose="020B0604020202020204" pitchFamily="34" charset="0"/>
                 <a:cs typeface="Arial" panose="020B0604020202020204" pitchFamily="34" charset="0"/>
               </a:rPr>
-              <a:t>um</a:t>
-            </a:r>
-            <a:r>
-              <a:rPr lang="es-ES" sz="1200" dirty="0">
+              <a:t>SOI</a:t>
+            </a:r>
+            <a:r>
+              <a:rPr lang="en-US" sz="1200" noProof="0" dirty="0">
                 <a:latin typeface="Arial" panose="020B0604020202020204" pitchFamily="34" charset="0"/>
                 <a:cs typeface="Arial" panose="020B0604020202020204" pitchFamily="34" charset="0"/>
               </a:rPr>
-              <a:t>, lo cual es bastante pequeño a comparación de </a:t>
-            </a:r>
-            <a:r>
-              <a:rPr lang="es-ES" sz="1200" dirty="0" err="1">
+              <a:t> case, we observe that a safe radius is around 15 µm, which is significantly smaller compared with the </a:t>
+            </a:r>
+            <a:r>
+              <a:rPr lang="en-US" sz="1200" noProof="0" dirty="0" err="1">
                 <a:latin typeface="Arial" panose="020B0604020202020204" pitchFamily="34" charset="0"/>
                 <a:cs typeface="Arial" panose="020B0604020202020204" pitchFamily="34" charset="0"/>
               </a:rPr>
               <a:t>SiNx</a:t>
             </a:r>
             <a:r>
-              <a:rPr lang="es-ES" sz="1200" dirty="0">
+              <a:rPr lang="en-US" sz="1200" noProof="0" dirty="0">
                 <a:latin typeface="Arial" panose="020B0604020202020204" pitchFamily="34" charset="0"/>
                 <a:cs typeface="Arial" panose="020B0604020202020204" pitchFamily="34" charset="0"/>
               </a:rPr>
-              <a:t> que era a los 65 </a:t>
-            </a:r>
-            <a:r>
-              <a:rPr lang="es-ES" sz="1200" dirty="0" err="1">
-                <a:latin typeface="Arial" panose="020B0604020202020204" pitchFamily="34" charset="0"/>
-                <a:cs typeface="Arial" panose="020B0604020202020204" pitchFamily="34" charset="0"/>
-              </a:rPr>
-              <a:t>um</a:t>
-            </a:r>
-            <a:r>
-              <a:rPr lang="es-ES" sz="1200" dirty="0">
-                <a:latin typeface="Arial" panose="020B0604020202020204" pitchFamily="34" charset="0"/>
-                <a:cs typeface="Arial" panose="020B0604020202020204" pitchFamily="34" charset="0"/>
-              </a:rPr>
-              <a:t>, reduciéndose este radio 4.3 veces. Por lo que el SOI es una tecnología que nos permite hacer curvaturas más pequeñas y a su vez circuitos integrados más pequeños, al poder optimizar mejor las curvaturas, aunque también hay que tener cuidado, porque entre más grande la curvatura, más perdidas se tendrán, aunque también se tienen muchas menos perdidas en cuanto a dB, esto porque al ser una tecnología más pequeña, y ser radios más pequeños, las perdidas de propagación serán menores. </a:t>
-            </a:r>
-            <a:endParaRPr lang="es-CO" sz="1200" noProof="0" dirty="0">
-              <a:latin typeface="Arial" panose="020B0604020202020204" pitchFamily="34" charset="0"/>
-              <a:cs typeface="Arial" panose="020B0604020202020204" pitchFamily="34" charset="0"/>
-            </a:endParaRPr>
-          </a:p>
-          <a:p>
-            <a:pPr algn="just"/>
+              <a:t> case, where the safe radius was about 65 µm. This represents a reduction by a factor of about 4.3. Therefore, SOI technology allows much smaller bending radii and consequently more compact integrated circuits. However, care must still be taken, since larger radii will increase propagation losses. Nevertheless, the total losses in dB remain smaller because the technology itself is more compact and the propagation distances are shorter.</a:t>
+            </a:r>
             <a:endParaRPr lang="es-CO" sz="1200" noProof="0" dirty="0">
               <a:latin typeface="Arial" panose="020B0604020202020204" pitchFamily="34" charset="0"/>
               <a:cs typeface="Arial" panose="020B0604020202020204" pitchFamily="34" charset="0"/>
@@ -7461,7 +7108,31 @@
           <a:lstStyle/>
           <a:p>
             <a:pPr algn="just"/>
-            <a:endParaRPr lang="es-CO" sz="1200" noProof="0" dirty="0">
+            <a:r>
+              <a:rPr lang="en-US" sz="1200" b="1" noProof="0" dirty="0">
+                <a:latin typeface="Arial" panose="020B0604020202020204" pitchFamily="34" charset="0"/>
+                <a:cs typeface="Arial" panose="020B0604020202020204" pitchFamily="34" charset="0"/>
+              </a:rPr>
+              <a:t>Case I (Silicon Nitride): </a:t>
+            </a:r>
+            <a:r>
+              <a:rPr lang="en-US" sz="1200" noProof="0" dirty="0">
+                <a:latin typeface="Arial" panose="020B0604020202020204" pitchFamily="34" charset="0"/>
+                <a:cs typeface="Arial" panose="020B0604020202020204" pitchFamily="34" charset="0"/>
+              </a:rPr>
+              <a:t>We simulated how the effective index changes for different grid resolutions. For</a:t>
+            </a:r>
+            <a:r>
+              <a:rPr lang="en-US" sz="1200" dirty="0">
+                <a:latin typeface="Arial" panose="020B0604020202020204" pitchFamily="34" charset="0"/>
+                <a:cs typeface="Arial" panose="020B0604020202020204" pitchFamily="34" charset="0"/>
+              </a:rPr>
+              <a:t> grid resolution values above 50 and for a value of 20, the effective index values are very similar, meaning that there is not a significant variation between the resulting effective indices. Since several points produce similar results, we analyze how the effective index varies when changing the max grid scaling for grid resolution values of 20, 50, and 60.</a:t>
+            </a:r>
+          </a:p>
+          <a:p>
+            <a:pPr algn="just"/>
+            <a:endParaRPr lang="en-US" sz="1200" dirty="0">
               <a:latin typeface="Arial" panose="020B0604020202020204" pitchFamily="34" charset="0"/>
               <a:cs typeface="Arial" panose="020B0604020202020204" pitchFamily="34" charset="0"/>
             </a:endParaRPr>
@@ -7469,661 +7140,96 @@
           <a:p>
             <a:pPr algn="just"/>
             <a:r>
-              <a:rPr lang="es-CO" sz="1200" noProof="0" dirty="0">
+              <a:rPr lang="en-US" sz="1200" dirty="0">
                 <a:latin typeface="Arial" panose="020B0604020202020204" pitchFamily="34" charset="0"/>
                 <a:cs typeface="Arial" panose="020B0604020202020204" pitchFamily="34" charset="0"/>
               </a:rPr>
-              <a:t>Realizamos la simulación de como cambia el </a:t>
-            </a:r>
-            <a:r>
-              <a:rPr lang="es-CO" sz="1200" noProof="0" dirty="0" err="1">
+              <a:t>For a grid resolution of 20, the graph is not very stable; however, at a max grid scaling of 1.30 the effective index is very similar to the results obtained in the other graphs. For the case of 50, we observe that for three values of max grid scaling the effective index is approximately 1.6054. Finally, for a resolution of 60, the values of max grid scaling produce effective indices closer to the ones previously obtained. </a:t>
+            </a:r>
+          </a:p>
+          <a:p>
+            <a:pPr algn="just"/>
+            <a:endParaRPr lang="en-US" sz="1200" dirty="0">
+              <a:latin typeface="Arial" panose="020B0604020202020204" pitchFamily="34" charset="0"/>
+              <a:cs typeface="Arial" panose="020B0604020202020204" pitchFamily="34" charset="0"/>
+            </a:endParaRPr>
+          </a:p>
+          <a:p>
+            <a:pPr algn="just"/>
+            <a:r>
+              <a:rPr lang="en-US" sz="1200" dirty="0">
                 <a:latin typeface="Arial" panose="020B0604020202020204" pitchFamily="34" charset="0"/>
                 <a:cs typeface="Arial" panose="020B0604020202020204" pitchFamily="34" charset="0"/>
               </a:rPr>
-              <a:t>indice</a:t>
-            </a:r>
-            <a:r>
-              <a:rPr lang="es-CO" sz="1200" noProof="0" dirty="0">
-                <a:latin typeface="Arial" panose="020B0604020202020204" pitchFamily="34" charset="0"/>
-                <a:cs typeface="Arial" panose="020B0604020202020204" pitchFamily="34" charset="0"/>
-              </a:rPr>
-              <a:t> efectivo a diferentes </a:t>
-            </a:r>
-            <a:r>
-              <a:rPr lang="es-CO" sz="1200" noProof="0" dirty="0" err="1">
-                <a:latin typeface="Arial" panose="020B0604020202020204" pitchFamily="34" charset="0"/>
-                <a:cs typeface="Arial" panose="020B0604020202020204" pitchFamily="34" charset="0"/>
-              </a:rPr>
-              <a:t>grid</a:t>
-            </a:r>
-            <a:r>
-              <a:rPr lang="es-CO" sz="1200" noProof="0" dirty="0">
-                <a:latin typeface="Arial" panose="020B0604020202020204" pitchFamily="34" charset="0"/>
-                <a:cs typeface="Arial" panose="020B0604020202020204" pitchFamily="34" charset="0"/>
-              </a:rPr>
-              <a:t> </a:t>
-            </a:r>
-            <a:r>
-              <a:rPr lang="es-CO" sz="1200" noProof="0" dirty="0" err="1">
-                <a:latin typeface="Arial" panose="020B0604020202020204" pitchFamily="34" charset="0"/>
-                <a:cs typeface="Arial" panose="020B0604020202020204" pitchFamily="34" charset="0"/>
-              </a:rPr>
-              <a:t>resolutions</a:t>
-            </a:r>
-            <a:r>
-              <a:rPr lang="es-CO" sz="1200" noProof="0" dirty="0">
-                <a:latin typeface="Arial" panose="020B0604020202020204" pitchFamily="34" charset="0"/>
-                <a:cs typeface="Arial" panose="020B0604020202020204" pitchFamily="34" charset="0"/>
-              </a:rPr>
-              <a:t>, para el caso de la </a:t>
-            </a:r>
-            <a:r>
-              <a:rPr lang="es-CO" sz="1200" noProof="0" dirty="0" err="1">
-                <a:latin typeface="Arial" panose="020B0604020202020204" pitchFamily="34" charset="0"/>
-                <a:cs typeface="Arial" panose="020B0604020202020204" pitchFamily="34" charset="0"/>
-              </a:rPr>
-              <a:t>deep</a:t>
-            </a:r>
-            <a:r>
-              <a:rPr lang="es-CO" sz="1200" noProof="0" dirty="0">
-                <a:latin typeface="Arial" panose="020B0604020202020204" pitchFamily="34" charset="0"/>
-                <a:cs typeface="Arial" panose="020B0604020202020204" pitchFamily="34" charset="0"/>
-              </a:rPr>
-              <a:t> </a:t>
-            </a:r>
-            <a:r>
-              <a:rPr lang="es-CO" sz="1200" noProof="0" dirty="0" err="1">
-                <a:latin typeface="Arial" panose="020B0604020202020204" pitchFamily="34" charset="0"/>
-                <a:cs typeface="Arial" panose="020B0604020202020204" pitchFamily="34" charset="0"/>
-              </a:rPr>
-              <a:t>waveguide</a:t>
-            </a:r>
-            <a:r>
-              <a:rPr lang="es-CO" sz="1200" noProof="0" dirty="0">
-                <a:latin typeface="Arial" panose="020B0604020202020204" pitchFamily="34" charset="0"/>
-                <a:cs typeface="Arial" panose="020B0604020202020204" pitchFamily="34" charset="0"/>
-              </a:rPr>
-              <a:t> para valores superiores a 50 de </a:t>
-            </a:r>
-            <a:r>
-              <a:rPr lang="es-CO" sz="1200" noProof="0" dirty="0" err="1">
-                <a:latin typeface="Arial" panose="020B0604020202020204" pitchFamily="34" charset="0"/>
-                <a:cs typeface="Arial" panose="020B0604020202020204" pitchFamily="34" charset="0"/>
-              </a:rPr>
-              <a:t>grid</a:t>
-            </a:r>
-            <a:r>
-              <a:rPr lang="es-CO" sz="1200" noProof="0" dirty="0">
-                <a:latin typeface="Arial" panose="020B0604020202020204" pitchFamily="34" charset="0"/>
-                <a:cs typeface="Arial" panose="020B0604020202020204" pitchFamily="34" charset="0"/>
-              </a:rPr>
-              <a:t> </a:t>
-            </a:r>
-            <a:r>
-              <a:rPr lang="es-CO" sz="1200" noProof="0" dirty="0" err="1">
-                <a:latin typeface="Arial" panose="020B0604020202020204" pitchFamily="34" charset="0"/>
-                <a:cs typeface="Arial" panose="020B0604020202020204" pitchFamily="34" charset="0"/>
-              </a:rPr>
-              <a:t>resolution</a:t>
-            </a:r>
-            <a:r>
-              <a:rPr lang="es-CO" sz="1200" noProof="0" dirty="0">
-                <a:latin typeface="Arial" panose="020B0604020202020204" pitchFamily="34" charset="0"/>
-                <a:cs typeface="Arial" panose="020B0604020202020204" pitchFamily="34" charset="0"/>
-              </a:rPr>
-              <a:t>   y al valor de 20, se tienen valores muy similares, es decir que no hay tanta variación entre los </a:t>
-            </a:r>
-            <a:r>
-              <a:rPr lang="es-CO" sz="1200" noProof="0" dirty="0" err="1">
-                <a:latin typeface="Arial" panose="020B0604020202020204" pitchFamily="34" charset="0"/>
-                <a:cs typeface="Arial" panose="020B0604020202020204" pitchFamily="34" charset="0"/>
-              </a:rPr>
-              <a:t>indices</a:t>
-            </a:r>
-            <a:r>
-              <a:rPr lang="es-CO" sz="1200" noProof="0" dirty="0">
-                <a:latin typeface="Arial" panose="020B0604020202020204" pitchFamily="34" charset="0"/>
-                <a:cs typeface="Arial" panose="020B0604020202020204" pitchFamily="34" charset="0"/>
-              </a:rPr>
-              <a:t> efectivos que da como resultado. Como </a:t>
-            </a:r>
-            <a:r>
-              <a:rPr lang="es-CO" sz="1200" noProof="0" dirty="0" err="1">
-                <a:latin typeface="Arial" panose="020B0604020202020204" pitchFamily="34" charset="0"/>
-                <a:cs typeface="Arial" panose="020B0604020202020204" pitchFamily="34" charset="0"/>
-              </a:rPr>
-              <a:t>temenos</a:t>
-            </a:r>
-            <a:r>
-              <a:rPr lang="es-CO" sz="1200" noProof="0" dirty="0">
-                <a:latin typeface="Arial" panose="020B0604020202020204" pitchFamily="34" charset="0"/>
-                <a:cs typeface="Arial" panose="020B0604020202020204" pitchFamily="34" charset="0"/>
-              </a:rPr>
-              <a:t> varios puntos que dan un resultado similar vamos a ver como varia el </a:t>
-            </a:r>
-            <a:r>
-              <a:rPr lang="es-CO" sz="1200" noProof="0" dirty="0" err="1">
-                <a:latin typeface="Arial" panose="020B0604020202020204" pitchFamily="34" charset="0"/>
-                <a:cs typeface="Arial" panose="020B0604020202020204" pitchFamily="34" charset="0"/>
-              </a:rPr>
-              <a:t>indice</a:t>
-            </a:r>
-            <a:r>
-              <a:rPr lang="es-CO" sz="1200" noProof="0" dirty="0">
-                <a:latin typeface="Arial" panose="020B0604020202020204" pitchFamily="34" charset="0"/>
-                <a:cs typeface="Arial" panose="020B0604020202020204" pitchFamily="34" charset="0"/>
-              </a:rPr>
-              <a:t> efectivo si variamos el </a:t>
-            </a:r>
-            <a:r>
-              <a:rPr lang="es-CO" sz="1200" noProof="0" dirty="0" err="1">
-                <a:latin typeface="Arial" panose="020B0604020202020204" pitchFamily="34" charset="0"/>
-                <a:cs typeface="Arial" panose="020B0604020202020204" pitchFamily="34" charset="0"/>
-              </a:rPr>
-              <a:t>max</a:t>
-            </a:r>
-            <a:r>
-              <a:rPr lang="es-CO" sz="1200" noProof="0" dirty="0">
-                <a:latin typeface="Arial" panose="020B0604020202020204" pitchFamily="34" charset="0"/>
-                <a:cs typeface="Arial" panose="020B0604020202020204" pitchFamily="34" charset="0"/>
-              </a:rPr>
-              <a:t> </a:t>
-            </a:r>
-            <a:r>
-              <a:rPr lang="es-CO" sz="1200" noProof="0" dirty="0" err="1">
-                <a:latin typeface="Arial" panose="020B0604020202020204" pitchFamily="34" charset="0"/>
-                <a:cs typeface="Arial" panose="020B0604020202020204" pitchFamily="34" charset="0"/>
-              </a:rPr>
-              <a:t>grid</a:t>
-            </a:r>
-            <a:r>
-              <a:rPr lang="es-CO" sz="1200" noProof="0" dirty="0">
-                <a:latin typeface="Arial" panose="020B0604020202020204" pitchFamily="34" charset="0"/>
-                <a:cs typeface="Arial" panose="020B0604020202020204" pitchFamily="34" charset="0"/>
-              </a:rPr>
-              <a:t> </a:t>
-            </a:r>
-            <a:r>
-              <a:rPr lang="es-CO" sz="1200" noProof="0" dirty="0" err="1">
-                <a:latin typeface="Arial" panose="020B0604020202020204" pitchFamily="34" charset="0"/>
-                <a:cs typeface="Arial" panose="020B0604020202020204" pitchFamily="34" charset="0"/>
-              </a:rPr>
-              <a:t>scaling</a:t>
-            </a:r>
-            <a:r>
-              <a:rPr lang="es-CO" sz="1200" noProof="0" dirty="0">
-                <a:latin typeface="Arial" panose="020B0604020202020204" pitchFamily="34" charset="0"/>
-                <a:cs typeface="Arial" panose="020B0604020202020204" pitchFamily="34" charset="0"/>
-              </a:rPr>
-              <a:t> para valore de 20, 50 y 60 de </a:t>
-            </a:r>
-            <a:r>
-              <a:rPr lang="es-CO" sz="1200" noProof="0" dirty="0" err="1">
-                <a:latin typeface="Arial" panose="020B0604020202020204" pitchFamily="34" charset="0"/>
-                <a:cs typeface="Arial" panose="020B0604020202020204" pitchFamily="34" charset="0"/>
-              </a:rPr>
-              <a:t>grid</a:t>
-            </a:r>
-            <a:r>
-              <a:rPr lang="es-CO" sz="1200" noProof="0" dirty="0">
-                <a:latin typeface="Arial" panose="020B0604020202020204" pitchFamily="34" charset="0"/>
-                <a:cs typeface="Arial" panose="020B0604020202020204" pitchFamily="34" charset="0"/>
-              </a:rPr>
-              <a:t> </a:t>
-            </a:r>
-            <a:r>
-              <a:rPr lang="es-CO" sz="1200" noProof="0" dirty="0" err="1">
-                <a:latin typeface="Arial" panose="020B0604020202020204" pitchFamily="34" charset="0"/>
-                <a:cs typeface="Arial" panose="020B0604020202020204" pitchFamily="34" charset="0"/>
-              </a:rPr>
-              <a:t>resolution</a:t>
-            </a:r>
-            <a:r>
-              <a:rPr lang="es-CO" sz="1200" noProof="0" dirty="0">
-                <a:latin typeface="Arial" panose="020B0604020202020204" pitchFamily="34" charset="0"/>
-                <a:cs typeface="Arial" panose="020B0604020202020204" pitchFamily="34" charset="0"/>
-              </a:rPr>
-              <a:t>.</a:t>
+              <a:t>Considering the computational cost and aiming to reduce the simulation time, the selected parameters are a grid resolution of 20 and a max grid scaling of 1.30, since this configuration produces results very similar to those obtained with a larger number of simulation points. With these parameters, the simulation mesh looks like the one shown in the image, where there are more simulation points (higher resolution) in the regions where the refractive index changes.</a:t>
             </a:r>
           </a:p>
           <a:p>
             <a:pPr algn="just"/>
-            <a:endParaRPr lang="es-CO" sz="1200" noProof="0" dirty="0">
+            <a:endParaRPr lang="en-US" sz="1200" dirty="0">
               <a:latin typeface="Arial" panose="020B0604020202020204" pitchFamily="34" charset="0"/>
               <a:cs typeface="Arial" panose="020B0604020202020204" pitchFamily="34" charset="0"/>
             </a:endParaRPr>
           </a:p>
           <a:p>
             <a:pPr algn="just"/>
-            <a:r>
-              <a:rPr lang="es-CO" sz="1200" noProof="0" dirty="0">
-                <a:latin typeface="Arial" panose="020B0604020202020204" pitchFamily="34" charset="0"/>
-                <a:cs typeface="Arial" panose="020B0604020202020204" pitchFamily="34" charset="0"/>
-              </a:rPr>
-              <a:t>En el caso de 20, vemos que la gráfica no es tan estable, sin embargo en 1.30 el </a:t>
-            </a:r>
-            <a:r>
-              <a:rPr lang="es-CO" sz="1200" noProof="0" dirty="0" err="1">
-                <a:latin typeface="Arial" panose="020B0604020202020204" pitchFamily="34" charset="0"/>
-                <a:cs typeface="Arial" panose="020B0604020202020204" pitchFamily="34" charset="0"/>
-              </a:rPr>
-              <a:t>indice</a:t>
-            </a:r>
-            <a:r>
-              <a:rPr lang="es-CO" sz="1200" noProof="0" dirty="0">
-                <a:latin typeface="Arial" panose="020B0604020202020204" pitchFamily="34" charset="0"/>
-                <a:cs typeface="Arial" panose="020B0604020202020204" pitchFamily="34" charset="0"/>
-              </a:rPr>
-              <a:t> efectivo se parece a los </a:t>
-            </a:r>
-            <a:r>
-              <a:rPr lang="es-CO" sz="1200" noProof="0" dirty="0" err="1">
-                <a:latin typeface="Arial" panose="020B0604020202020204" pitchFamily="34" charset="0"/>
-                <a:cs typeface="Arial" panose="020B0604020202020204" pitchFamily="34" charset="0"/>
-              </a:rPr>
-              <a:t>resulatdos</a:t>
-            </a:r>
-            <a:r>
-              <a:rPr lang="es-CO" sz="1200" noProof="0" dirty="0">
-                <a:latin typeface="Arial" panose="020B0604020202020204" pitchFamily="34" charset="0"/>
-                <a:cs typeface="Arial" panose="020B0604020202020204" pitchFamily="34" charset="0"/>
-              </a:rPr>
-              <a:t> de las otras gráficas. Para el caso de 50 encontramos que en 3 valores de </a:t>
-            </a:r>
-            <a:r>
-              <a:rPr lang="es-CO" sz="1200" noProof="0" dirty="0" err="1">
-                <a:latin typeface="Arial" panose="020B0604020202020204" pitchFamily="34" charset="0"/>
-                <a:cs typeface="Arial" panose="020B0604020202020204" pitchFamily="34" charset="0"/>
-              </a:rPr>
-              <a:t>max</a:t>
-            </a:r>
-            <a:r>
-              <a:rPr lang="es-CO" sz="1200" noProof="0" dirty="0">
-                <a:latin typeface="Arial" panose="020B0604020202020204" pitchFamily="34" charset="0"/>
-                <a:cs typeface="Arial" panose="020B0604020202020204" pitchFamily="34" charset="0"/>
-              </a:rPr>
-              <a:t> </a:t>
-            </a:r>
-            <a:r>
-              <a:rPr lang="es-CO" sz="1200" noProof="0" dirty="0" err="1">
-                <a:latin typeface="Arial" panose="020B0604020202020204" pitchFamily="34" charset="0"/>
-                <a:cs typeface="Arial" panose="020B0604020202020204" pitchFamily="34" charset="0"/>
-              </a:rPr>
-              <a:t>grid</a:t>
-            </a:r>
-            <a:r>
-              <a:rPr lang="es-CO" sz="1200" noProof="0" dirty="0">
-                <a:latin typeface="Arial" panose="020B0604020202020204" pitchFamily="34" charset="0"/>
-                <a:cs typeface="Arial" panose="020B0604020202020204" pitchFamily="34" charset="0"/>
-              </a:rPr>
-              <a:t> </a:t>
-            </a:r>
-            <a:r>
-              <a:rPr lang="es-CO" sz="1200" noProof="0" dirty="0" err="1">
-                <a:latin typeface="Arial" panose="020B0604020202020204" pitchFamily="34" charset="0"/>
-                <a:cs typeface="Arial" panose="020B0604020202020204" pitchFamily="34" charset="0"/>
-              </a:rPr>
-              <a:t>scaling</a:t>
-            </a:r>
-            <a:r>
-              <a:rPr lang="es-CO" sz="1200" noProof="0" dirty="0">
-                <a:latin typeface="Arial" panose="020B0604020202020204" pitchFamily="34" charset="0"/>
-                <a:cs typeface="Arial" panose="020B0604020202020204" pitchFamily="34" charset="0"/>
-              </a:rPr>
-              <a:t> </a:t>
-            </a:r>
-            <a:r>
-              <a:rPr lang="es-CO" sz="1200" noProof="0" dirty="0" err="1">
-                <a:latin typeface="Arial" panose="020B0604020202020204" pitchFamily="34" charset="0"/>
-                <a:cs typeface="Arial" panose="020B0604020202020204" pitchFamily="34" charset="0"/>
-              </a:rPr>
-              <a:t>temenos</a:t>
-            </a:r>
-            <a:r>
-              <a:rPr lang="es-CO" sz="1200" noProof="0" dirty="0">
-                <a:latin typeface="Arial" panose="020B0604020202020204" pitchFamily="34" charset="0"/>
-                <a:cs typeface="Arial" panose="020B0604020202020204" pitchFamily="34" charset="0"/>
-              </a:rPr>
-              <a:t> un </a:t>
-            </a:r>
-            <a:r>
-              <a:rPr lang="es-CO" sz="1200" noProof="0" dirty="0" err="1">
-                <a:latin typeface="Arial" panose="020B0604020202020204" pitchFamily="34" charset="0"/>
-                <a:cs typeface="Arial" panose="020B0604020202020204" pitchFamily="34" charset="0"/>
-              </a:rPr>
-              <a:t>indice</a:t>
-            </a:r>
-            <a:r>
-              <a:rPr lang="es-CO" sz="1200" noProof="0" dirty="0">
-                <a:latin typeface="Arial" panose="020B0604020202020204" pitchFamily="34" charset="0"/>
-                <a:cs typeface="Arial" panose="020B0604020202020204" pitchFamily="34" charset="0"/>
-              </a:rPr>
-              <a:t> efectivo de 1.6054 aproximadamente. Por último, en el caso de 60 de resolución, en ese caso vemos como el </a:t>
-            </a:r>
-            <a:r>
-              <a:rPr lang="es-CO" sz="1200" noProof="0" dirty="0" err="1">
-                <a:latin typeface="Arial" panose="020B0604020202020204" pitchFamily="34" charset="0"/>
-                <a:cs typeface="Arial" panose="020B0604020202020204" pitchFamily="34" charset="0"/>
-              </a:rPr>
-              <a:t>max</a:t>
-            </a:r>
-            <a:r>
-              <a:rPr lang="es-CO" sz="1200" noProof="0" dirty="0">
-                <a:latin typeface="Arial" panose="020B0604020202020204" pitchFamily="34" charset="0"/>
-                <a:cs typeface="Arial" panose="020B0604020202020204" pitchFamily="34" charset="0"/>
-              </a:rPr>
-              <a:t> </a:t>
-            </a:r>
-            <a:r>
-              <a:rPr lang="es-CO" sz="1200" noProof="0" dirty="0" err="1">
-                <a:latin typeface="Arial" panose="020B0604020202020204" pitchFamily="34" charset="0"/>
-                <a:cs typeface="Arial" panose="020B0604020202020204" pitchFamily="34" charset="0"/>
-              </a:rPr>
-              <a:t>grid</a:t>
-            </a:r>
-            <a:r>
-              <a:rPr lang="es-CO" sz="1200" noProof="0" dirty="0">
-                <a:latin typeface="Arial" panose="020B0604020202020204" pitchFamily="34" charset="0"/>
-                <a:cs typeface="Arial" panose="020B0604020202020204" pitchFamily="34" charset="0"/>
-              </a:rPr>
-              <a:t> </a:t>
-            </a:r>
-            <a:r>
-              <a:rPr lang="es-CO" sz="1200" noProof="0" dirty="0" err="1">
-                <a:latin typeface="Arial" panose="020B0604020202020204" pitchFamily="34" charset="0"/>
-                <a:cs typeface="Arial" panose="020B0604020202020204" pitchFamily="34" charset="0"/>
-              </a:rPr>
-              <a:t>resolution</a:t>
-            </a:r>
-            <a:r>
-              <a:rPr lang="es-CO" sz="1200" noProof="0" dirty="0">
-                <a:latin typeface="Arial" panose="020B0604020202020204" pitchFamily="34" charset="0"/>
-                <a:cs typeface="Arial" panose="020B0604020202020204" pitchFamily="34" charset="0"/>
-              </a:rPr>
-              <a:t> tiene valores más parecidos a los que ya </a:t>
-            </a:r>
-            <a:r>
-              <a:rPr lang="es-CO" sz="1200" noProof="0" dirty="0" err="1">
-                <a:latin typeface="Arial" panose="020B0604020202020204" pitchFamily="34" charset="0"/>
-                <a:cs typeface="Arial" panose="020B0604020202020204" pitchFamily="34" charset="0"/>
-              </a:rPr>
-              <a:t>habiamos</a:t>
-            </a:r>
-            <a:r>
-              <a:rPr lang="es-CO" sz="1200" noProof="0" dirty="0">
-                <a:latin typeface="Arial" panose="020B0604020202020204" pitchFamily="34" charset="0"/>
-                <a:cs typeface="Arial" panose="020B0604020202020204" pitchFamily="34" charset="0"/>
-              </a:rPr>
-              <a:t> encontrado de </a:t>
-            </a:r>
-            <a:r>
-              <a:rPr lang="es-CO" sz="1200" noProof="0" dirty="0" err="1">
-                <a:latin typeface="Arial" panose="020B0604020202020204" pitchFamily="34" charset="0"/>
-                <a:cs typeface="Arial" panose="020B0604020202020204" pitchFamily="34" charset="0"/>
-              </a:rPr>
-              <a:t>indice</a:t>
-            </a:r>
-            <a:r>
-              <a:rPr lang="es-CO" sz="1200" noProof="0" dirty="0">
-                <a:latin typeface="Arial" panose="020B0604020202020204" pitchFamily="34" charset="0"/>
-                <a:cs typeface="Arial" panose="020B0604020202020204" pitchFamily="34" charset="0"/>
-              </a:rPr>
-              <a:t> efectivo, viendo que en el </a:t>
-            </a:r>
-            <a:r>
-              <a:rPr lang="es-CO" sz="1200" noProof="0" dirty="0" err="1">
-                <a:latin typeface="Arial" panose="020B0604020202020204" pitchFamily="34" charset="0"/>
-                <a:cs typeface="Arial" panose="020B0604020202020204" pitchFamily="34" charset="0"/>
-              </a:rPr>
-              <a:t>interval</a:t>
-            </a:r>
-            <a:r>
-              <a:rPr lang="es-CO" sz="1200" noProof="0" dirty="0">
-                <a:latin typeface="Arial" panose="020B0604020202020204" pitchFamily="34" charset="0"/>
-                <a:cs typeface="Arial" panose="020B0604020202020204" pitchFamily="34" charset="0"/>
-              </a:rPr>
-              <a:t> de simulación que </a:t>
-            </a:r>
-            <a:r>
-              <a:rPr lang="es-CO" sz="1200" noProof="0" dirty="0" err="1">
-                <a:latin typeface="Arial" panose="020B0604020202020204" pitchFamily="34" charset="0"/>
-                <a:cs typeface="Arial" panose="020B0604020202020204" pitchFamily="34" charset="0"/>
-              </a:rPr>
-              <a:t>temenos</a:t>
-            </a:r>
-            <a:r>
-              <a:rPr lang="es-CO" sz="1200" noProof="0" dirty="0">
-                <a:latin typeface="Arial" panose="020B0604020202020204" pitchFamily="34" charset="0"/>
-                <a:cs typeface="Arial" panose="020B0604020202020204" pitchFamily="34" charset="0"/>
-              </a:rPr>
-              <a:t> solo uno de ellos tiene una variación más grande, mientras que los </a:t>
-            </a:r>
-            <a:r>
-              <a:rPr lang="es-CO" sz="1200" noProof="0" dirty="0" err="1">
-                <a:latin typeface="Arial" panose="020B0604020202020204" pitchFamily="34" charset="0"/>
-                <a:cs typeface="Arial" panose="020B0604020202020204" pitchFamily="34" charset="0"/>
-              </a:rPr>
-              <a:t>demas</a:t>
-            </a:r>
-            <a:r>
-              <a:rPr lang="es-CO" sz="1200" noProof="0" dirty="0">
-                <a:latin typeface="Arial" panose="020B0604020202020204" pitchFamily="34" charset="0"/>
-                <a:cs typeface="Arial" panose="020B0604020202020204" pitchFamily="34" charset="0"/>
-              </a:rPr>
-              <a:t> son más parecidos. </a:t>
-            </a:r>
-          </a:p>
-          <a:p>
-            <a:pPr algn="just"/>
-            <a:endParaRPr lang="es-CO" sz="1200" noProof="0" dirty="0">
+            <a:endParaRPr lang="en-US" sz="1200" dirty="0">
               <a:latin typeface="Arial" panose="020B0604020202020204" pitchFamily="34" charset="0"/>
               <a:cs typeface="Arial" panose="020B0604020202020204" pitchFamily="34" charset="0"/>
             </a:endParaRPr>
           </a:p>
           <a:p>
             <a:pPr algn="just"/>
-            <a:r>
-              <a:rPr lang="es-CO" sz="1200" noProof="0" dirty="0">
-                <a:latin typeface="Arial" panose="020B0604020202020204" pitchFamily="34" charset="0"/>
-                <a:cs typeface="Arial" panose="020B0604020202020204" pitchFamily="34" charset="0"/>
-              </a:rPr>
-              <a:t>Debido al costo computacional y a que queremos </a:t>
-            </a:r>
+            <a:endParaRPr lang="en-US" sz="1200" dirty="0">
+              <a:latin typeface="Arial" panose="020B0604020202020204" pitchFamily="34" charset="0"/>
+              <a:cs typeface="Arial" panose="020B0604020202020204" pitchFamily="34" charset="0"/>
+            </a:endParaRPr>
           </a:p>
           <a:p>
             <a:pPr algn="just"/>
-            <a:r>
-              <a:rPr lang="es-CO" sz="1200" noProof="0" dirty="0">
-                <a:latin typeface="Arial" panose="020B0604020202020204" pitchFamily="34" charset="0"/>
-                <a:cs typeface="Arial" panose="020B0604020202020204" pitchFamily="34" charset="0"/>
-              </a:rPr>
-              <a:t>tener el menor tiempo de simulación voy a escoger </a:t>
-            </a:r>
+            <a:endParaRPr lang="en-US" sz="1200" dirty="0">
+              <a:latin typeface="Arial" panose="020B0604020202020204" pitchFamily="34" charset="0"/>
+              <a:cs typeface="Arial" panose="020B0604020202020204" pitchFamily="34" charset="0"/>
+            </a:endParaRPr>
           </a:p>
           <a:p>
             <a:pPr algn="just"/>
-            <a:r>
-              <a:rPr lang="es-CO" sz="1200" noProof="0" dirty="0">
-                <a:latin typeface="Arial" panose="020B0604020202020204" pitchFamily="34" charset="0"/>
-                <a:cs typeface="Arial" panose="020B0604020202020204" pitchFamily="34" charset="0"/>
-              </a:rPr>
-              <a:t>como parámetros el </a:t>
-            </a:r>
-            <a:r>
-              <a:rPr lang="es-CO" sz="1200" noProof="0" dirty="0" err="1">
-                <a:latin typeface="Arial" panose="020B0604020202020204" pitchFamily="34" charset="0"/>
-                <a:cs typeface="Arial" panose="020B0604020202020204" pitchFamily="34" charset="0"/>
-              </a:rPr>
-              <a:t>grid</a:t>
-            </a:r>
-            <a:r>
-              <a:rPr lang="es-CO" sz="1200" noProof="0" dirty="0">
-                <a:latin typeface="Arial" panose="020B0604020202020204" pitchFamily="34" charset="0"/>
-                <a:cs typeface="Arial" panose="020B0604020202020204" pitchFamily="34" charset="0"/>
-              </a:rPr>
-              <a:t> </a:t>
-            </a:r>
-            <a:r>
-              <a:rPr lang="es-CO" sz="1200" noProof="0" dirty="0" err="1">
-                <a:latin typeface="Arial" panose="020B0604020202020204" pitchFamily="34" charset="0"/>
-                <a:cs typeface="Arial" panose="020B0604020202020204" pitchFamily="34" charset="0"/>
-              </a:rPr>
-              <a:t>resolution</a:t>
-            </a:r>
-            <a:r>
-              <a:rPr lang="es-CO" sz="1200" noProof="0" dirty="0">
-                <a:latin typeface="Arial" panose="020B0604020202020204" pitchFamily="34" charset="0"/>
-                <a:cs typeface="Arial" panose="020B0604020202020204" pitchFamily="34" charset="0"/>
-              </a:rPr>
-              <a:t> igual a 20 y el </a:t>
-            </a:r>
+            <a:endParaRPr lang="en-US" sz="1200" dirty="0">
+              <a:latin typeface="Arial" panose="020B0604020202020204" pitchFamily="34" charset="0"/>
+              <a:cs typeface="Arial" panose="020B0604020202020204" pitchFamily="34" charset="0"/>
+            </a:endParaRPr>
           </a:p>
           <a:p>
             <a:pPr algn="just"/>
-            <a:r>
-              <a:rPr lang="es-CO" sz="1200" noProof="0" dirty="0" err="1">
-                <a:latin typeface="Arial" panose="020B0604020202020204" pitchFamily="34" charset="0"/>
-                <a:cs typeface="Arial" panose="020B0604020202020204" pitchFamily="34" charset="0"/>
-              </a:rPr>
-              <a:t>max</a:t>
-            </a:r>
-            <a:r>
-              <a:rPr lang="es-CO" sz="1200" noProof="0" dirty="0">
-                <a:latin typeface="Arial" panose="020B0604020202020204" pitchFamily="34" charset="0"/>
-                <a:cs typeface="Arial" panose="020B0604020202020204" pitchFamily="34" charset="0"/>
-              </a:rPr>
-              <a:t> </a:t>
-            </a:r>
-            <a:r>
-              <a:rPr lang="es-CO" sz="1200" noProof="0" dirty="0" err="1">
-                <a:latin typeface="Arial" panose="020B0604020202020204" pitchFamily="34" charset="0"/>
-                <a:cs typeface="Arial" panose="020B0604020202020204" pitchFamily="34" charset="0"/>
-              </a:rPr>
-              <a:t>grid</a:t>
-            </a:r>
-            <a:r>
-              <a:rPr lang="es-CO" sz="1200" noProof="0" dirty="0">
-                <a:latin typeface="Arial" panose="020B0604020202020204" pitchFamily="34" charset="0"/>
-                <a:cs typeface="Arial" panose="020B0604020202020204" pitchFamily="34" charset="0"/>
-              </a:rPr>
-              <a:t> </a:t>
-            </a:r>
-            <a:r>
-              <a:rPr lang="es-CO" sz="1200" noProof="0" dirty="0" err="1">
-                <a:latin typeface="Arial" panose="020B0604020202020204" pitchFamily="34" charset="0"/>
-                <a:cs typeface="Arial" panose="020B0604020202020204" pitchFamily="34" charset="0"/>
-              </a:rPr>
-              <a:t>scaling</a:t>
-            </a:r>
-            <a:r>
-              <a:rPr lang="es-CO" sz="1200" noProof="0" dirty="0">
-                <a:latin typeface="Arial" panose="020B0604020202020204" pitchFamily="34" charset="0"/>
-                <a:cs typeface="Arial" panose="020B0604020202020204" pitchFamily="34" charset="0"/>
-              </a:rPr>
-              <a:t> de 1.30, ya que tiene un resultado </a:t>
-            </a:r>
+            <a:endParaRPr lang="en-US" sz="1200" dirty="0">
+              <a:latin typeface="Arial" panose="020B0604020202020204" pitchFamily="34" charset="0"/>
+              <a:cs typeface="Arial" panose="020B0604020202020204" pitchFamily="34" charset="0"/>
+            </a:endParaRPr>
           </a:p>
           <a:p>
             <a:pPr algn="just"/>
-            <a:r>
-              <a:rPr lang="es-CO" sz="1200" noProof="0" dirty="0">
-                <a:latin typeface="Arial" panose="020B0604020202020204" pitchFamily="34" charset="0"/>
-                <a:cs typeface="Arial" panose="020B0604020202020204" pitchFamily="34" charset="0"/>
-              </a:rPr>
-              <a:t>muy similar a los que tienen mayor número de </a:t>
-            </a:r>
+            <a:endParaRPr lang="en-US" sz="1200" dirty="0">
+              <a:latin typeface="Arial" panose="020B0604020202020204" pitchFamily="34" charset="0"/>
+              <a:cs typeface="Arial" panose="020B0604020202020204" pitchFamily="34" charset="0"/>
+            </a:endParaRPr>
           </a:p>
           <a:p>
             <a:pPr algn="just"/>
-            <a:r>
-              <a:rPr lang="es-CO" sz="1200" noProof="0" dirty="0">
-                <a:latin typeface="Arial" panose="020B0604020202020204" pitchFamily="34" charset="0"/>
-                <a:cs typeface="Arial" panose="020B0604020202020204" pitchFamily="34" charset="0"/>
-              </a:rPr>
-              <a:t>puntos de </a:t>
-            </a:r>
-            <a:r>
-              <a:rPr lang="es-CO" sz="1200" noProof="0" dirty="0" err="1">
-                <a:latin typeface="Arial" panose="020B0604020202020204" pitchFamily="34" charset="0"/>
-                <a:cs typeface="Arial" panose="020B0604020202020204" pitchFamily="34" charset="0"/>
-              </a:rPr>
-              <a:t>simuación</a:t>
-            </a:r>
-            <a:r>
-              <a:rPr lang="es-CO" sz="1200" noProof="0" dirty="0">
-                <a:latin typeface="Arial" panose="020B0604020202020204" pitchFamily="34" charset="0"/>
-                <a:cs typeface="Arial" panose="020B0604020202020204" pitchFamily="34" charset="0"/>
-              </a:rPr>
-              <a:t>. Con estos parámetros </a:t>
-            </a:r>
+            <a:endParaRPr lang="en-US" sz="1200" dirty="0">
+              <a:latin typeface="Arial" panose="020B0604020202020204" pitchFamily="34" charset="0"/>
+              <a:cs typeface="Arial" panose="020B0604020202020204" pitchFamily="34" charset="0"/>
+            </a:endParaRPr>
           </a:p>
           <a:p>
             <a:pPr algn="just"/>
-            <a:r>
-              <a:rPr lang="es-CO" sz="1200" noProof="0" dirty="0">
-                <a:latin typeface="Arial" panose="020B0604020202020204" pitchFamily="34" charset="0"/>
-                <a:cs typeface="Arial" panose="020B0604020202020204" pitchFamily="34" charset="0"/>
-              </a:rPr>
-              <a:t>tendremos una malla de simulación como la </a:t>
-            </a:r>
+            <a:endParaRPr lang="en-US" sz="1200" dirty="0">
+              <a:latin typeface="Arial" panose="020B0604020202020204" pitchFamily="34" charset="0"/>
+              <a:cs typeface="Arial" panose="020B0604020202020204" pitchFamily="34" charset="0"/>
+            </a:endParaRPr>
           </a:p>
           <a:p>
             <a:pPr algn="just"/>
-            <a:r>
-              <a:rPr lang="es-CO" sz="1200" noProof="0" dirty="0">
-                <a:latin typeface="Arial" panose="020B0604020202020204" pitchFamily="34" charset="0"/>
-                <a:cs typeface="Arial" panose="020B0604020202020204" pitchFamily="34" charset="0"/>
-              </a:rPr>
-              <a:t>que se observa en la imagen, en donde </a:t>
-            </a:r>
-          </a:p>
-          <a:p>
-            <a:pPr algn="just"/>
-            <a:r>
-              <a:rPr lang="es-CO" sz="1200" noProof="0" dirty="0">
-                <a:latin typeface="Arial" panose="020B0604020202020204" pitchFamily="34" charset="0"/>
-                <a:cs typeface="Arial" panose="020B0604020202020204" pitchFamily="34" charset="0"/>
-              </a:rPr>
-              <a:t>habrán más puntos de simulación, es decir, </a:t>
-            </a:r>
-          </a:p>
-          <a:p>
-            <a:pPr algn="just"/>
-            <a:r>
-              <a:rPr lang="es-CO" sz="1200" noProof="0" dirty="0">
-                <a:latin typeface="Arial" panose="020B0604020202020204" pitchFamily="34" charset="0"/>
-                <a:cs typeface="Arial" panose="020B0604020202020204" pitchFamily="34" charset="0"/>
-              </a:rPr>
-              <a:t>mayor resolución, cuando hay cambios de </a:t>
-            </a:r>
-            <a:r>
-              <a:rPr lang="es-CO" sz="1200" noProof="0" dirty="0" err="1">
-                <a:latin typeface="Arial" panose="020B0604020202020204" pitchFamily="34" charset="0"/>
-                <a:cs typeface="Arial" panose="020B0604020202020204" pitchFamily="34" charset="0"/>
-              </a:rPr>
-              <a:t>indice</a:t>
-            </a:r>
-            <a:r>
-              <a:rPr lang="es-CO" sz="1200" noProof="0" dirty="0">
-                <a:latin typeface="Arial" panose="020B0604020202020204" pitchFamily="34" charset="0"/>
-                <a:cs typeface="Arial" panose="020B0604020202020204" pitchFamily="34" charset="0"/>
-              </a:rPr>
-              <a:t> </a:t>
-            </a:r>
-          </a:p>
-          <a:p>
-            <a:pPr algn="just"/>
-            <a:r>
-              <a:rPr lang="es-CO" sz="1200" noProof="0" dirty="0">
-                <a:latin typeface="Arial" panose="020B0604020202020204" pitchFamily="34" charset="0"/>
-                <a:cs typeface="Arial" panose="020B0604020202020204" pitchFamily="34" charset="0"/>
-              </a:rPr>
-              <a:t>de refracción. </a:t>
-            </a:r>
-          </a:p>
-          <a:p>
-            <a:pPr algn="just"/>
-            <a:endParaRPr lang="es-CO" sz="1200" noProof="0" dirty="0">
+            <a:endParaRPr lang="en-US" sz="1200" dirty="0">
               <a:latin typeface="Arial" panose="020B0604020202020204" pitchFamily="34" charset="0"/>
               <a:cs typeface="Arial" panose="020B0604020202020204" pitchFamily="34" charset="0"/>
             </a:endParaRPr>
@@ -8219,8 +7325,8 @@
         </p:blipFill>
         <p:spPr>
           <a:xfrm>
-            <a:off x="8610600" y="3435927"/>
-            <a:ext cx="3200241" cy="2387481"/>
+            <a:off x="6705600" y="4009804"/>
+            <a:ext cx="2683209" cy="2001759"/>
           </a:xfrm>
           <a:prstGeom prst="rect">
             <a:avLst/>
@@ -8359,21 +7465,25 @@
             </a:r>
             <a:r>
               <a:rPr lang="es-CO" b="0" noProof="0" dirty="0"/>
-              <a:t> 1.55 µm.  Silicon </a:t>
-            </a:r>
-            <a:r>
-              <a:rPr lang="es-CO" b="0" noProof="0" dirty="0" err="1"/>
+              <a:t> 1.55 µm.  </a:t>
+            </a:r>
+            <a:r>
+              <a:rPr lang="es-CO" noProof="0" dirty="0"/>
+              <a:t>Silicon </a:t>
+            </a:r>
+            <a:r>
+              <a:rPr lang="es-CO" noProof="0" dirty="0" err="1"/>
               <a:t>On</a:t>
             </a:r>
             <a:r>
-              <a:rPr lang="es-CO" b="0" noProof="0" dirty="0"/>
+              <a:rPr lang="es-CO" noProof="0" dirty="0"/>
               <a:t> </a:t>
             </a:r>
             <a:r>
-              <a:rPr lang="es-CO" b="0" noProof="0" dirty="0" err="1"/>
+              <a:rPr lang="es-CO" noProof="0" dirty="0" err="1"/>
               <a:t>Insulator</a:t>
             </a:r>
-            <a:endParaRPr lang="es-CO" sz="2500" b="0" noProof="0" dirty="0">
+            <a:endParaRPr lang="es-CO" sz="2500" noProof="0" dirty="0">
               <a:latin typeface="+mj-lt"/>
               <a:cs typeface="Lucida Sans"/>
             </a:endParaRPr>
@@ -8576,18 +7686,39 @@
           <a:p>
             <a:pPr algn="just"/>
             <a:r>
-              <a:rPr lang="es-CO" sz="1200" noProof="0" dirty="0">
+              <a:rPr lang="es-CO" sz="1200" b="1" noProof="0" dirty="0">
                 <a:latin typeface="Arial" panose="020B0604020202020204" pitchFamily="34" charset="0"/>
                 <a:cs typeface="Arial" panose="020B0604020202020204" pitchFamily="34" charset="0"/>
               </a:rPr>
-              <a:t>Ahora, en el caso de </a:t>
-            </a:r>
-            <a:r>
-              <a:rPr lang="es-CO" sz="1200" noProof="0" dirty="0" err="1">
+              <a:t>Case II (Silicon </a:t>
+            </a:r>
+            <a:r>
+              <a:rPr lang="es-CO" sz="1200" b="1" noProof="0" dirty="0" err="1">
                 <a:latin typeface="Arial" panose="020B0604020202020204" pitchFamily="34" charset="0"/>
                 <a:cs typeface="Arial" panose="020B0604020202020204" pitchFamily="34" charset="0"/>
               </a:rPr>
-              <a:t>silicon</a:t>
+              <a:t>on</a:t>
+            </a:r>
+            <a:r>
+              <a:rPr lang="es-CO" sz="1200" b="1" noProof="0" dirty="0">
+                <a:latin typeface="Arial" panose="020B0604020202020204" pitchFamily="34" charset="0"/>
+                <a:cs typeface="Arial" panose="020B0604020202020204" pitchFamily="34" charset="0"/>
+              </a:rPr>
+              <a:t> </a:t>
+            </a:r>
+            <a:r>
+              <a:rPr lang="es-CO" sz="1200" b="1" noProof="0" dirty="0" err="1">
+                <a:latin typeface="Arial" panose="020B0604020202020204" pitchFamily="34" charset="0"/>
+                <a:cs typeface="Arial" panose="020B0604020202020204" pitchFamily="34" charset="0"/>
+              </a:rPr>
+              <a:t>Insulator</a:t>
+            </a:r>
+            <a:r>
+              <a:rPr lang="es-CO" sz="1200" b="1" noProof="0" dirty="0">
+                <a:latin typeface="Arial" panose="020B0604020202020204" pitchFamily="34" charset="0"/>
+                <a:cs typeface="Arial" panose="020B0604020202020204" pitchFamily="34" charset="0"/>
+              </a:rPr>
+              <a:t>):</a:t>
             </a:r>
             <a:r>
               <a:rPr lang="es-CO" sz="1200" noProof="0" dirty="0">
@@ -8597,334 +7728,103 @@
               <a:t> </a:t>
             </a:r>
             <a:r>
-              <a:rPr lang="es-CO" sz="1200" noProof="0" dirty="0" err="1">
+              <a:rPr lang="en-US" sz="1200" dirty="0">
                 <a:latin typeface="Arial" panose="020B0604020202020204" pitchFamily="34" charset="0"/>
                 <a:cs typeface="Arial" panose="020B0604020202020204" pitchFamily="34" charset="0"/>
               </a:rPr>
-              <a:t>on</a:t>
-            </a:r>
-            <a:r>
-              <a:rPr lang="es-CO" sz="1200" noProof="0" dirty="0">
+              <a:t>W</a:t>
+            </a:r>
+            <a:r>
+              <a:rPr lang="en-US" sz="1200" noProof="0" dirty="0">
                 <a:latin typeface="Arial" panose="020B0604020202020204" pitchFamily="34" charset="0"/>
                 <a:cs typeface="Arial" panose="020B0604020202020204" pitchFamily="34" charset="0"/>
               </a:rPr>
-              <a:t> </a:t>
-            </a:r>
-            <a:r>
-              <a:rPr lang="es-CO" sz="1200" noProof="0" dirty="0" err="1">
+              <a:t>e observe that for values of 20 and from 40 to 70 the effective indices are very similar. As in the previous case, three grid resolution values were selected in order to vary the max grid scaling and determine which values better suit this waveguide. The chosen grid resolutions were 20, 40, and 50.</a:t>
+            </a:r>
+          </a:p>
+          <a:p>
+            <a:pPr algn="just"/>
+            <a:endParaRPr lang="en-US" sz="1200" dirty="0">
+              <a:latin typeface="Arial" panose="020B0604020202020204" pitchFamily="34" charset="0"/>
+              <a:cs typeface="Arial" panose="020B0604020202020204" pitchFamily="34" charset="0"/>
+            </a:endParaRPr>
+          </a:p>
+          <a:p>
+            <a:pPr algn="just"/>
+            <a:r>
+              <a:rPr lang="en-US" sz="1200" noProof="0" dirty="0">
                 <a:latin typeface="Arial" panose="020B0604020202020204" pitchFamily="34" charset="0"/>
                 <a:cs typeface="Arial" panose="020B0604020202020204" pitchFamily="34" charset="0"/>
               </a:rPr>
-              <a:t>insulator</a:t>
-            </a:r>
-            <a:r>
-              <a:rPr lang="es-CO" sz="1200" noProof="0" dirty="0">
+              <a:t>For a grid resolution of 20, we obtain almost the same effective index across most of the selected range, whereas for higher resolutions this is not always the case. </a:t>
+            </a:r>
+            <a:r>
+              <a:rPr lang="en-US" sz="1200" dirty="0">
                 <a:latin typeface="Arial" panose="020B0604020202020204" pitchFamily="34" charset="0"/>
                 <a:cs typeface="Arial" panose="020B0604020202020204" pitchFamily="34" charset="0"/>
               </a:rPr>
-              <a:t>, vemos como para valores de 2 y de 40 a 70 tenemos índices efectivos muy parecidos. Como en el caso anterior, se </a:t>
-            </a:r>
-            <a:r>
-              <a:rPr lang="es-CO" sz="1200" noProof="0" dirty="0" err="1">
+              <a:t>F</a:t>
+            </a:r>
+            <a:r>
+              <a:rPr lang="en-US" sz="1200" noProof="0" dirty="0">
                 <a:latin typeface="Arial" panose="020B0604020202020204" pitchFamily="34" charset="0"/>
                 <a:cs typeface="Arial" panose="020B0604020202020204" pitchFamily="34" charset="0"/>
               </a:rPr>
-              <a:t>selecionaron</a:t>
-            </a:r>
-            <a:r>
-              <a:rPr lang="es-CO" sz="1200" noProof="0" dirty="0">
+              <a:t>or a grid resolution of 40 and 50, we also obtain similar values of the refractive index; however, </a:t>
+            </a:r>
+            <a:r>
+              <a:rPr lang="en-US" sz="1200" dirty="0">
                 <a:latin typeface="Arial" panose="020B0604020202020204" pitchFamily="34" charset="0"/>
                 <a:cs typeface="Arial" panose="020B0604020202020204" pitchFamily="34" charset="0"/>
               </a:rPr>
-              <a:t> 3 </a:t>
-            </a:r>
-            <a:r>
-              <a:rPr lang="es-CO" sz="1200" noProof="0" dirty="0" err="1">
+              <a:t>c</a:t>
+            </a:r>
+            <a:r>
+              <a:rPr lang="en-US" sz="1200" noProof="0" dirty="0" err="1">
                 <a:latin typeface="Arial" panose="020B0604020202020204" pitchFamily="34" charset="0"/>
                 <a:cs typeface="Arial" panose="020B0604020202020204" pitchFamily="34" charset="0"/>
               </a:rPr>
-              <a:t>valors</a:t>
-            </a:r>
-            <a:r>
-              <a:rPr lang="es-CO" sz="1200" noProof="0" dirty="0">
+              <a:t>onsidering</a:t>
+            </a:r>
+            <a:r>
+              <a:rPr lang="en-US" sz="1200" noProof="0" dirty="0">
                 <a:latin typeface="Arial" panose="020B0604020202020204" pitchFamily="34" charset="0"/>
                 <a:cs typeface="Arial" panose="020B0604020202020204" pitchFamily="34" charset="0"/>
               </a:rPr>
-              <a:t> de </a:t>
-            </a:r>
-            <a:r>
-              <a:rPr lang="es-CO" sz="1200" noProof="0" dirty="0" err="1">
+              <a:t> the lower computational cost and shorter simulation time, a value of 1.30 was selected for the max grid scaling whit grid resolution of 20. </a:t>
+            </a:r>
+          </a:p>
+          <a:p>
+            <a:pPr algn="just"/>
+            <a:endParaRPr lang="en-US" sz="1200" dirty="0">
+              <a:latin typeface="Arial" panose="020B0604020202020204" pitchFamily="34" charset="0"/>
+              <a:cs typeface="Arial" panose="020B0604020202020204" pitchFamily="34" charset="0"/>
+            </a:endParaRPr>
+          </a:p>
+          <a:p>
+            <a:pPr algn="just"/>
+            <a:r>
+              <a:rPr lang="en-US" sz="1200" noProof="0" dirty="0">
                 <a:latin typeface="Arial" panose="020B0604020202020204" pitchFamily="34" charset="0"/>
                 <a:cs typeface="Arial" panose="020B0604020202020204" pitchFamily="34" charset="0"/>
               </a:rPr>
-              <a:t>grid</a:t>
-            </a:r>
-            <a:r>
-              <a:rPr lang="es-CO" sz="1200" noProof="0" dirty="0">
+              <a:t>Compared with the previous case, we see that for SOI different max grid values could be selected for the same grid resolution of 20</a:t>
+            </a:r>
+            <a:r>
+              <a:rPr lang="en-US" sz="1200" dirty="0">
                 <a:latin typeface="Arial" panose="020B0604020202020204" pitchFamily="34" charset="0"/>
                 <a:cs typeface="Arial" panose="020B0604020202020204" pitchFamily="34" charset="0"/>
               </a:rPr>
-              <a:t> </a:t>
-            </a:r>
-            <a:r>
-              <a:rPr lang="es-CO" sz="1200" noProof="0" dirty="0" err="1">
+              <a:t>.</a:t>
+            </a:r>
+            <a:r>
+              <a:rPr lang="en-US" sz="1200" noProof="0" dirty="0">
                 <a:latin typeface="Arial" panose="020B0604020202020204" pitchFamily="34" charset="0"/>
                 <a:cs typeface="Arial" panose="020B0604020202020204" pitchFamily="34" charset="0"/>
               </a:rPr>
-              <a:t>resolution</a:t>
-            </a:r>
-            <a:r>
-              <a:rPr lang="es-CO" sz="1200" noProof="0" dirty="0">
-                <a:latin typeface="Arial" panose="020B0604020202020204" pitchFamily="34" charset="0"/>
-                <a:cs typeface="Arial" panose="020B0604020202020204" pitchFamily="34" charset="0"/>
-              </a:rPr>
-              <a:t> para ahora variar el </a:t>
-            </a:r>
-            <a:r>
-              <a:rPr lang="es-CO" sz="1200" noProof="0" dirty="0" err="1">
-                <a:latin typeface="Arial" panose="020B0604020202020204" pitchFamily="34" charset="0"/>
-                <a:cs typeface="Arial" panose="020B0604020202020204" pitchFamily="34" charset="0"/>
-              </a:rPr>
-              <a:t>max</a:t>
-            </a:r>
-            <a:r>
-              <a:rPr lang="es-CO" sz="1200" noProof="0" dirty="0">
-                <a:latin typeface="Arial" panose="020B0604020202020204" pitchFamily="34" charset="0"/>
-                <a:cs typeface="Arial" panose="020B0604020202020204" pitchFamily="34" charset="0"/>
-              </a:rPr>
-              <a:t> </a:t>
-            </a:r>
-            <a:r>
-              <a:rPr lang="es-CO" sz="1200" noProof="0" dirty="0" err="1">
-                <a:latin typeface="Arial" panose="020B0604020202020204" pitchFamily="34" charset="0"/>
-                <a:cs typeface="Arial" panose="020B0604020202020204" pitchFamily="34" charset="0"/>
-              </a:rPr>
-              <a:t>grid</a:t>
-            </a:r>
-            <a:r>
-              <a:rPr lang="es-CO" sz="1200" noProof="0" dirty="0">
-                <a:latin typeface="Arial" panose="020B0604020202020204" pitchFamily="34" charset="0"/>
-                <a:cs typeface="Arial" panose="020B0604020202020204" pitchFamily="34" charset="0"/>
-              </a:rPr>
-              <a:t> </a:t>
-            </a:r>
-            <a:r>
-              <a:rPr lang="es-CO" sz="1200" noProof="0" dirty="0" err="1">
-                <a:latin typeface="Arial" panose="020B0604020202020204" pitchFamily="34" charset="0"/>
-                <a:cs typeface="Arial" panose="020B0604020202020204" pitchFamily="34" charset="0"/>
-              </a:rPr>
-              <a:t>scaling</a:t>
-            </a:r>
-            <a:r>
-              <a:rPr lang="es-CO" sz="1200" noProof="0" dirty="0">
-                <a:latin typeface="Arial" panose="020B0604020202020204" pitchFamily="34" charset="0"/>
-                <a:cs typeface="Arial" panose="020B0604020202020204" pitchFamily="34" charset="0"/>
-              </a:rPr>
-              <a:t> y ver cuales son los valores que favorecen más esta </a:t>
-            </a:r>
-            <a:r>
-              <a:rPr lang="es-CO" sz="1200" noProof="0" dirty="0" err="1">
-                <a:latin typeface="Arial" panose="020B0604020202020204" pitchFamily="34" charset="0"/>
-                <a:cs typeface="Arial" panose="020B0604020202020204" pitchFamily="34" charset="0"/>
-              </a:rPr>
-              <a:t>waveguide</a:t>
-            </a:r>
-            <a:r>
-              <a:rPr lang="es-CO" sz="1200" noProof="0" dirty="0">
-                <a:latin typeface="Arial" panose="020B0604020202020204" pitchFamily="34" charset="0"/>
-                <a:cs typeface="Arial" panose="020B0604020202020204" pitchFamily="34" charset="0"/>
-              </a:rPr>
-              <a:t>. Se tomaron valores de 20, 40 y 50 de </a:t>
-            </a:r>
-            <a:r>
-              <a:rPr lang="es-CO" sz="1200" noProof="0" dirty="0" err="1">
-                <a:latin typeface="Arial" panose="020B0604020202020204" pitchFamily="34" charset="0"/>
-                <a:cs typeface="Arial" panose="020B0604020202020204" pitchFamily="34" charset="0"/>
-              </a:rPr>
-              <a:t>grid</a:t>
-            </a:r>
-            <a:r>
-              <a:rPr lang="es-CO" sz="1200" noProof="0" dirty="0">
-                <a:latin typeface="Arial" panose="020B0604020202020204" pitchFamily="34" charset="0"/>
-                <a:cs typeface="Arial" panose="020B0604020202020204" pitchFamily="34" charset="0"/>
-              </a:rPr>
-              <a:t> </a:t>
-            </a:r>
-            <a:r>
-              <a:rPr lang="es-CO" sz="1200" noProof="0" dirty="0" err="1">
-                <a:latin typeface="Arial" panose="020B0604020202020204" pitchFamily="34" charset="0"/>
-                <a:cs typeface="Arial" panose="020B0604020202020204" pitchFamily="34" charset="0"/>
-              </a:rPr>
-              <a:t>resolution</a:t>
-            </a:r>
-            <a:r>
-              <a:rPr lang="es-CO" sz="1200" noProof="0" dirty="0">
-                <a:latin typeface="Arial" panose="020B0604020202020204" pitchFamily="34" charset="0"/>
-                <a:cs typeface="Arial" panose="020B0604020202020204" pitchFamily="34" charset="0"/>
-              </a:rPr>
-              <a:t>. </a:t>
-            </a:r>
-          </a:p>
-          <a:p>
-            <a:pPr algn="just"/>
-            <a:endParaRPr lang="es-CO" sz="1200" dirty="0">
-              <a:latin typeface="Arial" panose="020B0604020202020204" pitchFamily="34" charset="0"/>
-              <a:cs typeface="Arial" panose="020B0604020202020204" pitchFamily="34" charset="0"/>
-            </a:endParaRPr>
-          </a:p>
-          <a:p>
-            <a:pPr algn="just"/>
-            <a:r>
-              <a:rPr lang="es-CO" sz="1200" noProof="0" dirty="0">
-                <a:latin typeface="Arial" panose="020B0604020202020204" pitchFamily="34" charset="0"/>
-                <a:cs typeface="Arial" panose="020B0604020202020204" pitchFamily="34" charset="0"/>
-              </a:rPr>
-              <a:t>Vemos que para 20 tenemos casi en toda la escala escogida el mismo índice efectivo, mientras que para valores más altos no tanto. Teniendo en cuenta el menor costo computacional y tiempo se escoge el valore de 1.30 para el </a:t>
-            </a:r>
-            <a:r>
-              <a:rPr lang="es-CO" sz="1200" noProof="0" dirty="0" err="1">
-                <a:latin typeface="Arial" panose="020B0604020202020204" pitchFamily="34" charset="0"/>
-                <a:cs typeface="Arial" panose="020B0604020202020204" pitchFamily="34" charset="0"/>
-              </a:rPr>
-              <a:t>max</a:t>
-            </a:r>
-            <a:r>
-              <a:rPr lang="es-CO" sz="1200" dirty="0">
-                <a:latin typeface="Arial" panose="020B0604020202020204" pitchFamily="34" charset="0"/>
-                <a:cs typeface="Arial" panose="020B0604020202020204" pitchFamily="34" charset="0"/>
-              </a:rPr>
-              <a:t> </a:t>
-            </a:r>
-            <a:r>
-              <a:rPr lang="es-CO" sz="1200" dirty="0" err="1">
-                <a:latin typeface="Arial" panose="020B0604020202020204" pitchFamily="34" charset="0"/>
-                <a:cs typeface="Arial" panose="020B0604020202020204" pitchFamily="34" charset="0"/>
-              </a:rPr>
-              <a:t>grid</a:t>
-            </a:r>
-            <a:r>
-              <a:rPr lang="es-CO" sz="1200" dirty="0">
-                <a:latin typeface="Arial" panose="020B0604020202020204" pitchFamily="34" charset="0"/>
-                <a:cs typeface="Arial" panose="020B0604020202020204" pitchFamily="34" charset="0"/>
-              </a:rPr>
-              <a:t> </a:t>
-            </a:r>
-            <a:r>
-              <a:rPr lang="es-CO" sz="1200" dirty="0" err="1">
-                <a:latin typeface="Arial" panose="020B0604020202020204" pitchFamily="34" charset="0"/>
-                <a:cs typeface="Arial" panose="020B0604020202020204" pitchFamily="34" charset="0"/>
-              </a:rPr>
-              <a:t>scaling</a:t>
-            </a:r>
-            <a:r>
-              <a:rPr lang="es-CO" sz="1200" dirty="0">
-                <a:latin typeface="Arial" panose="020B0604020202020204" pitchFamily="34" charset="0"/>
-                <a:cs typeface="Arial" panose="020B0604020202020204" pitchFamily="34" charset="0"/>
-              </a:rPr>
-              <a:t>, de manera que se tendrían las mismas especificaciones que para el caso anterior. A comparación del caso anterior, vemos que se podrían escoger diferentes valores de </a:t>
-            </a:r>
-            <a:r>
-              <a:rPr lang="es-CO" sz="1200" dirty="0" err="1">
-                <a:latin typeface="Arial" panose="020B0604020202020204" pitchFamily="34" charset="0"/>
-                <a:cs typeface="Arial" panose="020B0604020202020204" pitchFamily="34" charset="0"/>
-              </a:rPr>
-              <a:t>max</a:t>
-            </a:r>
-            <a:r>
-              <a:rPr lang="es-CO" sz="1200" dirty="0">
-                <a:latin typeface="Arial" panose="020B0604020202020204" pitchFamily="34" charset="0"/>
-                <a:cs typeface="Arial" panose="020B0604020202020204" pitchFamily="34" charset="0"/>
-              </a:rPr>
-              <a:t> </a:t>
-            </a:r>
-            <a:r>
-              <a:rPr lang="es-CO" sz="1200" dirty="0" err="1">
-                <a:latin typeface="Arial" panose="020B0604020202020204" pitchFamily="34" charset="0"/>
-                <a:cs typeface="Arial" panose="020B0604020202020204" pitchFamily="34" charset="0"/>
-              </a:rPr>
-              <a:t>grid</a:t>
-            </a:r>
-            <a:r>
-              <a:rPr lang="es-CO" sz="1200" dirty="0">
-                <a:latin typeface="Arial" panose="020B0604020202020204" pitchFamily="34" charset="0"/>
-                <a:cs typeface="Arial" panose="020B0604020202020204" pitchFamily="34" charset="0"/>
-              </a:rPr>
-              <a:t> para e mismo valor de 20 de </a:t>
-            </a:r>
-            <a:r>
-              <a:rPr lang="es-CO" sz="1200" dirty="0" err="1">
-                <a:latin typeface="Arial" panose="020B0604020202020204" pitchFamily="34" charset="0"/>
-                <a:cs typeface="Arial" panose="020B0604020202020204" pitchFamily="34" charset="0"/>
-              </a:rPr>
-              <a:t>grid</a:t>
-            </a:r>
-            <a:r>
-              <a:rPr lang="es-CO" sz="1200" dirty="0">
-                <a:latin typeface="Arial" panose="020B0604020202020204" pitchFamily="34" charset="0"/>
-                <a:cs typeface="Arial" panose="020B0604020202020204" pitchFamily="34" charset="0"/>
-              </a:rPr>
-              <a:t> </a:t>
-            </a:r>
-            <a:r>
-              <a:rPr lang="es-CO" sz="1200" dirty="0" err="1">
-                <a:latin typeface="Arial" panose="020B0604020202020204" pitchFamily="34" charset="0"/>
-                <a:cs typeface="Arial" panose="020B0604020202020204" pitchFamily="34" charset="0"/>
-              </a:rPr>
-              <a:t>resolution</a:t>
-            </a:r>
-            <a:r>
-              <a:rPr lang="es-CO" sz="1200" dirty="0">
-                <a:latin typeface="Arial" panose="020B0604020202020204" pitchFamily="34" charset="0"/>
-                <a:cs typeface="Arial" panose="020B0604020202020204" pitchFamily="34" charset="0"/>
-              </a:rPr>
-              <a:t>, así que se podrían simular muchos más puntos cuando hay cambios de índice de refracción sin que cambie el índice efectivo o adicionar más </a:t>
-            </a:r>
-            <a:r>
-              <a:rPr lang="es-CO" sz="1200" dirty="0" err="1">
-                <a:latin typeface="Arial" panose="020B0604020202020204" pitchFamily="34" charset="0"/>
-                <a:cs typeface="Arial" panose="020B0604020202020204" pitchFamily="34" charset="0"/>
-              </a:rPr>
-              <a:t>grid</a:t>
-            </a:r>
-            <a:r>
-              <a:rPr lang="es-CO" sz="1200" dirty="0">
-                <a:latin typeface="Arial" panose="020B0604020202020204" pitchFamily="34" charset="0"/>
-                <a:cs typeface="Arial" panose="020B0604020202020204" pitchFamily="34" charset="0"/>
-              </a:rPr>
-              <a:t> </a:t>
-            </a:r>
-            <a:r>
-              <a:rPr lang="es-CO" sz="1200" dirty="0" err="1">
-                <a:latin typeface="Arial" panose="020B0604020202020204" pitchFamily="34" charset="0"/>
-                <a:cs typeface="Arial" panose="020B0604020202020204" pitchFamily="34" charset="0"/>
-              </a:rPr>
-              <a:t>resolution</a:t>
-            </a:r>
-            <a:r>
-              <a:rPr lang="es-CO" sz="1200" dirty="0">
-                <a:latin typeface="Arial" panose="020B0604020202020204" pitchFamily="34" charset="0"/>
-                <a:cs typeface="Arial" panose="020B0604020202020204" pitchFamily="34" charset="0"/>
-              </a:rPr>
-              <a:t>. </a:t>
-            </a:r>
-          </a:p>
-          <a:p>
-            <a:pPr algn="just"/>
+              <a:t> This means that more simulation points could be used when refractive index changes occur without significantly affecting the effective index, or alternatively the grid resolution could be increased.</a:t>
+            </a:r>
             <a:endParaRPr lang="es-CO" sz="1200" noProof="0" dirty="0">
-              <a:latin typeface="Arial" panose="020B0604020202020204" pitchFamily="34" charset="0"/>
-              <a:cs typeface="Arial" panose="020B0604020202020204" pitchFamily="34" charset="0"/>
-            </a:endParaRPr>
-          </a:p>
-          <a:p>
-            <a:pPr algn="just"/>
-            <a:endParaRPr lang="es-CO" sz="1200" noProof="0" dirty="0">
-              <a:latin typeface="Arial" panose="020B0604020202020204" pitchFamily="34" charset="0"/>
-              <a:cs typeface="Arial" panose="020B0604020202020204" pitchFamily="34" charset="0"/>
-            </a:endParaRPr>
-          </a:p>
-          <a:p>
-            <a:pPr algn="just"/>
-            <a:endParaRPr lang="es-CO" sz="1200" dirty="0">
               <a:latin typeface="Arial" panose="020B0604020202020204" pitchFamily="34" charset="0"/>
               <a:cs typeface="Arial" panose="020B0604020202020204" pitchFamily="34" charset="0"/>
             </a:endParaRPr>
@@ -9097,8 +7997,8 @@
         </p:blipFill>
         <p:spPr>
           <a:xfrm>
-            <a:off x="6497193" y="3271660"/>
-            <a:ext cx="3505200" cy="2614990"/>
+            <a:off x="6183005" y="3692437"/>
+            <a:ext cx="2895320" cy="2160000"/>
           </a:xfrm>
           <a:prstGeom prst="rect">
             <a:avLst/>
@@ -9350,7 +8250,7 @@
         <p:spPr>
           <a:xfrm>
             <a:off x="609441" y="4860334"/>
-            <a:ext cx="11199971" cy="1569660"/>
+            <a:ext cx="11199971" cy="1938992"/>
           </a:xfrm>
           <a:prstGeom prst="rect">
             <a:avLst/>
@@ -9374,278 +8274,51 @@
           <a:p>
             <a:pPr algn="just"/>
             <a:r>
-              <a:rPr lang="es-CO" sz="1200" noProof="0" dirty="0">
+              <a:rPr lang="en-US" sz="1200" noProof="0" dirty="0">
                 <a:latin typeface="Arial" panose="020B0604020202020204" pitchFamily="34" charset="0"/>
                 <a:cs typeface="Arial" panose="020B0604020202020204" pitchFamily="34" charset="0"/>
               </a:rPr>
-              <a:t>Vemos como a mayor ancho de la </a:t>
-            </a:r>
-            <a:r>
-              <a:rPr lang="es-CO" sz="1200" noProof="0" dirty="0" err="1">
+              <a:t>We also observe that as the width of the waveguide increases, the number of propagating modes also increases. For a width of 0.6 µm, only the fundamental modes propagate, meaning that the waveguide is single-mode if the input polarization is controlled </a:t>
+            </a:r>
+            <a:r>
+              <a:rPr lang="en-US" sz="1200" dirty="0">
                 <a:latin typeface="Arial" panose="020B0604020202020204" pitchFamily="34" charset="0"/>
                 <a:cs typeface="Arial" panose="020B0604020202020204" pitchFamily="34" charset="0"/>
               </a:rPr>
-              <a:t>guia</a:t>
-            </a:r>
-            <a:r>
-              <a:rPr lang="es-CO" sz="1200" noProof="0" dirty="0">
+              <a:t>(</a:t>
+            </a:r>
+            <a:r>
+              <a:rPr lang="en-US" sz="1200" noProof="0" dirty="0">
                 <a:latin typeface="Arial" panose="020B0604020202020204" pitchFamily="34" charset="0"/>
                 <a:cs typeface="Arial" panose="020B0604020202020204" pitchFamily="34" charset="0"/>
               </a:rPr>
-              <a:t> de onda aumentan los modos de propagación, pues con 0.6 </a:t>
-            </a:r>
-            <a:r>
-              <a:rPr lang="es-CO" sz="1200" noProof="0" dirty="0" err="1">
+              <a:t>only TE or TM polarized light is launched). Additionally, as the width increases, the effective index value also increases, going from 1.51172534 for the first mode to 1.63222705, corresponding to a difference of 0.121 between the initial and final values. This increase indicates that enlarging the cross section in the x-direction allows the mode to become more confined within the waveguide.</a:t>
+            </a:r>
+            <a:endParaRPr lang="es-CO" sz="1200" noProof="0" dirty="0">
+              <a:latin typeface="Arial" panose="020B0604020202020204" pitchFamily="34" charset="0"/>
+              <a:cs typeface="Arial" panose="020B0604020202020204" pitchFamily="34" charset="0"/>
+            </a:endParaRPr>
+          </a:p>
+          <a:p>
+            <a:pPr algn="just"/>
+            <a:endParaRPr lang="es-CO" sz="1200" dirty="0">
+              <a:latin typeface="Arial" panose="020B0604020202020204" pitchFamily="34" charset="0"/>
+              <a:cs typeface="Arial" panose="020B0604020202020204" pitchFamily="34" charset="0"/>
+            </a:endParaRPr>
+          </a:p>
+          <a:p>
+            <a:pPr algn="just"/>
+            <a:r>
+              <a:rPr lang="en-US" sz="1200" dirty="0">
                 <a:latin typeface="Arial" panose="020B0604020202020204" pitchFamily="34" charset="0"/>
                 <a:cs typeface="Arial" panose="020B0604020202020204" pitchFamily="34" charset="0"/>
               </a:rPr>
-              <a:t>um</a:t>
-            </a:r>
-            <a:r>
-              <a:rPr lang="es-CO" sz="1200" noProof="0" dirty="0">
-                <a:latin typeface="Arial" panose="020B0604020202020204" pitchFamily="34" charset="0"/>
-                <a:cs typeface="Arial" panose="020B0604020202020204" pitchFamily="34" charset="0"/>
-              </a:rPr>
-              <a:t> </a:t>
-            </a:r>
-            <a:r>
-              <a:rPr lang="es-CO" sz="1200" noProof="0" dirty="0" err="1">
-                <a:latin typeface="Arial" panose="020B0604020202020204" pitchFamily="34" charset="0"/>
-                <a:cs typeface="Arial" panose="020B0604020202020204" pitchFamily="34" charset="0"/>
-              </a:rPr>
-              <a:t>temenos</a:t>
-            </a:r>
-            <a:r>
-              <a:rPr lang="es-CO" sz="1200" noProof="0" dirty="0">
-                <a:latin typeface="Arial" panose="020B0604020202020204" pitchFamily="34" charset="0"/>
-                <a:cs typeface="Arial" panose="020B0604020202020204" pitchFamily="34" charset="0"/>
-              </a:rPr>
-              <a:t> solo los modos </a:t>
-            </a:r>
-            <a:r>
-              <a:rPr lang="es-CO" sz="1200" noProof="0" dirty="0" err="1">
-                <a:latin typeface="Arial" panose="020B0604020202020204" pitchFamily="34" charset="0"/>
-                <a:cs typeface="Arial" panose="020B0604020202020204" pitchFamily="34" charset="0"/>
-              </a:rPr>
-              <a:t>fundamentals</a:t>
-            </a:r>
-            <a:r>
-              <a:rPr lang="es-CO" sz="1200" noProof="0" dirty="0">
-                <a:latin typeface="Arial" panose="020B0604020202020204" pitchFamily="34" charset="0"/>
-                <a:cs typeface="Arial" panose="020B0604020202020204" pitchFamily="34" charset="0"/>
-              </a:rPr>
-              <a:t> </a:t>
-            </a:r>
-            <a:r>
-              <a:rPr lang="es-CO" sz="1200" noProof="0" dirty="0" err="1">
-                <a:latin typeface="Arial" panose="020B0604020202020204" pitchFamily="34" charset="0"/>
-                <a:cs typeface="Arial" panose="020B0604020202020204" pitchFamily="34" charset="0"/>
-              </a:rPr>
-              <a:t>propagandose</a:t>
-            </a:r>
-            <a:r>
-              <a:rPr lang="es-CO" sz="1200" noProof="0" dirty="0">
-                <a:latin typeface="Arial" panose="020B0604020202020204" pitchFamily="34" charset="0"/>
-                <a:cs typeface="Arial" panose="020B0604020202020204" pitchFamily="34" charset="0"/>
-              </a:rPr>
-              <a:t>, de manera que, es una </a:t>
-            </a:r>
-            <a:r>
-              <a:rPr lang="es-CO" sz="1200" noProof="0" dirty="0" err="1">
-                <a:latin typeface="Arial" panose="020B0604020202020204" pitchFamily="34" charset="0"/>
-                <a:cs typeface="Arial" panose="020B0604020202020204" pitchFamily="34" charset="0"/>
-              </a:rPr>
-              <a:t>guia</a:t>
-            </a:r>
-            <a:r>
-              <a:rPr lang="es-CO" sz="1200" noProof="0" dirty="0">
-                <a:latin typeface="Arial" panose="020B0604020202020204" pitchFamily="34" charset="0"/>
-                <a:cs typeface="Arial" panose="020B0604020202020204" pitchFamily="34" charset="0"/>
-              </a:rPr>
-              <a:t> monomodal si controlamos la polarización con la que entra la luz, es decir que solo ingrese luz con polarización TE o TM. </a:t>
-            </a:r>
-            <a:r>
-              <a:rPr lang="es-CO" sz="1200" noProof="0" dirty="0" err="1">
-                <a:latin typeface="Arial" panose="020B0604020202020204" pitchFamily="34" charset="0"/>
-                <a:cs typeface="Arial" panose="020B0604020202020204" pitchFamily="34" charset="0"/>
-              </a:rPr>
-              <a:t>Tambien</a:t>
-            </a:r>
-            <a:r>
-              <a:rPr lang="es-CO" sz="1200" noProof="0" dirty="0">
-                <a:latin typeface="Arial" panose="020B0604020202020204" pitchFamily="34" charset="0"/>
-                <a:cs typeface="Arial" panose="020B0604020202020204" pitchFamily="34" charset="0"/>
-              </a:rPr>
-              <a:t> vemos como a medida que aumenta el ancho, aumenta el valor del </a:t>
-            </a:r>
-            <a:r>
-              <a:rPr lang="es-CO" sz="1200" noProof="0" dirty="0" err="1">
-                <a:latin typeface="Arial" panose="020B0604020202020204" pitchFamily="34" charset="0"/>
-                <a:cs typeface="Arial" panose="020B0604020202020204" pitchFamily="34" charset="0"/>
-              </a:rPr>
-              <a:t>indice</a:t>
-            </a:r>
-            <a:r>
-              <a:rPr lang="es-CO" sz="1200" noProof="0" dirty="0">
-                <a:latin typeface="Arial" panose="020B0604020202020204" pitchFamily="34" charset="0"/>
-                <a:cs typeface="Arial" panose="020B0604020202020204" pitchFamily="34" charset="0"/>
-              </a:rPr>
-              <a:t> efectivo, pasando de 1.51172534 para el primer modo hasta 1.63222705, teniendo una diferencia de 0.121 desde el </a:t>
-            </a:r>
-            <a:r>
-              <a:rPr lang="es-CO" sz="1200" noProof="0" dirty="0" err="1">
-                <a:latin typeface="Arial" panose="020B0604020202020204" pitchFamily="34" charset="0"/>
-                <a:cs typeface="Arial" panose="020B0604020202020204" pitchFamily="34" charset="0"/>
-              </a:rPr>
-              <a:t>indice</a:t>
-            </a:r>
-            <a:r>
-              <a:rPr lang="es-CO" sz="1200" noProof="0" dirty="0">
-                <a:latin typeface="Arial" panose="020B0604020202020204" pitchFamily="34" charset="0"/>
-                <a:cs typeface="Arial" panose="020B0604020202020204" pitchFamily="34" charset="0"/>
-              </a:rPr>
-              <a:t> inicial al final, este aumento nos muestra que al ampliar la sección transversal en x el modo se confina más dentro de la </a:t>
-            </a:r>
-            <a:r>
-              <a:rPr lang="es-CO" sz="1200" noProof="0" dirty="0" err="1">
-                <a:latin typeface="Arial" panose="020B0604020202020204" pitchFamily="34" charset="0"/>
-                <a:cs typeface="Arial" panose="020B0604020202020204" pitchFamily="34" charset="0"/>
-              </a:rPr>
-              <a:t>guia</a:t>
-            </a:r>
-            <a:r>
-              <a:rPr lang="es-CO" sz="1200" noProof="0" dirty="0">
-                <a:latin typeface="Arial" panose="020B0604020202020204" pitchFamily="34" charset="0"/>
-                <a:cs typeface="Arial" panose="020B0604020202020204" pitchFamily="34" charset="0"/>
-              </a:rPr>
-              <a:t> de onda. Otro </a:t>
-            </a:r>
-            <a:r>
-              <a:rPr lang="es-CO" sz="1200" noProof="0" dirty="0" err="1">
-                <a:latin typeface="Arial" panose="020B0604020202020204" pitchFamily="34" charset="0"/>
-                <a:cs typeface="Arial" panose="020B0604020202020204" pitchFamily="34" charset="0"/>
-              </a:rPr>
-              <a:t>aspect</a:t>
-            </a:r>
-            <a:r>
-              <a:rPr lang="es-CO" sz="1200" noProof="0" dirty="0">
-                <a:latin typeface="Arial" panose="020B0604020202020204" pitchFamily="34" charset="0"/>
-                <a:cs typeface="Arial" panose="020B0604020202020204" pitchFamily="34" charset="0"/>
-              </a:rPr>
-              <a:t> es que, al generarse ese aumento, provoca que para una medida de 1.6 </a:t>
-            </a:r>
-            <a:r>
-              <a:rPr lang="es-CO" sz="1200" noProof="0" dirty="0" err="1">
-                <a:latin typeface="Arial" panose="020B0604020202020204" pitchFamily="34" charset="0"/>
-                <a:cs typeface="Arial" panose="020B0604020202020204" pitchFamily="34" charset="0"/>
-              </a:rPr>
-              <a:t>um</a:t>
-            </a:r>
-            <a:r>
-              <a:rPr lang="es-CO" sz="1200" noProof="0" dirty="0">
-                <a:latin typeface="Arial" panose="020B0604020202020204" pitchFamily="34" charset="0"/>
-                <a:cs typeface="Arial" panose="020B0604020202020204" pitchFamily="34" charset="0"/>
-              </a:rPr>
-              <a:t> de ancho se empiecen a propagar otros modos, en este caso el modo 2 que es TE, y lo que nos muestra es que a medida que ensanchemos la </a:t>
-            </a:r>
-            <a:r>
-              <a:rPr lang="es-CO" sz="1200" noProof="0" dirty="0" err="1">
-                <a:latin typeface="Arial" panose="020B0604020202020204" pitchFamily="34" charset="0"/>
-                <a:cs typeface="Arial" panose="020B0604020202020204" pitchFamily="34" charset="0"/>
-              </a:rPr>
-              <a:t>seccion</a:t>
-            </a:r>
-            <a:r>
-              <a:rPr lang="es-CO" sz="1200" noProof="0" dirty="0">
-                <a:latin typeface="Arial" panose="020B0604020202020204" pitchFamily="34" charset="0"/>
-                <a:cs typeface="Arial" panose="020B0604020202020204" pitchFamily="34" charset="0"/>
-              </a:rPr>
-              <a:t> transversal, más modos se observarán, estos empezarán a viajar por el </a:t>
-            </a:r>
-            <a:r>
-              <a:rPr lang="es-CO" sz="1200" noProof="0" dirty="0" err="1">
-                <a:latin typeface="Arial" panose="020B0604020202020204" pitchFamily="34" charset="0"/>
-                <a:cs typeface="Arial" panose="020B0604020202020204" pitchFamily="34" charset="0"/>
-              </a:rPr>
-              <a:t>cladding</a:t>
-            </a:r>
-            <a:r>
-              <a:rPr lang="es-CO" sz="1200" noProof="0" dirty="0">
-                <a:latin typeface="Arial" panose="020B0604020202020204" pitchFamily="34" charset="0"/>
-                <a:cs typeface="Arial" panose="020B0604020202020204" pitchFamily="34" charset="0"/>
-              </a:rPr>
-              <a:t> es decir </a:t>
-            </a:r>
-            <a:r>
-              <a:rPr lang="es-CO" sz="1200" noProof="0" dirty="0" err="1">
-                <a:latin typeface="Arial" panose="020B0604020202020204" pitchFamily="34" charset="0"/>
-                <a:cs typeface="Arial" panose="020B0604020202020204" pitchFamily="34" charset="0"/>
-              </a:rPr>
-              <a:t>estaran</a:t>
-            </a:r>
-            <a:r>
-              <a:rPr lang="es-CO" sz="1200" noProof="0" dirty="0">
-                <a:latin typeface="Arial" panose="020B0604020202020204" pitchFamily="34" charset="0"/>
-                <a:cs typeface="Arial" panose="020B0604020202020204" pitchFamily="34" charset="0"/>
-              </a:rPr>
-              <a:t> menos confinados y luego a medida que se siga aumentando la sección transversal viajarán más </a:t>
-            </a:r>
-            <a:r>
-              <a:rPr lang="es-CO" sz="1200" noProof="0" dirty="0" err="1">
-                <a:latin typeface="Arial" panose="020B0604020202020204" pitchFamily="34" charset="0"/>
-                <a:cs typeface="Arial" panose="020B0604020202020204" pitchFamily="34" charset="0"/>
-              </a:rPr>
-              <a:t>cconfinados</a:t>
-            </a:r>
-            <a:r>
-              <a:rPr lang="es-CO" sz="1200" noProof="0" dirty="0">
-                <a:latin typeface="Arial" panose="020B0604020202020204" pitchFamily="34" charset="0"/>
-                <a:cs typeface="Arial" panose="020B0604020202020204" pitchFamily="34" charset="0"/>
-              </a:rPr>
-              <a:t>, sin embargo vemos que no se propagaran muy confinados debido a que la diferencia entre los </a:t>
-            </a:r>
-            <a:r>
-              <a:rPr lang="es-CO" sz="1200" noProof="0" dirty="0" err="1">
-                <a:latin typeface="Arial" panose="020B0604020202020204" pitchFamily="34" charset="0"/>
-                <a:cs typeface="Arial" panose="020B0604020202020204" pitchFamily="34" charset="0"/>
-              </a:rPr>
-              <a:t>indices</a:t>
-            </a:r>
-            <a:r>
-              <a:rPr lang="es-CO" sz="1200" noProof="0" dirty="0">
-                <a:latin typeface="Arial" panose="020B0604020202020204" pitchFamily="34" charset="0"/>
-                <a:cs typeface="Arial" panose="020B0604020202020204" pitchFamily="34" charset="0"/>
-              </a:rPr>
-              <a:t> no es la suficiente como para que se </a:t>
-            </a:r>
-            <a:r>
-              <a:rPr lang="es-CO" sz="1200" noProof="0" dirty="0" err="1">
-                <a:latin typeface="Arial" panose="020B0604020202020204" pitchFamily="34" charset="0"/>
-                <a:cs typeface="Arial" panose="020B0604020202020204" pitchFamily="34" charset="0"/>
-              </a:rPr>
-              <a:t>propage</a:t>
-            </a:r>
-            <a:r>
-              <a:rPr lang="es-CO" sz="1200" noProof="0" dirty="0">
-                <a:latin typeface="Arial" panose="020B0604020202020204" pitchFamily="34" charset="0"/>
-                <a:cs typeface="Arial" panose="020B0604020202020204" pitchFamily="34" charset="0"/>
-              </a:rPr>
-              <a:t> por el </a:t>
-            </a:r>
-            <a:r>
-              <a:rPr lang="es-CO" sz="1200" noProof="0" dirty="0" err="1">
-                <a:latin typeface="Arial" panose="020B0604020202020204" pitchFamily="34" charset="0"/>
-                <a:cs typeface="Arial" panose="020B0604020202020204" pitchFamily="34" charset="0"/>
-              </a:rPr>
-              <a:t>core</a:t>
-            </a:r>
-            <a:r>
-              <a:rPr lang="es-CO" sz="1200" noProof="0" dirty="0">
-                <a:latin typeface="Arial" panose="020B0604020202020204" pitchFamily="34" charset="0"/>
-                <a:cs typeface="Arial" panose="020B0604020202020204" pitchFamily="34" charset="0"/>
-              </a:rPr>
-              <a:t>. </a:t>
-            </a:r>
+              <a:t>Another important aspect is that this increase causes additional modes to start propagating once the width reaches 1.6 µm. In this case, mode 2 (TE) begins to propagate. This shows that as the cross section becomes wider, more modes appear. Initially, these modes propagate mainly through the cladding (meaning they are weakly confined), and as the cross section continues to increase, they become more confined. However, they still do not propagate strongly confined because the refractive index contrast between the materials is not sufficiently large for strong confinement within the core and the width is small.</a:t>
+            </a:r>
+            <a:endParaRPr lang="es-CO" sz="1200" noProof="0" dirty="0">
+              <a:latin typeface="Arial" panose="020B0604020202020204" pitchFamily="34" charset="0"/>
+              <a:cs typeface="Arial" panose="020B0604020202020204" pitchFamily="34" charset="0"/>
+            </a:endParaRPr>
           </a:p>
         </p:txBody>
       </p:sp>
@@ -9923,21 +8596,25 @@
             </a:r>
             <a:r>
               <a:rPr lang="es-CO" b="0" noProof="0" dirty="0"/>
-              <a:t> 1.55 µm – Silicon </a:t>
-            </a:r>
-            <a:r>
-              <a:rPr lang="es-CO" b="0" noProof="0" dirty="0" err="1"/>
+              <a:t> 1.55 µm – </a:t>
+            </a:r>
+            <a:r>
+              <a:rPr lang="es-CO" noProof="0" dirty="0"/>
+              <a:t>Silicon </a:t>
+            </a:r>
+            <a:r>
+              <a:rPr lang="es-CO" noProof="0" dirty="0" err="1"/>
               <a:t>On</a:t>
             </a:r>
             <a:r>
-              <a:rPr lang="es-CO" b="0" noProof="0" dirty="0"/>
+              <a:rPr lang="es-CO" noProof="0" dirty="0"/>
               <a:t> </a:t>
             </a:r>
             <a:r>
-              <a:rPr lang="es-CO" b="0" noProof="0" dirty="0" err="1"/>
+              <a:rPr lang="es-CO" noProof="0" dirty="0" err="1"/>
               <a:t>Insulator</a:t>
             </a:r>
-            <a:endParaRPr lang="es-CO" sz="2500" b="0" noProof="0" dirty="0">
+            <a:endParaRPr lang="es-CO" sz="2500" noProof="0" dirty="0">
               <a:latin typeface="+mj-lt"/>
               <a:cs typeface="Lucida Sans"/>
             </a:endParaRPr>
@@ -10057,7 +8734,7 @@
         <p:spPr>
           <a:xfrm>
             <a:off x="609441" y="4538008"/>
-            <a:ext cx="11199971" cy="1754326"/>
+            <a:ext cx="11199971" cy="2123658"/>
           </a:xfrm>
           <a:prstGeom prst="rect">
             <a:avLst/>
@@ -10081,161 +8758,91 @@
           <a:p>
             <a:pPr algn="just"/>
             <a:r>
-              <a:rPr lang="es-CO" sz="1200" noProof="0" dirty="0">
+              <a:rPr lang="en-US" sz="1200" noProof="0" dirty="0">
                 <a:latin typeface="Arial" panose="020B0604020202020204" pitchFamily="34" charset="0"/>
                 <a:cs typeface="Arial" panose="020B0604020202020204" pitchFamily="34" charset="0"/>
               </a:rPr>
-              <a:t>Se observa que con esta tecnología, cuando se aumenta el ancho de la guía de onda se propagan modos más rápidamente, pues mientras que </a:t>
-            </a:r>
-            <a:r>
-              <a:rPr lang="es-CO" sz="1200" noProof="0" dirty="0" err="1">
+              <a:t>It is observed that with </a:t>
+            </a:r>
+            <a:r>
+              <a:rPr lang="en-US" sz="1200" b="1" noProof="0" dirty="0">
+                <a:latin typeface="Arial" panose="020B0604020202020204" pitchFamily="34" charset="0"/>
+                <a:cs typeface="Arial" panose="020B0604020202020204" pitchFamily="34" charset="0"/>
+              </a:rPr>
+              <a:t>SOI</a:t>
+            </a:r>
+            <a:r>
+              <a:rPr lang="en-US" sz="1200" noProof="0" dirty="0">
+                <a:latin typeface="Arial" panose="020B0604020202020204" pitchFamily="34" charset="0"/>
+                <a:cs typeface="Arial" panose="020B0604020202020204" pitchFamily="34" charset="0"/>
+              </a:rPr>
+              <a:t>, increasing the width of the waveguide allows higher-order modes to appear more rapidly. While in </a:t>
+            </a:r>
+            <a:r>
+              <a:rPr lang="en-US" sz="1200" noProof="0" dirty="0" err="1">
                 <a:latin typeface="Arial" panose="020B0604020202020204" pitchFamily="34" charset="0"/>
                 <a:cs typeface="Arial" panose="020B0604020202020204" pitchFamily="34" charset="0"/>
               </a:rPr>
               <a:t>SiNx</a:t>
             </a:r>
             <a:r>
-              <a:rPr lang="es-CO" sz="1200" noProof="0" dirty="0">
+              <a:rPr lang="en-US" sz="1200" noProof="0" dirty="0">
                 <a:latin typeface="Arial" panose="020B0604020202020204" pitchFamily="34" charset="0"/>
                 <a:cs typeface="Arial" panose="020B0604020202020204" pitchFamily="34" charset="0"/>
               </a:rPr>
-              <a:t> después de aumentar 0.7 </a:t>
-            </a:r>
-            <a:r>
-              <a:rPr lang="es-CO" sz="1200" noProof="0" dirty="0" err="1">
-                <a:latin typeface="Arial" panose="020B0604020202020204" pitchFamily="34" charset="0"/>
-                <a:cs typeface="Arial" panose="020B0604020202020204" pitchFamily="34" charset="0"/>
-              </a:rPr>
-              <a:t>um</a:t>
-            </a:r>
-            <a:r>
-              <a:rPr lang="es-CO" sz="1200" noProof="0" dirty="0">
-                <a:latin typeface="Arial" panose="020B0604020202020204" pitchFamily="34" charset="0"/>
-                <a:cs typeface="Arial" panose="020B0604020202020204" pitchFamily="34" charset="0"/>
-              </a:rPr>
-              <a:t> empezaba a propagarse un modo de orden superior, en SOI después de aumentar 0.2 </a:t>
-            </a:r>
-            <a:r>
-              <a:rPr lang="es-CO" sz="1200" noProof="0" dirty="0" err="1">
-                <a:latin typeface="Arial" panose="020B0604020202020204" pitchFamily="34" charset="0"/>
-                <a:cs typeface="Arial" panose="020B0604020202020204" pitchFamily="34" charset="0"/>
-              </a:rPr>
-              <a:t>um</a:t>
-            </a:r>
-            <a:r>
-              <a:rPr lang="es-CO" sz="1200" noProof="0" dirty="0">
-                <a:latin typeface="Arial" panose="020B0604020202020204" pitchFamily="34" charset="0"/>
-                <a:cs typeface="Arial" panose="020B0604020202020204" pitchFamily="34" charset="0"/>
-              </a:rPr>
-              <a:t> ya se propagan modos de orden superior, esto se debe tener muy en cuenta a la hora de fabricar, ya que si queremos una guía monomodo en una polarización, podría estar más propensa a tener errores fabricarla con SOI. </a:t>
-            </a:r>
-          </a:p>
-          <a:p>
-            <a:pPr algn="just"/>
-            <a:r>
-              <a:rPr lang="es-CO" sz="1200" dirty="0">
-                <a:latin typeface="Arial" panose="020B0604020202020204" pitchFamily="34" charset="0"/>
-                <a:cs typeface="Arial" panose="020B0604020202020204" pitchFamily="34" charset="0"/>
-              </a:rPr>
-              <a:t>También, es importante resaltar que en SOI, vemos como hay conversión de polarización en los 0.7 </a:t>
-            </a:r>
-            <a:r>
-              <a:rPr lang="es-CO" sz="1200" dirty="0" err="1">
-                <a:latin typeface="Arial" panose="020B0604020202020204" pitchFamily="34" charset="0"/>
-                <a:cs typeface="Arial" panose="020B0604020202020204" pitchFamily="34" charset="0"/>
-              </a:rPr>
-              <a:t>um</a:t>
-            </a:r>
-            <a:r>
-              <a:rPr lang="es-CO" sz="1200" dirty="0">
-                <a:latin typeface="Arial" panose="020B0604020202020204" pitchFamily="34" charset="0"/>
-                <a:cs typeface="Arial" panose="020B0604020202020204" pitchFamily="34" charset="0"/>
-              </a:rPr>
-              <a:t> de </a:t>
-            </a:r>
-            <a:r>
-              <a:rPr lang="es-CO" sz="1200" dirty="0" err="1">
-                <a:latin typeface="Arial" panose="020B0604020202020204" pitchFamily="34" charset="0"/>
-                <a:cs typeface="Arial" panose="020B0604020202020204" pitchFamily="34" charset="0"/>
-              </a:rPr>
-              <a:t>width</a:t>
-            </a:r>
-            <a:r>
-              <a:rPr lang="es-CO" sz="1200" dirty="0">
-                <a:latin typeface="Arial" panose="020B0604020202020204" pitchFamily="34" charset="0"/>
-                <a:cs typeface="Arial" panose="020B0604020202020204" pitchFamily="34" charset="0"/>
-              </a:rPr>
-              <a:t>, </a:t>
-            </a:r>
-            <a:r>
-              <a:rPr lang="es-CO" sz="1200" dirty="0" err="1">
-                <a:latin typeface="Arial" panose="020B0604020202020204" pitchFamily="34" charset="0"/>
-                <a:cs typeface="Arial" panose="020B0604020202020204" pitchFamily="34" charset="0"/>
-              </a:rPr>
-              <a:t>endonde</a:t>
-            </a:r>
-            <a:r>
-              <a:rPr lang="es-CO" sz="1200" dirty="0">
-                <a:latin typeface="Arial" panose="020B0604020202020204" pitchFamily="34" charset="0"/>
-                <a:cs typeface="Arial" panose="020B0604020202020204" pitchFamily="34" charset="0"/>
-              </a:rPr>
-              <a:t> el modo 1 pasa de polarización magnética a eléctrica, esto también ocurre para modos superiores en los que pasan de una a otra. </a:t>
-            </a:r>
-            <a:endParaRPr lang="es-CO" sz="1200" noProof="0" dirty="0">
-              <a:latin typeface="Arial" panose="020B0604020202020204" pitchFamily="34" charset="0"/>
-              <a:cs typeface="Arial" panose="020B0604020202020204" pitchFamily="34" charset="0"/>
-            </a:endParaRPr>
-          </a:p>
-          <a:p>
-            <a:pPr algn="just"/>
-            <a:r>
-              <a:rPr lang="es-CO" sz="1200" dirty="0">
-                <a:latin typeface="Arial" panose="020B0604020202020204" pitchFamily="34" charset="0"/>
-                <a:cs typeface="Arial" panose="020B0604020202020204" pitchFamily="34" charset="0"/>
-              </a:rPr>
-              <a:t>El índice efectivo del modo 0 pasa de 1.79 a 2.72, teniendo una diferencia de 0.93, por lo que el aumentar el ancho de la fibra hace que los modos se confinen mucho más. Si lo comparamos con el </a:t>
-            </a:r>
-            <a:r>
-              <a:rPr lang="es-CO" sz="1200" dirty="0" err="1">
+              <a:t> a higher-order mode begins to propagate after increasing the width by about 0.7 µm, in SOI higher-order modes appear after increasing the width by only 0.2 µm. This must be carefully considered during fabrication, since if a single-mode waveguide is required for one polarization, fabrication with SOI could be more sensitive to dimensional variations. Additionally, it is important to highlight that in SOI polarization conversion occurs around a width of 0.7 µm, where mode 1 changes from magnetic polarization to electric polarization. This behavior also occurs for higher-order modes, where they transition from one polarization to the other. In contrast, for </a:t>
+            </a:r>
+            <a:r>
+              <a:rPr lang="en-US" sz="1200" noProof="0" dirty="0" err="1">
                 <a:latin typeface="Arial" panose="020B0604020202020204" pitchFamily="34" charset="0"/>
                 <a:cs typeface="Arial" panose="020B0604020202020204" pitchFamily="34" charset="0"/>
               </a:rPr>
               <a:t>SiNx</a:t>
             </a:r>
             <a:r>
-              <a:rPr lang="es-CO" sz="1200" dirty="0">
+              <a:rPr lang="en-US" sz="1200" noProof="0" dirty="0">
                 <a:latin typeface="Arial" panose="020B0604020202020204" pitchFamily="34" charset="0"/>
                 <a:cs typeface="Arial" panose="020B0604020202020204" pitchFamily="34" charset="0"/>
               </a:rPr>
-              <a:t> que tuvo un crecimiento para el modo 0 de 0.121, notamos que es 7.68 veces más, esto tiene que ver con la diferencia entre los índices de refracción del </a:t>
-            </a:r>
-            <a:r>
-              <a:rPr lang="es-CO" sz="1200" dirty="0" err="1">
+              <a:t> the polarization does not change.</a:t>
+            </a:r>
+          </a:p>
+          <a:p>
+            <a:pPr algn="just"/>
+            <a:endParaRPr lang="en-US" sz="1200" dirty="0">
+              <a:latin typeface="Arial" panose="020B0604020202020204" pitchFamily="34" charset="0"/>
+              <a:cs typeface="Arial" panose="020B0604020202020204" pitchFamily="34" charset="0"/>
+            </a:endParaRPr>
+          </a:p>
+          <a:p>
+            <a:pPr algn="just"/>
+            <a:r>
+              <a:rPr lang="en-US" sz="1200" dirty="0">
                 <a:latin typeface="Arial" panose="020B0604020202020204" pitchFamily="34" charset="0"/>
                 <a:cs typeface="Arial" panose="020B0604020202020204" pitchFamily="34" charset="0"/>
               </a:rPr>
-              <a:t>cladding</a:t>
-            </a:r>
-            <a:r>
-              <a:rPr lang="es-CO" sz="1200" dirty="0">
+              <a:t>Finally, in this case t</a:t>
+            </a:r>
+            <a:r>
+              <a:rPr lang="en-US" sz="1200" noProof="0" dirty="0">
                 <a:latin typeface="Arial" panose="020B0604020202020204" pitchFamily="34" charset="0"/>
                 <a:cs typeface="Arial" panose="020B0604020202020204" pitchFamily="34" charset="0"/>
               </a:rPr>
-              <a:t> y del </a:t>
-            </a:r>
-            <a:r>
-              <a:rPr lang="es-CO" sz="1200" dirty="0" err="1">
+              <a:t>he effective index of mode 0 increases from 1.79 to 2.72, corresponding to a difference of 0.93. This indicates that increasing the waveguide width significantly increases mode confinement. When compared with the </a:t>
+            </a:r>
+            <a:r>
+              <a:rPr lang="en-US" sz="1200" noProof="0" dirty="0" err="1">
                 <a:latin typeface="Arial" panose="020B0604020202020204" pitchFamily="34" charset="0"/>
                 <a:cs typeface="Arial" panose="020B0604020202020204" pitchFamily="34" charset="0"/>
               </a:rPr>
-              <a:t>core</a:t>
-            </a:r>
-            <a:r>
-              <a:rPr lang="es-CO" sz="1200" dirty="0">
+              <a:t>SiNx</a:t>
+            </a:r>
+            <a:r>
+              <a:rPr lang="en-US" sz="1200" noProof="0" dirty="0">
                 <a:latin typeface="Arial" panose="020B0604020202020204" pitchFamily="34" charset="0"/>
                 <a:cs typeface="Arial" panose="020B0604020202020204" pitchFamily="34" charset="0"/>
               </a:rPr>
-              <a:t>, ya que en SOI ese contraste es mucho más grande, lo que a su vez le permite confinar más los modos. </a:t>
+              <a:t> case, where the increase for mode 0 was 0.121, the SOI increase is about 7.68 times larger. This is related to the refractive index contrast between the cladding and the core, since in SOI this contrast is much higher, which allows stronger confinement of the modes.</a:t>
             </a:r>
             <a:endParaRPr lang="es-CO" sz="1200" noProof="0" dirty="0">
               <a:latin typeface="Arial" panose="020B0604020202020204" pitchFamily="34" charset="0"/>
@@ -10431,457 +9038,83 @@
           <a:chExt cx="0" cy="0"/>
         </a:xfrm>
       </p:grpSpPr>
-      <mc:AlternateContent xmlns:mc="http://schemas.openxmlformats.org/markup-compatibility/2006" xmlns:a14="http://schemas.microsoft.com/office/drawing/2010/main">
-        <mc:Choice Requires="a14">
-          <p:sp>
-            <p:nvSpPr>
-              <p:cNvPr id="16" name="object 16">
-                <a:extLst>
-                  <a:ext uri="{FF2B5EF4-FFF2-40B4-BE49-F238E27FC236}">
-                    <a16:creationId xmlns:a16="http://schemas.microsoft.com/office/drawing/2014/main" id="{394400B4-EE16-8E85-AB54-E82FE3B29345}"/>
-                  </a:ext>
-                </a:extLst>
-              </p:cNvPr>
-              <p:cNvSpPr txBox="1">
-                <a:spLocks noGrp="1"/>
-              </p:cNvSpPr>
-              <p:nvPr>
-                <p:ph type="title"/>
-              </p:nvPr>
-            </p:nvSpPr>
-            <p:spPr>
-              <a:xfrm>
-                <a:off x="685800" y="152400"/>
-                <a:ext cx="10994410" cy="1071255"/>
-              </a:xfrm>
-              <a:prstGeom prst="rect">
-                <a:avLst/>
-              </a:prstGeom>
-            </p:spPr>
-            <p:txBody>
-              <a:bodyPr vert="horz" wrap="square" lIns="0" tIns="12700" rIns="0" bIns="0" rtlCol="0">
-                <a:spAutoFit/>
-              </a:bodyPr>
-              <a:lstStyle/>
-              <a:p>
-                <a:pPr marL="12700">
-                  <a:lnSpc>
-                    <a:spcPct val="100000"/>
-                  </a:lnSpc>
-                  <a:spcBef>
-                    <a:spcPts val="100"/>
-                  </a:spcBef>
-                </a:pPr>
-                <a:r>
-                  <a:rPr lang="es-CO" sz="2500" noProof="0" dirty="0" err="1"/>
-                  <a:t>Learning</a:t>
-                </a:r>
-                <a:r>
-                  <a:rPr lang="es-CO" sz="2500" noProof="0" dirty="0"/>
-                  <a:t> </a:t>
-                </a:r>
-                <a:r>
-                  <a:rPr lang="es-CO" sz="2500" noProof="0" dirty="0" err="1"/>
-                  <a:t>outcome</a:t>
-                </a:r>
-                <a:r>
-                  <a:rPr lang="es-CO" sz="2500" noProof="0" dirty="0"/>
-                  <a:t> #3 – </a:t>
-                </a:r>
-                <a:r>
-                  <a:rPr lang="es-CO" sz="2500" noProof="0" dirty="0" err="1"/>
-                  <a:t>Waveguide</a:t>
-                </a:r>
-                <a:r>
-                  <a:rPr lang="es-CO" sz="2500" noProof="0" dirty="0"/>
-                  <a:t> compact </a:t>
-                </a:r>
-                <a:r>
-                  <a:rPr lang="es-CO" sz="2500" noProof="0" dirty="0" err="1"/>
-                  <a:t>model</a:t>
-                </a:r>
-                <a:br>
-                  <a:rPr lang="es-CO" sz="2500" spc="-5" noProof="0" dirty="0">
-                    <a:latin typeface="+mj-lt"/>
-                    <a:cs typeface="Lucida Sans"/>
-                  </a:rPr>
-                </a:br>
-                <a:r>
-                  <a:rPr lang="es-CO" b="0" noProof="0" dirty="0" err="1"/>
-                  <a:t>Let’s</a:t>
-                </a:r>
-                <a:r>
-                  <a:rPr lang="es-CO" b="0" noProof="0" dirty="0"/>
-                  <a:t> </a:t>
-                </a:r>
-                <a:r>
-                  <a:rPr lang="es-CO" b="0" noProof="0" dirty="0" err="1"/>
-                  <a:t>model</a:t>
-                </a:r>
-                <a:r>
-                  <a:rPr lang="es-CO" b="0" noProof="0" dirty="0"/>
-                  <a:t> the </a:t>
-                </a:r>
-                <a:r>
-                  <a:rPr lang="es-CO" b="0" noProof="0" dirty="0" err="1"/>
-                  <a:t>waveguide</a:t>
-                </a:r>
-                <a:r>
-                  <a:rPr lang="es-CO" b="0" noProof="0" dirty="0"/>
-                  <a:t> </a:t>
-                </a:r>
-                <a:r>
-                  <a:rPr lang="es-CO" b="0" noProof="0" dirty="0" err="1"/>
-                  <a:t>using</a:t>
-                </a:r>
-                <a:r>
-                  <a:rPr lang="es-CO" b="0" noProof="0" dirty="0"/>
-                  <a:t> a </a:t>
-                </a:r>
-                <a:r>
-                  <a:rPr lang="es-CO" b="0" noProof="0" dirty="0" err="1"/>
-                  <a:t>second</a:t>
-                </a:r>
-                <a:r>
-                  <a:rPr lang="es-CO" b="0" noProof="0" dirty="0"/>
-                  <a:t> </a:t>
-                </a:r>
-                <a:r>
-                  <a:rPr lang="es-CO" b="0" noProof="0" dirty="0" err="1"/>
-                  <a:t>order</a:t>
-                </a:r>
-                <a:r>
-                  <a:rPr lang="es-CO" b="0" noProof="0" dirty="0"/>
-                  <a:t> </a:t>
-                </a:r>
-                <a:r>
-                  <a:rPr lang="es-CO" b="0" noProof="0" dirty="0" err="1"/>
-                  <a:t>polynomial</a:t>
-                </a:r>
-                <a:r>
-                  <a:rPr lang="es-CO" b="0" noProof="0" dirty="0"/>
-                  <a:t>: </a:t>
-                </a:r>
-                <a:br>
-                  <a:rPr lang="es-CO" b="0" noProof="0" dirty="0"/>
-                </a:br>
-                <a14:m>
-                  <m:oMathPara xmlns:m="http://schemas.openxmlformats.org/officeDocument/2006/math">
-                    <m:oMathParaPr>
-                      <m:jc m:val="centerGroup"/>
-                    </m:oMathParaPr>
-                    <m:oMath xmlns:m="http://schemas.openxmlformats.org/officeDocument/2006/math">
-                      <m:sSub>
-                        <m:sSubPr>
-                          <m:ctrlPr>
-                            <a:rPr lang="es-CO" b="0" i="1" noProof="0" smtClean="0">
-                              <a:latin typeface="Cambria Math" panose="02040503050406030204" pitchFamily="18" charset="0"/>
-                            </a:rPr>
-                          </m:ctrlPr>
-                        </m:sSubPr>
-                        <m:e>
-                          <m:r>
-                            <a:rPr lang="es-CO" b="0" i="1" noProof="0" smtClean="0">
-                              <a:latin typeface="Cambria Math" panose="02040503050406030204" pitchFamily="18" charset="0"/>
-                            </a:rPr>
-                            <m:t>𝑛</m:t>
-                          </m:r>
-                        </m:e>
-                        <m:sub>
-                          <m:r>
-                            <a:rPr lang="es-CO" b="0" i="1" noProof="0" smtClean="0">
-                              <a:latin typeface="Cambria Math" panose="02040503050406030204" pitchFamily="18" charset="0"/>
-                            </a:rPr>
-                            <m:t>𝑒𝑓𝑓</m:t>
-                          </m:r>
-                        </m:sub>
-                      </m:sSub>
-                      <m:d>
-                        <m:dPr>
-                          <m:ctrlPr>
-                            <a:rPr lang="es-CO" b="0" i="1" noProof="0" smtClean="0">
-                              <a:latin typeface="Cambria Math" panose="02040503050406030204" pitchFamily="18" charset="0"/>
-                            </a:rPr>
-                          </m:ctrlPr>
-                        </m:dPr>
-                        <m:e>
-                          <m:r>
-                            <a:rPr lang="es-CO" b="0" i="1" noProof="0" smtClean="0">
-                              <a:latin typeface="Cambria Math" panose="02040503050406030204" pitchFamily="18" charset="0"/>
-                            </a:rPr>
-                            <m:t>𝜆</m:t>
-                          </m:r>
-                        </m:e>
-                      </m:d>
-                      <m:r>
-                        <a:rPr lang="es-CO" b="0" i="1" noProof="0" smtClean="0">
-                          <a:latin typeface="Cambria Math" panose="02040503050406030204" pitchFamily="18" charset="0"/>
-                        </a:rPr>
-                        <m:t>=</m:t>
-                      </m:r>
-                      <m:sSub>
-                        <m:sSubPr>
-                          <m:ctrlPr>
-                            <a:rPr lang="es-CO" b="0" i="1" noProof="0" smtClean="0">
-                              <a:latin typeface="Cambria Math" panose="02040503050406030204" pitchFamily="18" charset="0"/>
-                            </a:rPr>
-                          </m:ctrlPr>
-                        </m:sSubPr>
-                        <m:e>
-                          <m:r>
-                            <a:rPr lang="es-CO" b="0" i="1" noProof="0" smtClean="0">
-                              <a:latin typeface="Cambria Math" panose="02040503050406030204" pitchFamily="18" charset="0"/>
-                            </a:rPr>
-                            <m:t>𝑛</m:t>
-                          </m:r>
-                        </m:e>
-                        <m:sub>
-                          <m:r>
-                            <a:rPr lang="es-CO" b="0" i="1" noProof="0" smtClean="0">
-                              <a:latin typeface="Cambria Math" panose="02040503050406030204" pitchFamily="18" charset="0"/>
-                            </a:rPr>
-                            <m:t>1</m:t>
-                          </m:r>
-                        </m:sub>
-                      </m:sSub>
-                      <m:r>
-                        <a:rPr lang="es-CO" b="0" i="1" noProof="0" smtClean="0">
-                          <a:latin typeface="Cambria Math" panose="02040503050406030204" pitchFamily="18" charset="0"/>
-                        </a:rPr>
-                        <m:t>+</m:t>
-                      </m:r>
-                      <m:sSub>
-                        <m:sSubPr>
-                          <m:ctrlPr>
-                            <a:rPr lang="es-CO" b="0" i="1" noProof="0" smtClean="0">
-                              <a:latin typeface="Cambria Math" panose="02040503050406030204" pitchFamily="18" charset="0"/>
-                            </a:rPr>
-                          </m:ctrlPr>
-                        </m:sSubPr>
-                        <m:e>
-                          <m:r>
-                            <a:rPr lang="es-CO" b="0" i="1" noProof="0" smtClean="0">
-                              <a:latin typeface="Cambria Math" panose="02040503050406030204" pitchFamily="18" charset="0"/>
-                            </a:rPr>
-                            <m:t>𝑛</m:t>
-                          </m:r>
-                        </m:e>
-                        <m:sub>
-                          <m:r>
-                            <a:rPr lang="es-CO" b="0" i="1" noProof="0" smtClean="0">
-                              <a:latin typeface="Cambria Math" panose="02040503050406030204" pitchFamily="18" charset="0"/>
-                            </a:rPr>
-                            <m:t>2</m:t>
-                          </m:r>
-                        </m:sub>
-                      </m:sSub>
-                      <m:d>
-                        <m:dPr>
-                          <m:ctrlPr>
-                            <a:rPr lang="es-CO" b="0" i="1" noProof="0" smtClean="0">
-                              <a:latin typeface="Cambria Math" panose="02040503050406030204" pitchFamily="18" charset="0"/>
-                            </a:rPr>
-                          </m:ctrlPr>
-                        </m:dPr>
-                        <m:e>
-                          <m:r>
-                            <a:rPr lang="es-CO" b="0" i="1" noProof="0" smtClean="0">
-                              <a:latin typeface="Cambria Math" panose="02040503050406030204" pitchFamily="18" charset="0"/>
-                            </a:rPr>
-                            <m:t>𝜆</m:t>
-                          </m:r>
-                          <m:r>
-                            <a:rPr lang="es-CO" b="0" i="1" noProof="0" smtClean="0">
-                              <a:latin typeface="Cambria Math" panose="02040503050406030204" pitchFamily="18" charset="0"/>
-                            </a:rPr>
-                            <m:t>−</m:t>
-                          </m:r>
-                          <m:sSub>
-                            <m:sSubPr>
-                              <m:ctrlPr>
-                                <a:rPr lang="es-CO" b="0" i="1" noProof="0" smtClean="0">
-                                  <a:latin typeface="Cambria Math" panose="02040503050406030204" pitchFamily="18" charset="0"/>
-                                </a:rPr>
-                              </m:ctrlPr>
-                            </m:sSubPr>
-                            <m:e>
-                              <m:r>
-                                <a:rPr lang="es-CO" b="0" i="1" noProof="0" smtClean="0">
-                                  <a:latin typeface="Cambria Math" panose="02040503050406030204" pitchFamily="18" charset="0"/>
-                                </a:rPr>
-                                <m:t>𝜆</m:t>
-                              </m:r>
-                            </m:e>
-                            <m:sub>
-                              <m:r>
-                                <a:rPr lang="es-CO" b="0" i="1" noProof="0" smtClean="0">
-                                  <a:latin typeface="Cambria Math" panose="02040503050406030204" pitchFamily="18" charset="0"/>
-                                </a:rPr>
-                                <m:t>0</m:t>
-                              </m:r>
-                            </m:sub>
-                          </m:sSub>
-                        </m:e>
-                      </m:d>
-                      <m:r>
-                        <a:rPr lang="es-CO" b="0" i="1" noProof="0" smtClean="0">
-                          <a:latin typeface="Cambria Math" panose="02040503050406030204" pitchFamily="18" charset="0"/>
-                        </a:rPr>
-                        <m:t>+</m:t>
-                      </m:r>
-                      <m:sSub>
-                        <m:sSubPr>
-                          <m:ctrlPr>
-                            <a:rPr lang="es-CO" b="0" i="1" noProof="0" smtClean="0">
-                              <a:latin typeface="Cambria Math" panose="02040503050406030204" pitchFamily="18" charset="0"/>
-                            </a:rPr>
-                          </m:ctrlPr>
-                        </m:sSubPr>
-                        <m:e>
-                          <m:r>
-                            <a:rPr lang="es-CO" b="0" i="1" noProof="0" smtClean="0">
-                              <a:latin typeface="Cambria Math" panose="02040503050406030204" pitchFamily="18" charset="0"/>
-                            </a:rPr>
-                            <m:t>𝑛</m:t>
-                          </m:r>
-                        </m:e>
-                        <m:sub>
-                          <m:r>
-                            <a:rPr lang="es-CO" b="0" i="1" noProof="0" smtClean="0">
-                              <a:latin typeface="Cambria Math" panose="02040503050406030204" pitchFamily="18" charset="0"/>
-                            </a:rPr>
-                            <m:t>3</m:t>
-                          </m:r>
-                        </m:sub>
-                      </m:sSub>
-                      <m:sSup>
-                        <m:sSupPr>
-                          <m:ctrlPr>
-                            <a:rPr lang="es-CO" b="0" i="1" noProof="0" smtClean="0">
-                              <a:latin typeface="Cambria Math" panose="02040503050406030204" pitchFamily="18" charset="0"/>
-                            </a:rPr>
-                          </m:ctrlPr>
-                        </m:sSupPr>
-                        <m:e>
-                          <m:d>
-                            <m:dPr>
-                              <m:ctrlPr>
-                                <a:rPr lang="es-CO" b="0" i="1" noProof="0" smtClean="0">
-                                  <a:latin typeface="Cambria Math" panose="02040503050406030204" pitchFamily="18" charset="0"/>
-                                </a:rPr>
-                              </m:ctrlPr>
-                            </m:dPr>
-                            <m:e>
-                              <m:r>
-                                <a:rPr lang="es-CO" b="0" i="1" noProof="0" smtClean="0">
-                                  <a:latin typeface="Cambria Math" panose="02040503050406030204" pitchFamily="18" charset="0"/>
-                                </a:rPr>
-                                <m:t>𝜆</m:t>
-                              </m:r>
-                              <m:r>
-                                <a:rPr lang="es-CO" b="0" i="1" noProof="0" smtClean="0">
-                                  <a:latin typeface="Cambria Math" panose="02040503050406030204" pitchFamily="18" charset="0"/>
-                                </a:rPr>
-                                <m:t>−</m:t>
-                              </m:r>
-                              <m:sSub>
-                                <m:sSubPr>
-                                  <m:ctrlPr>
-                                    <a:rPr lang="es-CO" b="0" i="1" noProof="0" smtClean="0">
-                                      <a:latin typeface="Cambria Math" panose="02040503050406030204" pitchFamily="18" charset="0"/>
-                                    </a:rPr>
-                                  </m:ctrlPr>
-                                </m:sSubPr>
-                                <m:e>
-                                  <m:r>
-                                    <a:rPr lang="es-CO" b="0" i="1" noProof="0" smtClean="0">
-                                      <a:latin typeface="Cambria Math" panose="02040503050406030204" pitchFamily="18" charset="0"/>
-                                    </a:rPr>
-                                    <m:t>𝜆</m:t>
-                                  </m:r>
-                                </m:e>
-                                <m:sub>
-                                  <m:r>
-                                    <a:rPr lang="es-CO" b="0" i="1" noProof="0" smtClean="0">
-                                      <a:latin typeface="Cambria Math" panose="02040503050406030204" pitchFamily="18" charset="0"/>
-                                    </a:rPr>
-                                    <m:t>0</m:t>
-                                  </m:r>
-                                </m:sub>
-                              </m:sSub>
-                            </m:e>
-                          </m:d>
-                        </m:e>
-                        <m:sup>
-                          <m:r>
-                            <a:rPr lang="es-CO" b="0" i="1" noProof="0" smtClean="0">
-                              <a:latin typeface="Cambria Math" panose="02040503050406030204" pitchFamily="18" charset="0"/>
-                            </a:rPr>
-                            <m:t>2</m:t>
-                          </m:r>
-                        </m:sup>
-                      </m:sSup>
-                    </m:oMath>
-                  </m:oMathPara>
-                </a14:m>
-                <a:br>
-                  <a:rPr lang="es-CO" b="0" noProof="0" dirty="0"/>
-                </a:br>
-                <a:endParaRPr lang="es-CO" sz="2500" b="0" noProof="0" dirty="0">
-                  <a:latin typeface="+mj-lt"/>
-                  <a:cs typeface="Lucida Sans"/>
-                </a:endParaRPr>
-              </a:p>
-            </p:txBody>
-          </p:sp>
-        </mc:Choice>
-        <mc:Fallback xmlns="">
-          <p:sp>
-            <p:nvSpPr>
-              <p:cNvPr id="16" name="object 16">
-                <a:extLst>
-                  <a:ext uri="{FF2B5EF4-FFF2-40B4-BE49-F238E27FC236}">
-                    <a16:creationId xmlns:a16="http://schemas.microsoft.com/office/drawing/2014/main" id="{394400B4-EE16-8E85-AB54-E82FE3B29345}"/>
-                  </a:ext>
-                </a:extLst>
-              </p:cNvPr>
-              <p:cNvSpPr txBox="1">
-                <a:spLocks noGrp="1" noRot="1" noChangeAspect="1" noMove="1" noResize="1" noEditPoints="1" noAdjustHandles="1" noChangeArrowheads="1" noChangeShapeType="1" noTextEdit="1"/>
-              </p:cNvSpPr>
-              <p:nvPr>
-                <p:ph type="title"/>
-              </p:nvPr>
-            </p:nvSpPr>
-            <p:spPr>
-              <a:xfrm>
-                <a:off x="685800" y="152400"/>
-                <a:ext cx="10994410" cy="1071255"/>
-              </a:xfrm>
-              <a:prstGeom prst="rect">
-                <a:avLst/>
-              </a:prstGeom>
-              <a:blipFill>
-                <a:blip r:embed="rId3"/>
-                <a:stretch>
-                  <a:fillRect l="-1664" t="-7386" b="-4545"/>
-                </a:stretch>
-              </a:blipFill>
-            </p:spPr>
-            <p:txBody>
-              <a:bodyPr/>
-              <a:lstStyle/>
-              <a:p>
-                <a:r>
-                  <a:rPr lang="es-CO">
-                    <a:noFill/>
-                  </a:rPr>
-                  <a:t> </a:t>
-                </a:r>
-              </a:p>
-            </p:txBody>
-          </p:sp>
-        </mc:Fallback>
-      </mc:AlternateContent>
+      <p:sp>
+        <p:nvSpPr>
+          <p:cNvPr id="16" name="object 16">
+            <a:extLst>
+              <a:ext uri="{FF2B5EF4-FFF2-40B4-BE49-F238E27FC236}">
+                <a16:creationId xmlns:a16="http://schemas.microsoft.com/office/drawing/2014/main" id="{394400B4-EE16-8E85-AB54-E82FE3B29345}"/>
+              </a:ext>
+            </a:extLst>
+          </p:cNvPr>
+          <p:cNvSpPr txBox="1">
+            <a:spLocks noGrp="1"/>
+          </p:cNvSpPr>
+          <p:nvPr>
+            <p:ph type="title"/>
+          </p:nvPr>
+        </p:nvSpPr>
+        <p:spPr>
+          <a:xfrm>
+            <a:off x="685800" y="0"/>
+            <a:ext cx="10994410" cy="782265"/>
+          </a:xfrm>
+          <a:prstGeom prst="rect">
+            <a:avLst/>
+          </a:prstGeom>
+        </p:spPr>
+        <p:txBody>
+          <a:bodyPr vert="horz" wrap="square" lIns="0" tIns="12700" rIns="0" bIns="0" rtlCol="0">
+            <a:spAutoFit/>
+          </a:bodyPr>
+          <a:lstStyle/>
+          <a:p>
+            <a:pPr marL="12700">
+              <a:lnSpc>
+                <a:spcPct val="100000"/>
+              </a:lnSpc>
+              <a:spcBef>
+                <a:spcPts val="100"/>
+              </a:spcBef>
+            </a:pPr>
+            <a:r>
+              <a:rPr lang="es-CO" sz="2500" noProof="0" dirty="0" err="1"/>
+              <a:t>Learning</a:t>
+            </a:r>
+            <a:r>
+              <a:rPr lang="es-CO" sz="2500" noProof="0" dirty="0"/>
+              <a:t> </a:t>
+            </a:r>
+            <a:r>
+              <a:rPr lang="es-CO" sz="2500" noProof="0" dirty="0" err="1"/>
+              <a:t>outcome</a:t>
+            </a:r>
+            <a:r>
+              <a:rPr lang="es-CO" sz="2500" noProof="0" dirty="0"/>
+              <a:t> #3 – </a:t>
+            </a:r>
+            <a:r>
+              <a:rPr lang="es-CO" sz="2500" noProof="0" dirty="0" err="1"/>
+              <a:t>Waveguide</a:t>
+            </a:r>
+            <a:r>
+              <a:rPr lang="es-CO" sz="2500" noProof="0" dirty="0"/>
+              <a:t> compact </a:t>
+            </a:r>
+            <a:r>
+              <a:rPr lang="es-CO" sz="2500" noProof="0" dirty="0" err="1"/>
+              <a:t>model</a:t>
+            </a:r>
+            <a:br>
+              <a:rPr lang="es-CO" b="0" noProof="0" dirty="0"/>
+            </a:br>
+            <a:endParaRPr lang="es-CO" sz="2500" b="0" noProof="0" dirty="0">
+              <a:latin typeface="+mj-lt"/>
+              <a:cs typeface="Lucida Sans"/>
+            </a:endParaRPr>
+          </a:p>
+        </p:txBody>
+      </p:sp>
       <p:pic>
         <p:nvPicPr>
           <p:cNvPr id="83" name="Gráfico 82">
@@ -10897,10 +9130,10 @@
           <p:nvPr/>
         </p:nvPicPr>
         <p:blipFill>
-          <a:blip r:embed="rId4">
+          <a:blip r:embed="rId3">
             <a:extLst>
               <a:ext uri="{96DAC541-7B7A-43D3-8B79-37D633B846F1}">
-                <asvg:svgBlip xmlns:asvg="http://schemas.microsoft.com/office/drawing/2016/SVG/main" r:embed="rId5"/>
+                <asvg:svgBlip xmlns:asvg="http://schemas.microsoft.com/office/drawing/2016/SVG/main" r:embed="rId4"/>
               </a:ext>
             </a:extLst>
           </a:blip>
@@ -10980,8 +9213,8 @@
           </a:p>
         </p:txBody>
       </p:sp>
-      <mc:AlternateContent xmlns:mc="http://schemas.openxmlformats.org/markup-compatibility/2006" xmlns:a14="http://schemas.microsoft.com/office/drawing/2010/main">
-        <mc:Choice Requires="a14">
+      <mc:AlternateContent xmlns:mc="http://schemas.openxmlformats.org/markup-compatibility/2006">
+        <mc:Choice xmlns:a14="http://schemas.microsoft.com/office/drawing/2010/main" Requires="a14">
           <p:sp>
             <p:nvSpPr>
               <p:cNvPr id="2" name="CuadroTexto 1">
@@ -10996,8 +9229,8 @@
             </p:nvSpPr>
             <p:spPr>
               <a:xfrm>
-                <a:off x="609441" y="4141710"/>
-                <a:ext cx="11198542" cy="4903586"/>
+                <a:off x="4724400" y="457200"/>
+                <a:ext cx="7327743" cy="5642250"/>
               </a:xfrm>
               <a:prstGeom prst="rect">
                 <a:avLst/>
@@ -11021,68 +9254,23 @@
               <a:p>
                 <a:pPr algn="just"/>
                 <a:r>
-                  <a:rPr lang="es-CO" sz="1200" noProof="0" dirty="0">
+                  <a:rPr lang="en-US" sz="1200" dirty="0">
                     <a:latin typeface="Arial" panose="020B0604020202020204" pitchFamily="34" charset="0"/>
                     <a:cs typeface="Arial" panose="020B0604020202020204" pitchFamily="34" charset="0"/>
                   </a:rPr>
-                  <a:t>En las gráficas observamos como </a:t>
+                  <a:t>T</a:t>
                 </a:r>
                 <a:r>
-                  <a:rPr lang="es-CO" sz="1200" dirty="0" err="1">
+                  <a:rPr lang="en-US" sz="1200" noProof="0" dirty="0">
                     <a:latin typeface="Arial" panose="020B0604020202020204" pitchFamily="34" charset="0"/>
                     <a:cs typeface="Arial" panose="020B0604020202020204" pitchFamily="34" charset="0"/>
                   </a:rPr>
-                  <a:t>second-degree</a:t>
+                  <a:t>he graphs show that a second-degree polynomial fit provides a very good representation of the obtained data in both cases. Using this representation, the results presented in the following table were obtained.</a:t>
                 </a:r>
-                <a:r>
-                  <a:rPr lang="es-CO" sz="1200" dirty="0">
-                    <a:latin typeface="Arial" panose="020B0604020202020204" pitchFamily="34" charset="0"/>
-                    <a:cs typeface="Arial" panose="020B0604020202020204" pitchFamily="34" charset="0"/>
-                  </a:rPr>
-                  <a:t> </a:t>
-                </a:r>
-                <a:r>
-                  <a:rPr lang="es-CO" sz="1200" dirty="0" err="1">
-                    <a:latin typeface="Arial" panose="020B0604020202020204" pitchFamily="34" charset="0"/>
-                    <a:cs typeface="Arial" panose="020B0604020202020204" pitchFamily="34" charset="0"/>
-                  </a:rPr>
-                  <a:t>polynomial</a:t>
-                </a:r>
-                <a:r>
-                  <a:rPr lang="es-CO" sz="1200" dirty="0">
-                    <a:latin typeface="Arial" panose="020B0604020202020204" pitchFamily="34" charset="0"/>
-                    <a:cs typeface="Arial" panose="020B0604020202020204" pitchFamily="34" charset="0"/>
-                  </a:rPr>
-                  <a:t> </a:t>
-                </a:r>
-                <a:r>
-                  <a:rPr lang="es-CO" sz="1200" dirty="0" err="1">
-                    <a:latin typeface="Arial" panose="020B0604020202020204" pitchFamily="34" charset="0"/>
-                    <a:cs typeface="Arial" panose="020B0604020202020204" pitchFamily="34" charset="0"/>
-                  </a:rPr>
-                  <a:t>fit</a:t>
-                </a:r>
-                <a:r>
-                  <a:rPr lang="es-CO" sz="1200" dirty="0">
-                    <a:latin typeface="Arial" panose="020B0604020202020204" pitchFamily="34" charset="0"/>
-                    <a:cs typeface="Arial" panose="020B0604020202020204" pitchFamily="34" charset="0"/>
-                  </a:rPr>
-                  <a:t> es una muy </a:t>
-                </a:r>
-                <a:r>
-                  <a:rPr lang="es-CO" sz="1200" dirty="0" err="1">
-                    <a:latin typeface="Arial" panose="020B0604020202020204" pitchFamily="34" charset="0"/>
-                    <a:cs typeface="Arial" panose="020B0604020202020204" pitchFamily="34" charset="0"/>
-                  </a:rPr>
-                  <a:t>biena</a:t>
-                </a:r>
-                <a:r>
-                  <a:rPr lang="es-CO" sz="1200" dirty="0">
-                    <a:latin typeface="Arial" panose="020B0604020202020204" pitchFamily="34" charset="0"/>
-                    <a:cs typeface="Arial" panose="020B0604020202020204" pitchFamily="34" charset="0"/>
-                  </a:rPr>
-                  <a:t> representación de los campos obtenidos en ambos casos. Con esta representación se obtuvieron los resultados presentados en la siguiente tabla:</a:t>
-                </a:r>
+                <a:endParaRPr lang="es-CO" sz="1200" dirty="0">
+                  <a:latin typeface="Arial" panose="020B0604020202020204" pitchFamily="34" charset="0"/>
+                  <a:cs typeface="Arial" panose="020B0604020202020204" pitchFamily="34" charset="0"/>
+                </a:endParaRPr>
               </a:p>
               <a:p>
                 <a:pPr algn="just"/>
@@ -11128,7 +9316,7 @@
               </a:p>
               <a:p>
                 <a:pPr algn="just"/>
-                <a:endParaRPr lang="es-CO" sz="1200" noProof="0" dirty="0">
+                <a:endParaRPr lang="es-CO" sz="1200" dirty="0">
                   <a:latin typeface="Arial" panose="020B0604020202020204" pitchFamily="34" charset="0"/>
                   <a:cs typeface="Arial" panose="020B0604020202020204" pitchFamily="34" charset="0"/>
                 </a:endParaRPr>
@@ -11136,130 +9324,29 @@
               <a:p>
                 <a:pPr algn="just"/>
                 <a:r>
-                  <a:rPr lang="es-CO" sz="1200" dirty="0">
+                  <a:rPr lang="en-US" sz="1200" dirty="0">
                     <a:latin typeface="Arial" panose="020B0604020202020204" pitchFamily="34" charset="0"/>
                     <a:cs typeface="Arial" panose="020B0604020202020204" pitchFamily="34" charset="0"/>
                   </a:rPr>
-                  <a:t>En el caso de la </a:t>
-                </a:r>
-                <a:r>
-                  <a:rPr lang="es-CO" sz="1200" dirty="0" err="1">
-                    <a:latin typeface="Arial" panose="020B0604020202020204" pitchFamily="34" charset="0"/>
-                    <a:cs typeface="Arial" panose="020B0604020202020204" pitchFamily="34" charset="0"/>
-                  </a:rPr>
-                  <a:t>shallow</a:t>
-                </a:r>
-                <a:r>
-                  <a:rPr lang="es-CO" sz="1200" dirty="0">
-                    <a:latin typeface="Arial" panose="020B0604020202020204" pitchFamily="34" charset="0"/>
-                    <a:cs typeface="Arial" panose="020B0604020202020204" pitchFamily="34" charset="0"/>
-                  </a:rPr>
-                  <a:t> </a:t>
-                </a:r>
-                <a:r>
-                  <a:rPr lang="es-CO" sz="1200" dirty="0" err="1">
-                    <a:latin typeface="Arial" panose="020B0604020202020204" pitchFamily="34" charset="0"/>
-                    <a:cs typeface="Arial" panose="020B0604020202020204" pitchFamily="34" charset="0"/>
-                  </a:rPr>
-                  <a:t>waveguide</a:t>
-                </a:r>
-                <a:r>
-                  <a:rPr lang="es-CO" sz="1200" dirty="0">
-                    <a:latin typeface="Arial" panose="020B0604020202020204" pitchFamily="34" charset="0"/>
-                    <a:cs typeface="Arial" panose="020B0604020202020204" pitchFamily="34" charset="0"/>
-                  </a:rPr>
-                  <a:t> los modos TE0 y TM0 están viajando más confinados a comparación de la Deep </a:t>
-                </a:r>
-                <a:r>
-                  <a:rPr lang="es-CO" sz="1200" dirty="0" err="1">
-                    <a:latin typeface="Arial" panose="020B0604020202020204" pitchFamily="34" charset="0"/>
-                    <a:cs typeface="Arial" panose="020B0604020202020204" pitchFamily="34" charset="0"/>
-                  </a:rPr>
-                  <a:t>waveguide</a:t>
-                </a:r>
-                <a:r>
-                  <a:rPr lang="es-CO" sz="1200" dirty="0">
-                    <a:latin typeface="Arial" panose="020B0604020202020204" pitchFamily="34" charset="0"/>
-                    <a:cs typeface="Arial" panose="020B0604020202020204" pitchFamily="34" charset="0"/>
-                  </a:rPr>
-                  <a:t>, esto es debido a que en la guía </a:t>
-                </a:r>
-                <a:r>
-                  <a:rPr lang="es-CO" sz="1200" dirty="0" err="1">
-                    <a:latin typeface="Arial" panose="020B0604020202020204" pitchFamily="34" charset="0"/>
-                    <a:cs typeface="Arial" panose="020B0604020202020204" pitchFamily="34" charset="0"/>
-                  </a:rPr>
-                  <a:t>shallow</a:t>
-                </a:r>
-                <a:r>
-                  <a:rPr lang="es-CO" sz="1200" dirty="0">
-                    <a:latin typeface="Arial" panose="020B0604020202020204" pitchFamily="34" charset="0"/>
-                    <a:cs typeface="Arial" panose="020B0604020202020204" pitchFamily="34" charset="0"/>
-                  </a:rPr>
-                  <a:t> pusimos un </a:t>
-                </a:r>
-                <a:r>
-                  <a:rPr lang="es-CO" sz="1200" dirty="0" err="1">
-                    <a:latin typeface="Arial" panose="020B0604020202020204" pitchFamily="34" charset="0"/>
-                    <a:cs typeface="Arial" panose="020B0604020202020204" pitchFamily="34" charset="0"/>
-                  </a:rPr>
-                  <a:t>slab</a:t>
-                </a:r>
-                <a:r>
-                  <a:rPr lang="es-CO" sz="1200" dirty="0">
-                    <a:latin typeface="Arial" panose="020B0604020202020204" pitchFamily="34" charset="0"/>
-                    <a:cs typeface="Arial" panose="020B0604020202020204" pitchFamily="34" charset="0"/>
-                  </a:rPr>
-                  <a:t> que logra capturar un poco más de energía del modo. Con respecto a los índices de grupo vemos que en la Deep wave guide se introduce un poco más de retardo que en la guía </a:t>
-                </a:r>
-                <a:r>
-                  <a:rPr lang="es-CO" sz="1200" dirty="0" err="1">
-                    <a:latin typeface="Arial" panose="020B0604020202020204" pitchFamily="34" charset="0"/>
-                    <a:cs typeface="Arial" panose="020B0604020202020204" pitchFamily="34" charset="0"/>
-                  </a:rPr>
-                  <a:t>shallow</a:t>
-                </a:r>
-                <a:r>
-                  <a:rPr lang="es-CO" sz="1200" dirty="0">
-                    <a:latin typeface="Arial" panose="020B0604020202020204" pitchFamily="34" charset="0"/>
-                    <a:cs typeface="Arial" panose="020B0604020202020204" pitchFamily="34" charset="0"/>
-                  </a:rPr>
-                  <a:t>, además el modo TE viaja con más retardo que el modo TM.</a:t>
+                  <a:t>In the case of the shallow waveguide, the TE0 and TM0 modes travel more confined compared to the deep waveguide. This is because in the shallow waveguide a slab was introduced, which allows the structure to capture a larger portion of the modal energy. Regarding the group indices, we observe that the deep waveguide introduces slightly more delay than the shallow waveguide. Additionally, the TE mode experiences more delay than the TM mode.</a:t>
                 </a:r>
               </a:p>
               <a:p>
                 <a:pPr algn="just"/>
+                <a:endParaRPr lang="en-US" sz="1200" dirty="0">
+                  <a:latin typeface="Arial" panose="020B0604020202020204" pitchFamily="34" charset="0"/>
+                  <a:cs typeface="Arial" panose="020B0604020202020204" pitchFamily="34" charset="0"/>
+                </a:endParaRPr>
+              </a:p>
+              <a:p>
+                <a:pPr algn="just"/>
                 <a:r>
-                  <a:rPr lang="es-CO" sz="1200" dirty="0" err="1">
+                  <a:rPr lang="en-US" sz="1200" dirty="0">
                     <a:latin typeface="Arial" panose="020B0604020202020204" pitchFamily="34" charset="0"/>
                     <a:cs typeface="Arial" panose="020B0604020202020204" pitchFamily="34" charset="0"/>
                   </a:rPr>
-                  <a:t>Tambien</a:t>
+                  <a:t>Another relationship can also be observed: the stronger the confinement, the smaller the group index. At this point, it is important to evaluate the objective of the device. If the goal is to introduce a delay in the signal, this behavior could be useful, as it may generate a phase shift if that is desired. It is also important to note that the free spectral range (FSR) depends on the group index, since</a:t>
                 </a:r>
-                <a:r>
-                  <a:rPr lang="es-CO" sz="1200" dirty="0">
-                    <a:latin typeface="Arial" panose="020B0604020202020204" pitchFamily="34" charset="0"/>
-                    <a:cs typeface="Arial" panose="020B0604020202020204" pitchFamily="34" charset="0"/>
-                  </a:rPr>
-                  <a:t> se observa una relación y es que entre mayor es el confinamiento menor es el índice de grupo. Aquí tendríamos que evaluar que se busca en el dispositivo, si buscamos un retraso d </a:t>
-                </a:r>
-                <a:r>
-                  <a:rPr lang="es-CO" sz="1200" dirty="0" err="1">
-                    <a:latin typeface="Arial" panose="020B0604020202020204" pitchFamily="34" charset="0"/>
-                    <a:cs typeface="Arial" panose="020B0604020202020204" pitchFamily="34" charset="0"/>
-                  </a:rPr>
-                  <a:t>ela</a:t>
-                </a:r>
-                <a:r>
-                  <a:rPr lang="es-CO" sz="1200" dirty="0">
-                    <a:latin typeface="Arial" panose="020B0604020202020204" pitchFamily="34" charset="0"/>
-                    <a:cs typeface="Arial" panose="020B0604020202020204" pitchFamily="34" charset="0"/>
-                  </a:rPr>
-                  <a:t> señal o no, esto podría tal vez generar un desfase si es lo que queremos. También tenemos en cuenta que el FSR depende del índice de grupo, pues </a:t>
-                </a:r>
-              </a:p>
-              <a:p>
-                <a:pPr algn="just"/>
                 <a:endParaRPr lang="es-CO" sz="1200" dirty="0">
                   <a:latin typeface="Arial" panose="020B0604020202020204" pitchFamily="34" charset="0"/>
                   <a:cs typeface="Arial" panose="020B0604020202020204" pitchFamily="34" charset="0"/>
@@ -11329,7 +9416,17 @@
               </a:p>
               <a:p>
                 <a:pPr algn="just"/>
-                <a:endParaRPr lang="es-CO" sz="1200" noProof="0" dirty="0">
+                <a:r>
+                  <a:rPr lang="en-US" sz="1200" noProof="0" dirty="0">
+                    <a:latin typeface="Arial" panose="020B0604020202020204" pitchFamily="34" charset="0"/>
+                    <a:cs typeface="Arial" panose="020B0604020202020204" pitchFamily="34" charset="0"/>
+                  </a:rPr>
+                  <a:t>Therefore, if a large FSR is desired, the waveguide should be designed such that the group index is small; otherwise, increasing the group index will reduce the FSR.</a:t>
+                </a:r>
+              </a:p>
+              <a:p>
+                <a:pPr algn="just"/>
+                <a:endParaRPr lang="en-US" sz="1200" noProof="0" dirty="0">
                   <a:latin typeface="Arial" panose="020B0604020202020204" pitchFamily="34" charset="0"/>
                   <a:cs typeface="Arial" panose="020B0604020202020204" pitchFamily="34" charset="0"/>
                 </a:endParaRPr>
@@ -11337,119 +9434,11 @@
               <a:p>
                 <a:pPr algn="just"/>
                 <a:r>
-                  <a:rPr lang="es-CO" sz="1200" dirty="0">
+                  <a:rPr lang="en-US" sz="1200" noProof="0" dirty="0">
                     <a:latin typeface="Arial" panose="020B0604020202020204" pitchFamily="34" charset="0"/>
                     <a:cs typeface="Arial" panose="020B0604020202020204" pitchFamily="34" charset="0"/>
                   </a:rPr>
-                  <a:t>Así que si buscamos un FSR grande podríamos buscar que nuestra guía de onda haga que este índice sea pequeño, de lo contrario haríamos que este aumente.</a:t>
-                </a:r>
-              </a:p>
-              <a:p>
-                <a:pPr algn="just"/>
-                <a:endParaRPr lang="es-CO" sz="1200" noProof="0" dirty="0">
-                  <a:latin typeface="Arial" panose="020B0604020202020204" pitchFamily="34" charset="0"/>
-                  <a:cs typeface="Arial" panose="020B0604020202020204" pitchFamily="34" charset="0"/>
-                </a:endParaRPr>
-              </a:p>
-              <a:p>
-                <a:pPr algn="just"/>
-                <a:endParaRPr lang="es-CO" sz="1200" noProof="0" dirty="0">
-                  <a:latin typeface="Arial" panose="020B0604020202020204" pitchFamily="34" charset="0"/>
-                  <a:cs typeface="Arial" panose="020B0604020202020204" pitchFamily="34" charset="0"/>
-                </a:endParaRPr>
-              </a:p>
-              <a:p>
-                <a:pPr algn="just"/>
-                <a:r>
-                  <a:rPr lang="es-CO" sz="1200" dirty="0">
-                    <a:latin typeface="Arial" panose="020B0604020202020204" pitchFamily="34" charset="0"/>
-                    <a:cs typeface="Arial" panose="020B0604020202020204" pitchFamily="34" charset="0"/>
-                  </a:rPr>
-                  <a:t>Ahora con respecto a la dispersión vemos que tenemos muy poca dispersión, lo cual es positivo, ya que en ninguna de las </a:t>
-                </a:r>
-                <a:r>
-                  <a:rPr lang="es-CO" sz="1200" dirty="0" err="1">
-                    <a:latin typeface="Arial" panose="020B0604020202020204" pitchFamily="34" charset="0"/>
-                    <a:cs typeface="Arial" panose="020B0604020202020204" pitchFamily="34" charset="0"/>
-                  </a:rPr>
-                  <a:t>guias</a:t>
-                </a:r>
-                <a:r>
-                  <a:rPr lang="es-CO" sz="1200" dirty="0">
-                    <a:latin typeface="Arial" panose="020B0604020202020204" pitchFamily="34" charset="0"/>
-                    <a:cs typeface="Arial" panose="020B0604020202020204" pitchFamily="34" charset="0"/>
-                  </a:rPr>
-                  <a:t> de onda se estaría deformando tanto la señal que ingresa a ella, en este caso vemos que en particular el caso TM0 de la Deep </a:t>
-                </a:r>
-                <a:r>
-                  <a:rPr lang="es-CO" sz="1200" dirty="0" err="1">
-                    <a:latin typeface="Arial" panose="020B0604020202020204" pitchFamily="34" charset="0"/>
-                    <a:cs typeface="Arial" panose="020B0604020202020204" pitchFamily="34" charset="0"/>
-                  </a:rPr>
-                  <a:t>waveguide</a:t>
-                </a:r>
-                <a:r>
-                  <a:rPr lang="es-CO" sz="1200" dirty="0">
-                    <a:latin typeface="Arial" panose="020B0604020202020204" pitchFamily="34" charset="0"/>
-                    <a:cs typeface="Arial" panose="020B0604020202020204" pitchFamily="34" charset="0"/>
-                  </a:rPr>
-                  <a:t> se </a:t>
-                </a:r>
-                <a:r>
-                  <a:rPr lang="es-CO" sz="1200" dirty="0" err="1">
-                    <a:latin typeface="Arial" panose="020B0604020202020204" pitchFamily="34" charset="0"/>
-                    <a:cs typeface="Arial" panose="020B0604020202020204" pitchFamily="34" charset="0"/>
-                  </a:rPr>
-                  <a:t>deporma</a:t>
-                </a:r>
-                <a:r>
-                  <a:rPr lang="es-CO" sz="1200" dirty="0">
-                    <a:latin typeface="Arial" panose="020B0604020202020204" pitchFamily="34" charset="0"/>
-                    <a:cs typeface="Arial" panose="020B0604020202020204" pitchFamily="34" charset="0"/>
-                  </a:rPr>
-                  <a:t> casi el doble que los otros modos. Con respecto al TE0 vemos que son muy parecidos para ambas </a:t>
-                </a:r>
-                <a:r>
-                  <a:rPr lang="es-CO" sz="1200" dirty="0" err="1">
-                    <a:latin typeface="Arial" panose="020B0604020202020204" pitchFamily="34" charset="0"/>
-                    <a:cs typeface="Arial" panose="020B0604020202020204" pitchFamily="34" charset="0"/>
-                  </a:rPr>
-                  <a:t>guias</a:t>
-                </a:r>
-                <a:r>
-                  <a:rPr lang="es-CO" sz="1200" dirty="0">
-                    <a:latin typeface="Arial" panose="020B0604020202020204" pitchFamily="34" charset="0"/>
-                    <a:cs typeface="Arial" panose="020B0604020202020204" pitchFamily="34" charset="0"/>
-                  </a:rPr>
-                  <a:t>, esto puede deberse a que el crecimiento </a:t>
-                </a:r>
-                <a:r>
-                  <a:rPr lang="es-CO" sz="1200" dirty="0" err="1">
-                    <a:latin typeface="Arial" panose="020B0604020202020204" pitchFamily="34" charset="0"/>
-                    <a:cs typeface="Arial" panose="020B0604020202020204" pitchFamily="34" charset="0"/>
-                  </a:rPr>
-                  <a:t>parabolico</a:t>
-                </a:r>
-                <a:r>
-                  <a:rPr lang="es-CO" sz="1200" dirty="0">
-                    <a:latin typeface="Arial" panose="020B0604020202020204" pitchFamily="34" charset="0"/>
-                    <a:cs typeface="Arial" panose="020B0604020202020204" pitchFamily="34" charset="0"/>
-                  </a:rPr>
-                  <a:t> en ambos casos es muy parecido, es decir el </a:t>
-                </a:r>
-                <a:r>
-                  <a:rPr lang="es-CO" sz="1200" dirty="0" err="1">
-                    <a:latin typeface="Arial" panose="020B0604020202020204" pitchFamily="34" charset="0"/>
-                    <a:cs typeface="Arial" panose="020B0604020202020204" pitchFamily="34" charset="0"/>
-                  </a:rPr>
-                  <a:t>infdice</a:t>
-                </a:r>
-                <a:r>
-                  <a:rPr lang="es-CO" sz="1200" dirty="0">
-                    <a:latin typeface="Arial" panose="020B0604020202020204" pitchFamily="34" charset="0"/>
-                    <a:cs typeface="Arial" panose="020B0604020202020204" pitchFamily="34" charset="0"/>
-                  </a:rPr>
-                  <a:t> efectivo varia en una cantidad similar al aumentar la longitud de onda, es decir que n_3 es parecido en la aproximación. </a:t>
+                  <a:t>Now, regarding dispersion, we observe that it is very small in both cases, which is positive since the signal entering the waveguide will not experience significant distortion. In this case, we see that the TM0 mode of the deep waveguide undergoes almost twice the deformation compared to the other modes. For the TE0 mode, the results are very similar for both waveguides. This may be because the parabolic growth in both cases is very similar, meaning that the effective index varies by a similar amount as the wavelength increases. In other words, the parameter n_3​ in the approximation is similar for both cases.</a:t>
                 </a:r>
                 <a:endParaRPr lang="es-CO" sz="1200" noProof="0" dirty="0">
                   <a:latin typeface="Arial" panose="020B0604020202020204" pitchFamily="34" charset="0"/>
@@ -11459,7 +9448,7 @@
             </p:txBody>
           </p:sp>
         </mc:Choice>
-        <mc:Fallback xmlns="">
+        <mc:Fallback>
           <p:sp>
             <p:nvSpPr>
               <p:cNvPr id="2" name="CuadroTexto 1">
@@ -11476,14 +9465,14 @@
             </p:nvSpPr>
             <p:spPr>
               <a:xfrm>
-                <a:off x="609441" y="4141710"/>
-                <a:ext cx="11198542" cy="4903586"/>
+                <a:off x="4724400" y="457200"/>
+                <a:ext cx="7327743" cy="5642250"/>
               </a:xfrm>
               <a:prstGeom prst="rect">
                 <a:avLst/>
               </a:prstGeom>
               <a:blipFill>
-                <a:blip r:embed="rId6"/>
+                <a:blip r:embed="rId5"/>
                 <a:stretch>
                   <a:fillRect/>
                 </a:stretch>
@@ -11523,8 +9512,8 @@
         </p:nvSpPr>
         <p:spPr>
           <a:xfrm>
-            <a:off x="609441" y="1447800"/>
-            <a:ext cx="5486559" cy="2610410"/>
+            <a:off x="76200" y="457200"/>
+            <a:ext cx="4572000" cy="5642250"/>
           </a:xfrm>
           <a:prstGeom prst="rect">
             <a:avLst/>
@@ -11561,64 +9550,42 @@
           </a:p>
         </p:txBody>
       </p:sp>
-      <p:sp>
-        <p:nvSpPr>
-          <p:cNvPr id="6" name="Rectángulo 5">
-            <a:extLst>
-              <a:ext uri="{FF2B5EF4-FFF2-40B4-BE49-F238E27FC236}">
-                <a16:creationId xmlns:a16="http://schemas.microsoft.com/office/drawing/2014/main" id="{2886628E-6E58-1F7E-B6C6-432B9A228397}"/>
-              </a:ext>
-            </a:extLst>
-          </p:cNvPr>
-          <p:cNvSpPr/>
+      <p:pic>
+        <p:nvPicPr>
+          <p:cNvPr id="17" name="Imagen 16" descr="Gráfico, Gráfico de líneas&#10;&#10;El contenido generado por IA puede ser incorrecto.">
+            <a:extLst>
+              <a:ext uri="{FF2B5EF4-FFF2-40B4-BE49-F238E27FC236}">
+                <a16:creationId xmlns:a16="http://schemas.microsoft.com/office/drawing/2014/main" id="{BE94B7BA-BEA9-77DB-25D4-B0C1E1B7A340}"/>
+              </a:ext>
+            </a:extLst>
+          </p:cNvPr>
+          <p:cNvPicPr>
+            <a:picLocks noChangeAspect="1"/>
+          </p:cNvPicPr>
           <p:nvPr/>
-        </p:nvSpPr>
+        </p:nvPicPr>
+        <p:blipFill>
+          <a:blip r:embed="rId6"/>
+          <a:stretch>
+            <a:fillRect/>
+          </a:stretch>
+        </p:blipFill>
         <p:spPr>
           <a:xfrm>
-            <a:off x="6321424" y="1447800"/>
-            <a:ext cx="5486559" cy="2610410"/>
+            <a:off x="112200" y="3560811"/>
+            <a:ext cx="4500000" cy="2332004"/>
           </a:xfrm>
           <a:prstGeom prst="rect">
             <a:avLst/>
           </a:prstGeom>
-          <a:noFill/>
-          <a:ln w="28575">
-            <a:solidFill>
-              <a:srgbClr val="E0700D"/>
-            </a:solidFill>
-          </a:ln>
         </p:spPr>
-        <p:style>
-          <a:lnRef idx="2">
-            <a:schemeClr val="accent1">
-              <a:shade val="15000"/>
-            </a:schemeClr>
-          </a:lnRef>
-          <a:fillRef idx="1">
-            <a:schemeClr val="accent1"/>
-          </a:fillRef>
-          <a:effectRef idx="0">
-            <a:schemeClr val="accent1"/>
-          </a:effectRef>
-          <a:fontRef idx="minor">
-            <a:schemeClr val="lt1"/>
-          </a:fontRef>
-        </p:style>
-        <p:txBody>
-          <a:bodyPr rtlCol="0" anchor="ctr"/>
-          <a:lstStyle/>
-          <a:p>
-            <a:pPr algn="ctr"/>
-            <a:endParaRPr lang="es-CO" noProof="0" dirty="0"/>
-          </a:p>
-        </p:txBody>
-      </p:sp>
+      </p:pic>
       <p:pic>
         <p:nvPicPr>
-          <p:cNvPr id="17" name="Imagen 16" descr="Gráfico, Gráfico de líneas&#10;&#10;El contenido generado por IA puede ser incorrecto.">
-            <a:extLst>
-              <a:ext uri="{FF2B5EF4-FFF2-40B4-BE49-F238E27FC236}">
-                <a16:creationId xmlns:a16="http://schemas.microsoft.com/office/drawing/2014/main" id="{BE94B7BA-BEA9-77DB-25D4-B0C1E1B7A340}"/>
+          <p:cNvPr id="19" name="Imagen 18" descr="Gráfico, Gráfico de líneas&#10;&#10;El contenido generado por IA puede ser incorrecto.">
+            <a:extLst>
+              <a:ext uri="{FF2B5EF4-FFF2-40B4-BE49-F238E27FC236}">
+                <a16:creationId xmlns:a16="http://schemas.microsoft.com/office/drawing/2014/main" id="{E5F3E715-F114-4B12-4BFA-AFC8E512D656}"/>
               </a:ext>
             </a:extLst>
           </p:cNvPr>
@@ -11635,38 +9602,8 @@
         </p:blipFill>
         <p:spPr>
           <a:xfrm>
-            <a:off x="6463911" y="1518600"/>
-            <a:ext cx="4862769" cy="2520000"/>
-          </a:xfrm>
-          <a:prstGeom prst="rect">
-            <a:avLst/>
-          </a:prstGeom>
-        </p:spPr>
-      </p:pic>
-      <p:pic>
-        <p:nvPicPr>
-          <p:cNvPr id="19" name="Imagen 18" descr="Gráfico, Gráfico de líneas&#10;&#10;El contenido generado por IA puede ser incorrecto.">
-            <a:extLst>
-              <a:ext uri="{FF2B5EF4-FFF2-40B4-BE49-F238E27FC236}">
-                <a16:creationId xmlns:a16="http://schemas.microsoft.com/office/drawing/2014/main" id="{E5F3E715-F114-4B12-4BFA-AFC8E512D656}"/>
-              </a:ext>
-            </a:extLst>
-          </p:cNvPr>
-          <p:cNvPicPr>
-            <a:picLocks noChangeAspect="1"/>
-          </p:cNvPicPr>
-          <p:nvPr/>
-        </p:nvPicPr>
-        <p:blipFill>
-          <a:blip r:embed="rId8"/>
-          <a:stretch>
-            <a:fillRect/>
-          </a:stretch>
-        </p:blipFill>
-        <p:spPr>
-          <a:xfrm>
-            <a:off x="977351" y="1518600"/>
-            <a:ext cx="4862770" cy="2520000"/>
+            <a:off x="139857" y="883900"/>
+            <a:ext cx="4500000" cy="2332004"/>
           </a:xfrm>
           <a:prstGeom prst="rect">
             <a:avLst/>
@@ -11685,22 +9622,28 @@
           <p:cNvGraphicFramePr>
             <a:graphicFrameLocks noChangeAspect="1"/>
           </p:cNvGraphicFramePr>
-          <p:nvPr/>
+          <p:nvPr>
+            <p:extLst>
+              <p:ext uri="{D42A27DB-BD31-4B8C-83A1-F6EECF244321}">
+                <p14:modId xmlns:p14="http://schemas.microsoft.com/office/powerpoint/2010/main" val="70288703"/>
+              </p:ext>
+            </p:extLst>
+          </p:nvPr>
         </p:nvGraphicFramePr>
         <p:xfrm>
-          <a:off x="3810000" y="4703476"/>
-          <a:ext cx="3819525" cy="1000125"/>
+          <a:off x="6535293" y="1038872"/>
+          <a:ext cx="3429000" cy="897868"/>
         </p:xfrm>
         <a:graphic>
           <a:graphicData uri="http://schemas.openxmlformats.org/presentationml/2006/ole">
             <mc:AlternateContent xmlns:mc="http://schemas.openxmlformats.org/markup-compatibility/2006">
               <mc:Choice xmlns:v="urn:schemas-microsoft-com:vml" Requires="v">
-                <p:oleObj name="Worksheet" r:id="rId9" imgW="3819552" imgH="1000026" progId="Excel.Sheet.12">
+                <p:oleObj name="Worksheet" r:id="rId8" imgW="3819552" imgH="1000026" progId="Excel.Sheet.12">
                   <p:embed/>
                 </p:oleObj>
               </mc:Choice>
               <mc:Fallback>
-                <p:oleObj name="Worksheet" r:id="rId9" imgW="3819552" imgH="1000026" progId="Excel.Sheet.12">
+                <p:oleObj name="Worksheet" r:id="rId8" imgW="3819552" imgH="1000026" progId="Excel.Sheet.12">
                   <p:embed/>
                   <p:pic>
                     <p:nvPicPr>
@@ -11715,15 +9658,15 @@
                       <p:nvPr/>
                     </p:nvPicPr>
                     <p:blipFill>
-                      <a:blip r:embed="rId10"/>
+                      <a:blip r:embed="rId9"/>
                       <a:stretch>
                         <a:fillRect/>
                       </a:stretch>
                     </p:blipFill>
                     <p:spPr>
                       <a:xfrm>
-                        <a:off x="3810000" y="4703476"/>
-                        <a:ext cx="3819525" cy="1000125"/>
+                        <a:off x="6535293" y="1038872"/>
+                        <a:ext cx="3429000" cy="897868"/>
                       </a:xfrm>
                       <a:prstGeom prst="rect">
                         <a:avLst/>
@@ -12021,7 +9964,7 @@
         <p:spPr>
           <a:xfrm>
             <a:off x="384408" y="4860334"/>
-            <a:ext cx="11578992" cy="1384995"/>
+            <a:ext cx="11578992" cy="830997"/>
           </a:xfrm>
           <a:prstGeom prst="rect">
             <a:avLst/>
@@ -12045,50 +9988,12 @@
           <a:p>
             <a:pPr algn="just"/>
             <a:r>
-              <a:rPr lang="es-CO" sz="1200" noProof="0" dirty="0">
+              <a:rPr lang="en-US" sz="1200" noProof="0" dirty="0">
                 <a:latin typeface="Arial" panose="020B0604020202020204" pitchFamily="34" charset="0"/>
                 <a:cs typeface="Arial" panose="020B0604020202020204" pitchFamily="34" charset="0"/>
               </a:rPr>
-              <a:t>Primero miramos como cambia el índice efectivo con respecto al radio de curvatura, encontramos que, en ambos casos (TE0 y TM0) </a:t>
-            </a:r>
-            <a:r>
-              <a:rPr lang="es-CO" sz="1200" dirty="0">
-                <a:latin typeface="Arial" panose="020B0604020202020204" pitchFamily="34" charset="0"/>
-                <a:cs typeface="Arial" panose="020B0604020202020204" pitchFamily="34" charset="0"/>
-              </a:rPr>
-              <a:t>a medida que aumenta el radio de curvatura se disminuye el índice efectivo, es decir, que viajan cada vez menos confinados los modos, acercándose cada vez más al índice de refracción del </a:t>
-            </a:r>
-            <a:r>
-              <a:rPr lang="es-CO" sz="1200" dirty="0" err="1">
-                <a:latin typeface="Arial" panose="020B0604020202020204" pitchFamily="34" charset="0"/>
-                <a:cs typeface="Arial" panose="020B0604020202020204" pitchFamily="34" charset="0"/>
-              </a:rPr>
-              <a:t>cladding</a:t>
-            </a:r>
-            <a:r>
-              <a:rPr lang="es-CO" sz="1200" dirty="0">
-                <a:latin typeface="Arial" panose="020B0604020202020204" pitchFamily="34" charset="0"/>
-                <a:cs typeface="Arial" panose="020B0604020202020204" pitchFamily="34" charset="0"/>
-              </a:rPr>
-              <a:t>. También en ambos casos la variación es muy muy pequeña, pues si observamos la primera gráfica vemos como es casi nula a comparación de la escala que se maneja allí. </a:t>
-            </a:r>
-            <a:r>
-              <a:rPr lang="es-CO" sz="1200" noProof="0" dirty="0">
-                <a:latin typeface="Arial" panose="020B0604020202020204" pitchFamily="34" charset="0"/>
-                <a:cs typeface="Arial" panose="020B0604020202020204" pitchFamily="34" charset="0"/>
-              </a:rPr>
-              <a:t> </a:t>
-            </a:r>
-          </a:p>
-          <a:p>
-            <a:pPr algn="just"/>
-            <a:endParaRPr lang="es-CO" sz="1200" noProof="0" dirty="0">
-              <a:latin typeface="Arial" panose="020B0604020202020204" pitchFamily="34" charset="0"/>
-              <a:cs typeface="Arial" panose="020B0604020202020204" pitchFamily="34" charset="0"/>
-            </a:endParaRPr>
-          </a:p>
-          <a:p>
-            <a:pPr algn="just"/>
+              <a:t>First, we analyze how the effective index changes with respect to the bending radius. We find that in both cases (TE0 and TM0), as the bending radius increases, the effective index slightly decreases. This means that the modes become slightly less confined, approaching the refractive index of the cladding. In both cases the variation is extremely small; as seen in the first graph, the change is almost negligible compared with the scale used.</a:t>
+            </a:r>
             <a:endParaRPr lang="es-CO" sz="1200" noProof="0" dirty="0">
               <a:latin typeface="Arial" panose="020B0604020202020204" pitchFamily="34" charset="0"/>
               <a:cs typeface="Arial" panose="020B0604020202020204" pitchFamily="34" charset="0"/>
@@ -12530,7 +10435,7 @@
         <p:spPr>
           <a:xfrm>
             <a:off x="6670198" y="1397590"/>
-            <a:ext cx="5165997" cy="4524315"/>
+            <a:ext cx="5165997" cy="4708981"/>
           </a:xfrm>
           <a:prstGeom prst="rect">
             <a:avLst/>
@@ -12554,270 +10459,113 @@
           <a:p>
             <a:pPr algn="just"/>
             <a:r>
-              <a:rPr lang="es-CO" sz="1200" noProof="0" dirty="0" err="1">
+              <a:rPr lang="en-US" sz="1200" noProof="0" dirty="0">
                 <a:latin typeface="Arial" panose="020B0604020202020204" pitchFamily="34" charset="0"/>
                 <a:cs typeface="Arial" panose="020B0604020202020204" pitchFamily="34" charset="0"/>
               </a:rPr>
-              <a:t>Comment</a:t>
-            </a:r>
-            <a:r>
-              <a:rPr lang="es-CO" sz="1200" noProof="0" dirty="0">
+              <a:t>Next, when analyzing the losses, we find that </a:t>
+            </a:r>
+            <a:r>
+              <a:rPr lang="en-US" sz="1200" dirty="0">
                 <a:latin typeface="Arial" panose="020B0604020202020204" pitchFamily="34" charset="0"/>
                 <a:cs typeface="Arial" panose="020B0604020202020204" pitchFamily="34" charset="0"/>
               </a:rPr>
-              <a:t> </a:t>
-            </a:r>
-            <a:r>
-              <a:rPr lang="es-CO" sz="1200" noProof="0" dirty="0" err="1">
+              <a:t>mode </a:t>
+            </a:r>
+            <a:r>
+              <a:rPr lang="en-US" sz="1200" noProof="0" dirty="0">
                 <a:latin typeface="Arial" panose="020B0604020202020204" pitchFamily="34" charset="0"/>
                 <a:cs typeface="Arial" panose="020B0604020202020204" pitchFamily="34" charset="0"/>
               </a:rPr>
-              <a:t>results</a:t>
-            </a:r>
-            <a:r>
-              <a:rPr lang="es-CO" sz="1200" noProof="0" dirty="0">
+              <a:t>losses decrease as the radius increases. This occurs because when the radius increases, the mode interacts less abruptly with the refractive index discontinuity at the waveguide walls.</a:t>
+            </a:r>
+          </a:p>
+          <a:p>
+            <a:pPr algn="just"/>
+            <a:endParaRPr lang="en-US" sz="1200" dirty="0">
+              <a:latin typeface="Arial" panose="020B0604020202020204" pitchFamily="34" charset="0"/>
+              <a:cs typeface="Arial" panose="020B0604020202020204" pitchFamily="34" charset="0"/>
+            </a:endParaRPr>
+          </a:p>
+          <a:p>
+            <a:pPr algn="just"/>
+            <a:r>
+              <a:rPr lang="en-US" sz="1200" noProof="0" dirty="0">
                 <a:latin typeface="Arial" panose="020B0604020202020204" pitchFamily="34" charset="0"/>
                 <a:cs typeface="Arial" panose="020B0604020202020204" pitchFamily="34" charset="0"/>
               </a:rPr>
-              <a:t>, </a:t>
-            </a:r>
-            <a:r>
-              <a:rPr lang="es-CO" sz="1200" noProof="0" dirty="0" err="1">
+              <a:t>For both TE0 and TM0 modes, propagation losses become more significant as the radius increases. For the TE0 mode, from approximately 70 µm onward, propagation losses dominate the behavior of the total losses. Therefore, it is necessary to find a balance between the two types of losses. In this case, a bending radius of around 65 µm would provide the lowest overall losses, making it a safe radius for the TE0 mode.</a:t>
+            </a:r>
+          </a:p>
+          <a:p>
+            <a:pPr algn="just"/>
+            <a:endParaRPr lang="en-US" sz="1200" dirty="0">
+              <a:latin typeface="Arial" panose="020B0604020202020204" pitchFamily="34" charset="0"/>
+              <a:cs typeface="Arial" panose="020B0604020202020204" pitchFamily="34" charset="0"/>
+            </a:endParaRPr>
+          </a:p>
+          <a:p>
+            <a:pPr algn="just"/>
+            <a:r>
+              <a:rPr lang="en-US" sz="1200" noProof="0" dirty="0">
                 <a:latin typeface="Arial" panose="020B0604020202020204" pitchFamily="34" charset="0"/>
                 <a:cs typeface="Arial" panose="020B0604020202020204" pitchFamily="34" charset="0"/>
               </a:rPr>
-              <a:t>which</a:t>
-            </a:r>
-            <a:r>
-              <a:rPr lang="es-CO" sz="1200" noProof="0" dirty="0">
-                <a:latin typeface="Arial" panose="020B0604020202020204" pitchFamily="34" charset="0"/>
-                <a:cs typeface="Arial" panose="020B0604020202020204" pitchFamily="34" charset="0"/>
-              </a:rPr>
-              <a:t> </a:t>
-            </a:r>
-            <a:r>
-              <a:rPr lang="es-CO" sz="1200" noProof="0" dirty="0" err="1">
-                <a:latin typeface="Arial" panose="020B0604020202020204" pitchFamily="34" charset="0"/>
-                <a:cs typeface="Arial" panose="020B0604020202020204" pitchFamily="34" charset="0"/>
-              </a:rPr>
-              <a:t>is</a:t>
-            </a:r>
-            <a:r>
-              <a:rPr lang="es-CO" sz="1200" noProof="0" dirty="0">
-                <a:latin typeface="Arial" panose="020B0604020202020204" pitchFamily="34" charset="0"/>
-                <a:cs typeface="Arial" panose="020B0604020202020204" pitchFamily="34" charset="0"/>
-              </a:rPr>
-              <a:t> the </a:t>
-            </a:r>
-            <a:r>
-              <a:rPr lang="es-CO" sz="1200" noProof="0" dirty="0" err="1">
-                <a:latin typeface="Arial" panose="020B0604020202020204" pitchFamily="34" charset="0"/>
-                <a:cs typeface="Arial" panose="020B0604020202020204" pitchFamily="34" charset="0"/>
-              </a:rPr>
-              <a:t>safe</a:t>
-            </a:r>
-            <a:r>
-              <a:rPr lang="es-CO" sz="1200" noProof="0" dirty="0">
-                <a:latin typeface="Arial" panose="020B0604020202020204" pitchFamily="34" charset="0"/>
-                <a:cs typeface="Arial" panose="020B0604020202020204" pitchFamily="34" charset="0"/>
-              </a:rPr>
-              <a:t> </a:t>
-            </a:r>
-            <a:r>
-              <a:rPr lang="es-CO" sz="1200" noProof="0" dirty="0" err="1">
-                <a:latin typeface="Arial" panose="020B0604020202020204" pitchFamily="34" charset="0"/>
-                <a:cs typeface="Arial" panose="020B0604020202020204" pitchFamily="34" charset="0"/>
-              </a:rPr>
-              <a:t>radius</a:t>
-            </a:r>
-            <a:r>
-              <a:rPr lang="es-CO" sz="1200" noProof="0" dirty="0">
-                <a:latin typeface="Arial" panose="020B0604020202020204" pitchFamily="34" charset="0"/>
-                <a:cs typeface="Arial" panose="020B0604020202020204" pitchFamily="34" charset="0"/>
-              </a:rPr>
-              <a:t>, </a:t>
-            </a:r>
-            <a:r>
-              <a:rPr lang="es-CO" sz="1200" noProof="0" dirty="0" err="1">
-                <a:latin typeface="Arial" panose="020B0604020202020204" pitchFamily="34" charset="0"/>
-                <a:cs typeface="Arial" panose="020B0604020202020204" pitchFamily="34" charset="0"/>
-              </a:rPr>
-              <a:t>consider</a:t>
-            </a:r>
-            <a:r>
-              <a:rPr lang="es-CO" sz="1200" noProof="0" dirty="0">
-                <a:latin typeface="Arial" panose="020B0604020202020204" pitchFamily="34" charset="0"/>
-                <a:cs typeface="Arial" panose="020B0604020202020204" pitchFamily="34" charset="0"/>
-              </a:rPr>
-              <a:t> </a:t>
-            </a:r>
-            <a:r>
-              <a:rPr lang="es-CO" sz="1200" noProof="0" dirty="0" err="1">
-                <a:latin typeface="Arial" panose="020B0604020202020204" pitchFamily="34" charset="0"/>
-                <a:cs typeface="Arial" panose="020B0604020202020204" pitchFamily="34" charset="0"/>
-              </a:rPr>
-              <a:t>safe</a:t>
-            </a:r>
-            <a:r>
-              <a:rPr lang="es-CO" sz="1200" noProof="0" dirty="0">
-                <a:latin typeface="Arial" panose="020B0604020202020204" pitchFamily="34" charset="0"/>
-                <a:cs typeface="Arial" panose="020B0604020202020204" pitchFamily="34" charset="0"/>
-              </a:rPr>
-              <a:t> </a:t>
-            </a:r>
-            <a:r>
-              <a:rPr lang="es-CO" sz="1200" noProof="0" dirty="0" err="1">
-                <a:latin typeface="Arial" panose="020B0604020202020204" pitchFamily="34" charset="0"/>
-                <a:cs typeface="Arial" panose="020B0604020202020204" pitchFamily="34" charset="0"/>
-              </a:rPr>
-              <a:t>means</a:t>
-            </a:r>
-            <a:r>
-              <a:rPr lang="es-CO" sz="1200" noProof="0" dirty="0">
-                <a:latin typeface="Arial" panose="020B0604020202020204" pitchFamily="34" charset="0"/>
-                <a:cs typeface="Arial" panose="020B0604020202020204" pitchFamily="34" charset="0"/>
-              </a:rPr>
-              <a:t> </a:t>
-            </a:r>
-            <a:r>
-              <a:rPr lang="es-CO" sz="1200" noProof="0" dirty="0" err="1">
-                <a:latin typeface="Arial" panose="020B0604020202020204" pitchFamily="34" charset="0"/>
-                <a:cs typeface="Arial" panose="020B0604020202020204" pitchFamily="34" charset="0"/>
-              </a:rPr>
-              <a:t>less</a:t>
-            </a:r>
-            <a:r>
-              <a:rPr lang="es-CO" sz="1200" noProof="0" dirty="0">
-                <a:latin typeface="Arial" panose="020B0604020202020204" pitchFamily="34" charset="0"/>
-                <a:cs typeface="Arial" panose="020B0604020202020204" pitchFamily="34" charset="0"/>
-              </a:rPr>
-              <a:t> </a:t>
-            </a:r>
-            <a:r>
-              <a:rPr lang="es-CO" sz="1200" noProof="0" dirty="0" err="1">
-                <a:latin typeface="Arial" panose="020B0604020202020204" pitchFamily="34" charset="0"/>
-                <a:cs typeface="Arial" panose="020B0604020202020204" pitchFamily="34" charset="0"/>
-              </a:rPr>
-              <a:t>than</a:t>
-            </a:r>
-            <a:r>
-              <a:rPr lang="es-CO" sz="1200" noProof="0" dirty="0">
-                <a:latin typeface="Arial" panose="020B0604020202020204" pitchFamily="34" charset="0"/>
-                <a:cs typeface="Arial" panose="020B0604020202020204" pitchFamily="34" charset="0"/>
-              </a:rPr>
-              <a:t> 0.1 dB/90º.</a:t>
+              <a:t>For the TM0 mode, we observe larger losses. Additionally, even at 150 µm the final behavior is not yet fully dominated by propagation losses, although this is likely where they begin to dominate. Therefore, if the goal is to propagate the TM0 mode in this waveguide, larger bending radii are required compared to the TE0 case.</a:t>
             </a:r>
           </a:p>
           <a:p>
             <a:pPr algn="just"/>
-            <a:endParaRPr lang="es-CO" sz="1200" dirty="0">
+            <a:endParaRPr lang="en-US" sz="1200" dirty="0">
               <a:latin typeface="Arial" panose="020B0604020202020204" pitchFamily="34" charset="0"/>
               <a:cs typeface="Arial" panose="020B0604020202020204" pitchFamily="34" charset="0"/>
             </a:endParaRPr>
           </a:p>
           <a:p>
             <a:pPr algn="just"/>
-            <a:r>
-              <a:rPr lang="es-CO" sz="1200" noProof="0" dirty="0">
-                <a:latin typeface="Arial" panose="020B0604020202020204" pitchFamily="34" charset="0"/>
-                <a:cs typeface="Arial" panose="020B0604020202020204" pitchFamily="34" charset="0"/>
-              </a:rPr>
-              <a:t>Ahora, si vemos las perdidas encontramos que en el caso de las perdidas de modo, estas disminuyen a medida que aumentamos el tamaño del radio, esto es debido a que al aumentar el radio no choca tan directamente con un cambio de índice de refracción que se encuentra en las paredes de la guía. </a:t>
-            </a:r>
-          </a:p>
-          <a:p>
-            <a:pPr algn="just"/>
-            <a:endParaRPr lang="es-CO" sz="1200" dirty="0">
+            <a:endParaRPr lang="en-US" sz="1200" dirty="0">
               <a:latin typeface="Arial" panose="020B0604020202020204" pitchFamily="34" charset="0"/>
               <a:cs typeface="Arial" panose="020B0604020202020204" pitchFamily="34" charset="0"/>
             </a:endParaRPr>
           </a:p>
           <a:p>
             <a:pPr algn="just"/>
-            <a:r>
-              <a:rPr lang="es-CO" sz="1200" noProof="0" dirty="0">
-                <a:latin typeface="Arial" panose="020B0604020202020204" pitchFamily="34" charset="0"/>
-                <a:cs typeface="Arial" panose="020B0604020202020204" pitchFamily="34" charset="0"/>
-              </a:rPr>
-              <a:t>En el caso del modo TE0 y TM0 vemos como las perdidas de propagación se vuelven más importantes a medida que aumentamos el tamaño del radio, siendo para TE0 desde los 70 </a:t>
-            </a:r>
-            <a:r>
-              <a:rPr lang="es-CO" sz="1200" noProof="0" dirty="0" err="1">
-                <a:latin typeface="Arial" panose="020B0604020202020204" pitchFamily="34" charset="0"/>
-                <a:cs typeface="Arial" panose="020B0604020202020204" pitchFamily="34" charset="0"/>
-              </a:rPr>
-              <a:t>um</a:t>
-            </a:r>
-            <a:r>
-              <a:rPr lang="es-CO" sz="1200" noProof="0" dirty="0">
-                <a:latin typeface="Arial" panose="020B0604020202020204" pitchFamily="34" charset="0"/>
-                <a:cs typeface="Arial" panose="020B0604020202020204" pitchFamily="34" charset="0"/>
-              </a:rPr>
-              <a:t> el comportamiento que siguen las perdidas totales. Por esta razón es necesario encontrar un balance entre los dos tipos de perdidas contemplados, en este caso, un radio de curvatura que nos proporcionaría las menores perdidas estaría alrededor de los 65 </a:t>
-            </a:r>
-            <a:r>
-              <a:rPr lang="es-CO" sz="1200" noProof="0" dirty="0" err="1">
-                <a:latin typeface="Arial" panose="020B0604020202020204" pitchFamily="34" charset="0"/>
-                <a:cs typeface="Arial" panose="020B0604020202020204" pitchFamily="34" charset="0"/>
-              </a:rPr>
-              <a:t>um</a:t>
-            </a:r>
-            <a:r>
-              <a:rPr lang="es-CO" sz="1200" noProof="0" dirty="0">
-                <a:latin typeface="Arial" panose="020B0604020202020204" pitchFamily="34" charset="0"/>
-                <a:cs typeface="Arial" panose="020B0604020202020204" pitchFamily="34" charset="0"/>
-              </a:rPr>
-              <a:t>, ese valor sería el radio seguro para el modo TE0</a:t>
-            </a:r>
-            <a:r>
-              <a:rPr lang="es-CO" sz="1200" dirty="0">
-                <a:latin typeface="Arial" panose="020B0604020202020204" pitchFamily="34" charset="0"/>
-                <a:cs typeface="Arial" panose="020B0604020202020204" pitchFamily="34" charset="0"/>
-              </a:rPr>
-              <a:t>. </a:t>
-            </a:r>
-            <a:r>
-              <a:rPr lang="es-CO" sz="1200" noProof="0" dirty="0">
-                <a:latin typeface="Arial" panose="020B0604020202020204" pitchFamily="34" charset="0"/>
-                <a:cs typeface="Arial" panose="020B0604020202020204" pitchFamily="34" charset="0"/>
-              </a:rPr>
-              <a:t> </a:t>
-            </a:r>
-          </a:p>
-          <a:p>
-            <a:pPr algn="just"/>
-            <a:endParaRPr lang="es-CO" sz="1200" dirty="0">
+            <a:endParaRPr lang="en-US" sz="1200" dirty="0">
               <a:latin typeface="Arial" panose="020B0604020202020204" pitchFamily="34" charset="0"/>
               <a:cs typeface="Arial" panose="020B0604020202020204" pitchFamily="34" charset="0"/>
             </a:endParaRPr>
           </a:p>
           <a:p>
             <a:pPr algn="just"/>
-            <a:r>
-              <a:rPr lang="es-CO" sz="1200" noProof="0" dirty="0">
-                <a:latin typeface="Arial" panose="020B0604020202020204" pitchFamily="34" charset="0"/>
-                <a:cs typeface="Arial" panose="020B0604020202020204" pitchFamily="34" charset="0"/>
-              </a:rPr>
-              <a:t>En el caso del modo TM0 vemos como tenemos mayores perdidas y adicionalmente para los 150 </a:t>
-            </a:r>
-            <a:r>
-              <a:rPr lang="es-CO" sz="1200" noProof="0" dirty="0" err="1">
-                <a:latin typeface="Arial" panose="020B0604020202020204" pitchFamily="34" charset="0"/>
-                <a:cs typeface="Arial" panose="020B0604020202020204" pitchFamily="34" charset="0"/>
-              </a:rPr>
-              <a:t>um</a:t>
-            </a:r>
-            <a:r>
-              <a:rPr lang="es-CO" sz="1200" noProof="0" dirty="0">
-                <a:latin typeface="Arial" panose="020B0604020202020204" pitchFamily="34" charset="0"/>
-                <a:cs typeface="Arial" panose="020B0604020202020204" pitchFamily="34" charset="0"/>
-              </a:rPr>
-              <a:t> aun no se rige el comportamiento final por las perdidas de propagación, sino que probablemente allí es donde empiece a dominar. Por lo que si buscamos propagar el modo TM0 en esta guía, es necesario tener radios de curvatura más grandes que en el caso del TE0.</a:t>
-            </a:r>
+            <a:endParaRPr lang="en-US" sz="1200" dirty="0">
+              <a:latin typeface="Arial" panose="020B0604020202020204" pitchFamily="34" charset="0"/>
+              <a:cs typeface="Arial" panose="020B0604020202020204" pitchFamily="34" charset="0"/>
+            </a:endParaRPr>
           </a:p>
           <a:p>
             <a:pPr algn="just"/>
-            <a:endParaRPr lang="es-CO" sz="1200" noProof="0" dirty="0">
+            <a:endParaRPr lang="en-US" sz="1200" dirty="0">
+              <a:latin typeface="Arial" panose="020B0604020202020204" pitchFamily="34" charset="0"/>
+              <a:cs typeface="Arial" panose="020B0604020202020204" pitchFamily="34" charset="0"/>
+            </a:endParaRPr>
+          </a:p>
+          <a:p>
+            <a:pPr algn="just"/>
+            <a:endParaRPr lang="en-US" sz="1200" dirty="0">
+              <a:latin typeface="Arial" panose="020B0604020202020204" pitchFamily="34" charset="0"/>
+              <a:cs typeface="Arial" panose="020B0604020202020204" pitchFamily="34" charset="0"/>
+            </a:endParaRPr>
+          </a:p>
+          <a:p>
+            <a:pPr algn="just"/>
+            <a:endParaRPr lang="en-US" sz="1200" dirty="0">
+              <a:latin typeface="Arial" panose="020B0604020202020204" pitchFamily="34" charset="0"/>
+              <a:cs typeface="Arial" panose="020B0604020202020204" pitchFamily="34" charset="0"/>
+            </a:endParaRPr>
+          </a:p>
+          <a:p>
+            <a:pPr algn="just"/>
+            <a:endParaRPr lang="en-US" sz="1200" dirty="0">
               <a:latin typeface="Arial" panose="020B0604020202020204" pitchFamily="34" charset="0"/>
               <a:cs typeface="Arial" panose="020B0604020202020204" pitchFamily="34" charset="0"/>
             </a:endParaRPr>
